--- a/Science_Teesside/Teaching_Packs/GROW/lessons/W6B/GROW_Science_Autumn1_W6B_Earth_And_Planets.pptx
+++ b/Science_Teesside/Teaching_Packs/GROW/lessons/W6B/GROW_Science_Autumn1_W6B_Earth_And_Planets.pptx
@@ -2,26 +2,26 @@
 <file path=ppt/presentation.xml><?xml version="1.0" encoding="utf-8"?>
 <p:presentation xmlns:p="http://schemas.openxmlformats.org/presentationml/2006/main">
   <p:sldMasterIdLst>
-    <p:sldMasterId xmlns:r="http://schemas.openxmlformats.org/officeDocument/2006/relationships" id="2147483648" r:id="Rc1f3bf41b7944011"/>
+    <p:sldMasterId xmlns:r="http://schemas.openxmlformats.org/officeDocument/2006/relationships" id="2147483648" r:id="R1517ea64e950472b"/>
   </p:sldMasterIdLst>
   <p:notesMasterIdLst>
-    <p:notesMasterId xmlns:r="http://schemas.openxmlformats.org/officeDocument/2006/relationships" r:id="R735900342d984939"/>
+    <p:notesMasterId xmlns:r="http://schemas.openxmlformats.org/officeDocument/2006/relationships" r:id="Rc2e9353e2f214f49"/>
   </p:notesMasterIdLst>
   <p:sldIdLst>
-    <p:sldId xmlns:r="http://schemas.openxmlformats.org/officeDocument/2006/relationships" id="256" r:id="Rfb112aee8c5e4b40"/>
-    <p:sldId xmlns:r="http://schemas.openxmlformats.org/officeDocument/2006/relationships" id="257" r:id="Rf0bdfa732f5d44cc"/>
-    <p:sldId xmlns:r="http://schemas.openxmlformats.org/officeDocument/2006/relationships" id="258" r:id="R289dd006e34848d8"/>
-    <p:sldId xmlns:r="http://schemas.openxmlformats.org/officeDocument/2006/relationships" id="259" r:id="Rfac5c51f17f04612"/>
-    <p:sldId xmlns:r="http://schemas.openxmlformats.org/officeDocument/2006/relationships" id="260" r:id="Rfa2cbe0b16f044ab"/>
-    <p:sldId xmlns:r="http://schemas.openxmlformats.org/officeDocument/2006/relationships" id="261" r:id="R9e11092e63da4b5f"/>
-    <p:sldId xmlns:r="http://schemas.openxmlformats.org/officeDocument/2006/relationships" id="262" r:id="Rd2b7ea4916ba40f5"/>
-    <p:sldId xmlns:r="http://schemas.openxmlformats.org/officeDocument/2006/relationships" id="263" r:id="R8dde91cf22294c79"/>
-    <p:sldId xmlns:r="http://schemas.openxmlformats.org/officeDocument/2006/relationships" id="264" r:id="R423693483c664e7d"/>
-    <p:sldId xmlns:r="http://schemas.openxmlformats.org/officeDocument/2006/relationships" id="265" r:id="R77fd0a7d2e3747ed"/>
-    <p:sldId xmlns:r="http://schemas.openxmlformats.org/officeDocument/2006/relationships" id="266" r:id="R9d67233b24704e7b"/>
-    <p:sldId xmlns:r="http://schemas.openxmlformats.org/officeDocument/2006/relationships" id="267" r:id="Rf86d74b00f4f4ed2"/>
-    <p:sldId xmlns:r="http://schemas.openxmlformats.org/officeDocument/2006/relationships" id="268" r:id="Rda00fcc5c7a44253"/>
-    <p:sldId xmlns:r="http://schemas.openxmlformats.org/officeDocument/2006/relationships" id="269" r:id="Rb5b61a0ee97c48d9"/>
+    <p:sldId xmlns:r="http://schemas.openxmlformats.org/officeDocument/2006/relationships" id="256" r:id="Ref4978c1e2c442b7"/>
+    <p:sldId xmlns:r="http://schemas.openxmlformats.org/officeDocument/2006/relationships" id="257" r:id="Rb013e0dfa04349b8"/>
+    <p:sldId xmlns:r="http://schemas.openxmlformats.org/officeDocument/2006/relationships" id="258" r:id="Rb36e06abe63a4341"/>
+    <p:sldId xmlns:r="http://schemas.openxmlformats.org/officeDocument/2006/relationships" id="259" r:id="R955edfbe776a4fc4"/>
+    <p:sldId xmlns:r="http://schemas.openxmlformats.org/officeDocument/2006/relationships" id="260" r:id="R0738728c0f8f42de"/>
+    <p:sldId xmlns:r="http://schemas.openxmlformats.org/officeDocument/2006/relationships" id="261" r:id="R6a819ecf27864f2b"/>
+    <p:sldId xmlns:r="http://schemas.openxmlformats.org/officeDocument/2006/relationships" id="262" r:id="R7416e55c2a7947ab"/>
+    <p:sldId xmlns:r="http://schemas.openxmlformats.org/officeDocument/2006/relationships" id="263" r:id="R813ecf4f60ac41c4"/>
+    <p:sldId xmlns:r="http://schemas.openxmlformats.org/officeDocument/2006/relationships" id="264" r:id="R7d66b8ddf1fe44a3"/>
+    <p:sldId xmlns:r="http://schemas.openxmlformats.org/officeDocument/2006/relationships" id="265" r:id="R26458801389a4a1c"/>
+    <p:sldId xmlns:r="http://schemas.openxmlformats.org/officeDocument/2006/relationships" id="266" r:id="Rad22a6018c284a6b"/>
+    <p:sldId xmlns:r="http://schemas.openxmlformats.org/officeDocument/2006/relationships" id="267" r:id="R2dcf231dfdcc44ba"/>
+    <p:sldId xmlns:r="http://schemas.openxmlformats.org/officeDocument/2006/relationships" id="268" r:id="Rec47af34102c4820"/>
+    <p:sldId xmlns:r="http://schemas.openxmlformats.org/officeDocument/2006/relationships" id="269" r:id="R4f7aa5d0c0c64dd6"/>
   </p:sldIdLst>
   <p:sldSz cx="12192000" cy="6858000"/>
   <p:notesSz cx="6858000" cy="9144000"/>
@@ -493,6 +493,14 @@
               <a:t>[/Sources]</a:t>
             </a:r>
           </a:p>
+          <a:p xmlns:a="http://schemas.openxmlformats.org/drawingml/2006/main">
+            <a:r>
+              <a:t>
+[Sources]
+NASA, The Blue Marble, Apollo 17, 1972. https://science.nasa.gov/resource/the-blue-marble/
+[/Sources]</a:t>
+            </a:r>
+          </a:p>
         </p:txBody>
       </p:sp>
       <p:sp>
@@ -1923,7 +1931,7 @@
   </p:cSld>
   <p:clrMap bg1="lt1" tx1="dk1" bg2="lt2" tx2="dk2" accent1="accent1" accent2="accent2" accent3="accent3" accent4="accent4" accent5="accent5" accent6="accent6" hlink="hlink" folHlink="folHlink"/>
   <p:sldLayoutIdLst>
-    <p:sldLayoutId xmlns:r="http://schemas.openxmlformats.org/officeDocument/2006/relationships" id="2147483649" r:id="R46c4e9cc7e9d4f29"/>
+    <p:sldLayoutId xmlns:r="http://schemas.openxmlformats.org/officeDocument/2006/relationships" id="2147483649" r:id="R4ac788d14be14c01"/>
   </p:sldLayoutIdLst>
   <p:txStyles>
     <p:titleStyle>
@@ -2456,7 +2464,7 @@
     <p:bg>
       <p:bgPr>
         <a:solidFill xmlns:a="http://schemas.openxmlformats.org/drawingml/2006/main">
-          <a:srgbClr val="F5F1E8"/>
+          <a:srgbClr val="FAF9F5"/>
         </a:solidFill>
       </p:bgPr>
     </p:bg>
@@ -2485,8 +2493,8 @@
         </p:nvSpPr>
         <p:spPr>
           <a:xfrm xmlns:a="http://schemas.openxmlformats.org/drawingml/2006/main">
-            <a:off x="609600" y="552450"/>
-            <a:ext cx="781050" cy="57150"/>
+            <a:off x="609600" y="733425"/>
+            <a:ext cx="781050" cy="38100"/>
           </a:xfrm>
           <a:prstGeom xmlns:a="http://schemas.openxmlformats.org/drawingml/2006/main" prst="rect">
             <a:avLst/>
@@ -2516,34 +2524,43 @@
         </p:nvSpPr>
         <p:spPr>
           <a:xfrm xmlns:a="http://schemas.openxmlformats.org/drawingml/2006/main">
-            <a:off x="609600" y="762000"/>
-            <a:ext cx="8572500" cy="285750"/>
-          </a:xfrm>
-          <a:prstGeom xmlns:a="http://schemas.openxmlformats.org/drawingml/2006/main" prst="rect">
-            <a:avLst/>
-          </a:prstGeom>
-          <a:noFill xmlns:a="http://schemas.openxmlformats.org/drawingml/2006/main"/>
-          <a:ln xmlns:a="http://schemas.openxmlformats.org/drawingml/2006/main" w="0">
-            <a:noFill/>
-            <a:prstDash val="solid"/>
-          </a:ln>
-        </p:spPr>
-        <p:txBody>
-          <a:bodyPr xmlns:a="http://schemas.openxmlformats.org/drawingml/2006/main" lIns="0" tIns="0" rIns="0" bIns="0" anchor="ctr"/>
-          <a:lstStyle xmlns:a="http://schemas.openxmlformats.org/drawingml/2006/main"/>
-          <a:p xmlns:a="http://schemas.openxmlformats.org/drawingml/2006/main">
-            <a:pPr>
-              <a:defRPr sz="1500" b="1">
+            <a:off x="609600" y="342900"/>
+            <a:ext cx="9334500" cy="304800"/>
+          </a:xfrm>
+          <a:prstGeom xmlns:a="http://schemas.openxmlformats.org/drawingml/2006/main" prst="rect">
+            <a:avLst/>
+          </a:prstGeom>
+          <a:noFill xmlns:a="http://schemas.openxmlformats.org/drawingml/2006/main"/>
+          <a:ln xmlns:a="http://schemas.openxmlformats.org/drawingml/2006/main" w="0">
+            <a:noFill/>
+            <a:prstDash val="solid"/>
+          </a:ln>
+        </p:spPr>
+        <p:txBody>
+          <a:bodyPr xmlns:a="http://schemas.openxmlformats.org/drawingml/2006/main" lIns="0" tIns="0" rIns="0" bIns="0" anchor="ctr">
+            <a:noAutofit/>
+          </a:bodyPr>
+          <a:lstStyle xmlns:a="http://schemas.openxmlformats.org/drawingml/2006/main"/>
+          <a:p xmlns:a="http://schemas.openxmlformats.org/drawingml/2006/main">
+            <a:pPr algn="l">
+              <a:buNone/>
+              <a:defRPr sz="1350" b="1">
                 <a:solidFill>
                   <a:srgbClr val="28685E"/>
                 </a:solidFill>
-              </a:defRPr>
-            </a:pPr>
-            <a:r>
-              <a:rPr sz="1500" b="1">
+                <a:latin typeface="Calibri"/>
+                <a:ea typeface="Calibri"/>
+                <a:cs typeface="Calibri"/>
+              </a:defRPr>
+            </a:pPr>
+            <a:r>
+              <a:rPr sz="1350" b="1">
                 <a:solidFill>
                   <a:srgbClr val="28685E"/>
                 </a:solidFill>
+                <a:latin typeface="Calibri"/>
+                <a:ea typeface="Calibri"/>
+                <a:cs typeface="Calibri"/>
               </a:rPr>
               <a:t>MADE BY MATT  /  GROW SCIENCE</a:t>
             </a:r>
@@ -2566,34 +2583,43 @@
         </p:nvSpPr>
         <p:spPr>
           <a:xfrm xmlns:a="http://schemas.openxmlformats.org/drawingml/2006/main">
-            <a:off x="609600" y="1352550"/>
-            <a:ext cx="10972800" cy="952500"/>
-          </a:xfrm>
-          <a:prstGeom xmlns:a="http://schemas.openxmlformats.org/drawingml/2006/main" prst="rect">
-            <a:avLst/>
-          </a:prstGeom>
-          <a:noFill xmlns:a="http://schemas.openxmlformats.org/drawingml/2006/main"/>
-          <a:ln xmlns:a="http://schemas.openxmlformats.org/drawingml/2006/main" w="0">
-            <a:noFill/>
-            <a:prstDash val="solid"/>
-          </a:ln>
-        </p:spPr>
-        <p:txBody>
-          <a:bodyPr xmlns:a="http://schemas.openxmlformats.org/drawingml/2006/main" lIns="0" tIns="0" rIns="0" bIns="0" anchor="ctr"/>
-          <a:lstStyle xmlns:a="http://schemas.openxmlformats.org/drawingml/2006/main"/>
-          <a:p xmlns:a="http://schemas.openxmlformats.org/drawingml/2006/main">
-            <a:pPr>
-              <a:defRPr sz="3750" b="1">
+            <a:off x="609600" y="990600"/>
+            <a:ext cx="10972800" cy="1000125"/>
+          </a:xfrm>
+          <a:prstGeom xmlns:a="http://schemas.openxmlformats.org/drawingml/2006/main" prst="rect">
+            <a:avLst/>
+          </a:prstGeom>
+          <a:noFill xmlns:a="http://schemas.openxmlformats.org/drawingml/2006/main"/>
+          <a:ln xmlns:a="http://schemas.openxmlformats.org/drawingml/2006/main" w="0">
+            <a:noFill/>
+            <a:prstDash val="solid"/>
+          </a:ln>
+        </p:spPr>
+        <p:txBody>
+          <a:bodyPr xmlns:a="http://schemas.openxmlformats.org/drawingml/2006/main" lIns="0" tIns="0" rIns="0" bIns="0" anchor="ctr">
+            <a:noAutofit/>
+          </a:bodyPr>
+          <a:lstStyle xmlns:a="http://schemas.openxmlformats.org/drawingml/2006/main"/>
+          <a:p xmlns:a="http://schemas.openxmlformats.org/drawingml/2006/main">
+            <a:pPr algn="l">
+              <a:buNone/>
+              <a:defRPr sz="3675" b="1">
                 <a:solidFill>
                   <a:srgbClr val="152B3A"/>
                 </a:solidFill>
-              </a:defRPr>
-            </a:pPr>
-            <a:r>
-              <a:rPr sz="3750" b="1">
+                <a:latin typeface="Calibri"/>
+                <a:ea typeface="Calibri"/>
+                <a:cs typeface="Calibri"/>
+              </a:defRPr>
+            </a:pPr>
+            <a:r>
+              <a:rPr sz="3675" b="1">
                 <a:solidFill>
                   <a:srgbClr val="152B3A"/>
                 </a:solidFill>
+                <a:latin typeface="Calibri"/>
+                <a:ea typeface="Calibri"/>
+                <a:cs typeface="Calibri"/>
               </a:rPr>
               <a:t>Build an orbit model</a:t>
             </a:r>
@@ -2616,14 +2642,14 @@
         </p:nvSpPr>
         <p:spPr>
           <a:xfrm xmlns:a="http://schemas.openxmlformats.org/drawingml/2006/main">
-            <a:off x="609600" y="6219825"/>
+            <a:off x="609600" y="6191250"/>
             <a:ext cx="10972800" cy="9525"/>
           </a:xfrm>
           <a:prstGeom xmlns:a="http://schemas.openxmlformats.org/drawingml/2006/main" prst="rect">
             <a:avLst/>
           </a:prstGeom>
           <a:solidFill xmlns:a="http://schemas.openxmlformats.org/drawingml/2006/main">
-            <a:srgbClr val="DCE7DD"/>
+            <a:srgbClr val="CEDBD3"/>
           </a:solidFill>
           <a:ln xmlns:a="http://schemas.openxmlformats.org/drawingml/2006/main" w="0">
             <a:noFill/>
@@ -2647,34 +2673,43 @@
         </p:nvSpPr>
         <p:spPr>
           <a:xfrm xmlns:a="http://schemas.openxmlformats.org/drawingml/2006/main">
-            <a:off x="609600" y="6381750"/>
-            <a:ext cx="9906000" cy="228600"/>
-          </a:xfrm>
-          <a:prstGeom xmlns:a="http://schemas.openxmlformats.org/drawingml/2006/main" prst="rect">
-            <a:avLst/>
-          </a:prstGeom>
-          <a:noFill xmlns:a="http://schemas.openxmlformats.org/drawingml/2006/main"/>
-          <a:ln xmlns:a="http://schemas.openxmlformats.org/drawingml/2006/main" w="0">
-            <a:noFill/>
-            <a:prstDash val="solid"/>
-          </a:ln>
-        </p:spPr>
-        <p:txBody>
-          <a:bodyPr xmlns:a="http://schemas.openxmlformats.org/drawingml/2006/main" lIns="0" tIns="0" rIns="0" bIns="0" anchor="ctr"/>
-          <a:lstStyle xmlns:a="http://schemas.openxmlformats.org/drawingml/2006/main"/>
-          <a:p xmlns:a="http://schemas.openxmlformats.org/drawingml/2006/main">
-            <a:pPr>
-              <a:defRPr sz="1275" b="0">
+            <a:off x="609600" y="6419850"/>
+            <a:ext cx="9525000" cy="219075"/>
+          </a:xfrm>
+          <a:prstGeom xmlns:a="http://schemas.openxmlformats.org/drawingml/2006/main" prst="rect">
+            <a:avLst/>
+          </a:prstGeom>
+          <a:noFill xmlns:a="http://schemas.openxmlformats.org/drawingml/2006/main"/>
+          <a:ln xmlns:a="http://schemas.openxmlformats.org/drawingml/2006/main" w="0">
+            <a:noFill/>
+            <a:prstDash val="solid"/>
+          </a:ln>
+        </p:spPr>
+        <p:txBody>
+          <a:bodyPr xmlns:a="http://schemas.openxmlformats.org/drawingml/2006/main" lIns="0" tIns="0" rIns="0" bIns="0" anchor="ctr">
+            <a:noAutofit/>
+          </a:bodyPr>
+          <a:lstStyle xmlns:a="http://schemas.openxmlformats.org/drawingml/2006/main"/>
+          <a:p xmlns:a="http://schemas.openxmlformats.org/drawingml/2006/main">
+            <a:pPr algn="l">
+              <a:buNone/>
+              <a:defRPr sz="1200" b="0">
                 <a:solidFill>
                   <a:srgbClr val="50616B"/>
                 </a:solidFill>
-              </a:defRPr>
-            </a:pPr>
-            <a:r>
-              <a:rPr sz="1275" b="0">
+                <a:latin typeface="Calibri"/>
+                <a:ea typeface="Calibri"/>
+                <a:cs typeface="Calibri"/>
+              </a:defRPr>
+            </a:pPr>
+            <a:r>
+              <a:rPr sz="1200" b="0">
                 <a:solidFill>
                   <a:srgbClr val="50616B"/>
                 </a:solidFill>
+                <a:latin typeface="Calibri"/>
+                <a:ea typeface="Calibri"/>
+                <a:cs typeface="Calibri"/>
               </a:rPr>
               <a:t>AUTUMN 1  ·  WEEK 6  ·  LESSON B</a:t>
             </a:r>
@@ -2697,27 +2732,33 @@
         </p:nvSpPr>
         <p:spPr>
           <a:xfrm xmlns:a="http://schemas.openxmlformats.org/drawingml/2006/main">
-            <a:off x="11106150" y="6362700"/>
-            <a:ext cx="476250" cy="238125"/>
-          </a:xfrm>
-          <a:prstGeom xmlns:a="http://schemas.openxmlformats.org/drawingml/2006/main" prst="rect">
-            <a:avLst/>
-          </a:prstGeom>
-          <a:noFill xmlns:a="http://schemas.openxmlformats.org/drawingml/2006/main"/>
-          <a:ln xmlns:a="http://schemas.openxmlformats.org/drawingml/2006/main" w="0">
-            <a:noFill/>
-            <a:prstDash val="solid"/>
-          </a:ln>
-        </p:spPr>
-        <p:txBody>
-          <a:bodyPr xmlns:a="http://schemas.openxmlformats.org/drawingml/2006/main" lIns="0" tIns="0" rIns="0" bIns="0" anchor="ctr"/>
-          <a:lstStyle xmlns:a="http://schemas.openxmlformats.org/drawingml/2006/main"/>
-          <a:p xmlns:a="http://schemas.openxmlformats.org/drawingml/2006/main">
-            <a:pPr>
+            <a:off x="11106150" y="6400800"/>
+            <a:ext cx="476250" cy="247650"/>
+          </a:xfrm>
+          <a:prstGeom xmlns:a="http://schemas.openxmlformats.org/drawingml/2006/main" prst="rect">
+            <a:avLst/>
+          </a:prstGeom>
+          <a:noFill xmlns:a="http://schemas.openxmlformats.org/drawingml/2006/main"/>
+          <a:ln xmlns:a="http://schemas.openxmlformats.org/drawingml/2006/main" w="0">
+            <a:noFill/>
+            <a:prstDash val="solid"/>
+          </a:ln>
+        </p:spPr>
+        <p:txBody>
+          <a:bodyPr xmlns:a="http://schemas.openxmlformats.org/drawingml/2006/main" lIns="0" tIns="0" rIns="0" bIns="0" anchor="ctr">
+            <a:noAutofit/>
+          </a:bodyPr>
+          <a:lstStyle xmlns:a="http://schemas.openxmlformats.org/drawingml/2006/main"/>
+          <a:p xmlns:a="http://schemas.openxmlformats.org/drawingml/2006/main">
+            <a:pPr algn="l">
+              <a:buNone/>
               <a:defRPr sz="1350" b="1">
                 <a:solidFill>
                   <a:srgbClr val="28685E"/>
                 </a:solidFill>
+                <a:latin typeface="Calibri"/>
+                <a:ea typeface="Calibri"/>
+                <a:cs typeface="Calibri"/>
               </a:defRPr>
             </a:pPr>
             <a:r>
@@ -2725,6 +2766,9 @@
                 <a:solidFill>
                   <a:srgbClr val="28685E"/>
                 </a:solidFill>
+                <a:latin typeface="Calibri"/>
+                <a:ea typeface="Calibri"/>
+                <a:cs typeface="Calibri"/>
               </a:rPr>
               <a:t>01</a:t>
             </a:r>
@@ -2747,36 +2791,69 @@
         </p:nvSpPr>
         <p:spPr>
           <a:xfrm xmlns:a="http://schemas.openxmlformats.org/drawingml/2006/main">
-            <a:off x="609600" y="2809875"/>
-            <a:ext cx="10668000" cy="1000125"/>
-          </a:xfrm>
-          <a:prstGeom xmlns:a="http://schemas.openxmlformats.org/drawingml/2006/main" prst="rect">
-            <a:avLst/>
-          </a:prstGeom>
-          <a:noFill xmlns:a="http://schemas.openxmlformats.org/drawingml/2006/main"/>
-          <a:ln xmlns:a="http://schemas.openxmlformats.org/drawingml/2006/main" w="0">
-            <a:noFill/>
-            <a:prstDash val="solid"/>
-          </a:ln>
-        </p:spPr>
-        <p:txBody>
-          <a:bodyPr xmlns:a="http://schemas.openxmlformats.org/drawingml/2006/main" lIns="0" tIns="0" rIns="0" bIns="0" anchor="ctr"/>
-          <a:lstStyle xmlns:a="http://schemas.openxmlformats.org/drawingml/2006/main"/>
-          <a:p xmlns:a="http://schemas.openxmlformats.org/drawingml/2006/main">
-            <a:pPr>
-              <a:defRPr sz="3900" b="1">
+            <a:off x="609600" y="2447925"/>
+            <a:ext cx="5429250" cy="1638300"/>
+          </a:xfrm>
+          <a:prstGeom xmlns:a="http://schemas.openxmlformats.org/drawingml/2006/main" prst="rect">
+            <a:avLst/>
+          </a:prstGeom>
+          <a:noFill xmlns:a="http://schemas.openxmlformats.org/drawingml/2006/main"/>
+          <a:ln xmlns:a="http://schemas.openxmlformats.org/drawingml/2006/main" w="0">
+            <a:noFill/>
+            <a:prstDash val="solid"/>
+          </a:ln>
+        </p:spPr>
+        <p:txBody>
+          <a:bodyPr xmlns:a="http://schemas.openxmlformats.org/drawingml/2006/main" lIns="0" tIns="0" rIns="0" bIns="0" anchor="ctr">
+            <a:noAutofit/>
+          </a:bodyPr>
+          <a:lstStyle xmlns:a="http://schemas.openxmlformats.org/drawingml/2006/main"/>
+          <a:p xmlns:a="http://schemas.openxmlformats.org/drawingml/2006/main">
+            <a:pPr algn="l">
+              <a:buNone/>
+              <a:defRPr sz="3600" b="1">
                 <a:solidFill>
                   <a:srgbClr val="28685E"/>
                 </a:solidFill>
-              </a:defRPr>
-            </a:pPr>
-            <a:r>
-              <a:rPr sz="3900" b="1">
+                <a:latin typeface="Calibri"/>
+                <a:ea typeface="Calibri"/>
+                <a:cs typeface="Calibri"/>
+              </a:defRPr>
+            </a:pPr>
+            <a:r>
+              <a:rPr sz="3600" b="1">
                 <a:solidFill>
                   <a:srgbClr val="28685E"/>
                 </a:solidFill>
-              </a:rPr>
-              <a:t>Show it. Check it. Improve it.</a:t>
+                <a:latin typeface="Calibri"/>
+                <a:ea typeface="Calibri"/>
+                <a:cs typeface="Calibri"/>
+              </a:rPr>
+              <a:t>Show it. Check it.</a:t>
+            </a:r>
+          </a:p>
+          <a:p xmlns:a="http://schemas.openxmlformats.org/drawingml/2006/main">
+            <a:pPr algn="l">
+              <a:buNone/>
+              <a:defRPr sz="3600" b="1">
+                <a:solidFill>
+                  <a:srgbClr val="28685E"/>
+                </a:solidFill>
+                <a:latin typeface="Calibri"/>
+                <a:ea typeface="Calibri"/>
+                <a:cs typeface="Calibri"/>
+              </a:defRPr>
+            </a:pPr>
+            <a:r>
+              <a:rPr sz="3600" b="1">
+                <a:solidFill>
+                  <a:srgbClr val="28685E"/>
+                </a:solidFill>
+                <a:latin typeface="Calibri"/>
+                <a:ea typeface="Calibri"/>
+                <a:cs typeface="Calibri"/>
+              </a:rPr>
+              <a:t>Improve it.</a:t>
             </a:r>
           </a:p>
         </p:txBody>
@@ -2797,40 +2874,71 @@
         </p:nvSpPr>
         <p:spPr>
           <a:xfrm xmlns:a="http://schemas.openxmlformats.org/drawingml/2006/main">
-            <a:off x="609600" y="4143375"/>
-            <a:ext cx="10668000" cy="1143000"/>
-          </a:xfrm>
-          <a:prstGeom xmlns:a="http://schemas.openxmlformats.org/drawingml/2006/main" prst="rect">
-            <a:avLst/>
-          </a:prstGeom>
-          <a:noFill xmlns:a="http://schemas.openxmlformats.org/drawingml/2006/main"/>
-          <a:ln xmlns:a="http://schemas.openxmlformats.org/drawingml/2006/main" w="0">
-            <a:noFill/>
-            <a:prstDash val="solid"/>
-          </a:ln>
-        </p:spPr>
-        <p:txBody>
-          <a:bodyPr xmlns:a="http://schemas.openxmlformats.org/drawingml/2006/main" lIns="0" tIns="0" rIns="0" bIns="0" anchor="ctr"/>
-          <a:lstStyle xmlns:a="http://schemas.openxmlformats.org/drawingml/2006/main"/>
-          <a:p xmlns:a="http://schemas.openxmlformats.org/drawingml/2006/main">
-            <a:pPr>
-              <a:defRPr sz="2550" b="0">
+            <a:off x="609600" y="4286250"/>
+            <a:ext cx="5314950" cy="1466850"/>
+          </a:xfrm>
+          <a:prstGeom xmlns:a="http://schemas.openxmlformats.org/drawingml/2006/main" prst="rect">
+            <a:avLst/>
+          </a:prstGeom>
+          <a:noFill xmlns:a="http://schemas.openxmlformats.org/drawingml/2006/main"/>
+          <a:ln xmlns:a="http://schemas.openxmlformats.org/drawingml/2006/main" w="0">
+            <a:noFill/>
+            <a:prstDash val="solid"/>
+          </a:ln>
+        </p:spPr>
+        <p:txBody>
+          <a:bodyPr xmlns:a="http://schemas.openxmlformats.org/drawingml/2006/main" lIns="0" tIns="0" rIns="0" bIns="0" anchor="ctr">
+            <a:noAutofit/>
+          </a:bodyPr>
+          <a:lstStyle xmlns:a="http://schemas.openxmlformats.org/drawingml/2006/main"/>
+          <a:p xmlns:a="http://schemas.openxmlformats.org/drawingml/2006/main">
+            <a:pPr algn="l">
+              <a:buNone/>
+              <a:defRPr sz="2400" b="0">
                 <a:solidFill>
                   <a:srgbClr val="152B3A"/>
                 </a:solidFill>
-              </a:defRPr>
-            </a:pPr>
-            <a:r>
-              <a:rPr sz="2550" b="0">
+                <a:latin typeface="Calibri"/>
+                <a:ea typeface="Calibri"/>
+                <a:cs typeface="Calibri"/>
+              </a:defRPr>
+            </a:pPr>
+            <a:r>
+              <a:rPr sz="2400" b="0">
                 <a:solidFill>
                   <a:srgbClr val="152B3A"/>
                 </a:solidFill>
+                <a:latin typeface="Calibri"/>
+                <a:ea typeface="Calibri"/>
+                <a:cs typeface="Calibri"/>
               </a:rPr>
               <a:t>Explain an orbit and compare the time planets take.</a:t>
             </a:r>
           </a:p>
         </p:txBody>
       </p:sp>
+      <p:pic>
+        <p:nvPicPr>
+          <p:cNvPr id="19" name=""/>
+          <p:cNvPicPr>
+            <a:picLocks xmlns:a="http://schemas.openxmlformats.org/drawingml/2006/main" noChangeAspect="1"/>
+          </p:cNvPicPr>
+          <p:nvPr/>
+        </p:nvPicPr>
+        <p:blipFill>
+          <a:blip xmlns:r="http://schemas.openxmlformats.org/officeDocument/2006/relationships" xmlns:a="http://schemas.openxmlformats.org/drawingml/2006/main" r:embed="Rfbd679cd46964ea3"/>
+          <a:stretch xmlns:a="http://schemas.openxmlformats.org/drawingml/2006/main"/>
+        </p:blipFill>
+        <p:spPr>
+          <a:xfrm xmlns:a="http://schemas.openxmlformats.org/drawingml/2006/main">
+            <a:off x="7134225" y="2200275"/>
+            <a:ext cx="3714750" cy="3714750"/>
+          </a:xfrm>
+          <a:prstGeom xmlns:a="http://schemas.openxmlformats.org/drawingml/2006/main" prst="rect">
+            <a:avLst/>
+          </a:prstGeom>
+        </p:spPr>
+      </p:pic>
     </p:spTree>
     <p:extLst>
       <p:ext uri="{BB962C8B-B14F-4D97-AF65-F5344CB8AC3E}">
@@ -2847,7 +2955,7 @@
     <p:bg>
       <p:bgPr>
         <a:solidFill xmlns:a="http://schemas.openxmlformats.org/drawingml/2006/main">
-          <a:srgbClr val="F5F1E8"/>
+          <a:srgbClr val="FAF9F5"/>
         </a:solidFill>
       </p:bgPr>
     </p:bg>
@@ -2876,8 +2984,8 @@
         </p:nvSpPr>
         <p:spPr>
           <a:xfrm xmlns:a="http://schemas.openxmlformats.org/drawingml/2006/main">
-            <a:off x="609600" y="552450"/>
-            <a:ext cx="781050" cy="57150"/>
+            <a:off x="609600" y="733425"/>
+            <a:ext cx="781050" cy="38100"/>
           </a:xfrm>
           <a:prstGeom xmlns:a="http://schemas.openxmlformats.org/drawingml/2006/main" prst="rect">
             <a:avLst/>
@@ -2907,34 +3015,43 @@
         </p:nvSpPr>
         <p:spPr>
           <a:xfrm xmlns:a="http://schemas.openxmlformats.org/drawingml/2006/main">
-            <a:off x="609600" y="762000"/>
-            <a:ext cx="8572500" cy="285750"/>
-          </a:xfrm>
-          <a:prstGeom xmlns:a="http://schemas.openxmlformats.org/drawingml/2006/main" prst="rect">
-            <a:avLst/>
-          </a:prstGeom>
-          <a:noFill xmlns:a="http://schemas.openxmlformats.org/drawingml/2006/main"/>
-          <a:ln xmlns:a="http://schemas.openxmlformats.org/drawingml/2006/main" w="0">
-            <a:noFill/>
-            <a:prstDash val="solid"/>
-          </a:ln>
-        </p:spPr>
-        <p:txBody>
-          <a:bodyPr xmlns:a="http://schemas.openxmlformats.org/drawingml/2006/main" lIns="0" tIns="0" rIns="0" bIns="0" anchor="ctr"/>
-          <a:lstStyle xmlns:a="http://schemas.openxmlformats.org/drawingml/2006/main"/>
-          <a:p xmlns:a="http://schemas.openxmlformats.org/drawingml/2006/main">
-            <a:pPr>
-              <a:defRPr sz="1500" b="1">
+            <a:off x="609600" y="342900"/>
+            <a:ext cx="9334500" cy="304800"/>
+          </a:xfrm>
+          <a:prstGeom xmlns:a="http://schemas.openxmlformats.org/drawingml/2006/main" prst="rect">
+            <a:avLst/>
+          </a:prstGeom>
+          <a:noFill xmlns:a="http://schemas.openxmlformats.org/drawingml/2006/main"/>
+          <a:ln xmlns:a="http://schemas.openxmlformats.org/drawingml/2006/main" w="0">
+            <a:noFill/>
+            <a:prstDash val="solid"/>
+          </a:ln>
+        </p:spPr>
+        <p:txBody>
+          <a:bodyPr xmlns:a="http://schemas.openxmlformats.org/drawingml/2006/main" lIns="0" tIns="0" rIns="0" bIns="0" anchor="ctr">
+            <a:noAutofit/>
+          </a:bodyPr>
+          <a:lstStyle xmlns:a="http://schemas.openxmlformats.org/drawingml/2006/main"/>
+          <a:p xmlns:a="http://schemas.openxmlformats.org/drawingml/2006/main">
+            <a:pPr algn="l">
+              <a:buNone/>
+              <a:defRPr sz="1350" b="1">
                 <a:solidFill>
                   <a:srgbClr val="28685E"/>
                 </a:solidFill>
-              </a:defRPr>
-            </a:pPr>
-            <a:r>
-              <a:rPr sz="1500" b="1">
+                <a:latin typeface="Calibri"/>
+                <a:ea typeface="Calibri"/>
+                <a:cs typeface="Calibri"/>
+              </a:defRPr>
+            </a:pPr>
+            <a:r>
+              <a:rPr sz="1350" b="1">
                 <a:solidFill>
                   <a:srgbClr val="28685E"/>
                 </a:solidFill>
+                <a:latin typeface="Calibri"/>
+                <a:ea typeface="Calibri"/>
+                <a:cs typeface="Calibri"/>
               </a:rPr>
               <a:t>MADE BY MATT  /  GROW SCIENCE</a:t>
             </a:r>
@@ -2957,34 +3074,43 @@
         </p:nvSpPr>
         <p:spPr>
           <a:xfrm xmlns:a="http://schemas.openxmlformats.org/drawingml/2006/main">
-            <a:off x="609600" y="1352550"/>
-            <a:ext cx="10972800" cy="952500"/>
-          </a:xfrm>
-          <a:prstGeom xmlns:a="http://schemas.openxmlformats.org/drawingml/2006/main" prst="rect">
-            <a:avLst/>
-          </a:prstGeom>
-          <a:noFill xmlns:a="http://schemas.openxmlformats.org/drawingml/2006/main"/>
-          <a:ln xmlns:a="http://schemas.openxmlformats.org/drawingml/2006/main" w="0">
-            <a:noFill/>
-            <a:prstDash val="solid"/>
-          </a:ln>
-        </p:spPr>
-        <p:txBody>
-          <a:bodyPr xmlns:a="http://schemas.openxmlformats.org/drawingml/2006/main" lIns="0" tIns="0" rIns="0" bIns="0" anchor="ctr"/>
-          <a:lstStyle xmlns:a="http://schemas.openxmlformats.org/drawingml/2006/main"/>
-          <a:p xmlns:a="http://schemas.openxmlformats.org/drawingml/2006/main">
-            <a:pPr>
-              <a:defRPr sz="3750" b="1">
+            <a:off x="609600" y="990600"/>
+            <a:ext cx="10972800" cy="1000125"/>
+          </a:xfrm>
+          <a:prstGeom xmlns:a="http://schemas.openxmlformats.org/drawingml/2006/main" prst="rect">
+            <a:avLst/>
+          </a:prstGeom>
+          <a:noFill xmlns:a="http://schemas.openxmlformats.org/drawingml/2006/main"/>
+          <a:ln xmlns:a="http://schemas.openxmlformats.org/drawingml/2006/main" w="0">
+            <a:noFill/>
+            <a:prstDash val="solid"/>
+          </a:ln>
+        </p:spPr>
+        <p:txBody>
+          <a:bodyPr xmlns:a="http://schemas.openxmlformats.org/drawingml/2006/main" lIns="0" tIns="0" rIns="0" bIns="0" anchor="ctr">
+            <a:noAutofit/>
+          </a:bodyPr>
+          <a:lstStyle xmlns:a="http://schemas.openxmlformats.org/drawingml/2006/main"/>
+          <a:p xmlns:a="http://schemas.openxmlformats.org/drawingml/2006/main">
+            <a:pPr algn="l">
+              <a:buNone/>
+              <a:defRPr sz="3675" b="1">
                 <a:solidFill>
                   <a:srgbClr val="152B3A"/>
                 </a:solidFill>
-              </a:defRPr>
-            </a:pPr>
-            <a:r>
-              <a:rPr sz="3750" b="1">
+                <a:latin typeface="Calibri"/>
+                <a:ea typeface="Calibri"/>
+                <a:cs typeface="Calibri"/>
+              </a:defRPr>
+            </a:pPr>
+            <a:r>
+              <a:rPr sz="3675" b="1">
                 <a:solidFill>
                   <a:srgbClr val="152B3A"/>
                 </a:solidFill>
+                <a:latin typeface="Calibri"/>
+                <a:ea typeface="Calibri"/>
+                <a:cs typeface="Calibri"/>
               </a:rPr>
               <a:t>Keep the evidence; return the kit</a:t>
             </a:r>
@@ -3007,14 +3133,14 @@
         </p:nvSpPr>
         <p:spPr>
           <a:xfrm xmlns:a="http://schemas.openxmlformats.org/drawingml/2006/main">
-            <a:off x="609600" y="6219825"/>
+            <a:off x="609600" y="6191250"/>
             <a:ext cx="10972800" cy="9525"/>
           </a:xfrm>
           <a:prstGeom xmlns:a="http://schemas.openxmlformats.org/drawingml/2006/main" prst="rect">
             <a:avLst/>
           </a:prstGeom>
           <a:solidFill xmlns:a="http://schemas.openxmlformats.org/drawingml/2006/main">
-            <a:srgbClr val="DCE7DD"/>
+            <a:srgbClr val="CEDBD3"/>
           </a:solidFill>
           <a:ln xmlns:a="http://schemas.openxmlformats.org/drawingml/2006/main" w="0">
             <a:noFill/>
@@ -3038,34 +3164,43 @@
         </p:nvSpPr>
         <p:spPr>
           <a:xfrm xmlns:a="http://schemas.openxmlformats.org/drawingml/2006/main">
-            <a:off x="609600" y="6381750"/>
-            <a:ext cx="9906000" cy="228600"/>
-          </a:xfrm>
-          <a:prstGeom xmlns:a="http://schemas.openxmlformats.org/drawingml/2006/main" prst="rect">
-            <a:avLst/>
-          </a:prstGeom>
-          <a:noFill xmlns:a="http://schemas.openxmlformats.org/drawingml/2006/main"/>
-          <a:ln xmlns:a="http://schemas.openxmlformats.org/drawingml/2006/main" w="0">
-            <a:noFill/>
-            <a:prstDash val="solid"/>
-          </a:ln>
-        </p:spPr>
-        <p:txBody>
-          <a:bodyPr xmlns:a="http://schemas.openxmlformats.org/drawingml/2006/main" lIns="0" tIns="0" rIns="0" bIns="0" anchor="ctr"/>
-          <a:lstStyle xmlns:a="http://schemas.openxmlformats.org/drawingml/2006/main"/>
-          <a:p xmlns:a="http://schemas.openxmlformats.org/drawingml/2006/main">
-            <a:pPr>
-              <a:defRPr sz="1275" b="0">
+            <a:off x="609600" y="6419850"/>
+            <a:ext cx="9525000" cy="219075"/>
+          </a:xfrm>
+          <a:prstGeom xmlns:a="http://schemas.openxmlformats.org/drawingml/2006/main" prst="rect">
+            <a:avLst/>
+          </a:prstGeom>
+          <a:noFill xmlns:a="http://schemas.openxmlformats.org/drawingml/2006/main"/>
+          <a:ln xmlns:a="http://schemas.openxmlformats.org/drawingml/2006/main" w="0">
+            <a:noFill/>
+            <a:prstDash val="solid"/>
+          </a:ln>
+        </p:spPr>
+        <p:txBody>
+          <a:bodyPr xmlns:a="http://schemas.openxmlformats.org/drawingml/2006/main" lIns="0" tIns="0" rIns="0" bIns="0" anchor="ctr">
+            <a:noAutofit/>
+          </a:bodyPr>
+          <a:lstStyle xmlns:a="http://schemas.openxmlformats.org/drawingml/2006/main"/>
+          <a:p xmlns:a="http://schemas.openxmlformats.org/drawingml/2006/main">
+            <a:pPr algn="l">
+              <a:buNone/>
+              <a:defRPr sz="1200" b="0">
                 <a:solidFill>
                   <a:srgbClr val="50616B"/>
                 </a:solidFill>
-              </a:defRPr>
-            </a:pPr>
-            <a:r>
-              <a:rPr sz="1275" b="0">
+                <a:latin typeface="Calibri"/>
+                <a:ea typeface="Calibri"/>
+                <a:cs typeface="Calibri"/>
+              </a:defRPr>
+            </a:pPr>
+            <a:r>
+              <a:rPr sz="1200" b="0">
                 <a:solidFill>
                   <a:srgbClr val="50616B"/>
                 </a:solidFill>
+                <a:latin typeface="Calibri"/>
+                <a:ea typeface="Calibri"/>
+                <a:cs typeface="Calibri"/>
               </a:rPr>
               <a:t>AUTUMN 1  ·  WEEK 6  ·  LESSON B</a:t>
             </a:r>
@@ -3088,27 +3223,33 @@
         </p:nvSpPr>
         <p:spPr>
           <a:xfrm xmlns:a="http://schemas.openxmlformats.org/drawingml/2006/main">
-            <a:off x="11106150" y="6362700"/>
-            <a:ext cx="476250" cy="238125"/>
-          </a:xfrm>
-          <a:prstGeom xmlns:a="http://schemas.openxmlformats.org/drawingml/2006/main" prst="rect">
-            <a:avLst/>
-          </a:prstGeom>
-          <a:noFill xmlns:a="http://schemas.openxmlformats.org/drawingml/2006/main"/>
-          <a:ln xmlns:a="http://schemas.openxmlformats.org/drawingml/2006/main" w="0">
-            <a:noFill/>
-            <a:prstDash val="solid"/>
-          </a:ln>
-        </p:spPr>
-        <p:txBody>
-          <a:bodyPr xmlns:a="http://schemas.openxmlformats.org/drawingml/2006/main" lIns="0" tIns="0" rIns="0" bIns="0" anchor="ctr"/>
-          <a:lstStyle xmlns:a="http://schemas.openxmlformats.org/drawingml/2006/main"/>
-          <a:p xmlns:a="http://schemas.openxmlformats.org/drawingml/2006/main">
-            <a:pPr>
+            <a:off x="11106150" y="6400800"/>
+            <a:ext cx="476250" cy="247650"/>
+          </a:xfrm>
+          <a:prstGeom xmlns:a="http://schemas.openxmlformats.org/drawingml/2006/main" prst="rect">
+            <a:avLst/>
+          </a:prstGeom>
+          <a:noFill xmlns:a="http://schemas.openxmlformats.org/drawingml/2006/main"/>
+          <a:ln xmlns:a="http://schemas.openxmlformats.org/drawingml/2006/main" w="0">
+            <a:noFill/>
+            <a:prstDash val="solid"/>
+          </a:ln>
+        </p:spPr>
+        <p:txBody>
+          <a:bodyPr xmlns:a="http://schemas.openxmlformats.org/drawingml/2006/main" lIns="0" tIns="0" rIns="0" bIns="0" anchor="ctr">
+            <a:noAutofit/>
+          </a:bodyPr>
+          <a:lstStyle xmlns:a="http://schemas.openxmlformats.org/drawingml/2006/main"/>
+          <a:p xmlns:a="http://schemas.openxmlformats.org/drawingml/2006/main">
+            <a:pPr algn="l">
+              <a:buNone/>
               <a:defRPr sz="1350" b="1">
                 <a:solidFill>
                   <a:srgbClr val="28685E"/>
                 </a:solidFill>
+                <a:latin typeface="Calibri"/>
+                <a:ea typeface="Calibri"/>
+                <a:cs typeface="Calibri"/>
               </a:defRPr>
             </a:pPr>
             <a:r>
@@ -3116,6 +3257,9 @@
                 <a:solidFill>
                   <a:srgbClr val="28685E"/>
                 </a:solidFill>
+                <a:latin typeface="Calibri"/>
+                <a:ea typeface="Calibri"/>
+                <a:cs typeface="Calibri"/>
               </a:rPr>
               <a:t>10</a:t>
             </a:r>
@@ -3138,34 +3282,43 @@
         </p:nvSpPr>
         <p:spPr>
           <a:xfrm xmlns:a="http://schemas.openxmlformats.org/drawingml/2006/main">
-            <a:off x="609600" y="2619375"/>
-            <a:ext cx="10972800" cy="781050"/>
-          </a:xfrm>
-          <a:prstGeom xmlns:a="http://schemas.openxmlformats.org/drawingml/2006/main" prst="rect">
-            <a:avLst/>
-          </a:prstGeom>
-          <a:noFill xmlns:a="http://schemas.openxmlformats.org/drawingml/2006/main"/>
-          <a:ln xmlns:a="http://schemas.openxmlformats.org/drawingml/2006/main" w="0">
-            <a:noFill/>
-            <a:prstDash val="solid"/>
-          </a:ln>
-        </p:spPr>
-        <p:txBody>
-          <a:bodyPr xmlns:a="http://schemas.openxmlformats.org/drawingml/2006/main" lIns="0" tIns="0" rIns="0" bIns="0" anchor="ctr"/>
-          <a:lstStyle xmlns:a="http://schemas.openxmlformats.org/drawingml/2006/main"/>
-          <a:p xmlns:a="http://schemas.openxmlformats.org/drawingml/2006/main">
-            <a:pPr>
-              <a:defRPr sz="2550" b="0">
+            <a:off x="1000125" y="2333625"/>
+            <a:ext cx="10382250" cy="1076325"/>
+          </a:xfrm>
+          <a:prstGeom xmlns:a="http://schemas.openxmlformats.org/drawingml/2006/main" prst="rect">
+            <a:avLst/>
+          </a:prstGeom>
+          <a:noFill xmlns:a="http://schemas.openxmlformats.org/drawingml/2006/main"/>
+          <a:ln xmlns:a="http://schemas.openxmlformats.org/drawingml/2006/main" w="0">
+            <a:noFill/>
+            <a:prstDash val="solid"/>
+          </a:ln>
+        </p:spPr>
+        <p:txBody>
+          <a:bodyPr xmlns:a="http://schemas.openxmlformats.org/drawingml/2006/main" lIns="0" tIns="0" rIns="0" bIns="0" anchor="ctr">
+            <a:noAutofit/>
+          </a:bodyPr>
+          <a:lstStyle xmlns:a="http://schemas.openxmlformats.org/drawingml/2006/main"/>
+          <a:p xmlns:a="http://schemas.openxmlformats.org/drawingml/2006/main">
+            <a:pPr algn="l">
+              <a:buNone/>
+              <a:defRPr sz="2625" b="0">
                 <a:solidFill>
                   <a:srgbClr val="152B3A"/>
                 </a:solidFill>
-              </a:defRPr>
-            </a:pPr>
-            <a:r>
-              <a:rPr sz="2550" b="0">
+                <a:latin typeface="Calibri"/>
+                <a:ea typeface="Calibri"/>
+                <a:cs typeface="Calibri"/>
+              </a:defRPr>
+            </a:pPr>
+            <a:r>
+              <a:rPr sz="2625" b="0">
                 <a:solidFill>
                   <a:srgbClr val="152B3A"/>
                 </a:solidFill>
+                <a:latin typeface="Calibri"/>
+                <a:ea typeface="Calibri"/>
+                <a:cs typeface="Calibri"/>
               </a:rPr>
               <a:t>Check your name, planet order and recorded comparison.</a:t>
             </a:r>
@@ -3188,34 +3341,43 @@
         </p:nvSpPr>
         <p:spPr>
           <a:xfrm xmlns:a="http://schemas.openxmlformats.org/drawingml/2006/main">
-            <a:off x="609600" y="3476625"/>
-            <a:ext cx="10972800" cy="781050"/>
-          </a:xfrm>
-          <a:prstGeom xmlns:a="http://schemas.openxmlformats.org/drawingml/2006/main" prst="rect">
-            <a:avLst/>
-          </a:prstGeom>
-          <a:noFill xmlns:a="http://schemas.openxmlformats.org/drawingml/2006/main"/>
-          <a:ln xmlns:a="http://schemas.openxmlformats.org/drawingml/2006/main" w="0">
-            <a:noFill/>
-            <a:prstDash val="solid"/>
-          </a:ln>
-        </p:spPr>
-        <p:txBody>
-          <a:bodyPr xmlns:a="http://schemas.openxmlformats.org/drawingml/2006/main" lIns="0" tIns="0" rIns="0" bIns="0" anchor="ctr"/>
-          <a:lstStyle xmlns:a="http://schemas.openxmlformats.org/drawingml/2006/main"/>
-          <a:p xmlns:a="http://schemas.openxmlformats.org/drawingml/2006/main">
-            <a:pPr>
-              <a:defRPr sz="2550" b="0">
+            <a:off x="1000125" y="3467100"/>
+            <a:ext cx="10382250" cy="1076325"/>
+          </a:xfrm>
+          <a:prstGeom xmlns:a="http://schemas.openxmlformats.org/drawingml/2006/main" prst="rect">
+            <a:avLst/>
+          </a:prstGeom>
+          <a:noFill xmlns:a="http://schemas.openxmlformats.org/drawingml/2006/main"/>
+          <a:ln xmlns:a="http://schemas.openxmlformats.org/drawingml/2006/main" w="0">
+            <a:noFill/>
+            <a:prstDash val="solid"/>
+          </a:ln>
+        </p:spPr>
+        <p:txBody>
+          <a:bodyPr xmlns:a="http://schemas.openxmlformats.org/drawingml/2006/main" lIns="0" tIns="0" rIns="0" bIns="0" anchor="ctr">
+            <a:noAutofit/>
+          </a:bodyPr>
+          <a:lstStyle xmlns:a="http://schemas.openxmlformats.org/drawingml/2006/main"/>
+          <a:p xmlns:a="http://schemas.openxmlformats.org/drawingml/2006/main">
+            <a:pPr algn="l">
+              <a:buNone/>
+              <a:defRPr sz="2625" b="0">
                 <a:solidFill>
                   <a:srgbClr val="152B3A"/>
                 </a:solidFill>
-              </a:defRPr>
-            </a:pPr>
-            <a:r>
-              <a:rPr sz="2550" b="0">
+                <a:latin typeface="Calibri"/>
+                <a:ea typeface="Calibri"/>
+                <a:cs typeface="Calibri"/>
+              </a:defRPr>
+            </a:pPr>
+            <a:r>
+              <a:rPr sz="2625" b="0">
                 <a:solidFill>
                   <a:srgbClr val="152B3A"/>
                 </a:solidFill>
+                <a:latin typeface="Calibri"/>
+                <a:ea typeface="Calibri"/>
+                <a:cs typeface="Calibri"/>
               </a:rPr>
               <a:t>Keep the drawing or explanation you want to use.</a:t>
             </a:r>
@@ -3238,36 +3400,276 @@
         </p:nvSpPr>
         <p:spPr>
           <a:xfrm xmlns:a="http://schemas.openxmlformats.org/drawingml/2006/main">
-            <a:off x="609600" y="4333875"/>
-            <a:ext cx="10972800" cy="781050"/>
-          </a:xfrm>
-          <a:prstGeom xmlns:a="http://schemas.openxmlformats.org/drawingml/2006/main" prst="rect">
-            <a:avLst/>
-          </a:prstGeom>
-          <a:noFill xmlns:a="http://schemas.openxmlformats.org/drawingml/2006/main"/>
-          <a:ln xmlns:a="http://schemas.openxmlformats.org/drawingml/2006/main" w="0">
-            <a:noFill/>
-            <a:prstDash val="solid"/>
-          </a:ln>
-        </p:spPr>
-        <p:txBody>
-          <a:bodyPr xmlns:a="http://schemas.openxmlformats.org/drawingml/2006/main" lIns="0" tIns="0" rIns="0" bIns="0" anchor="ctr"/>
-          <a:lstStyle xmlns:a="http://schemas.openxmlformats.org/drawingml/2006/main"/>
-          <a:p xmlns:a="http://schemas.openxmlformats.org/drawingml/2006/main">
-            <a:pPr>
-              <a:defRPr sz="2550" b="0">
+            <a:off x="1000125" y="4600575"/>
+            <a:ext cx="10382250" cy="1076325"/>
+          </a:xfrm>
+          <a:prstGeom xmlns:a="http://schemas.openxmlformats.org/drawingml/2006/main" prst="rect">
+            <a:avLst/>
+          </a:prstGeom>
+          <a:noFill xmlns:a="http://schemas.openxmlformats.org/drawingml/2006/main"/>
+          <a:ln xmlns:a="http://schemas.openxmlformats.org/drawingml/2006/main" w="0">
+            <a:noFill/>
+            <a:prstDash val="solid"/>
+          </a:ln>
+        </p:spPr>
+        <p:txBody>
+          <a:bodyPr xmlns:a="http://schemas.openxmlformats.org/drawingml/2006/main" lIns="0" tIns="0" rIns="0" bIns="0" anchor="ctr">
+            <a:noAutofit/>
+          </a:bodyPr>
+          <a:lstStyle xmlns:a="http://schemas.openxmlformats.org/drawingml/2006/main"/>
+          <a:p xmlns:a="http://schemas.openxmlformats.org/drawingml/2006/main">
+            <a:pPr algn="l">
+              <a:buNone/>
+              <a:defRPr sz="2625" b="0">
                 <a:solidFill>
                   <a:srgbClr val="152B3A"/>
                 </a:solidFill>
-              </a:defRPr>
-            </a:pPr>
-            <a:r>
-              <a:rPr sz="2550" b="0">
+                <a:latin typeface="Calibri"/>
+                <a:ea typeface="Calibri"/>
+                <a:cs typeface="Calibri"/>
+              </a:defRPr>
+            </a:pPr>
+            <a:r>
+              <a:rPr sz="2625" b="0">
                 <a:solidFill>
                   <a:srgbClr val="152B3A"/>
                 </a:solidFill>
+                <a:latin typeface="Calibri"/>
+                <a:ea typeface="Calibri"/>
+                <a:cs typeface="Calibri"/>
               </a:rPr>
               <a:t>Return counters, arrows and labels.</a:t>
+            </a:r>
+          </a:p>
+        </p:txBody>
+      </p:sp>
+      <p:sp>
+        <p:nvSpPr>
+          <p:cNvPr id="11" name="cue-0">
+            <a:extLst xmlns:a="http://schemas.openxmlformats.org/drawingml/2006/main">
+              <a:ext uri="{FF2B5EF4-FFF2-40B4-BE49-F238E27FC236}">
+                <a16:creationId xmlns:a16="http://schemas.microsoft.com/office/drawing/2014/main" id="{6B581E3B-6F45-4278-BED9-3328424C2F60}"/>
+              </a:ext>
+            </a:extLst>
+          </p:cNvPr>
+          <p:cNvSpPr>
+            <a:spLocks xmlns:a="http://schemas.openxmlformats.org/drawingml/2006/main" noGrp="1"/>
+          </p:cNvSpPr>
+          <p:nvPr/>
+        </p:nvSpPr>
+        <p:spPr>
+          <a:xfrm xmlns:a="http://schemas.openxmlformats.org/drawingml/2006/main">
+            <a:off x="609600" y="2362200"/>
+            <a:ext cx="323850" cy="323850"/>
+          </a:xfrm>
+          <a:prstGeom xmlns:a="http://schemas.openxmlformats.org/drawingml/2006/main" prst="rect">
+            <a:avLst/>
+          </a:prstGeom>
+          <a:noFill xmlns:a="http://schemas.openxmlformats.org/drawingml/2006/main"/>
+          <a:ln xmlns:a="http://schemas.openxmlformats.org/drawingml/2006/main" w="0">
+            <a:noFill/>
+          </a:ln>
+        </p:spPr>
+        <p:txBody>
+          <a:bodyPr xmlns:a="http://schemas.openxmlformats.org/drawingml/2006/main" lIns="0" tIns="0" rIns="0" bIns="0" anchor="ctr">
+            <a:noAutofit/>
+          </a:bodyPr>
+          <a:lstStyle xmlns:a="http://schemas.openxmlformats.org/drawingml/2006/main"/>
+          <a:p xmlns:a="http://schemas.openxmlformats.org/drawingml/2006/main">
+            <a:pPr algn="l">
+              <a:defRPr sz="1350" b="1">
+                <a:solidFill>
+                  <a:srgbClr val="28685E"/>
+                </a:solidFill>
+                <a:latin typeface="Calibri"/>
+                <a:ea typeface="Calibri"/>
+                <a:cs typeface="Calibri"/>
+              </a:defRPr>
+            </a:pPr>
+            <a:r>
+              <a:rPr sz="1350" b="1">
+                <a:solidFill>
+                  <a:srgbClr val="28685E"/>
+                </a:solidFill>
+                <a:latin typeface="Calibri"/>
+                <a:ea typeface="Calibri"/>
+                <a:cs typeface="Calibri"/>
+              </a:rPr>
+              <a:t>01</a:t>
+            </a:r>
+          </a:p>
+        </p:txBody>
+      </p:sp>
+      <p:sp>
+        <p:nvSpPr>
+          <p:cNvPr id="12" name="row-rule-0">
+            <a:extLst xmlns:a="http://schemas.openxmlformats.org/drawingml/2006/main">
+              <a:ext uri="{FF2B5EF4-FFF2-40B4-BE49-F238E27FC236}">
+                <a16:creationId xmlns:a16="http://schemas.microsoft.com/office/drawing/2014/main" id="{CBD533FE-68A8-4B37-A3C3-76F9E90EC834}"/>
+              </a:ext>
+            </a:extLst>
+          </p:cNvPr>
+          <p:cNvSpPr>
+            <a:spLocks xmlns:a="http://schemas.openxmlformats.org/drawingml/2006/main" noGrp="1"/>
+          </p:cNvSpPr>
+          <p:nvPr/>
+        </p:nvSpPr>
+        <p:spPr>
+          <a:xfrm xmlns:a="http://schemas.openxmlformats.org/drawingml/2006/main">
+            <a:off x="1000125" y="3419475"/>
+            <a:ext cx="10334625" cy="0"/>
+          </a:xfrm>
+          <a:prstGeom xmlns:a="http://schemas.openxmlformats.org/drawingml/2006/main" prst="line">
+            <a:avLst/>
+          </a:prstGeom>
+          <a:noFill xmlns:a="http://schemas.openxmlformats.org/drawingml/2006/main"/>
+          <a:ln xmlns:a="http://schemas.openxmlformats.org/drawingml/2006/main" w="9525">
+            <a:solidFill>
+              <a:srgbClr val="CEDBD3"/>
+            </a:solidFill>
+          </a:ln>
+        </p:spPr>
+      </p:sp>
+      <p:sp>
+        <p:nvSpPr>
+          <p:cNvPr id="13" name="cue-1">
+            <a:extLst xmlns:a="http://schemas.openxmlformats.org/drawingml/2006/main">
+              <a:ext uri="{FF2B5EF4-FFF2-40B4-BE49-F238E27FC236}">
+                <a16:creationId xmlns:a16="http://schemas.microsoft.com/office/drawing/2014/main" id="{046677FB-32D7-4597-8014-9B8809184F3C}"/>
+              </a:ext>
+            </a:extLst>
+          </p:cNvPr>
+          <p:cNvSpPr>
+            <a:spLocks xmlns:a="http://schemas.openxmlformats.org/drawingml/2006/main" noGrp="1"/>
+          </p:cNvSpPr>
+          <p:nvPr/>
+        </p:nvSpPr>
+        <p:spPr>
+          <a:xfrm xmlns:a="http://schemas.openxmlformats.org/drawingml/2006/main">
+            <a:off x="609600" y="3495675"/>
+            <a:ext cx="323850" cy="323850"/>
+          </a:xfrm>
+          <a:prstGeom xmlns:a="http://schemas.openxmlformats.org/drawingml/2006/main" prst="rect">
+            <a:avLst/>
+          </a:prstGeom>
+          <a:noFill xmlns:a="http://schemas.openxmlformats.org/drawingml/2006/main"/>
+          <a:ln xmlns:a="http://schemas.openxmlformats.org/drawingml/2006/main" w="0">
+            <a:noFill/>
+          </a:ln>
+        </p:spPr>
+        <p:txBody>
+          <a:bodyPr xmlns:a="http://schemas.openxmlformats.org/drawingml/2006/main" lIns="0" tIns="0" rIns="0" bIns="0" anchor="ctr">
+            <a:noAutofit/>
+          </a:bodyPr>
+          <a:lstStyle xmlns:a="http://schemas.openxmlformats.org/drawingml/2006/main"/>
+          <a:p xmlns:a="http://schemas.openxmlformats.org/drawingml/2006/main">
+            <a:pPr algn="l">
+              <a:defRPr sz="1350" b="1">
+                <a:solidFill>
+                  <a:srgbClr val="28685E"/>
+                </a:solidFill>
+                <a:latin typeface="Calibri"/>
+                <a:ea typeface="Calibri"/>
+                <a:cs typeface="Calibri"/>
+              </a:defRPr>
+            </a:pPr>
+            <a:r>
+              <a:rPr sz="1350" b="1">
+                <a:solidFill>
+                  <a:srgbClr val="28685E"/>
+                </a:solidFill>
+                <a:latin typeface="Calibri"/>
+                <a:ea typeface="Calibri"/>
+                <a:cs typeface="Calibri"/>
+              </a:rPr>
+              <a:t>02</a:t>
+            </a:r>
+          </a:p>
+        </p:txBody>
+      </p:sp>
+      <p:sp>
+        <p:nvSpPr>
+          <p:cNvPr id="14" name="row-rule-1">
+            <a:extLst xmlns:a="http://schemas.openxmlformats.org/drawingml/2006/main">
+              <a:ext uri="{FF2B5EF4-FFF2-40B4-BE49-F238E27FC236}">
+                <a16:creationId xmlns:a16="http://schemas.microsoft.com/office/drawing/2014/main" id="{6D39302F-1EE3-4D58-9D47-8840136F8674}"/>
+              </a:ext>
+            </a:extLst>
+          </p:cNvPr>
+          <p:cNvSpPr>
+            <a:spLocks xmlns:a="http://schemas.openxmlformats.org/drawingml/2006/main" noGrp="1"/>
+          </p:cNvSpPr>
+          <p:nvPr/>
+        </p:nvSpPr>
+        <p:spPr>
+          <a:xfrm xmlns:a="http://schemas.openxmlformats.org/drawingml/2006/main">
+            <a:off x="1000125" y="4552950"/>
+            <a:ext cx="10334625" cy="0"/>
+          </a:xfrm>
+          <a:prstGeom xmlns:a="http://schemas.openxmlformats.org/drawingml/2006/main" prst="line">
+            <a:avLst/>
+          </a:prstGeom>
+          <a:noFill xmlns:a="http://schemas.openxmlformats.org/drawingml/2006/main"/>
+          <a:ln xmlns:a="http://schemas.openxmlformats.org/drawingml/2006/main" w="9525">
+            <a:solidFill>
+              <a:srgbClr val="CEDBD3"/>
+            </a:solidFill>
+          </a:ln>
+        </p:spPr>
+      </p:sp>
+      <p:sp>
+        <p:nvSpPr>
+          <p:cNvPr id="15" name="cue-2">
+            <a:extLst xmlns:a="http://schemas.openxmlformats.org/drawingml/2006/main">
+              <a:ext uri="{FF2B5EF4-FFF2-40B4-BE49-F238E27FC236}">
+                <a16:creationId xmlns:a16="http://schemas.microsoft.com/office/drawing/2014/main" id="{3244ED29-A3A9-41E4-914D-5620CE6FF734}"/>
+              </a:ext>
+            </a:extLst>
+          </p:cNvPr>
+          <p:cNvSpPr>
+            <a:spLocks xmlns:a="http://schemas.openxmlformats.org/drawingml/2006/main" noGrp="1"/>
+          </p:cNvSpPr>
+          <p:nvPr/>
+        </p:nvSpPr>
+        <p:spPr>
+          <a:xfrm xmlns:a="http://schemas.openxmlformats.org/drawingml/2006/main">
+            <a:off x="609600" y="4629150"/>
+            <a:ext cx="323850" cy="323850"/>
+          </a:xfrm>
+          <a:prstGeom xmlns:a="http://schemas.openxmlformats.org/drawingml/2006/main" prst="rect">
+            <a:avLst/>
+          </a:prstGeom>
+          <a:noFill xmlns:a="http://schemas.openxmlformats.org/drawingml/2006/main"/>
+          <a:ln xmlns:a="http://schemas.openxmlformats.org/drawingml/2006/main" w="0">
+            <a:noFill/>
+          </a:ln>
+        </p:spPr>
+        <p:txBody>
+          <a:bodyPr xmlns:a="http://schemas.openxmlformats.org/drawingml/2006/main" lIns="0" tIns="0" rIns="0" bIns="0" anchor="ctr">
+            <a:noAutofit/>
+          </a:bodyPr>
+          <a:lstStyle xmlns:a="http://schemas.openxmlformats.org/drawingml/2006/main"/>
+          <a:p xmlns:a="http://schemas.openxmlformats.org/drawingml/2006/main">
+            <a:pPr algn="l">
+              <a:defRPr sz="1350" b="1">
+                <a:solidFill>
+                  <a:srgbClr val="28685E"/>
+                </a:solidFill>
+                <a:latin typeface="Calibri"/>
+                <a:ea typeface="Calibri"/>
+                <a:cs typeface="Calibri"/>
+              </a:defRPr>
+            </a:pPr>
+            <a:r>
+              <a:rPr sz="1350" b="1">
+                <a:solidFill>
+                  <a:srgbClr val="28685E"/>
+                </a:solidFill>
+                <a:latin typeface="Calibri"/>
+                <a:ea typeface="Calibri"/>
+                <a:cs typeface="Calibri"/>
+              </a:rPr>
+              <a:t>03</a:t>
             </a:r>
           </a:p>
         </p:txBody>
@@ -3288,7 +3690,7 @@
     <p:bg>
       <p:bgPr>
         <a:solidFill xmlns:a="http://schemas.openxmlformats.org/drawingml/2006/main">
-          <a:srgbClr val="F5F1E8"/>
+          <a:srgbClr val="FAF9F5"/>
         </a:solidFill>
       </p:bgPr>
     </p:bg>
@@ -3317,8 +3719,8 @@
         </p:nvSpPr>
         <p:spPr>
           <a:xfrm xmlns:a="http://schemas.openxmlformats.org/drawingml/2006/main">
-            <a:off x="609600" y="552450"/>
-            <a:ext cx="781050" cy="57150"/>
+            <a:off x="609600" y="733425"/>
+            <a:ext cx="781050" cy="38100"/>
           </a:xfrm>
           <a:prstGeom xmlns:a="http://schemas.openxmlformats.org/drawingml/2006/main" prst="rect">
             <a:avLst/>
@@ -3348,34 +3750,43 @@
         </p:nvSpPr>
         <p:spPr>
           <a:xfrm xmlns:a="http://schemas.openxmlformats.org/drawingml/2006/main">
-            <a:off x="609600" y="762000"/>
-            <a:ext cx="8572500" cy="285750"/>
-          </a:xfrm>
-          <a:prstGeom xmlns:a="http://schemas.openxmlformats.org/drawingml/2006/main" prst="rect">
-            <a:avLst/>
-          </a:prstGeom>
-          <a:noFill xmlns:a="http://schemas.openxmlformats.org/drawingml/2006/main"/>
-          <a:ln xmlns:a="http://schemas.openxmlformats.org/drawingml/2006/main" w="0">
-            <a:noFill/>
-            <a:prstDash val="solid"/>
-          </a:ln>
-        </p:spPr>
-        <p:txBody>
-          <a:bodyPr xmlns:a="http://schemas.openxmlformats.org/drawingml/2006/main" lIns="0" tIns="0" rIns="0" bIns="0" anchor="ctr"/>
-          <a:lstStyle xmlns:a="http://schemas.openxmlformats.org/drawingml/2006/main"/>
-          <a:p xmlns:a="http://schemas.openxmlformats.org/drawingml/2006/main">
-            <a:pPr>
-              <a:defRPr sz="1500" b="1">
+            <a:off x="609600" y="342900"/>
+            <a:ext cx="9334500" cy="304800"/>
+          </a:xfrm>
+          <a:prstGeom xmlns:a="http://schemas.openxmlformats.org/drawingml/2006/main" prst="rect">
+            <a:avLst/>
+          </a:prstGeom>
+          <a:noFill xmlns:a="http://schemas.openxmlformats.org/drawingml/2006/main"/>
+          <a:ln xmlns:a="http://schemas.openxmlformats.org/drawingml/2006/main" w="0">
+            <a:noFill/>
+            <a:prstDash val="solid"/>
+          </a:ln>
+        </p:spPr>
+        <p:txBody>
+          <a:bodyPr xmlns:a="http://schemas.openxmlformats.org/drawingml/2006/main" lIns="0" tIns="0" rIns="0" bIns="0" anchor="ctr">
+            <a:noAutofit/>
+          </a:bodyPr>
+          <a:lstStyle xmlns:a="http://schemas.openxmlformats.org/drawingml/2006/main"/>
+          <a:p xmlns:a="http://schemas.openxmlformats.org/drawingml/2006/main">
+            <a:pPr algn="l">
+              <a:buNone/>
+              <a:defRPr sz="1350" b="1">
                 <a:solidFill>
                   <a:srgbClr val="28685E"/>
                 </a:solidFill>
-              </a:defRPr>
-            </a:pPr>
-            <a:r>
-              <a:rPr sz="1500" b="1">
+                <a:latin typeface="Calibri"/>
+                <a:ea typeface="Calibri"/>
+                <a:cs typeface="Calibri"/>
+              </a:defRPr>
+            </a:pPr>
+            <a:r>
+              <a:rPr sz="1350" b="1">
                 <a:solidFill>
                   <a:srgbClr val="28685E"/>
                 </a:solidFill>
+                <a:latin typeface="Calibri"/>
+                <a:ea typeface="Calibri"/>
+                <a:cs typeface="Calibri"/>
               </a:rPr>
               <a:t>MADE BY MATT  /  GROW SCIENCE</a:t>
             </a:r>
@@ -3398,34 +3809,43 @@
         </p:nvSpPr>
         <p:spPr>
           <a:xfrm xmlns:a="http://schemas.openxmlformats.org/drawingml/2006/main">
-            <a:off x="609600" y="1352550"/>
-            <a:ext cx="10972800" cy="952500"/>
-          </a:xfrm>
-          <a:prstGeom xmlns:a="http://schemas.openxmlformats.org/drawingml/2006/main" prst="rect">
-            <a:avLst/>
-          </a:prstGeom>
-          <a:noFill xmlns:a="http://schemas.openxmlformats.org/drawingml/2006/main"/>
-          <a:ln xmlns:a="http://schemas.openxmlformats.org/drawingml/2006/main" w="0">
-            <a:noFill/>
-            <a:prstDash val="solid"/>
-          </a:ln>
-        </p:spPr>
-        <p:txBody>
-          <a:bodyPr xmlns:a="http://schemas.openxmlformats.org/drawingml/2006/main" lIns="0" tIns="0" rIns="0" bIns="0" anchor="ctr"/>
-          <a:lstStyle xmlns:a="http://schemas.openxmlformats.org/drawingml/2006/main"/>
-          <a:p xmlns:a="http://schemas.openxmlformats.org/drawingml/2006/main">
-            <a:pPr>
-              <a:defRPr sz="3750" b="1">
+            <a:off x="609600" y="990600"/>
+            <a:ext cx="10972800" cy="1000125"/>
+          </a:xfrm>
+          <a:prstGeom xmlns:a="http://schemas.openxmlformats.org/drawingml/2006/main" prst="rect">
+            <a:avLst/>
+          </a:prstGeom>
+          <a:noFill xmlns:a="http://schemas.openxmlformats.org/drawingml/2006/main"/>
+          <a:ln xmlns:a="http://schemas.openxmlformats.org/drawingml/2006/main" w="0">
+            <a:noFill/>
+            <a:prstDash val="solid"/>
+          </a:ln>
+        </p:spPr>
+        <p:txBody>
+          <a:bodyPr xmlns:a="http://schemas.openxmlformats.org/drawingml/2006/main" lIns="0" tIns="0" rIns="0" bIns="0" anchor="ctr">
+            <a:noAutofit/>
+          </a:bodyPr>
+          <a:lstStyle xmlns:a="http://schemas.openxmlformats.org/drawingml/2006/main"/>
+          <a:p xmlns:a="http://schemas.openxmlformats.org/drawingml/2006/main">
+            <a:pPr algn="l">
+              <a:buNone/>
+              <a:defRPr sz="3675" b="1">
                 <a:solidFill>
                   <a:srgbClr val="152B3A"/>
                 </a:solidFill>
-              </a:defRPr>
-            </a:pPr>
-            <a:r>
-              <a:rPr sz="3750" b="1">
+                <a:latin typeface="Calibri"/>
+                <a:ea typeface="Calibri"/>
+                <a:cs typeface="Calibri"/>
+              </a:defRPr>
+            </a:pPr>
+            <a:r>
+              <a:rPr sz="3675" b="1">
                 <a:solidFill>
                   <a:srgbClr val="152B3A"/>
                 </a:solidFill>
+                <a:latin typeface="Calibri"/>
+                <a:ea typeface="Calibri"/>
+                <a:cs typeface="Calibri"/>
               </a:rPr>
               <a:t>Your voice can change the lesson</a:t>
             </a:r>
@@ -3448,14 +3868,14 @@
         </p:nvSpPr>
         <p:spPr>
           <a:xfrm xmlns:a="http://schemas.openxmlformats.org/drawingml/2006/main">
-            <a:off x="609600" y="6219825"/>
+            <a:off x="609600" y="6191250"/>
             <a:ext cx="10972800" cy="9525"/>
           </a:xfrm>
           <a:prstGeom xmlns:a="http://schemas.openxmlformats.org/drawingml/2006/main" prst="rect">
             <a:avLst/>
           </a:prstGeom>
           <a:solidFill xmlns:a="http://schemas.openxmlformats.org/drawingml/2006/main">
-            <a:srgbClr val="DCE7DD"/>
+            <a:srgbClr val="CEDBD3"/>
           </a:solidFill>
           <a:ln xmlns:a="http://schemas.openxmlformats.org/drawingml/2006/main" w="0">
             <a:noFill/>
@@ -3479,34 +3899,43 @@
         </p:nvSpPr>
         <p:spPr>
           <a:xfrm xmlns:a="http://schemas.openxmlformats.org/drawingml/2006/main">
-            <a:off x="609600" y="6381750"/>
-            <a:ext cx="9906000" cy="228600"/>
-          </a:xfrm>
-          <a:prstGeom xmlns:a="http://schemas.openxmlformats.org/drawingml/2006/main" prst="rect">
-            <a:avLst/>
-          </a:prstGeom>
-          <a:noFill xmlns:a="http://schemas.openxmlformats.org/drawingml/2006/main"/>
-          <a:ln xmlns:a="http://schemas.openxmlformats.org/drawingml/2006/main" w="0">
-            <a:noFill/>
-            <a:prstDash val="solid"/>
-          </a:ln>
-        </p:spPr>
-        <p:txBody>
-          <a:bodyPr xmlns:a="http://schemas.openxmlformats.org/drawingml/2006/main" lIns="0" tIns="0" rIns="0" bIns="0" anchor="ctr"/>
-          <a:lstStyle xmlns:a="http://schemas.openxmlformats.org/drawingml/2006/main"/>
-          <a:p xmlns:a="http://schemas.openxmlformats.org/drawingml/2006/main">
-            <a:pPr>
-              <a:defRPr sz="1275" b="0">
+            <a:off x="609600" y="6419850"/>
+            <a:ext cx="9525000" cy="219075"/>
+          </a:xfrm>
+          <a:prstGeom xmlns:a="http://schemas.openxmlformats.org/drawingml/2006/main" prst="rect">
+            <a:avLst/>
+          </a:prstGeom>
+          <a:noFill xmlns:a="http://schemas.openxmlformats.org/drawingml/2006/main"/>
+          <a:ln xmlns:a="http://schemas.openxmlformats.org/drawingml/2006/main" w="0">
+            <a:noFill/>
+            <a:prstDash val="solid"/>
+          </a:ln>
+        </p:spPr>
+        <p:txBody>
+          <a:bodyPr xmlns:a="http://schemas.openxmlformats.org/drawingml/2006/main" lIns="0" tIns="0" rIns="0" bIns="0" anchor="ctr">
+            <a:noAutofit/>
+          </a:bodyPr>
+          <a:lstStyle xmlns:a="http://schemas.openxmlformats.org/drawingml/2006/main"/>
+          <a:p xmlns:a="http://schemas.openxmlformats.org/drawingml/2006/main">
+            <a:pPr algn="l">
+              <a:buNone/>
+              <a:defRPr sz="1200" b="0">
                 <a:solidFill>
                   <a:srgbClr val="50616B"/>
                 </a:solidFill>
-              </a:defRPr>
-            </a:pPr>
-            <a:r>
-              <a:rPr sz="1275" b="0">
+                <a:latin typeface="Calibri"/>
+                <a:ea typeface="Calibri"/>
+                <a:cs typeface="Calibri"/>
+              </a:defRPr>
+            </a:pPr>
+            <a:r>
+              <a:rPr sz="1200" b="0">
                 <a:solidFill>
                   <a:srgbClr val="50616B"/>
                 </a:solidFill>
+                <a:latin typeface="Calibri"/>
+                <a:ea typeface="Calibri"/>
+                <a:cs typeface="Calibri"/>
               </a:rPr>
               <a:t>AUTUMN 1  ·  WEEK 6  ·  LESSON B</a:t>
             </a:r>
@@ -3529,27 +3958,33 @@
         </p:nvSpPr>
         <p:spPr>
           <a:xfrm xmlns:a="http://schemas.openxmlformats.org/drawingml/2006/main">
-            <a:off x="11106150" y="6362700"/>
-            <a:ext cx="476250" cy="238125"/>
-          </a:xfrm>
-          <a:prstGeom xmlns:a="http://schemas.openxmlformats.org/drawingml/2006/main" prst="rect">
-            <a:avLst/>
-          </a:prstGeom>
-          <a:noFill xmlns:a="http://schemas.openxmlformats.org/drawingml/2006/main"/>
-          <a:ln xmlns:a="http://schemas.openxmlformats.org/drawingml/2006/main" w="0">
-            <a:noFill/>
-            <a:prstDash val="solid"/>
-          </a:ln>
-        </p:spPr>
-        <p:txBody>
-          <a:bodyPr xmlns:a="http://schemas.openxmlformats.org/drawingml/2006/main" lIns="0" tIns="0" rIns="0" bIns="0" anchor="ctr"/>
-          <a:lstStyle xmlns:a="http://schemas.openxmlformats.org/drawingml/2006/main"/>
-          <a:p xmlns:a="http://schemas.openxmlformats.org/drawingml/2006/main">
-            <a:pPr>
+            <a:off x="11106150" y="6400800"/>
+            <a:ext cx="476250" cy="247650"/>
+          </a:xfrm>
+          <a:prstGeom xmlns:a="http://schemas.openxmlformats.org/drawingml/2006/main" prst="rect">
+            <a:avLst/>
+          </a:prstGeom>
+          <a:noFill xmlns:a="http://schemas.openxmlformats.org/drawingml/2006/main"/>
+          <a:ln xmlns:a="http://schemas.openxmlformats.org/drawingml/2006/main" w="0">
+            <a:noFill/>
+            <a:prstDash val="solid"/>
+          </a:ln>
+        </p:spPr>
+        <p:txBody>
+          <a:bodyPr xmlns:a="http://schemas.openxmlformats.org/drawingml/2006/main" lIns="0" tIns="0" rIns="0" bIns="0" anchor="ctr">
+            <a:noAutofit/>
+          </a:bodyPr>
+          <a:lstStyle xmlns:a="http://schemas.openxmlformats.org/drawingml/2006/main"/>
+          <a:p xmlns:a="http://schemas.openxmlformats.org/drawingml/2006/main">
+            <a:pPr algn="l">
+              <a:buNone/>
               <a:defRPr sz="1350" b="1">
                 <a:solidFill>
                   <a:srgbClr val="28685E"/>
                 </a:solidFill>
+                <a:latin typeface="Calibri"/>
+                <a:ea typeface="Calibri"/>
+                <a:cs typeface="Calibri"/>
               </a:defRPr>
             </a:pPr>
             <a:r>
@@ -3557,6 +3992,9 @@
                 <a:solidFill>
                   <a:srgbClr val="28685E"/>
                 </a:solidFill>
+                <a:latin typeface="Calibri"/>
+                <a:ea typeface="Calibri"/>
+                <a:cs typeface="Calibri"/>
               </a:rPr>
               <a:t>11</a:t>
             </a:r>
@@ -3579,34 +4017,43 @@
         </p:nvSpPr>
         <p:spPr>
           <a:xfrm xmlns:a="http://schemas.openxmlformats.org/drawingml/2006/main">
-            <a:off x="609600" y="2619375"/>
-            <a:ext cx="10972800" cy="781050"/>
-          </a:xfrm>
-          <a:prstGeom xmlns:a="http://schemas.openxmlformats.org/drawingml/2006/main" prst="rect">
-            <a:avLst/>
-          </a:prstGeom>
-          <a:noFill xmlns:a="http://schemas.openxmlformats.org/drawingml/2006/main"/>
-          <a:ln xmlns:a="http://schemas.openxmlformats.org/drawingml/2006/main" w="0">
-            <a:noFill/>
-            <a:prstDash val="solid"/>
-          </a:ln>
-        </p:spPr>
-        <p:txBody>
-          <a:bodyPr xmlns:a="http://schemas.openxmlformats.org/drawingml/2006/main" lIns="0" tIns="0" rIns="0" bIns="0" anchor="ctr"/>
-          <a:lstStyle xmlns:a="http://schemas.openxmlformats.org/drawingml/2006/main"/>
-          <a:p xmlns:a="http://schemas.openxmlformats.org/drawingml/2006/main">
-            <a:pPr>
-              <a:defRPr sz="2550" b="0">
+            <a:off x="1000125" y="2333625"/>
+            <a:ext cx="10382250" cy="1076325"/>
+          </a:xfrm>
+          <a:prstGeom xmlns:a="http://schemas.openxmlformats.org/drawingml/2006/main" prst="rect">
+            <a:avLst/>
+          </a:prstGeom>
+          <a:noFill xmlns:a="http://schemas.openxmlformats.org/drawingml/2006/main"/>
+          <a:ln xmlns:a="http://schemas.openxmlformats.org/drawingml/2006/main" w="0">
+            <a:noFill/>
+            <a:prstDash val="solid"/>
+          </a:ln>
+        </p:spPr>
+        <p:txBody>
+          <a:bodyPr xmlns:a="http://schemas.openxmlformats.org/drawingml/2006/main" lIns="0" tIns="0" rIns="0" bIns="0" anchor="ctr">
+            <a:noAutofit/>
+          </a:bodyPr>
+          <a:lstStyle xmlns:a="http://schemas.openxmlformats.org/drawingml/2006/main"/>
+          <a:p xmlns:a="http://schemas.openxmlformats.org/drawingml/2006/main">
+            <a:pPr algn="l">
+              <a:buNone/>
+              <a:defRPr sz="2625" b="0">
                 <a:solidFill>
                   <a:srgbClr val="152B3A"/>
                 </a:solidFill>
-              </a:defRPr>
-            </a:pPr>
-            <a:r>
-              <a:rPr sz="2550" b="0">
+                <a:latin typeface="Calibri"/>
+                <a:ea typeface="Calibri"/>
+                <a:cs typeface="Calibri"/>
+              </a:defRPr>
+            </a:pPr>
+            <a:r>
+              <a:rPr sz="2625" b="0">
                 <a:solidFill>
                   <a:srgbClr val="152B3A"/>
                 </a:solidFill>
+                <a:latin typeface="Calibri"/>
+                <a:ea typeface="Calibri"/>
+                <a:cs typeface="Calibri"/>
               </a:rPr>
               <a:t>What helped you understand the orbit?</a:t>
             </a:r>
@@ -3629,34 +4076,43 @@
         </p:nvSpPr>
         <p:spPr>
           <a:xfrm xmlns:a="http://schemas.openxmlformats.org/drawingml/2006/main">
-            <a:off x="609600" y="3476625"/>
-            <a:ext cx="10972800" cy="781050"/>
-          </a:xfrm>
-          <a:prstGeom xmlns:a="http://schemas.openxmlformats.org/drawingml/2006/main" prst="rect">
-            <a:avLst/>
-          </a:prstGeom>
-          <a:noFill xmlns:a="http://schemas.openxmlformats.org/drawingml/2006/main"/>
-          <a:ln xmlns:a="http://schemas.openxmlformats.org/drawingml/2006/main" w="0">
-            <a:noFill/>
-            <a:prstDash val="solid"/>
-          </a:ln>
-        </p:spPr>
-        <p:txBody>
-          <a:bodyPr xmlns:a="http://schemas.openxmlformats.org/drawingml/2006/main" lIns="0" tIns="0" rIns="0" bIns="0" anchor="ctr"/>
-          <a:lstStyle xmlns:a="http://schemas.openxmlformats.org/drawingml/2006/main"/>
-          <a:p xmlns:a="http://schemas.openxmlformats.org/drawingml/2006/main">
-            <a:pPr>
-              <a:defRPr sz="2550" b="0">
+            <a:off x="1000125" y="3467100"/>
+            <a:ext cx="10382250" cy="1076325"/>
+          </a:xfrm>
+          <a:prstGeom xmlns:a="http://schemas.openxmlformats.org/drawingml/2006/main" prst="rect">
+            <a:avLst/>
+          </a:prstGeom>
+          <a:noFill xmlns:a="http://schemas.openxmlformats.org/drawingml/2006/main"/>
+          <a:ln xmlns:a="http://schemas.openxmlformats.org/drawingml/2006/main" w="0">
+            <a:noFill/>
+            <a:prstDash val="solid"/>
+          </a:ln>
+        </p:spPr>
+        <p:txBody>
+          <a:bodyPr xmlns:a="http://schemas.openxmlformats.org/drawingml/2006/main" lIns="0" tIns="0" rIns="0" bIns="0" anchor="ctr">
+            <a:noAutofit/>
+          </a:bodyPr>
+          <a:lstStyle xmlns:a="http://schemas.openxmlformats.org/drawingml/2006/main"/>
+          <a:p xmlns:a="http://schemas.openxmlformats.org/drawingml/2006/main">
+            <a:pPr algn="l">
+              <a:buNone/>
+              <a:defRPr sz="2625" b="0">
                 <a:solidFill>
                   <a:srgbClr val="152B3A"/>
                 </a:solidFill>
-              </a:defRPr>
-            </a:pPr>
-            <a:r>
-              <a:rPr sz="2550" b="0">
+                <a:latin typeface="Calibri"/>
+                <a:ea typeface="Calibri"/>
+                <a:cs typeface="Calibri"/>
+              </a:defRPr>
+            </a:pPr>
+            <a:r>
+              <a:rPr sz="2625" b="0">
                 <a:solidFill>
                   <a:srgbClr val="152B3A"/>
                 </a:solidFill>
+                <a:latin typeface="Calibri"/>
+                <a:ea typeface="Calibri"/>
+                <a:cs typeface="Calibri"/>
               </a:rPr>
               <a:t>What made the model or task difficult?</a:t>
             </a:r>
@@ -3679,36 +4135,276 @@
         </p:nvSpPr>
         <p:spPr>
           <a:xfrm xmlns:a="http://schemas.openxmlformats.org/drawingml/2006/main">
-            <a:off x="609600" y="4333875"/>
-            <a:ext cx="10972800" cy="781050"/>
-          </a:xfrm>
-          <a:prstGeom xmlns:a="http://schemas.openxmlformats.org/drawingml/2006/main" prst="rect">
-            <a:avLst/>
-          </a:prstGeom>
-          <a:noFill xmlns:a="http://schemas.openxmlformats.org/drawingml/2006/main"/>
-          <a:ln xmlns:a="http://schemas.openxmlformats.org/drawingml/2006/main" w="0">
-            <a:noFill/>
-            <a:prstDash val="solid"/>
-          </a:ln>
-        </p:spPr>
-        <p:txBody>
-          <a:bodyPr xmlns:a="http://schemas.openxmlformats.org/drawingml/2006/main" lIns="0" tIns="0" rIns="0" bIns="0" anchor="ctr"/>
-          <a:lstStyle xmlns:a="http://schemas.openxmlformats.org/drawingml/2006/main"/>
-          <a:p xmlns:a="http://schemas.openxmlformats.org/drawingml/2006/main">
-            <a:pPr>
-              <a:defRPr sz="2550" b="0">
+            <a:off x="1000125" y="4600575"/>
+            <a:ext cx="10382250" cy="1076325"/>
+          </a:xfrm>
+          <a:prstGeom xmlns:a="http://schemas.openxmlformats.org/drawingml/2006/main" prst="rect">
+            <a:avLst/>
+          </a:prstGeom>
+          <a:noFill xmlns:a="http://schemas.openxmlformats.org/drawingml/2006/main"/>
+          <a:ln xmlns:a="http://schemas.openxmlformats.org/drawingml/2006/main" w="0">
+            <a:noFill/>
+            <a:prstDash val="solid"/>
+          </a:ln>
+        </p:spPr>
+        <p:txBody>
+          <a:bodyPr xmlns:a="http://schemas.openxmlformats.org/drawingml/2006/main" lIns="0" tIns="0" rIns="0" bIns="0" anchor="ctr">
+            <a:noAutofit/>
+          </a:bodyPr>
+          <a:lstStyle xmlns:a="http://schemas.openxmlformats.org/drawingml/2006/main"/>
+          <a:p xmlns:a="http://schemas.openxmlformats.org/drawingml/2006/main">
+            <a:pPr algn="l">
+              <a:buNone/>
+              <a:defRPr sz="2625" b="0">
                 <a:solidFill>
                   <a:srgbClr val="152B3A"/>
                 </a:solidFill>
-              </a:defRPr>
-            </a:pPr>
-            <a:r>
-              <a:rPr sz="2550" b="0">
+                <a:latin typeface="Calibri"/>
+                <a:ea typeface="Calibri"/>
+                <a:cs typeface="Calibri"/>
+              </a:defRPr>
+            </a:pPr>
+            <a:r>
+              <a:rPr sz="2625" b="0">
                 <a:solidFill>
                   <a:srgbClr val="152B3A"/>
                 </a:solidFill>
+                <a:latin typeface="Calibri"/>
+                <a:ea typeface="Calibri"/>
+                <a:cs typeface="Calibri"/>
               </a:rPr>
               <a:t>Point, speak privately, sign, or pass.</a:t>
+            </a:r>
+          </a:p>
+        </p:txBody>
+      </p:sp>
+      <p:sp>
+        <p:nvSpPr>
+          <p:cNvPr id="11" name="cue-0">
+            <a:extLst xmlns:a="http://schemas.openxmlformats.org/drawingml/2006/main">
+              <a:ext uri="{FF2B5EF4-FFF2-40B4-BE49-F238E27FC236}">
+                <a16:creationId xmlns:a16="http://schemas.microsoft.com/office/drawing/2014/main" id="{C5B1FDF3-2BAC-44C9-988B-018F272D949B}"/>
+              </a:ext>
+            </a:extLst>
+          </p:cNvPr>
+          <p:cNvSpPr>
+            <a:spLocks xmlns:a="http://schemas.openxmlformats.org/drawingml/2006/main" noGrp="1"/>
+          </p:cNvSpPr>
+          <p:nvPr/>
+        </p:nvSpPr>
+        <p:spPr>
+          <a:xfrm xmlns:a="http://schemas.openxmlformats.org/drawingml/2006/main">
+            <a:off x="609600" y="2362200"/>
+            <a:ext cx="323850" cy="323850"/>
+          </a:xfrm>
+          <a:prstGeom xmlns:a="http://schemas.openxmlformats.org/drawingml/2006/main" prst="rect">
+            <a:avLst/>
+          </a:prstGeom>
+          <a:noFill xmlns:a="http://schemas.openxmlformats.org/drawingml/2006/main"/>
+          <a:ln xmlns:a="http://schemas.openxmlformats.org/drawingml/2006/main" w="0">
+            <a:noFill/>
+          </a:ln>
+        </p:spPr>
+        <p:txBody>
+          <a:bodyPr xmlns:a="http://schemas.openxmlformats.org/drawingml/2006/main" lIns="0" tIns="0" rIns="0" bIns="0" anchor="ctr">
+            <a:noAutofit/>
+          </a:bodyPr>
+          <a:lstStyle xmlns:a="http://schemas.openxmlformats.org/drawingml/2006/main"/>
+          <a:p xmlns:a="http://schemas.openxmlformats.org/drawingml/2006/main">
+            <a:pPr algn="l">
+              <a:defRPr sz="1350" b="1">
+                <a:solidFill>
+                  <a:srgbClr val="28685E"/>
+                </a:solidFill>
+                <a:latin typeface="Calibri"/>
+                <a:ea typeface="Calibri"/>
+                <a:cs typeface="Calibri"/>
+              </a:defRPr>
+            </a:pPr>
+            <a:r>
+              <a:rPr sz="1350" b="1">
+                <a:solidFill>
+                  <a:srgbClr val="28685E"/>
+                </a:solidFill>
+                <a:latin typeface="Calibri"/>
+                <a:ea typeface="Calibri"/>
+                <a:cs typeface="Calibri"/>
+              </a:rPr>
+              <a:t>01</a:t>
+            </a:r>
+          </a:p>
+        </p:txBody>
+      </p:sp>
+      <p:sp>
+        <p:nvSpPr>
+          <p:cNvPr id="12" name="row-rule-0">
+            <a:extLst xmlns:a="http://schemas.openxmlformats.org/drawingml/2006/main">
+              <a:ext uri="{FF2B5EF4-FFF2-40B4-BE49-F238E27FC236}">
+                <a16:creationId xmlns:a16="http://schemas.microsoft.com/office/drawing/2014/main" id="{A19842C6-666A-4132-ACD5-92DDA7375298}"/>
+              </a:ext>
+            </a:extLst>
+          </p:cNvPr>
+          <p:cNvSpPr>
+            <a:spLocks xmlns:a="http://schemas.openxmlformats.org/drawingml/2006/main" noGrp="1"/>
+          </p:cNvSpPr>
+          <p:nvPr/>
+        </p:nvSpPr>
+        <p:spPr>
+          <a:xfrm xmlns:a="http://schemas.openxmlformats.org/drawingml/2006/main">
+            <a:off x="1000125" y="3419475"/>
+            <a:ext cx="10334625" cy="0"/>
+          </a:xfrm>
+          <a:prstGeom xmlns:a="http://schemas.openxmlformats.org/drawingml/2006/main" prst="line">
+            <a:avLst/>
+          </a:prstGeom>
+          <a:noFill xmlns:a="http://schemas.openxmlformats.org/drawingml/2006/main"/>
+          <a:ln xmlns:a="http://schemas.openxmlformats.org/drawingml/2006/main" w="9525">
+            <a:solidFill>
+              <a:srgbClr val="CEDBD3"/>
+            </a:solidFill>
+          </a:ln>
+        </p:spPr>
+      </p:sp>
+      <p:sp>
+        <p:nvSpPr>
+          <p:cNvPr id="13" name="cue-1">
+            <a:extLst xmlns:a="http://schemas.openxmlformats.org/drawingml/2006/main">
+              <a:ext uri="{FF2B5EF4-FFF2-40B4-BE49-F238E27FC236}">
+                <a16:creationId xmlns:a16="http://schemas.microsoft.com/office/drawing/2014/main" id="{611BC846-4B15-4F58-8063-9C495F61CFDD}"/>
+              </a:ext>
+            </a:extLst>
+          </p:cNvPr>
+          <p:cNvSpPr>
+            <a:spLocks xmlns:a="http://schemas.openxmlformats.org/drawingml/2006/main" noGrp="1"/>
+          </p:cNvSpPr>
+          <p:nvPr/>
+        </p:nvSpPr>
+        <p:spPr>
+          <a:xfrm xmlns:a="http://schemas.openxmlformats.org/drawingml/2006/main">
+            <a:off x="609600" y="3495675"/>
+            <a:ext cx="323850" cy="323850"/>
+          </a:xfrm>
+          <a:prstGeom xmlns:a="http://schemas.openxmlformats.org/drawingml/2006/main" prst="rect">
+            <a:avLst/>
+          </a:prstGeom>
+          <a:noFill xmlns:a="http://schemas.openxmlformats.org/drawingml/2006/main"/>
+          <a:ln xmlns:a="http://schemas.openxmlformats.org/drawingml/2006/main" w="0">
+            <a:noFill/>
+          </a:ln>
+        </p:spPr>
+        <p:txBody>
+          <a:bodyPr xmlns:a="http://schemas.openxmlformats.org/drawingml/2006/main" lIns="0" tIns="0" rIns="0" bIns="0" anchor="ctr">
+            <a:noAutofit/>
+          </a:bodyPr>
+          <a:lstStyle xmlns:a="http://schemas.openxmlformats.org/drawingml/2006/main"/>
+          <a:p xmlns:a="http://schemas.openxmlformats.org/drawingml/2006/main">
+            <a:pPr algn="l">
+              <a:defRPr sz="1350" b="1">
+                <a:solidFill>
+                  <a:srgbClr val="28685E"/>
+                </a:solidFill>
+                <a:latin typeface="Calibri"/>
+                <a:ea typeface="Calibri"/>
+                <a:cs typeface="Calibri"/>
+              </a:defRPr>
+            </a:pPr>
+            <a:r>
+              <a:rPr sz="1350" b="1">
+                <a:solidFill>
+                  <a:srgbClr val="28685E"/>
+                </a:solidFill>
+                <a:latin typeface="Calibri"/>
+                <a:ea typeface="Calibri"/>
+                <a:cs typeface="Calibri"/>
+              </a:rPr>
+              <a:t>02</a:t>
+            </a:r>
+          </a:p>
+        </p:txBody>
+      </p:sp>
+      <p:sp>
+        <p:nvSpPr>
+          <p:cNvPr id="14" name="row-rule-1">
+            <a:extLst xmlns:a="http://schemas.openxmlformats.org/drawingml/2006/main">
+              <a:ext uri="{FF2B5EF4-FFF2-40B4-BE49-F238E27FC236}">
+                <a16:creationId xmlns:a16="http://schemas.microsoft.com/office/drawing/2014/main" id="{E3CC9525-55EF-4933-AE35-9CB321801508}"/>
+              </a:ext>
+            </a:extLst>
+          </p:cNvPr>
+          <p:cNvSpPr>
+            <a:spLocks xmlns:a="http://schemas.openxmlformats.org/drawingml/2006/main" noGrp="1"/>
+          </p:cNvSpPr>
+          <p:nvPr/>
+        </p:nvSpPr>
+        <p:spPr>
+          <a:xfrm xmlns:a="http://schemas.openxmlformats.org/drawingml/2006/main">
+            <a:off x="1000125" y="4552950"/>
+            <a:ext cx="10334625" cy="0"/>
+          </a:xfrm>
+          <a:prstGeom xmlns:a="http://schemas.openxmlformats.org/drawingml/2006/main" prst="line">
+            <a:avLst/>
+          </a:prstGeom>
+          <a:noFill xmlns:a="http://schemas.openxmlformats.org/drawingml/2006/main"/>
+          <a:ln xmlns:a="http://schemas.openxmlformats.org/drawingml/2006/main" w="9525">
+            <a:solidFill>
+              <a:srgbClr val="CEDBD3"/>
+            </a:solidFill>
+          </a:ln>
+        </p:spPr>
+      </p:sp>
+      <p:sp>
+        <p:nvSpPr>
+          <p:cNvPr id="15" name="cue-2">
+            <a:extLst xmlns:a="http://schemas.openxmlformats.org/drawingml/2006/main">
+              <a:ext uri="{FF2B5EF4-FFF2-40B4-BE49-F238E27FC236}">
+                <a16:creationId xmlns:a16="http://schemas.microsoft.com/office/drawing/2014/main" id="{100346B0-EA72-4AB0-91D2-C5F3A5CEE898}"/>
+              </a:ext>
+            </a:extLst>
+          </p:cNvPr>
+          <p:cNvSpPr>
+            <a:spLocks xmlns:a="http://schemas.openxmlformats.org/drawingml/2006/main" noGrp="1"/>
+          </p:cNvSpPr>
+          <p:nvPr/>
+        </p:nvSpPr>
+        <p:spPr>
+          <a:xfrm xmlns:a="http://schemas.openxmlformats.org/drawingml/2006/main">
+            <a:off x="609600" y="4629150"/>
+            <a:ext cx="323850" cy="323850"/>
+          </a:xfrm>
+          <a:prstGeom xmlns:a="http://schemas.openxmlformats.org/drawingml/2006/main" prst="rect">
+            <a:avLst/>
+          </a:prstGeom>
+          <a:noFill xmlns:a="http://schemas.openxmlformats.org/drawingml/2006/main"/>
+          <a:ln xmlns:a="http://schemas.openxmlformats.org/drawingml/2006/main" w="0">
+            <a:noFill/>
+          </a:ln>
+        </p:spPr>
+        <p:txBody>
+          <a:bodyPr xmlns:a="http://schemas.openxmlformats.org/drawingml/2006/main" lIns="0" tIns="0" rIns="0" bIns="0" anchor="ctr">
+            <a:noAutofit/>
+          </a:bodyPr>
+          <a:lstStyle xmlns:a="http://schemas.openxmlformats.org/drawingml/2006/main"/>
+          <a:p xmlns:a="http://schemas.openxmlformats.org/drawingml/2006/main">
+            <a:pPr algn="l">
+              <a:defRPr sz="1350" b="1">
+                <a:solidFill>
+                  <a:srgbClr val="28685E"/>
+                </a:solidFill>
+                <a:latin typeface="Calibri"/>
+                <a:ea typeface="Calibri"/>
+                <a:cs typeface="Calibri"/>
+              </a:defRPr>
+            </a:pPr>
+            <a:r>
+              <a:rPr sz="1350" b="1">
+                <a:solidFill>
+                  <a:srgbClr val="28685E"/>
+                </a:solidFill>
+                <a:latin typeface="Calibri"/>
+                <a:ea typeface="Calibri"/>
+                <a:cs typeface="Calibri"/>
+              </a:rPr>
+              <a:t>03</a:t>
             </a:r>
           </a:p>
         </p:txBody>
@@ -3729,7 +4425,7 @@
     <p:bg>
       <p:bgPr>
         <a:solidFill xmlns:a="http://schemas.openxmlformats.org/drawingml/2006/main">
-          <a:srgbClr val="F5F1E8"/>
+          <a:srgbClr val="FAF9F5"/>
         </a:solidFill>
       </p:bgPr>
     </p:bg>
@@ -3758,8 +4454,8 @@
         </p:nvSpPr>
         <p:spPr>
           <a:xfrm xmlns:a="http://schemas.openxmlformats.org/drawingml/2006/main">
-            <a:off x="609600" y="552450"/>
-            <a:ext cx="781050" cy="57150"/>
+            <a:off x="609600" y="733425"/>
+            <a:ext cx="781050" cy="38100"/>
           </a:xfrm>
           <a:prstGeom xmlns:a="http://schemas.openxmlformats.org/drawingml/2006/main" prst="rect">
             <a:avLst/>
@@ -3789,34 +4485,43 @@
         </p:nvSpPr>
         <p:spPr>
           <a:xfrm xmlns:a="http://schemas.openxmlformats.org/drawingml/2006/main">
-            <a:off x="609600" y="762000"/>
-            <a:ext cx="8572500" cy="285750"/>
-          </a:xfrm>
-          <a:prstGeom xmlns:a="http://schemas.openxmlformats.org/drawingml/2006/main" prst="rect">
-            <a:avLst/>
-          </a:prstGeom>
-          <a:noFill xmlns:a="http://schemas.openxmlformats.org/drawingml/2006/main"/>
-          <a:ln xmlns:a="http://schemas.openxmlformats.org/drawingml/2006/main" w="0">
-            <a:noFill/>
-            <a:prstDash val="solid"/>
-          </a:ln>
-        </p:spPr>
-        <p:txBody>
-          <a:bodyPr xmlns:a="http://schemas.openxmlformats.org/drawingml/2006/main" lIns="0" tIns="0" rIns="0" bIns="0" anchor="ctr"/>
-          <a:lstStyle xmlns:a="http://schemas.openxmlformats.org/drawingml/2006/main"/>
-          <a:p xmlns:a="http://schemas.openxmlformats.org/drawingml/2006/main">
-            <a:pPr>
-              <a:defRPr sz="1500" b="1">
+            <a:off x="609600" y="342900"/>
+            <a:ext cx="9334500" cy="304800"/>
+          </a:xfrm>
+          <a:prstGeom xmlns:a="http://schemas.openxmlformats.org/drawingml/2006/main" prst="rect">
+            <a:avLst/>
+          </a:prstGeom>
+          <a:noFill xmlns:a="http://schemas.openxmlformats.org/drawingml/2006/main"/>
+          <a:ln xmlns:a="http://schemas.openxmlformats.org/drawingml/2006/main" w="0">
+            <a:noFill/>
+            <a:prstDash val="solid"/>
+          </a:ln>
+        </p:spPr>
+        <p:txBody>
+          <a:bodyPr xmlns:a="http://schemas.openxmlformats.org/drawingml/2006/main" lIns="0" tIns="0" rIns="0" bIns="0" anchor="ctr">
+            <a:noAutofit/>
+          </a:bodyPr>
+          <a:lstStyle xmlns:a="http://schemas.openxmlformats.org/drawingml/2006/main"/>
+          <a:p xmlns:a="http://schemas.openxmlformats.org/drawingml/2006/main">
+            <a:pPr algn="l">
+              <a:buNone/>
+              <a:defRPr sz="1350" b="1">
                 <a:solidFill>
                   <a:srgbClr val="28685E"/>
                 </a:solidFill>
-              </a:defRPr>
-            </a:pPr>
-            <a:r>
-              <a:rPr sz="1500" b="1">
+                <a:latin typeface="Calibri"/>
+                <a:ea typeface="Calibri"/>
+                <a:cs typeface="Calibri"/>
+              </a:defRPr>
+            </a:pPr>
+            <a:r>
+              <a:rPr sz="1350" b="1">
                 <a:solidFill>
                   <a:srgbClr val="28685E"/>
                 </a:solidFill>
+                <a:latin typeface="Calibri"/>
+                <a:ea typeface="Calibri"/>
+                <a:cs typeface="Calibri"/>
               </a:rPr>
               <a:t>MADE BY MATT  /  GROW SCIENCE</a:t>
             </a:r>
@@ -3839,34 +4544,43 @@
         </p:nvSpPr>
         <p:spPr>
           <a:xfrm xmlns:a="http://schemas.openxmlformats.org/drawingml/2006/main">
-            <a:off x="609600" y="1352550"/>
-            <a:ext cx="10972800" cy="952500"/>
-          </a:xfrm>
-          <a:prstGeom xmlns:a="http://schemas.openxmlformats.org/drawingml/2006/main" prst="rect">
-            <a:avLst/>
-          </a:prstGeom>
-          <a:noFill xmlns:a="http://schemas.openxmlformats.org/drawingml/2006/main"/>
-          <a:ln xmlns:a="http://schemas.openxmlformats.org/drawingml/2006/main" w="0">
-            <a:noFill/>
-            <a:prstDash val="solid"/>
-          </a:ln>
-        </p:spPr>
-        <p:txBody>
-          <a:bodyPr xmlns:a="http://schemas.openxmlformats.org/drawingml/2006/main" lIns="0" tIns="0" rIns="0" bIns="0" anchor="ctr"/>
-          <a:lstStyle xmlns:a="http://schemas.openxmlformats.org/drawingml/2006/main"/>
-          <a:p xmlns:a="http://schemas.openxmlformats.org/drawingml/2006/main">
-            <a:pPr>
-              <a:defRPr sz="3750" b="1">
+            <a:off x="609600" y="990600"/>
+            <a:ext cx="10972800" cy="1000125"/>
+          </a:xfrm>
+          <a:prstGeom xmlns:a="http://schemas.openxmlformats.org/drawingml/2006/main" prst="rect">
+            <a:avLst/>
+          </a:prstGeom>
+          <a:noFill xmlns:a="http://schemas.openxmlformats.org/drawingml/2006/main"/>
+          <a:ln xmlns:a="http://schemas.openxmlformats.org/drawingml/2006/main" w="0">
+            <a:noFill/>
+            <a:prstDash val="solid"/>
+          </a:ln>
+        </p:spPr>
+        <p:txBody>
+          <a:bodyPr xmlns:a="http://schemas.openxmlformats.org/drawingml/2006/main" lIns="0" tIns="0" rIns="0" bIns="0" anchor="ctr">
+            <a:noAutofit/>
+          </a:bodyPr>
+          <a:lstStyle xmlns:a="http://schemas.openxmlformats.org/drawingml/2006/main"/>
+          <a:p xmlns:a="http://schemas.openxmlformats.org/drawingml/2006/main">
+            <a:pPr algn="l">
+              <a:buNone/>
+              <a:defRPr sz="3675" b="1">
                 <a:solidFill>
                   <a:srgbClr val="152B3A"/>
                 </a:solidFill>
-              </a:defRPr>
-            </a:pPr>
-            <a:r>
-              <a:rPr sz="3750" b="1">
+                <a:latin typeface="Calibri"/>
+                <a:ea typeface="Calibri"/>
+                <a:cs typeface="Calibri"/>
+              </a:defRPr>
+            </a:pPr>
+            <a:r>
+              <a:rPr sz="3675" b="1">
                 <a:solidFill>
                   <a:srgbClr val="152B3A"/>
                 </a:solidFill>
+                <a:latin typeface="Calibri"/>
+                <a:ea typeface="Calibri"/>
+                <a:cs typeface="Calibri"/>
               </a:rPr>
               <a:t>Agree one useful change</a:t>
             </a:r>
@@ -3889,14 +4603,14 @@
         </p:nvSpPr>
         <p:spPr>
           <a:xfrm xmlns:a="http://schemas.openxmlformats.org/drawingml/2006/main">
-            <a:off x="609600" y="6219825"/>
+            <a:off x="609600" y="6191250"/>
             <a:ext cx="10972800" cy="9525"/>
           </a:xfrm>
           <a:prstGeom xmlns:a="http://schemas.openxmlformats.org/drawingml/2006/main" prst="rect">
             <a:avLst/>
           </a:prstGeom>
           <a:solidFill xmlns:a="http://schemas.openxmlformats.org/drawingml/2006/main">
-            <a:srgbClr val="DCE7DD"/>
+            <a:srgbClr val="CEDBD3"/>
           </a:solidFill>
           <a:ln xmlns:a="http://schemas.openxmlformats.org/drawingml/2006/main" w="0">
             <a:noFill/>
@@ -3920,34 +4634,43 @@
         </p:nvSpPr>
         <p:spPr>
           <a:xfrm xmlns:a="http://schemas.openxmlformats.org/drawingml/2006/main">
-            <a:off x="609600" y="6381750"/>
-            <a:ext cx="9906000" cy="228600"/>
-          </a:xfrm>
-          <a:prstGeom xmlns:a="http://schemas.openxmlformats.org/drawingml/2006/main" prst="rect">
-            <a:avLst/>
-          </a:prstGeom>
-          <a:noFill xmlns:a="http://schemas.openxmlformats.org/drawingml/2006/main"/>
-          <a:ln xmlns:a="http://schemas.openxmlformats.org/drawingml/2006/main" w="0">
-            <a:noFill/>
-            <a:prstDash val="solid"/>
-          </a:ln>
-        </p:spPr>
-        <p:txBody>
-          <a:bodyPr xmlns:a="http://schemas.openxmlformats.org/drawingml/2006/main" lIns="0" tIns="0" rIns="0" bIns="0" anchor="ctr"/>
-          <a:lstStyle xmlns:a="http://schemas.openxmlformats.org/drawingml/2006/main"/>
-          <a:p xmlns:a="http://schemas.openxmlformats.org/drawingml/2006/main">
-            <a:pPr>
-              <a:defRPr sz="1275" b="0">
+            <a:off x="609600" y="6419850"/>
+            <a:ext cx="9525000" cy="219075"/>
+          </a:xfrm>
+          <a:prstGeom xmlns:a="http://schemas.openxmlformats.org/drawingml/2006/main" prst="rect">
+            <a:avLst/>
+          </a:prstGeom>
+          <a:noFill xmlns:a="http://schemas.openxmlformats.org/drawingml/2006/main"/>
+          <a:ln xmlns:a="http://schemas.openxmlformats.org/drawingml/2006/main" w="0">
+            <a:noFill/>
+            <a:prstDash val="solid"/>
+          </a:ln>
+        </p:spPr>
+        <p:txBody>
+          <a:bodyPr xmlns:a="http://schemas.openxmlformats.org/drawingml/2006/main" lIns="0" tIns="0" rIns="0" bIns="0" anchor="ctr">
+            <a:noAutofit/>
+          </a:bodyPr>
+          <a:lstStyle xmlns:a="http://schemas.openxmlformats.org/drawingml/2006/main"/>
+          <a:p xmlns:a="http://schemas.openxmlformats.org/drawingml/2006/main">
+            <a:pPr algn="l">
+              <a:buNone/>
+              <a:defRPr sz="1200" b="0">
                 <a:solidFill>
                   <a:srgbClr val="50616B"/>
                 </a:solidFill>
-              </a:defRPr>
-            </a:pPr>
-            <a:r>
-              <a:rPr sz="1275" b="0">
+                <a:latin typeface="Calibri"/>
+                <a:ea typeface="Calibri"/>
+                <a:cs typeface="Calibri"/>
+              </a:defRPr>
+            </a:pPr>
+            <a:r>
+              <a:rPr sz="1200" b="0">
                 <a:solidFill>
                   <a:srgbClr val="50616B"/>
                 </a:solidFill>
+                <a:latin typeface="Calibri"/>
+                <a:ea typeface="Calibri"/>
+                <a:cs typeface="Calibri"/>
               </a:rPr>
               <a:t>AUTUMN 1  ·  WEEK 6  ·  LESSON B</a:t>
             </a:r>
@@ -3970,27 +4693,33 @@
         </p:nvSpPr>
         <p:spPr>
           <a:xfrm xmlns:a="http://schemas.openxmlformats.org/drawingml/2006/main">
-            <a:off x="11106150" y="6362700"/>
-            <a:ext cx="476250" cy="238125"/>
-          </a:xfrm>
-          <a:prstGeom xmlns:a="http://schemas.openxmlformats.org/drawingml/2006/main" prst="rect">
-            <a:avLst/>
-          </a:prstGeom>
-          <a:noFill xmlns:a="http://schemas.openxmlformats.org/drawingml/2006/main"/>
-          <a:ln xmlns:a="http://schemas.openxmlformats.org/drawingml/2006/main" w="0">
-            <a:noFill/>
-            <a:prstDash val="solid"/>
-          </a:ln>
-        </p:spPr>
-        <p:txBody>
-          <a:bodyPr xmlns:a="http://schemas.openxmlformats.org/drawingml/2006/main" lIns="0" tIns="0" rIns="0" bIns="0" anchor="ctr"/>
-          <a:lstStyle xmlns:a="http://schemas.openxmlformats.org/drawingml/2006/main"/>
-          <a:p xmlns:a="http://schemas.openxmlformats.org/drawingml/2006/main">
-            <a:pPr>
+            <a:off x="11106150" y="6400800"/>
+            <a:ext cx="476250" cy="247650"/>
+          </a:xfrm>
+          <a:prstGeom xmlns:a="http://schemas.openxmlformats.org/drawingml/2006/main" prst="rect">
+            <a:avLst/>
+          </a:prstGeom>
+          <a:noFill xmlns:a="http://schemas.openxmlformats.org/drawingml/2006/main"/>
+          <a:ln xmlns:a="http://schemas.openxmlformats.org/drawingml/2006/main" w="0">
+            <a:noFill/>
+            <a:prstDash val="solid"/>
+          </a:ln>
+        </p:spPr>
+        <p:txBody>
+          <a:bodyPr xmlns:a="http://schemas.openxmlformats.org/drawingml/2006/main" lIns="0" tIns="0" rIns="0" bIns="0" anchor="ctr">
+            <a:noAutofit/>
+          </a:bodyPr>
+          <a:lstStyle xmlns:a="http://schemas.openxmlformats.org/drawingml/2006/main"/>
+          <a:p xmlns:a="http://schemas.openxmlformats.org/drawingml/2006/main">
+            <a:pPr algn="l">
+              <a:buNone/>
               <a:defRPr sz="1350" b="1">
                 <a:solidFill>
                   <a:srgbClr val="28685E"/>
                 </a:solidFill>
+                <a:latin typeface="Calibri"/>
+                <a:ea typeface="Calibri"/>
+                <a:cs typeface="Calibri"/>
               </a:defRPr>
             </a:pPr>
             <a:r>
@@ -3998,6 +4727,9 @@
                 <a:solidFill>
                   <a:srgbClr val="28685E"/>
                 </a:solidFill>
+                <a:latin typeface="Calibri"/>
+                <a:ea typeface="Calibri"/>
+                <a:cs typeface="Calibri"/>
               </a:rPr>
               <a:t>12</a:t>
             </a:r>
@@ -4020,34 +4752,45 @@
         </p:nvSpPr>
         <p:spPr>
           <a:xfrm xmlns:a="http://schemas.openxmlformats.org/drawingml/2006/main">
-            <a:off x="609600" y="2686050"/>
-            <a:ext cx="10858500" cy="1524000"/>
-          </a:xfrm>
-          <a:prstGeom xmlns:a="http://schemas.openxmlformats.org/drawingml/2006/main" prst="rect">
-            <a:avLst/>
-          </a:prstGeom>
-          <a:noFill xmlns:a="http://schemas.openxmlformats.org/drawingml/2006/main"/>
-          <a:ln xmlns:a="http://schemas.openxmlformats.org/drawingml/2006/main" w="0">
-            <a:noFill/>
-            <a:prstDash val="solid"/>
-          </a:ln>
-        </p:spPr>
-        <p:txBody>
-          <a:bodyPr xmlns:a="http://schemas.openxmlformats.org/drawingml/2006/main" lIns="0" tIns="0" rIns="0" bIns="0" anchor="ctr"/>
-          <a:lstStyle xmlns:a="http://schemas.openxmlformats.org/drawingml/2006/main"/>
-          <a:p xmlns:a="http://schemas.openxmlformats.org/drawingml/2006/main">
-            <a:pPr>
-              <a:defRPr sz="2925" b="1">
+            <a:off x="457200" y="2190750"/>
+            <a:ext cx="11277600" cy="2143125"/>
+          </a:xfrm>
+          <a:prstGeom xmlns:a="http://schemas.openxmlformats.org/drawingml/2006/main" prst="rect">
+            <a:avLst/>
+          </a:prstGeom>
+          <a:solidFill xmlns:a="http://schemas.openxmlformats.org/drawingml/2006/main">
+            <a:srgbClr val="E7EFE9"/>
+          </a:solidFill>
+          <a:ln xmlns:a="http://schemas.openxmlformats.org/drawingml/2006/main" w="0">
+            <a:noFill/>
+            <a:prstDash val="solid"/>
+          </a:ln>
+        </p:spPr>
+        <p:txBody>
+          <a:bodyPr xmlns:a="http://schemas.openxmlformats.org/drawingml/2006/main" lIns="152400" tIns="114300" rIns="152400" bIns="114300" anchor="ctr">
+            <a:noAutofit/>
+          </a:bodyPr>
+          <a:lstStyle xmlns:a="http://schemas.openxmlformats.org/drawingml/2006/main"/>
+          <a:p xmlns:a="http://schemas.openxmlformats.org/drawingml/2006/main">
+            <a:pPr algn="l">
+              <a:buNone/>
+              <a:defRPr sz="3075" b="1">
                 <a:solidFill>
                   <a:srgbClr val="28685E"/>
                 </a:solidFill>
-              </a:defRPr>
-            </a:pPr>
-            <a:r>
-              <a:rPr sz="2925" b="1">
+                <a:latin typeface="Calibri"/>
+                <a:ea typeface="Calibri"/>
+                <a:cs typeface="Calibri"/>
+              </a:defRPr>
+            </a:pPr>
+            <a:r>
+              <a:rPr sz="3075" b="1">
                 <a:solidFill>
                   <a:srgbClr val="28685E"/>
                 </a:solidFill>
+                <a:latin typeface="Calibri"/>
+                <a:ea typeface="Calibri"/>
+                <a:cs typeface="Calibri"/>
               </a:rPr>
               <a:t>You said_____. We can change_____.</a:t>
             </a:r>
@@ -4070,34 +4813,43 @@
         </p:nvSpPr>
         <p:spPr>
           <a:xfrm xmlns:a="http://schemas.openxmlformats.org/drawingml/2006/main">
-            <a:off x="609600" y="4552950"/>
-            <a:ext cx="10858500" cy="1285875"/>
-          </a:xfrm>
-          <a:prstGeom xmlns:a="http://schemas.openxmlformats.org/drawingml/2006/main" prst="rect">
-            <a:avLst/>
-          </a:prstGeom>
-          <a:noFill xmlns:a="http://schemas.openxmlformats.org/drawingml/2006/main"/>
-          <a:ln xmlns:a="http://schemas.openxmlformats.org/drawingml/2006/main" w="0">
-            <a:noFill/>
-            <a:prstDash val="solid"/>
-          </a:ln>
-        </p:spPr>
-        <p:txBody>
-          <a:bodyPr xmlns:a="http://schemas.openxmlformats.org/drawingml/2006/main" lIns="0" tIns="0" rIns="0" bIns="0" anchor="ctr"/>
-          <a:lstStyle xmlns:a="http://schemas.openxmlformats.org/drawingml/2006/main"/>
-          <a:p xmlns:a="http://schemas.openxmlformats.org/drawingml/2006/main">
-            <a:pPr>
-              <a:defRPr sz="2700" b="0">
+            <a:off x="609600" y="4438650"/>
+            <a:ext cx="10972800" cy="1257300"/>
+          </a:xfrm>
+          <a:prstGeom xmlns:a="http://schemas.openxmlformats.org/drawingml/2006/main" prst="rect">
+            <a:avLst/>
+          </a:prstGeom>
+          <a:noFill xmlns:a="http://schemas.openxmlformats.org/drawingml/2006/main"/>
+          <a:ln xmlns:a="http://schemas.openxmlformats.org/drawingml/2006/main" w="0">
+            <a:noFill/>
+            <a:prstDash val="solid"/>
+          </a:ln>
+        </p:spPr>
+        <p:txBody>
+          <a:bodyPr xmlns:a="http://schemas.openxmlformats.org/drawingml/2006/main" lIns="0" tIns="0" rIns="0" bIns="0" anchor="ctr">
+            <a:noAutofit/>
+          </a:bodyPr>
+          <a:lstStyle xmlns:a="http://schemas.openxmlformats.org/drawingml/2006/main"/>
+          <a:p xmlns:a="http://schemas.openxmlformats.org/drawingml/2006/main">
+            <a:pPr algn="l">
+              <a:buNone/>
+              <a:defRPr sz="2550" b="0">
                 <a:solidFill>
                   <a:srgbClr val="152B3A"/>
                 </a:solidFill>
-              </a:defRPr>
-            </a:pPr>
-            <a:r>
-              <a:rPr sz="2700" b="0">
+                <a:latin typeface="Calibri"/>
+                <a:ea typeface="Calibri"/>
+                <a:cs typeface="Calibri"/>
+              </a:defRPr>
+            </a:pPr>
+            <a:r>
+              <a:rPr sz="2550" b="0">
                 <a:solidFill>
                   <a:srgbClr val="152B3A"/>
                 </a:solidFill>
+                <a:latin typeface="Calibri"/>
+                <a:ea typeface="Calibri"/>
+                <a:cs typeface="Calibri"/>
               </a:rPr>
               <a:t>Did that change help? What still needs explaining?</a:t>
             </a:r>
@@ -4120,7 +4872,7 @@
     <p:bg>
       <p:bgPr>
         <a:solidFill xmlns:a="http://schemas.openxmlformats.org/drawingml/2006/main">
-          <a:srgbClr val="F5F1E8"/>
+          <a:srgbClr val="FAF9F5"/>
         </a:solidFill>
       </p:bgPr>
     </p:bg>
@@ -4149,8 +4901,8 @@
         </p:nvSpPr>
         <p:spPr>
           <a:xfrm xmlns:a="http://schemas.openxmlformats.org/drawingml/2006/main">
-            <a:off x="609600" y="552450"/>
-            <a:ext cx="781050" cy="57150"/>
+            <a:off x="609600" y="733425"/>
+            <a:ext cx="781050" cy="38100"/>
           </a:xfrm>
           <a:prstGeom xmlns:a="http://schemas.openxmlformats.org/drawingml/2006/main" prst="rect">
             <a:avLst/>
@@ -4180,34 +4932,43 @@
         </p:nvSpPr>
         <p:spPr>
           <a:xfrm xmlns:a="http://schemas.openxmlformats.org/drawingml/2006/main">
-            <a:off x="609600" y="762000"/>
-            <a:ext cx="8572500" cy="285750"/>
-          </a:xfrm>
-          <a:prstGeom xmlns:a="http://schemas.openxmlformats.org/drawingml/2006/main" prst="rect">
-            <a:avLst/>
-          </a:prstGeom>
-          <a:noFill xmlns:a="http://schemas.openxmlformats.org/drawingml/2006/main"/>
-          <a:ln xmlns:a="http://schemas.openxmlformats.org/drawingml/2006/main" w="0">
-            <a:noFill/>
-            <a:prstDash val="solid"/>
-          </a:ln>
-        </p:spPr>
-        <p:txBody>
-          <a:bodyPr xmlns:a="http://schemas.openxmlformats.org/drawingml/2006/main" lIns="0" tIns="0" rIns="0" bIns="0" anchor="ctr"/>
-          <a:lstStyle xmlns:a="http://schemas.openxmlformats.org/drawingml/2006/main"/>
-          <a:p xmlns:a="http://schemas.openxmlformats.org/drawingml/2006/main">
-            <a:pPr>
-              <a:defRPr sz="1500" b="1">
+            <a:off x="609600" y="342900"/>
+            <a:ext cx="9334500" cy="304800"/>
+          </a:xfrm>
+          <a:prstGeom xmlns:a="http://schemas.openxmlformats.org/drawingml/2006/main" prst="rect">
+            <a:avLst/>
+          </a:prstGeom>
+          <a:noFill xmlns:a="http://schemas.openxmlformats.org/drawingml/2006/main"/>
+          <a:ln xmlns:a="http://schemas.openxmlformats.org/drawingml/2006/main" w="0">
+            <a:noFill/>
+            <a:prstDash val="solid"/>
+          </a:ln>
+        </p:spPr>
+        <p:txBody>
+          <a:bodyPr xmlns:a="http://schemas.openxmlformats.org/drawingml/2006/main" lIns="0" tIns="0" rIns="0" bIns="0" anchor="ctr">
+            <a:noAutofit/>
+          </a:bodyPr>
+          <a:lstStyle xmlns:a="http://schemas.openxmlformats.org/drawingml/2006/main"/>
+          <a:p xmlns:a="http://schemas.openxmlformats.org/drawingml/2006/main">
+            <a:pPr algn="l">
+              <a:buNone/>
+              <a:defRPr sz="1350" b="1">
                 <a:solidFill>
                   <a:srgbClr val="28685E"/>
                 </a:solidFill>
-              </a:defRPr>
-            </a:pPr>
-            <a:r>
-              <a:rPr sz="1500" b="1">
+                <a:latin typeface="Calibri"/>
+                <a:ea typeface="Calibri"/>
+                <a:cs typeface="Calibri"/>
+              </a:defRPr>
+            </a:pPr>
+            <a:r>
+              <a:rPr sz="1350" b="1">
                 <a:solidFill>
                   <a:srgbClr val="28685E"/>
                 </a:solidFill>
+                <a:latin typeface="Calibri"/>
+                <a:ea typeface="Calibri"/>
+                <a:cs typeface="Calibri"/>
               </a:rPr>
               <a:t>MADE BY MATT  /  GROW SCIENCE</a:t>
             </a:r>
@@ -4230,34 +4991,43 @@
         </p:nvSpPr>
         <p:spPr>
           <a:xfrm xmlns:a="http://schemas.openxmlformats.org/drawingml/2006/main">
-            <a:off x="609600" y="1352550"/>
-            <a:ext cx="10972800" cy="952500"/>
-          </a:xfrm>
-          <a:prstGeom xmlns:a="http://schemas.openxmlformats.org/drawingml/2006/main" prst="rect">
-            <a:avLst/>
-          </a:prstGeom>
-          <a:noFill xmlns:a="http://schemas.openxmlformats.org/drawingml/2006/main"/>
-          <a:ln xmlns:a="http://schemas.openxmlformats.org/drawingml/2006/main" w="0">
-            <a:noFill/>
-            <a:prstDash val="solid"/>
-          </a:ln>
-        </p:spPr>
-        <p:txBody>
-          <a:bodyPr xmlns:a="http://schemas.openxmlformats.org/drawingml/2006/main" lIns="0" tIns="0" rIns="0" bIns="0" anchor="ctr"/>
-          <a:lstStyle xmlns:a="http://schemas.openxmlformats.org/drawingml/2006/main"/>
-          <a:p xmlns:a="http://schemas.openxmlformats.org/drawingml/2006/main">
-            <a:pPr>
-              <a:defRPr sz="3750" b="1">
+            <a:off x="609600" y="990600"/>
+            <a:ext cx="10972800" cy="1000125"/>
+          </a:xfrm>
+          <a:prstGeom xmlns:a="http://schemas.openxmlformats.org/drawingml/2006/main" prst="rect">
+            <a:avLst/>
+          </a:prstGeom>
+          <a:noFill xmlns:a="http://schemas.openxmlformats.org/drawingml/2006/main"/>
+          <a:ln xmlns:a="http://schemas.openxmlformats.org/drawingml/2006/main" w="0">
+            <a:noFill/>
+            <a:prstDash val="solid"/>
+          </a:ln>
+        </p:spPr>
+        <p:txBody>
+          <a:bodyPr xmlns:a="http://schemas.openxmlformats.org/drawingml/2006/main" lIns="0" tIns="0" rIns="0" bIns="0" anchor="ctr">
+            <a:noAutofit/>
+          </a:bodyPr>
+          <a:lstStyle xmlns:a="http://schemas.openxmlformats.org/drawingml/2006/main"/>
+          <a:p xmlns:a="http://schemas.openxmlformats.org/drawingml/2006/main">
+            <a:pPr algn="l">
+              <a:buNone/>
+              <a:defRPr sz="3675" b="1">
                 <a:solidFill>
                   <a:srgbClr val="152B3A"/>
                 </a:solidFill>
-              </a:defRPr>
-            </a:pPr>
-            <a:r>
-              <a:rPr sz="3750" b="1">
+                <a:latin typeface="Calibri"/>
+                <a:ea typeface="Calibri"/>
+                <a:cs typeface="Calibri"/>
+              </a:defRPr>
+            </a:pPr>
+            <a:r>
+              <a:rPr sz="3675" b="1">
                 <a:solidFill>
                   <a:srgbClr val="152B3A"/>
                 </a:solidFill>
+                <a:latin typeface="Calibri"/>
+                <a:ea typeface="Calibri"/>
+                <a:cs typeface="Calibri"/>
               </a:rPr>
               <a:t>Exit: show what you understand</a:t>
             </a:r>
@@ -4280,14 +5050,14 @@
         </p:nvSpPr>
         <p:spPr>
           <a:xfrm xmlns:a="http://schemas.openxmlformats.org/drawingml/2006/main">
-            <a:off x="609600" y="6219825"/>
+            <a:off x="609600" y="6191250"/>
             <a:ext cx="10972800" cy="9525"/>
           </a:xfrm>
           <a:prstGeom xmlns:a="http://schemas.openxmlformats.org/drawingml/2006/main" prst="rect">
             <a:avLst/>
           </a:prstGeom>
           <a:solidFill xmlns:a="http://schemas.openxmlformats.org/drawingml/2006/main">
-            <a:srgbClr val="DCE7DD"/>
+            <a:srgbClr val="CEDBD3"/>
           </a:solidFill>
           <a:ln xmlns:a="http://schemas.openxmlformats.org/drawingml/2006/main" w="0">
             <a:noFill/>
@@ -4311,34 +5081,43 @@
         </p:nvSpPr>
         <p:spPr>
           <a:xfrm xmlns:a="http://schemas.openxmlformats.org/drawingml/2006/main">
-            <a:off x="609600" y="6381750"/>
-            <a:ext cx="9906000" cy="228600"/>
-          </a:xfrm>
-          <a:prstGeom xmlns:a="http://schemas.openxmlformats.org/drawingml/2006/main" prst="rect">
-            <a:avLst/>
-          </a:prstGeom>
-          <a:noFill xmlns:a="http://schemas.openxmlformats.org/drawingml/2006/main"/>
-          <a:ln xmlns:a="http://schemas.openxmlformats.org/drawingml/2006/main" w="0">
-            <a:noFill/>
-            <a:prstDash val="solid"/>
-          </a:ln>
-        </p:spPr>
-        <p:txBody>
-          <a:bodyPr xmlns:a="http://schemas.openxmlformats.org/drawingml/2006/main" lIns="0" tIns="0" rIns="0" bIns="0" anchor="ctr"/>
-          <a:lstStyle xmlns:a="http://schemas.openxmlformats.org/drawingml/2006/main"/>
-          <a:p xmlns:a="http://schemas.openxmlformats.org/drawingml/2006/main">
-            <a:pPr>
-              <a:defRPr sz="1275" b="0">
+            <a:off x="609600" y="6419850"/>
+            <a:ext cx="9525000" cy="219075"/>
+          </a:xfrm>
+          <a:prstGeom xmlns:a="http://schemas.openxmlformats.org/drawingml/2006/main" prst="rect">
+            <a:avLst/>
+          </a:prstGeom>
+          <a:noFill xmlns:a="http://schemas.openxmlformats.org/drawingml/2006/main"/>
+          <a:ln xmlns:a="http://schemas.openxmlformats.org/drawingml/2006/main" w="0">
+            <a:noFill/>
+            <a:prstDash val="solid"/>
+          </a:ln>
+        </p:spPr>
+        <p:txBody>
+          <a:bodyPr xmlns:a="http://schemas.openxmlformats.org/drawingml/2006/main" lIns="0" tIns="0" rIns="0" bIns="0" anchor="ctr">
+            <a:noAutofit/>
+          </a:bodyPr>
+          <a:lstStyle xmlns:a="http://schemas.openxmlformats.org/drawingml/2006/main"/>
+          <a:p xmlns:a="http://schemas.openxmlformats.org/drawingml/2006/main">
+            <a:pPr algn="l">
+              <a:buNone/>
+              <a:defRPr sz="1200" b="0">
                 <a:solidFill>
                   <a:srgbClr val="50616B"/>
                 </a:solidFill>
-              </a:defRPr>
-            </a:pPr>
-            <a:r>
-              <a:rPr sz="1275" b="0">
+                <a:latin typeface="Calibri"/>
+                <a:ea typeface="Calibri"/>
+                <a:cs typeface="Calibri"/>
+              </a:defRPr>
+            </a:pPr>
+            <a:r>
+              <a:rPr sz="1200" b="0">
                 <a:solidFill>
                   <a:srgbClr val="50616B"/>
                 </a:solidFill>
+                <a:latin typeface="Calibri"/>
+                <a:ea typeface="Calibri"/>
+                <a:cs typeface="Calibri"/>
               </a:rPr>
               <a:t>AUTUMN 1  ·  WEEK 6  ·  LESSON B</a:t>
             </a:r>
@@ -4361,27 +5140,33 @@
         </p:nvSpPr>
         <p:spPr>
           <a:xfrm xmlns:a="http://schemas.openxmlformats.org/drawingml/2006/main">
-            <a:off x="11106150" y="6362700"/>
-            <a:ext cx="476250" cy="238125"/>
-          </a:xfrm>
-          <a:prstGeom xmlns:a="http://schemas.openxmlformats.org/drawingml/2006/main" prst="rect">
-            <a:avLst/>
-          </a:prstGeom>
-          <a:noFill xmlns:a="http://schemas.openxmlformats.org/drawingml/2006/main"/>
-          <a:ln xmlns:a="http://schemas.openxmlformats.org/drawingml/2006/main" w="0">
-            <a:noFill/>
-            <a:prstDash val="solid"/>
-          </a:ln>
-        </p:spPr>
-        <p:txBody>
-          <a:bodyPr xmlns:a="http://schemas.openxmlformats.org/drawingml/2006/main" lIns="0" tIns="0" rIns="0" bIns="0" anchor="ctr"/>
-          <a:lstStyle xmlns:a="http://schemas.openxmlformats.org/drawingml/2006/main"/>
-          <a:p xmlns:a="http://schemas.openxmlformats.org/drawingml/2006/main">
-            <a:pPr>
+            <a:off x="11106150" y="6400800"/>
+            <a:ext cx="476250" cy="247650"/>
+          </a:xfrm>
+          <a:prstGeom xmlns:a="http://schemas.openxmlformats.org/drawingml/2006/main" prst="rect">
+            <a:avLst/>
+          </a:prstGeom>
+          <a:noFill xmlns:a="http://schemas.openxmlformats.org/drawingml/2006/main"/>
+          <a:ln xmlns:a="http://schemas.openxmlformats.org/drawingml/2006/main" w="0">
+            <a:noFill/>
+            <a:prstDash val="solid"/>
+          </a:ln>
+        </p:spPr>
+        <p:txBody>
+          <a:bodyPr xmlns:a="http://schemas.openxmlformats.org/drawingml/2006/main" lIns="0" tIns="0" rIns="0" bIns="0" anchor="ctr">
+            <a:noAutofit/>
+          </a:bodyPr>
+          <a:lstStyle xmlns:a="http://schemas.openxmlformats.org/drawingml/2006/main"/>
+          <a:p xmlns:a="http://schemas.openxmlformats.org/drawingml/2006/main">
+            <a:pPr algn="l">
+              <a:buNone/>
               <a:defRPr sz="1350" b="1">
                 <a:solidFill>
                   <a:srgbClr val="28685E"/>
                 </a:solidFill>
+                <a:latin typeface="Calibri"/>
+                <a:ea typeface="Calibri"/>
+                <a:cs typeface="Calibri"/>
               </a:defRPr>
             </a:pPr>
             <a:r>
@@ -4389,6 +5174,9 @@
                 <a:solidFill>
                   <a:srgbClr val="28685E"/>
                 </a:solidFill>
+                <a:latin typeface="Calibri"/>
+                <a:ea typeface="Calibri"/>
+                <a:cs typeface="Calibri"/>
               </a:rPr>
               <a:t>13</a:t>
             </a:r>
@@ -4411,34 +5199,43 @@
         </p:nvSpPr>
         <p:spPr>
           <a:xfrm xmlns:a="http://schemas.openxmlformats.org/drawingml/2006/main">
-            <a:off x="609600" y="2619375"/>
-            <a:ext cx="10972800" cy="781050"/>
-          </a:xfrm>
-          <a:prstGeom xmlns:a="http://schemas.openxmlformats.org/drawingml/2006/main" prst="rect">
-            <a:avLst/>
-          </a:prstGeom>
-          <a:noFill xmlns:a="http://schemas.openxmlformats.org/drawingml/2006/main"/>
-          <a:ln xmlns:a="http://schemas.openxmlformats.org/drawingml/2006/main" w="0">
-            <a:noFill/>
-            <a:prstDash val="solid"/>
-          </a:ln>
-        </p:spPr>
-        <p:txBody>
-          <a:bodyPr xmlns:a="http://schemas.openxmlformats.org/drawingml/2006/main" lIns="0" tIns="0" rIns="0" bIns="0" anchor="ctr"/>
-          <a:lstStyle xmlns:a="http://schemas.openxmlformats.org/drawingml/2006/main"/>
-          <a:p xmlns:a="http://schemas.openxmlformats.org/drawingml/2006/main">
-            <a:pPr>
-              <a:defRPr sz="2550" b="0">
+            <a:off x="1000125" y="2333625"/>
+            <a:ext cx="10382250" cy="1076325"/>
+          </a:xfrm>
+          <a:prstGeom xmlns:a="http://schemas.openxmlformats.org/drawingml/2006/main" prst="rect">
+            <a:avLst/>
+          </a:prstGeom>
+          <a:noFill xmlns:a="http://schemas.openxmlformats.org/drawingml/2006/main"/>
+          <a:ln xmlns:a="http://schemas.openxmlformats.org/drawingml/2006/main" w="0">
+            <a:noFill/>
+            <a:prstDash val="solid"/>
+          </a:ln>
+        </p:spPr>
+        <p:txBody>
+          <a:bodyPr xmlns:a="http://schemas.openxmlformats.org/drawingml/2006/main" lIns="0" tIns="0" rIns="0" bIns="0" anchor="ctr">
+            <a:noAutofit/>
+          </a:bodyPr>
+          <a:lstStyle xmlns:a="http://schemas.openxmlformats.org/drawingml/2006/main"/>
+          <a:p xmlns:a="http://schemas.openxmlformats.org/drawingml/2006/main">
+            <a:pPr algn="l">
+              <a:buNone/>
+              <a:defRPr sz="2625" b="0">
                 <a:solidFill>
                   <a:srgbClr val="152B3A"/>
                 </a:solidFill>
-              </a:defRPr>
-            </a:pPr>
-            <a:r>
-              <a:rPr sz="2550" b="0">
+                <a:latin typeface="Calibri"/>
+                <a:ea typeface="Calibri"/>
+                <a:cs typeface="Calibri"/>
+              </a:defRPr>
+            </a:pPr>
+            <a:r>
+              <a:rPr sz="2625" b="0">
                 <a:solidFill>
                   <a:srgbClr val="152B3A"/>
                 </a:solidFill>
+                <a:latin typeface="Calibri"/>
+                <a:ea typeface="Calibri"/>
+                <a:cs typeface="Calibri"/>
               </a:rPr>
               <a:t>Supported: which planet is third from the Sun?</a:t>
             </a:r>
@@ -4461,34 +5258,43 @@
         </p:nvSpPr>
         <p:spPr>
           <a:xfrm xmlns:a="http://schemas.openxmlformats.org/drawingml/2006/main">
-            <a:off x="609600" y="3476625"/>
-            <a:ext cx="10972800" cy="781050"/>
-          </a:xfrm>
-          <a:prstGeom xmlns:a="http://schemas.openxmlformats.org/drawingml/2006/main" prst="rect">
-            <a:avLst/>
-          </a:prstGeom>
-          <a:noFill xmlns:a="http://schemas.openxmlformats.org/drawingml/2006/main"/>
-          <a:ln xmlns:a="http://schemas.openxmlformats.org/drawingml/2006/main" w="0">
-            <a:noFill/>
-            <a:prstDash val="solid"/>
-          </a:ln>
-        </p:spPr>
-        <p:txBody>
-          <a:bodyPr xmlns:a="http://schemas.openxmlformats.org/drawingml/2006/main" lIns="0" tIns="0" rIns="0" bIns="0" anchor="ctr"/>
-          <a:lstStyle xmlns:a="http://schemas.openxmlformats.org/drawingml/2006/main"/>
-          <a:p xmlns:a="http://schemas.openxmlformats.org/drawingml/2006/main">
-            <a:pPr>
-              <a:defRPr sz="2550" b="0">
+            <a:off x="1000125" y="3467100"/>
+            <a:ext cx="10382250" cy="1076325"/>
+          </a:xfrm>
+          <a:prstGeom xmlns:a="http://schemas.openxmlformats.org/drawingml/2006/main" prst="rect">
+            <a:avLst/>
+          </a:prstGeom>
+          <a:noFill xmlns:a="http://schemas.openxmlformats.org/drawingml/2006/main"/>
+          <a:ln xmlns:a="http://schemas.openxmlformats.org/drawingml/2006/main" w="0">
+            <a:noFill/>
+            <a:prstDash val="solid"/>
+          </a:ln>
+        </p:spPr>
+        <p:txBody>
+          <a:bodyPr xmlns:a="http://schemas.openxmlformats.org/drawingml/2006/main" lIns="0" tIns="0" rIns="0" bIns="0" anchor="ctr">
+            <a:noAutofit/>
+          </a:bodyPr>
+          <a:lstStyle xmlns:a="http://schemas.openxmlformats.org/drawingml/2006/main"/>
+          <a:p xmlns:a="http://schemas.openxmlformats.org/drawingml/2006/main">
+            <a:pPr algn="l">
+              <a:buNone/>
+              <a:defRPr sz="2625" b="0">
                 <a:solidFill>
                   <a:srgbClr val="152B3A"/>
                 </a:solidFill>
-              </a:defRPr>
-            </a:pPr>
-            <a:r>
-              <a:rPr sz="2550" b="0">
+                <a:latin typeface="Calibri"/>
+                <a:ea typeface="Calibri"/>
+                <a:cs typeface="Calibri"/>
+              </a:defRPr>
+            </a:pPr>
+            <a:r>
+              <a:rPr sz="2625" b="0">
                 <a:solidFill>
                   <a:srgbClr val="152B3A"/>
                 </a:solidFill>
+                <a:latin typeface="Calibri"/>
+                <a:ea typeface="Calibri"/>
+                <a:cs typeface="Calibri"/>
               </a:rPr>
               <a:t>Standard: what force keeps a planet in orbit?</a:t>
             </a:r>
@@ -4511,36 +5317,276 @@
         </p:nvSpPr>
         <p:spPr>
           <a:xfrm xmlns:a="http://schemas.openxmlformats.org/drawingml/2006/main">
-            <a:off x="609600" y="4333875"/>
-            <a:ext cx="10972800" cy="781050"/>
-          </a:xfrm>
-          <a:prstGeom xmlns:a="http://schemas.openxmlformats.org/drawingml/2006/main" prst="rect">
-            <a:avLst/>
-          </a:prstGeom>
-          <a:noFill xmlns:a="http://schemas.openxmlformats.org/drawingml/2006/main"/>
-          <a:ln xmlns:a="http://schemas.openxmlformats.org/drawingml/2006/main" w="0">
-            <a:noFill/>
-            <a:prstDash val="solid"/>
-          </a:ln>
-        </p:spPr>
-        <p:txBody>
-          <a:bodyPr xmlns:a="http://schemas.openxmlformats.org/drawingml/2006/main" lIns="0" tIns="0" rIns="0" bIns="0" anchor="ctr"/>
-          <a:lstStyle xmlns:a="http://schemas.openxmlformats.org/drawingml/2006/main"/>
-          <a:p xmlns:a="http://schemas.openxmlformats.org/drawingml/2006/main">
-            <a:pPr>
-              <a:defRPr sz="2550" b="0">
+            <a:off x="1000125" y="4600575"/>
+            <a:ext cx="10382250" cy="1076325"/>
+          </a:xfrm>
+          <a:prstGeom xmlns:a="http://schemas.openxmlformats.org/drawingml/2006/main" prst="rect">
+            <a:avLst/>
+          </a:prstGeom>
+          <a:noFill xmlns:a="http://schemas.openxmlformats.org/drawingml/2006/main"/>
+          <a:ln xmlns:a="http://schemas.openxmlformats.org/drawingml/2006/main" w="0">
+            <a:noFill/>
+            <a:prstDash val="solid"/>
+          </a:ln>
+        </p:spPr>
+        <p:txBody>
+          <a:bodyPr xmlns:a="http://schemas.openxmlformats.org/drawingml/2006/main" lIns="0" tIns="0" rIns="0" bIns="0" anchor="ctr">
+            <a:noAutofit/>
+          </a:bodyPr>
+          <a:lstStyle xmlns:a="http://schemas.openxmlformats.org/drawingml/2006/main"/>
+          <a:p xmlns:a="http://schemas.openxmlformats.org/drawingml/2006/main">
+            <a:pPr algn="l">
+              <a:buNone/>
+              <a:defRPr sz="2625" b="0">
                 <a:solidFill>
                   <a:srgbClr val="152B3A"/>
                 </a:solidFill>
-              </a:defRPr>
-            </a:pPr>
-            <a:r>
-              <a:rPr sz="2550" b="0">
+                <a:latin typeface="Calibri"/>
+                <a:ea typeface="Calibri"/>
+                <a:cs typeface="Calibri"/>
+              </a:defRPr>
+            </a:pPr>
+            <a:r>
+              <a:rPr sz="2625" b="0">
                 <a:solidFill>
                   <a:srgbClr val="152B3A"/>
                 </a:solidFill>
+                <a:latin typeface="Calibri"/>
+                <a:ea typeface="Calibri"/>
+                <a:cs typeface="Calibri"/>
               </a:rPr>
               <a:t>Stretch: why does Earth not simply fall into the Sun?</a:t>
+            </a:r>
+          </a:p>
+        </p:txBody>
+      </p:sp>
+      <p:sp>
+        <p:nvSpPr>
+          <p:cNvPr id="11" name="cue-0">
+            <a:extLst xmlns:a="http://schemas.openxmlformats.org/drawingml/2006/main">
+              <a:ext uri="{FF2B5EF4-FFF2-40B4-BE49-F238E27FC236}">
+                <a16:creationId xmlns:a16="http://schemas.microsoft.com/office/drawing/2014/main" id="{FEE4270E-FF63-4849-96E4-83794D78ABB8}"/>
+              </a:ext>
+            </a:extLst>
+          </p:cNvPr>
+          <p:cNvSpPr>
+            <a:spLocks xmlns:a="http://schemas.openxmlformats.org/drawingml/2006/main" noGrp="1"/>
+          </p:cNvSpPr>
+          <p:nvPr/>
+        </p:nvSpPr>
+        <p:spPr>
+          <a:xfrm xmlns:a="http://schemas.openxmlformats.org/drawingml/2006/main">
+            <a:off x="609600" y="2362200"/>
+            <a:ext cx="323850" cy="323850"/>
+          </a:xfrm>
+          <a:prstGeom xmlns:a="http://schemas.openxmlformats.org/drawingml/2006/main" prst="rect">
+            <a:avLst/>
+          </a:prstGeom>
+          <a:noFill xmlns:a="http://schemas.openxmlformats.org/drawingml/2006/main"/>
+          <a:ln xmlns:a="http://schemas.openxmlformats.org/drawingml/2006/main" w="0">
+            <a:noFill/>
+          </a:ln>
+        </p:spPr>
+        <p:txBody>
+          <a:bodyPr xmlns:a="http://schemas.openxmlformats.org/drawingml/2006/main" lIns="0" tIns="0" rIns="0" bIns="0" anchor="ctr">
+            <a:noAutofit/>
+          </a:bodyPr>
+          <a:lstStyle xmlns:a="http://schemas.openxmlformats.org/drawingml/2006/main"/>
+          <a:p xmlns:a="http://schemas.openxmlformats.org/drawingml/2006/main">
+            <a:pPr algn="l">
+              <a:defRPr sz="1350" b="1">
+                <a:solidFill>
+                  <a:srgbClr val="28685E"/>
+                </a:solidFill>
+                <a:latin typeface="Calibri"/>
+                <a:ea typeface="Calibri"/>
+                <a:cs typeface="Calibri"/>
+              </a:defRPr>
+            </a:pPr>
+            <a:r>
+              <a:rPr sz="1350" b="1">
+                <a:solidFill>
+                  <a:srgbClr val="28685E"/>
+                </a:solidFill>
+                <a:latin typeface="Calibri"/>
+                <a:ea typeface="Calibri"/>
+                <a:cs typeface="Calibri"/>
+              </a:rPr>
+              <a:t>01</a:t>
+            </a:r>
+          </a:p>
+        </p:txBody>
+      </p:sp>
+      <p:sp>
+        <p:nvSpPr>
+          <p:cNvPr id="12" name="row-rule-0">
+            <a:extLst xmlns:a="http://schemas.openxmlformats.org/drawingml/2006/main">
+              <a:ext uri="{FF2B5EF4-FFF2-40B4-BE49-F238E27FC236}">
+                <a16:creationId xmlns:a16="http://schemas.microsoft.com/office/drawing/2014/main" id="{74CCE0CF-9757-482F-A2C6-2045B0AEB070}"/>
+              </a:ext>
+            </a:extLst>
+          </p:cNvPr>
+          <p:cNvSpPr>
+            <a:spLocks xmlns:a="http://schemas.openxmlformats.org/drawingml/2006/main" noGrp="1"/>
+          </p:cNvSpPr>
+          <p:nvPr/>
+        </p:nvSpPr>
+        <p:spPr>
+          <a:xfrm xmlns:a="http://schemas.openxmlformats.org/drawingml/2006/main">
+            <a:off x="1000125" y="3419475"/>
+            <a:ext cx="10334625" cy="0"/>
+          </a:xfrm>
+          <a:prstGeom xmlns:a="http://schemas.openxmlformats.org/drawingml/2006/main" prst="line">
+            <a:avLst/>
+          </a:prstGeom>
+          <a:noFill xmlns:a="http://schemas.openxmlformats.org/drawingml/2006/main"/>
+          <a:ln xmlns:a="http://schemas.openxmlformats.org/drawingml/2006/main" w="9525">
+            <a:solidFill>
+              <a:srgbClr val="CEDBD3"/>
+            </a:solidFill>
+          </a:ln>
+        </p:spPr>
+      </p:sp>
+      <p:sp>
+        <p:nvSpPr>
+          <p:cNvPr id="13" name="cue-1">
+            <a:extLst xmlns:a="http://schemas.openxmlformats.org/drawingml/2006/main">
+              <a:ext uri="{FF2B5EF4-FFF2-40B4-BE49-F238E27FC236}">
+                <a16:creationId xmlns:a16="http://schemas.microsoft.com/office/drawing/2014/main" id="{76F23EEE-97B0-44F3-8325-1606401F520D}"/>
+              </a:ext>
+            </a:extLst>
+          </p:cNvPr>
+          <p:cNvSpPr>
+            <a:spLocks xmlns:a="http://schemas.openxmlformats.org/drawingml/2006/main" noGrp="1"/>
+          </p:cNvSpPr>
+          <p:nvPr/>
+        </p:nvSpPr>
+        <p:spPr>
+          <a:xfrm xmlns:a="http://schemas.openxmlformats.org/drawingml/2006/main">
+            <a:off x="609600" y="3495675"/>
+            <a:ext cx="323850" cy="323850"/>
+          </a:xfrm>
+          <a:prstGeom xmlns:a="http://schemas.openxmlformats.org/drawingml/2006/main" prst="rect">
+            <a:avLst/>
+          </a:prstGeom>
+          <a:noFill xmlns:a="http://schemas.openxmlformats.org/drawingml/2006/main"/>
+          <a:ln xmlns:a="http://schemas.openxmlformats.org/drawingml/2006/main" w="0">
+            <a:noFill/>
+          </a:ln>
+        </p:spPr>
+        <p:txBody>
+          <a:bodyPr xmlns:a="http://schemas.openxmlformats.org/drawingml/2006/main" lIns="0" tIns="0" rIns="0" bIns="0" anchor="ctr">
+            <a:noAutofit/>
+          </a:bodyPr>
+          <a:lstStyle xmlns:a="http://schemas.openxmlformats.org/drawingml/2006/main"/>
+          <a:p xmlns:a="http://schemas.openxmlformats.org/drawingml/2006/main">
+            <a:pPr algn="l">
+              <a:defRPr sz="1350" b="1">
+                <a:solidFill>
+                  <a:srgbClr val="28685E"/>
+                </a:solidFill>
+                <a:latin typeface="Calibri"/>
+                <a:ea typeface="Calibri"/>
+                <a:cs typeface="Calibri"/>
+              </a:defRPr>
+            </a:pPr>
+            <a:r>
+              <a:rPr sz="1350" b="1">
+                <a:solidFill>
+                  <a:srgbClr val="28685E"/>
+                </a:solidFill>
+                <a:latin typeface="Calibri"/>
+                <a:ea typeface="Calibri"/>
+                <a:cs typeface="Calibri"/>
+              </a:rPr>
+              <a:t>02</a:t>
+            </a:r>
+          </a:p>
+        </p:txBody>
+      </p:sp>
+      <p:sp>
+        <p:nvSpPr>
+          <p:cNvPr id="14" name="row-rule-1">
+            <a:extLst xmlns:a="http://schemas.openxmlformats.org/drawingml/2006/main">
+              <a:ext uri="{FF2B5EF4-FFF2-40B4-BE49-F238E27FC236}">
+                <a16:creationId xmlns:a16="http://schemas.microsoft.com/office/drawing/2014/main" id="{D2BF977E-5A3A-490C-9B27-644B06378ECE}"/>
+              </a:ext>
+            </a:extLst>
+          </p:cNvPr>
+          <p:cNvSpPr>
+            <a:spLocks xmlns:a="http://schemas.openxmlformats.org/drawingml/2006/main" noGrp="1"/>
+          </p:cNvSpPr>
+          <p:nvPr/>
+        </p:nvSpPr>
+        <p:spPr>
+          <a:xfrm xmlns:a="http://schemas.openxmlformats.org/drawingml/2006/main">
+            <a:off x="1000125" y="4552950"/>
+            <a:ext cx="10334625" cy="0"/>
+          </a:xfrm>
+          <a:prstGeom xmlns:a="http://schemas.openxmlformats.org/drawingml/2006/main" prst="line">
+            <a:avLst/>
+          </a:prstGeom>
+          <a:noFill xmlns:a="http://schemas.openxmlformats.org/drawingml/2006/main"/>
+          <a:ln xmlns:a="http://schemas.openxmlformats.org/drawingml/2006/main" w="9525">
+            <a:solidFill>
+              <a:srgbClr val="CEDBD3"/>
+            </a:solidFill>
+          </a:ln>
+        </p:spPr>
+      </p:sp>
+      <p:sp>
+        <p:nvSpPr>
+          <p:cNvPr id="15" name="cue-2">
+            <a:extLst xmlns:a="http://schemas.openxmlformats.org/drawingml/2006/main">
+              <a:ext uri="{FF2B5EF4-FFF2-40B4-BE49-F238E27FC236}">
+                <a16:creationId xmlns:a16="http://schemas.microsoft.com/office/drawing/2014/main" id="{F83039F3-8BE3-498C-82F5-A7153D76A0FB}"/>
+              </a:ext>
+            </a:extLst>
+          </p:cNvPr>
+          <p:cNvSpPr>
+            <a:spLocks xmlns:a="http://schemas.openxmlformats.org/drawingml/2006/main" noGrp="1"/>
+          </p:cNvSpPr>
+          <p:nvPr/>
+        </p:nvSpPr>
+        <p:spPr>
+          <a:xfrm xmlns:a="http://schemas.openxmlformats.org/drawingml/2006/main">
+            <a:off x="609600" y="4629150"/>
+            <a:ext cx="323850" cy="323850"/>
+          </a:xfrm>
+          <a:prstGeom xmlns:a="http://schemas.openxmlformats.org/drawingml/2006/main" prst="rect">
+            <a:avLst/>
+          </a:prstGeom>
+          <a:noFill xmlns:a="http://schemas.openxmlformats.org/drawingml/2006/main"/>
+          <a:ln xmlns:a="http://schemas.openxmlformats.org/drawingml/2006/main" w="0">
+            <a:noFill/>
+          </a:ln>
+        </p:spPr>
+        <p:txBody>
+          <a:bodyPr xmlns:a="http://schemas.openxmlformats.org/drawingml/2006/main" lIns="0" tIns="0" rIns="0" bIns="0" anchor="ctr">
+            <a:noAutofit/>
+          </a:bodyPr>
+          <a:lstStyle xmlns:a="http://schemas.openxmlformats.org/drawingml/2006/main"/>
+          <a:p xmlns:a="http://schemas.openxmlformats.org/drawingml/2006/main">
+            <a:pPr algn="l">
+              <a:defRPr sz="1350" b="1">
+                <a:solidFill>
+                  <a:srgbClr val="28685E"/>
+                </a:solidFill>
+                <a:latin typeface="Calibri"/>
+                <a:ea typeface="Calibri"/>
+                <a:cs typeface="Calibri"/>
+              </a:defRPr>
+            </a:pPr>
+            <a:r>
+              <a:rPr sz="1350" b="1">
+                <a:solidFill>
+                  <a:srgbClr val="28685E"/>
+                </a:solidFill>
+                <a:latin typeface="Calibri"/>
+                <a:ea typeface="Calibri"/>
+                <a:cs typeface="Calibri"/>
+              </a:rPr>
+              <a:t>03</a:t>
             </a:r>
           </a:p>
         </p:txBody>
@@ -4561,7 +5607,7 @@
     <p:bg>
       <p:bgPr>
         <a:solidFill xmlns:a="http://schemas.openxmlformats.org/drawingml/2006/main">
-          <a:srgbClr val="F5F1E8"/>
+          <a:srgbClr val="FAF9F5"/>
         </a:solidFill>
       </p:bgPr>
     </p:bg>
@@ -4590,8 +5636,8 @@
         </p:nvSpPr>
         <p:spPr>
           <a:xfrm xmlns:a="http://schemas.openxmlformats.org/drawingml/2006/main">
-            <a:off x="609600" y="552450"/>
-            <a:ext cx="781050" cy="57150"/>
+            <a:off x="609600" y="733425"/>
+            <a:ext cx="781050" cy="38100"/>
           </a:xfrm>
           <a:prstGeom xmlns:a="http://schemas.openxmlformats.org/drawingml/2006/main" prst="rect">
             <a:avLst/>
@@ -4621,34 +5667,43 @@
         </p:nvSpPr>
         <p:spPr>
           <a:xfrm xmlns:a="http://schemas.openxmlformats.org/drawingml/2006/main">
-            <a:off x="609600" y="762000"/>
-            <a:ext cx="8572500" cy="285750"/>
-          </a:xfrm>
-          <a:prstGeom xmlns:a="http://schemas.openxmlformats.org/drawingml/2006/main" prst="rect">
-            <a:avLst/>
-          </a:prstGeom>
-          <a:noFill xmlns:a="http://schemas.openxmlformats.org/drawingml/2006/main"/>
-          <a:ln xmlns:a="http://schemas.openxmlformats.org/drawingml/2006/main" w="0">
-            <a:noFill/>
-            <a:prstDash val="solid"/>
-          </a:ln>
-        </p:spPr>
-        <p:txBody>
-          <a:bodyPr xmlns:a="http://schemas.openxmlformats.org/drawingml/2006/main" lIns="0" tIns="0" rIns="0" bIns="0" anchor="ctr"/>
-          <a:lstStyle xmlns:a="http://schemas.openxmlformats.org/drawingml/2006/main"/>
-          <a:p xmlns:a="http://schemas.openxmlformats.org/drawingml/2006/main">
-            <a:pPr>
-              <a:defRPr sz="1500" b="1">
+            <a:off x="609600" y="342900"/>
+            <a:ext cx="9334500" cy="304800"/>
+          </a:xfrm>
+          <a:prstGeom xmlns:a="http://schemas.openxmlformats.org/drawingml/2006/main" prst="rect">
+            <a:avLst/>
+          </a:prstGeom>
+          <a:noFill xmlns:a="http://schemas.openxmlformats.org/drawingml/2006/main"/>
+          <a:ln xmlns:a="http://schemas.openxmlformats.org/drawingml/2006/main" w="0">
+            <a:noFill/>
+            <a:prstDash val="solid"/>
+          </a:ln>
+        </p:spPr>
+        <p:txBody>
+          <a:bodyPr xmlns:a="http://schemas.openxmlformats.org/drawingml/2006/main" lIns="0" tIns="0" rIns="0" bIns="0" anchor="ctr">
+            <a:noAutofit/>
+          </a:bodyPr>
+          <a:lstStyle xmlns:a="http://schemas.openxmlformats.org/drawingml/2006/main"/>
+          <a:p xmlns:a="http://schemas.openxmlformats.org/drawingml/2006/main">
+            <a:pPr algn="l">
+              <a:buNone/>
+              <a:defRPr sz="1350" b="1">
                 <a:solidFill>
                   <a:srgbClr val="28685E"/>
                 </a:solidFill>
-              </a:defRPr>
-            </a:pPr>
-            <a:r>
-              <a:rPr sz="1500" b="1">
+                <a:latin typeface="Calibri"/>
+                <a:ea typeface="Calibri"/>
+                <a:cs typeface="Calibri"/>
+              </a:defRPr>
+            </a:pPr>
+            <a:r>
+              <a:rPr sz="1350" b="1">
                 <a:solidFill>
                   <a:srgbClr val="28685E"/>
                 </a:solidFill>
+                <a:latin typeface="Calibri"/>
+                <a:ea typeface="Calibri"/>
+                <a:cs typeface="Calibri"/>
               </a:rPr>
               <a:t>MADE BY MATT  /  GROW SCIENCE</a:t>
             </a:r>
@@ -4671,34 +5726,43 @@
         </p:nvSpPr>
         <p:spPr>
           <a:xfrm xmlns:a="http://schemas.openxmlformats.org/drawingml/2006/main">
-            <a:off x="609600" y="1352550"/>
-            <a:ext cx="10972800" cy="952500"/>
-          </a:xfrm>
-          <a:prstGeom xmlns:a="http://schemas.openxmlformats.org/drawingml/2006/main" prst="rect">
-            <a:avLst/>
-          </a:prstGeom>
-          <a:noFill xmlns:a="http://schemas.openxmlformats.org/drawingml/2006/main"/>
-          <a:ln xmlns:a="http://schemas.openxmlformats.org/drawingml/2006/main" w="0">
-            <a:noFill/>
-            <a:prstDash val="solid"/>
-          </a:ln>
-        </p:spPr>
-        <p:txBody>
-          <a:bodyPr xmlns:a="http://schemas.openxmlformats.org/drawingml/2006/main" lIns="0" tIns="0" rIns="0" bIns="0" anchor="ctr"/>
-          <a:lstStyle xmlns:a="http://schemas.openxmlformats.org/drawingml/2006/main"/>
-          <a:p xmlns:a="http://schemas.openxmlformats.org/drawingml/2006/main">
-            <a:pPr>
-              <a:defRPr sz="3750" b="1">
+            <a:off x="609600" y="990600"/>
+            <a:ext cx="10972800" cy="1000125"/>
+          </a:xfrm>
+          <a:prstGeom xmlns:a="http://schemas.openxmlformats.org/drawingml/2006/main" prst="rect">
+            <a:avLst/>
+          </a:prstGeom>
+          <a:noFill xmlns:a="http://schemas.openxmlformats.org/drawingml/2006/main"/>
+          <a:ln xmlns:a="http://schemas.openxmlformats.org/drawingml/2006/main" w="0">
+            <a:noFill/>
+            <a:prstDash val="solid"/>
+          </a:ln>
+        </p:spPr>
+        <p:txBody>
+          <a:bodyPr xmlns:a="http://schemas.openxmlformats.org/drawingml/2006/main" lIns="0" tIns="0" rIns="0" bIns="0" anchor="ctr">
+            <a:noAutofit/>
+          </a:bodyPr>
+          <a:lstStyle xmlns:a="http://schemas.openxmlformats.org/drawingml/2006/main"/>
+          <a:p xmlns:a="http://schemas.openxmlformats.org/drawingml/2006/main">
+            <a:pPr algn="l">
+              <a:buNone/>
+              <a:defRPr sz="3675" b="1">
                 <a:solidFill>
                   <a:srgbClr val="152B3A"/>
                 </a:solidFill>
-              </a:defRPr>
-            </a:pPr>
-            <a:r>
-              <a:rPr sz="3750" b="1">
+                <a:latin typeface="Calibri"/>
+                <a:ea typeface="Calibri"/>
+                <a:cs typeface="Calibri"/>
+              </a:defRPr>
+            </a:pPr>
+            <a:r>
+              <a:rPr sz="3675" b="1">
                 <a:solidFill>
                   <a:srgbClr val="152B3A"/>
                 </a:solidFill>
+                <a:latin typeface="Calibri"/>
+                <a:ea typeface="Calibri"/>
+                <a:cs typeface="Calibri"/>
               </a:rPr>
               <a:t>Check the science before you leave</a:t>
             </a:r>
@@ -4721,14 +5785,14 @@
         </p:nvSpPr>
         <p:spPr>
           <a:xfrm xmlns:a="http://schemas.openxmlformats.org/drawingml/2006/main">
-            <a:off x="609600" y="6219825"/>
+            <a:off x="609600" y="6191250"/>
             <a:ext cx="10972800" cy="9525"/>
           </a:xfrm>
           <a:prstGeom xmlns:a="http://schemas.openxmlformats.org/drawingml/2006/main" prst="rect">
             <a:avLst/>
           </a:prstGeom>
           <a:solidFill xmlns:a="http://schemas.openxmlformats.org/drawingml/2006/main">
-            <a:srgbClr val="DCE7DD"/>
+            <a:srgbClr val="CEDBD3"/>
           </a:solidFill>
           <a:ln xmlns:a="http://schemas.openxmlformats.org/drawingml/2006/main" w="0">
             <a:noFill/>
@@ -4752,34 +5816,43 @@
         </p:nvSpPr>
         <p:spPr>
           <a:xfrm xmlns:a="http://schemas.openxmlformats.org/drawingml/2006/main">
-            <a:off x="609600" y="6381750"/>
-            <a:ext cx="9906000" cy="228600"/>
-          </a:xfrm>
-          <a:prstGeom xmlns:a="http://schemas.openxmlformats.org/drawingml/2006/main" prst="rect">
-            <a:avLst/>
-          </a:prstGeom>
-          <a:noFill xmlns:a="http://schemas.openxmlformats.org/drawingml/2006/main"/>
-          <a:ln xmlns:a="http://schemas.openxmlformats.org/drawingml/2006/main" w="0">
-            <a:noFill/>
-            <a:prstDash val="solid"/>
-          </a:ln>
-        </p:spPr>
-        <p:txBody>
-          <a:bodyPr xmlns:a="http://schemas.openxmlformats.org/drawingml/2006/main" lIns="0" tIns="0" rIns="0" bIns="0" anchor="ctr"/>
-          <a:lstStyle xmlns:a="http://schemas.openxmlformats.org/drawingml/2006/main"/>
-          <a:p xmlns:a="http://schemas.openxmlformats.org/drawingml/2006/main">
-            <a:pPr>
-              <a:defRPr sz="1275" b="0">
+            <a:off x="609600" y="6419850"/>
+            <a:ext cx="9525000" cy="219075"/>
+          </a:xfrm>
+          <a:prstGeom xmlns:a="http://schemas.openxmlformats.org/drawingml/2006/main" prst="rect">
+            <a:avLst/>
+          </a:prstGeom>
+          <a:noFill xmlns:a="http://schemas.openxmlformats.org/drawingml/2006/main"/>
+          <a:ln xmlns:a="http://schemas.openxmlformats.org/drawingml/2006/main" w="0">
+            <a:noFill/>
+            <a:prstDash val="solid"/>
+          </a:ln>
+        </p:spPr>
+        <p:txBody>
+          <a:bodyPr xmlns:a="http://schemas.openxmlformats.org/drawingml/2006/main" lIns="0" tIns="0" rIns="0" bIns="0" anchor="ctr">
+            <a:noAutofit/>
+          </a:bodyPr>
+          <a:lstStyle xmlns:a="http://schemas.openxmlformats.org/drawingml/2006/main"/>
+          <a:p xmlns:a="http://schemas.openxmlformats.org/drawingml/2006/main">
+            <a:pPr algn="l">
+              <a:buNone/>
+              <a:defRPr sz="1200" b="0">
                 <a:solidFill>
                   <a:srgbClr val="50616B"/>
                 </a:solidFill>
-              </a:defRPr>
-            </a:pPr>
-            <a:r>
-              <a:rPr sz="1275" b="0">
+                <a:latin typeface="Calibri"/>
+                <a:ea typeface="Calibri"/>
+                <a:cs typeface="Calibri"/>
+              </a:defRPr>
+            </a:pPr>
+            <a:r>
+              <a:rPr sz="1200" b="0">
                 <a:solidFill>
                   <a:srgbClr val="50616B"/>
                 </a:solidFill>
+                <a:latin typeface="Calibri"/>
+                <a:ea typeface="Calibri"/>
+                <a:cs typeface="Calibri"/>
               </a:rPr>
               <a:t>AUTUMN 1  ·  WEEK 6  ·  LESSON B</a:t>
             </a:r>
@@ -4802,27 +5875,33 @@
         </p:nvSpPr>
         <p:spPr>
           <a:xfrm xmlns:a="http://schemas.openxmlformats.org/drawingml/2006/main">
-            <a:off x="11106150" y="6362700"/>
-            <a:ext cx="476250" cy="238125"/>
-          </a:xfrm>
-          <a:prstGeom xmlns:a="http://schemas.openxmlformats.org/drawingml/2006/main" prst="rect">
-            <a:avLst/>
-          </a:prstGeom>
-          <a:noFill xmlns:a="http://schemas.openxmlformats.org/drawingml/2006/main"/>
-          <a:ln xmlns:a="http://schemas.openxmlformats.org/drawingml/2006/main" w="0">
-            <a:noFill/>
-            <a:prstDash val="solid"/>
-          </a:ln>
-        </p:spPr>
-        <p:txBody>
-          <a:bodyPr xmlns:a="http://schemas.openxmlformats.org/drawingml/2006/main" lIns="0" tIns="0" rIns="0" bIns="0" anchor="ctr"/>
-          <a:lstStyle xmlns:a="http://schemas.openxmlformats.org/drawingml/2006/main"/>
-          <a:p xmlns:a="http://schemas.openxmlformats.org/drawingml/2006/main">
-            <a:pPr>
+            <a:off x="11106150" y="6400800"/>
+            <a:ext cx="476250" cy="247650"/>
+          </a:xfrm>
+          <a:prstGeom xmlns:a="http://schemas.openxmlformats.org/drawingml/2006/main" prst="rect">
+            <a:avLst/>
+          </a:prstGeom>
+          <a:noFill xmlns:a="http://schemas.openxmlformats.org/drawingml/2006/main"/>
+          <a:ln xmlns:a="http://schemas.openxmlformats.org/drawingml/2006/main" w="0">
+            <a:noFill/>
+            <a:prstDash val="solid"/>
+          </a:ln>
+        </p:spPr>
+        <p:txBody>
+          <a:bodyPr xmlns:a="http://schemas.openxmlformats.org/drawingml/2006/main" lIns="0" tIns="0" rIns="0" bIns="0" anchor="ctr">
+            <a:noAutofit/>
+          </a:bodyPr>
+          <a:lstStyle xmlns:a="http://schemas.openxmlformats.org/drawingml/2006/main"/>
+          <a:p xmlns:a="http://schemas.openxmlformats.org/drawingml/2006/main">
+            <a:pPr algn="l">
+              <a:buNone/>
               <a:defRPr sz="1350" b="1">
                 <a:solidFill>
                   <a:srgbClr val="28685E"/>
                 </a:solidFill>
+                <a:latin typeface="Calibri"/>
+                <a:ea typeface="Calibri"/>
+                <a:cs typeface="Calibri"/>
               </a:defRPr>
             </a:pPr>
             <a:r>
@@ -4830,6 +5909,9 @@
                 <a:solidFill>
                   <a:srgbClr val="28685E"/>
                 </a:solidFill>
+                <a:latin typeface="Calibri"/>
+                <a:ea typeface="Calibri"/>
+                <a:cs typeface="Calibri"/>
               </a:rPr>
               <a:t>14</a:t>
             </a:r>
@@ -4852,34 +5934,43 @@
         </p:nvSpPr>
         <p:spPr>
           <a:xfrm xmlns:a="http://schemas.openxmlformats.org/drawingml/2006/main">
-            <a:off x="609600" y="2619375"/>
-            <a:ext cx="10972800" cy="781050"/>
-          </a:xfrm>
-          <a:prstGeom xmlns:a="http://schemas.openxmlformats.org/drawingml/2006/main" prst="rect">
-            <a:avLst/>
-          </a:prstGeom>
-          <a:noFill xmlns:a="http://schemas.openxmlformats.org/drawingml/2006/main"/>
-          <a:ln xmlns:a="http://schemas.openxmlformats.org/drawingml/2006/main" w="0">
-            <a:noFill/>
-            <a:prstDash val="solid"/>
-          </a:ln>
-        </p:spPr>
-        <p:txBody>
-          <a:bodyPr xmlns:a="http://schemas.openxmlformats.org/drawingml/2006/main" lIns="0" tIns="0" rIns="0" bIns="0" anchor="ctr"/>
-          <a:lstStyle xmlns:a="http://schemas.openxmlformats.org/drawingml/2006/main"/>
-          <a:p xmlns:a="http://schemas.openxmlformats.org/drawingml/2006/main">
-            <a:pPr>
-              <a:defRPr sz="2550" b="0">
+            <a:off x="609600" y="2295525"/>
+            <a:ext cx="5238750" cy="1101725"/>
+          </a:xfrm>
+          <a:prstGeom xmlns:a="http://schemas.openxmlformats.org/drawingml/2006/main" prst="rect">
+            <a:avLst/>
+          </a:prstGeom>
+          <a:noFill xmlns:a="http://schemas.openxmlformats.org/drawingml/2006/main"/>
+          <a:ln xmlns:a="http://schemas.openxmlformats.org/drawingml/2006/main" w="0">
+            <a:noFill/>
+            <a:prstDash val="solid"/>
+          </a:ln>
+        </p:spPr>
+        <p:txBody>
+          <a:bodyPr xmlns:a="http://schemas.openxmlformats.org/drawingml/2006/main" lIns="0" tIns="0" rIns="0" bIns="0" anchor="ctr">
+            <a:noAutofit/>
+          </a:bodyPr>
+          <a:lstStyle xmlns:a="http://schemas.openxmlformats.org/drawingml/2006/main"/>
+          <a:p xmlns:a="http://schemas.openxmlformats.org/drawingml/2006/main">
+            <a:pPr algn="l">
+              <a:buNone/>
+              <a:defRPr sz="2325" b="0">
                 <a:solidFill>
                   <a:srgbClr val="152B3A"/>
                 </a:solidFill>
-              </a:defRPr>
-            </a:pPr>
-            <a:r>
-              <a:rPr sz="2550" b="0">
+                <a:latin typeface="Calibri"/>
+                <a:ea typeface="Calibri"/>
+                <a:cs typeface="Calibri"/>
+              </a:defRPr>
+            </a:pPr>
+            <a:r>
+              <a:rPr sz="2325" b="0">
                 <a:solidFill>
                   <a:srgbClr val="152B3A"/>
                 </a:solidFill>
+                <a:latin typeface="Calibri"/>
+                <a:ea typeface="Calibri"/>
+                <a:cs typeface="Calibri"/>
               </a:rPr>
               <a:t>Earth is third from the Sun.</a:t>
             </a:r>
@@ -4902,36 +5993,69 @@
         </p:nvSpPr>
         <p:spPr>
           <a:xfrm xmlns:a="http://schemas.openxmlformats.org/drawingml/2006/main">
-            <a:off x="609600" y="3476625"/>
-            <a:ext cx="10972800" cy="781050"/>
-          </a:xfrm>
-          <a:prstGeom xmlns:a="http://schemas.openxmlformats.org/drawingml/2006/main" prst="rect">
-            <a:avLst/>
-          </a:prstGeom>
-          <a:noFill xmlns:a="http://schemas.openxmlformats.org/drawingml/2006/main"/>
-          <a:ln xmlns:a="http://schemas.openxmlformats.org/drawingml/2006/main" w="0">
-            <a:noFill/>
-            <a:prstDash val="solid"/>
-          </a:ln>
-        </p:spPr>
-        <p:txBody>
-          <a:bodyPr xmlns:a="http://schemas.openxmlformats.org/drawingml/2006/main" lIns="0" tIns="0" rIns="0" bIns="0" anchor="ctr"/>
-          <a:lstStyle xmlns:a="http://schemas.openxmlformats.org/drawingml/2006/main"/>
-          <a:p xmlns:a="http://schemas.openxmlformats.org/drawingml/2006/main">
-            <a:pPr>
-              <a:defRPr sz="2550" b="0">
+            <a:off x="609600" y="3454400"/>
+            <a:ext cx="5238750" cy="1101725"/>
+          </a:xfrm>
+          <a:prstGeom xmlns:a="http://schemas.openxmlformats.org/drawingml/2006/main" prst="rect">
+            <a:avLst/>
+          </a:prstGeom>
+          <a:noFill xmlns:a="http://schemas.openxmlformats.org/drawingml/2006/main"/>
+          <a:ln xmlns:a="http://schemas.openxmlformats.org/drawingml/2006/main" w="0">
+            <a:noFill/>
+            <a:prstDash val="solid"/>
+          </a:ln>
+        </p:spPr>
+        <p:txBody>
+          <a:bodyPr xmlns:a="http://schemas.openxmlformats.org/drawingml/2006/main" lIns="0" tIns="0" rIns="0" bIns="0" anchor="ctr">
+            <a:noAutofit/>
+          </a:bodyPr>
+          <a:lstStyle xmlns:a="http://schemas.openxmlformats.org/drawingml/2006/main"/>
+          <a:p xmlns:a="http://schemas.openxmlformats.org/drawingml/2006/main">
+            <a:pPr algn="l">
+              <a:buNone/>
+              <a:defRPr sz="2325" b="0">
                 <a:solidFill>
                   <a:srgbClr val="152B3A"/>
                 </a:solidFill>
-              </a:defRPr>
-            </a:pPr>
-            <a:r>
-              <a:rPr sz="2550" b="0">
+                <a:latin typeface="Calibri"/>
+                <a:ea typeface="Calibri"/>
+                <a:cs typeface="Calibri"/>
+              </a:defRPr>
+            </a:pPr>
+            <a:r>
+              <a:rPr sz="2325" b="0">
                 <a:solidFill>
                   <a:srgbClr val="152B3A"/>
                 </a:solidFill>
-              </a:rPr>
-              <a:t>The Sun's gravity keeps curving the planet's path.</a:t>
+                <a:latin typeface="Calibri"/>
+                <a:ea typeface="Calibri"/>
+                <a:cs typeface="Calibri"/>
+              </a:rPr>
+              <a:t>The Sun's gravity keeps</a:t>
+            </a:r>
+          </a:p>
+          <a:p xmlns:a="http://schemas.openxmlformats.org/drawingml/2006/main">
+            <a:pPr algn="l">
+              <a:buNone/>
+              <a:defRPr sz="2325" b="0">
+                <a:solidFill>
+                  <a:srgbClr val="152B3A"/>
+                </a:solidFill>
+                <a:latin typeface="Calibri"/>
+                <a:ea typeface="Calibri"/>
+                <a:cs typeface="Calibri"/>
+              </a:defRPr>
+            </a:pPr>
+            <a:r>
+              <a:rPr sz="2325" b="0">
+                <a:solidFill>
+                  <a:srgbClr val="152B3A"/>
+                </a:solidFill>
+                <a:latin typeface="Calibri"/>
+                <a:ea typeface="Calibri"/>
+                <a:cs typeface="Calibri"/>
+              </a:rPr>
+              <a:t>curving the planet's path.</a:t>
             </a:r>
           </a:p>
         </p:txBody>
@@ -4952,36 +6076,447 @@
         </p:nvSpPr>
         <p:spPr>
           <a:xfrm xmlns:a="http://schemas.openxmlformats.org/drawingml/2006/main">
-            <a:off x="609600" y="4333875"/>
-            <a:ext cx="10972800" cy="781050"/>
-          </a:xfrm>
-          <a:prstGeom xmlns:a="http://schemas.openxmlformats.org/drawingml/2006/main" prst="rect">
-            <a:avLst/>
-          </a:prstGeom>
-          <a:noFill xmlns:a="http://schemas.openxmlformats.org/drawingml/2006/main"/>
-          <a:ln xmlns:a="http://schemas.openxmlformats.org/drawingml/2006/main" w="0">
-            <a:noFill/>
-            <a:prstDash val="solid"/>
-          </a:ln>
-        </p:spPr>
-        <p:txBody>
-          <a:bodyPr xmlns:a="http://schemas.openxmlformats.org/drawingml/2006/main" lIns="0" tIns="0" rIns="0" bIns="0" anchor="ctr"/>
-          <a:lstStyle xmlns:a="http://schemas.openxmlformats.org/drawingml/2006/main"/>
-          <a:p xmlns:a="http://schemas.openxmlformats.org/drawingml/2006/main">
-            <a:pPr>
-              <a:defRPr sz="2550" b="0">
+            <a:off x="609600" y="4613275"/>
+            <a:ext cx="5238750" cy="1101725"/>
+          </a:xfrm>
+          <a:prstGeom xmlns:a="http://schemas.openxmlformats.org/drawingml/2006/main" prst="rect">
+            <a:avLst/>
+          </a:prstGeom>
+          <a:noFill xmlns:a="http://schemas.openxmlformats.org/drawingml/2006/main"/>
+          <a:ln xmlns:a="http://schemas.openxmlformats.org/drawingml/2006/main" w="0">
+            <a:noFill/>
+            <a:prstDash val="solid"/>
+          </a:ln>
+        </p:spPr>
+        <p:txBody>
+          <a:bodyPr xmlns:a="http://schemas.openxmlformats.org/drawingml/2006/main" lIns="0" tIns="0" rIns="0" bIns="0" anchor="ctr">
+            <a:noAutofit/>
+          </a:bodyPr>
+          <a:lstStyle xmlns:a="http://schemas.openxmlformats.org/drawingml/2006/main"/>
+          <a:p xmlns:a="http://schemas.openxmlformats.org/drawingml/2006/main">
+            <a:pPr algn="l">
+              <a:buNone/>
+              <a:defRPr sz="2325" b="0">
                 <a:solidFill>
                   <a:srgbClr val="152B3A"/>
                 </a:solidFill>
-              </a:defRPr>
-            </a:pPr>
-            <a:r>
-              <a:rPr sz="2550" b="0">
+                <a:latin typeface="Calibri"/>
+                <a:ea typeface="Calibri"/>
+                <a:cs typeface="Calibri"/>
+              </a:defRPr>
+            </a:pPr>
+            <a:r>
+              <a:rPr sz="2325" b="0">
                 <a:solidFill>
                   <a:srgbClr val="152B3A"/>
                 </a:solidFill>
-              </a:rPr>
-              <a:t>Earth keeps moving while gravity pulls it inward.</a:t>
+                <a:latin typeface="Calibri"/>
+                <a:ea typeface="Calibri"/>
+                <a:cs typeface="Calibri"/>
+              </a:rPr>
+              <a:t>Earth keeps moving while</a:t>
+            </a:r>
+          </a:p>
+          <a:p xmlns:a="http://schemas.openxmlformats.org/drawingml/2006/main">
+            <a:pPr algn="l">
+              <a:buNone/>
+              <a:defRPr sz="2325" b="0">
+                <a:solidFill>
+                  <a:srgbClr val="152B3A"/>
+                </a:solidFill>
+                <a:latin typeface="Calibri"/>
+                <a:ea typeface="Calibri"/>
+                <a:cs typeface="Calibri"/>
+              </a:defRPr>
+            </a:pPr>
+            <a:r>
+              <a:rPr sz="2325" b="0">
+                <a:solidFill>
+                  <a:srgbClr val="152B3A"/>
+                </a:solidFill>
+                <a:latin typeface="Calibri"/>
+                <a:ea typeface="Calibri"/>
+                <a:cs typeface="Calibri"/>
+              </a:rPr>
+              <a:t>gravity pulls it inward.</a:t>
+            </a:r>
+          </a:p>
+        </p:txBody>
+      </p:sp>
+      <p:sp>
+        <p:nvSpPr>
+          <p:cNvPr id="11" name="orbit-path">
+            <a:extLst xmlns:a="http://schemas.openxmlformats.org/drawingml/2006/main">
+              <a:ext uri="{FF2B5EF4-FFF2-40B4-BE49-F238E27FC236}">
+                <a16:creationId xmlns:a16="http://schemas.microsoft.com/office/drawing/2014/main" id="{61876F5C-C6C6-4A3C-A6AB-EB084C84F81B}"/>
+              </a:ext>
+            </a:extLst>
+          </p:cNvPr>
+          <p:cNvSpPr>
+            <a:spLocks xmlns:a="http://schemas.openxmlformats.org/drawingml/2006/main" noGrp="1"/>
+          </p:cNvSpPr>
+          <p:nvPr/>
+        </p:nvSpPr>
+        <p:spPr>
+          <a:xfrm xmlns:a="http://schemas.openxmlformats.org/drawingml/2006/main">
+            <a:off x="6762750" y="2809875"/>
+            <a:ext cx="4286250" cy="2857500"/>
+          </a:xfrm>
+          <a:prstGeom xmlns:a="http://schemas.openxmlformats.org/drawingml/2006/main" prst="ellipse">
+            <a:avLst/>
+          </a:prstGeom>
+          <a:noFill xmlns:a="http://schemas.openxmlformats.org/drawingml/2006/main"/>
+          <a:ln xmlns:a="http://schemas.openxmlformats.org/drawingml/2006/main" w="28575">
+            <a:solidFill>
+              <a:srgbClr val="CEDBD3"/>
+            </a:solidFill>
+          </a:ln>
+        </p:spPr>
+      </p:sp>
+      <p:sp>
+        <p:nvSpPr>
+          <p:cNvPr id="12" name="sun-new">
+            <a:extLst xmlns:a="http://schemas.openxmlformats.org/drawingml/2006/main">
+              <a:ext uri="{FF2B5EF4-FFF2-40B4-BE49-F238E27FC236}">
+                <a16:creationId xmlns:a16="http://schemas.microsoft.com/office/drawing/2014/main" id="{BF63C59E-1BC4-4478-A374-DD72ABEBB6D9}"/>
+              </a:ext>
+            </a:extLst>
+          </p:cNvPr>
+          <p:cNvSpPr>
+            <a:spLocks xmlns:a="http://schemas.openxmlformats.org/drawingml/2006/main" noGrp="1"/>
+          </p:cNvSpPr>
+          <p:nvPr/>
+        </p:nvSpPr>
+        <p:spPr>
+          <a:xfrm xmlns:a="http://schemas.openxmlformats.org/drawingml/2006/main">
+            <a:off x="8429625" y="3810000"/>
+            <a:ext cx="857250" cy="857250"/>
+          </a:xfrm>
+          <a:prstGeom xmlns:a="http://schemas.openxmlformats.org/drawingml/2006/main" prst="ellipse">
+            <a:avLst/>
+          </a:prstGeom>
+          <a:solidFill xmlns:a="http://schemas.openxmlformats.org/drawingml/2006/main">
+            <a:srgbClr val="D49C44"/>
+          </a:solidFill>
+          <a:ln xmlns:a="http://schemas.openxmlformats.org/drawingml/2006/main" w="0">
+            <a:noFill/>
+          </a:ln>
+        </p:spPr>
+      </p:sp>
+      <p:sp>
+        <p:nvSpPr>
+          <p:cNvPr id="13" name="sun-new-label">
+            <a:extLst xmlns:a="http://schemas.openxmlformats.org/drawingml/2006/main">
+              <a:ext uri="{FF2B5EF4-FFF2-40B4-BE49-F238E27FC236}">
+                <a16:creationId xmlns:a16="http://schemas.microsoft.com/office/drawing/2014/main" id="{5827B83F-4D39-474D-98CB-CFD1BEEA7659}"/>
+              </a:ext>
+            </a:extLst>
+          </p:cNvPr>
+          <p:cNvSpPr>
+            <a:spLocks xmlns:a="http://schemas.openxmlformats.org/drawingml/2006/main" noGrp="1"/>
+          </p:cNvSpPr>
+          <p:nvPr/>
+        </p:nvSpPr>
+        <p:spPr>
+          <a:xfrm xmlns:a="http://schemas.openxmlformats.org/drawingml/2006/main">
+            <a:off x="8486775" y="4029075"/>
+            <a:ext cx="762000" cy="381000"/>
+          </a:xfrm>
+          <a:prstGeom xmlns:a="http://schemas.openxmlformats.org/drawingml/2006/main" prst="rect">
+            <a:avLst/>
+          </a:prstGeom>
+          <a:noFill xmlns:a="http://schemas.openxmlformats.org/drawingml/2006/main"/>
+          <a:ln xmlns:a="http://schemas.openxmlformats.org/drawingml/2006/main" w="0">
+            <a:noFill/>
+          </a:ln>
+        </p:spPr>
+        <p:txBody>
+          <a:bodyPr xmlns:a="http://schemas.openxmlformats.org/drawingml/2006/main" lIns="0" tIns="0" rIns="0" bIns="0" anchor="ctr">
+            <a:noAutofit/>
+          </a:bodyPr>
+          <a:lstStyle xmlns:a="http://schemas.openxmlformats.org/drawingml/2006/main"/>
+          <a:p xmlns:a="http://schemas.openxmlformats.org/drawingml/2006/main">
+            <a:pPr algn="ctr">
+              <a:defRPr sz="2025" b="1">
+                <a:solidFill>
+                  <a:srgbClr val="152B3A"/>
+                </a:solidFill>
+                <a:latin typeface="Calibri"/>
+                <a:ea typeface="Calibri"/>
+                <a:cs typeface="Calibri"/>
+              </a:defRPr>
+            </a:pPr>
+            <a:r>
+              <a:rPr sz="2025" b="1">
+                <a:solidFill>
+                  <a:srgbClr val="152B3A"/>
+                </a:solidFill>
+                <a:latin typeface="Calibri"/>
+                <a:ea typeface="Calibri"/>
+                <a:cs typeface="Calibri"/>
+              </a:rPr>
+              <a:t>Sun</a:t>
+            </a:r>
+          </a:p>
+        </p:txBody>
+      </p:sp>
+      <p:sp>
+        <p:nvSpPr>
+          <p:cNvPr id="14" name="earth-new">
+            <a:extLst xmlns:a="http://schemas.openxmlformats.org/drawingml/2006/main">
+              <a:ext uri="{FF2B5EF4-FFF2-40B4-BE49-F238E27FC236}">
+                <a16:creationId xmlns:a16="http://schemas.microsoft.com/office/drawing/2014/main" id="{FF91F77E-70AC-452D-8AAC-AD0CE78452D4}"/>
+              </a:ext>
+            </a:extLst>
+          </p:cNvPr>
+          <p:cNvSpPr>
+            <a:spLocks xmlns:a="http://schemas.openxmlformats.org/drawingml/2006/main" noGrp="1"/>
+          </p:cNvSpPr>
+          <p:nvPr/>
+        </p:nvSpPr>
+        <p:spPr>
+          <a:xfrm xmlns:a="http://schemas.openxmlformats.org/drawingml/2006/main">
+            <a:off x="10715625" y="3905250"/>
+            <a:ext cx="400050" cy="400050"/>
+          </a:xfrm>
+          <a:prstGeom xmlns:a="http://schemas.openxmlformats.org/drawingml/2006/main" prst="ellipse">
+            <a:avLst/>
+          </a:prstGeom>
+          <a:solidFill xmlns:a="http://schemas.openxmlformats.org/drawingml/2006/main">
+            <a:srgbClr val="28685E"/>
+          </a:solidFill>
+          <a:ln xmlns:a="http://schemas.openxmlformats.org/drawingml/2006/main" w="0">
+            <a:noFill/>
+          </a:ln>
+        </p:spPr>
+      </p:sp>
+      <p:sp>
+        <p:nvSpPr>
+          <p:cNvPr id="15" name="gravity-new">
+            <a:extLst xmlns:a="http://schemas.openxmlformats.org/drawingml/2006/main">
+              <a:ext uri="{FF2B5EF4-FFF2-40B4-BE49-F238E27FC236}">
+                <a16:creationId xmlns:a16="http://schemas.microsoft.com/office/drawing/2014/main" id="{8C4E99FE-80E3-44EA-A9FE-1415D6642BFB}"/>
+              </a:ext>
+            </a:extLst>
+          </p:cNvPr>
+          <p:cNvSpPr>
+            <a:spLocks xmlns:a="http://schemas.openxmlformats.org/drawingml/2006/main" noGrp="1"/>
+          </p:cNvSpPr>
+          <p:nvPr/>
+        </p:nvSpPr>
+        <p:spPr>
+          <a:xfrm xmlns:a="http://schemas.openxmlformats.org/drawingml/2006/main" rot="10800000">
+            <a:off x="9505950" y="4010025"/>
+            <a:ext cx="990600" cy="219075"/>
+          </a:xfrm>
+          <a:prstGeom xmlns:a="http://schemas.openxmlformats.org/drawingml/2006/main" prst="rightArrow">
+            <a:avLst/>
+          </a:prstGeom>
+          <a:solidFill xmlns:a="http://schemas.openxmlformats.org/drawingml/2006/main">
+            <a:srgbClr val="28685E"/>
+          </a:solidFill>
+          <a:ln xmlns:a="http://schemas.openxmlformats.org/drawingml/2006/main" w="0">
+            <a:noFill/>
+          </a:ln>
+        </p:spPr>
+      </p:sp>
+      <p:sp>
+        <p:nvSpPr>
+          <p:cNvPr id="16" name="motion-new">
+            <a:extLst xmlns:a="http://schemas.openxmlformats.org/drawingml/2006/main">
+              <a:ext uri="{FF2B5EF4-FFF2-40B4-BE49-F238E27FC236}">
+                <a16:creationId xmlns:a16="http://schemas.microsoft.com/office/drawing/2014/main" id="{D5B14498-07FF-4159-9E31-C9C92A9ADF46}"/>
+              </a:ext>
+            </a:extLst>
+          </p:cNvPr>
+          <p:cNvSpPr>
+            <a:spLocks xmlns:a="http://schemas.openxmlformats.org/drawingml/2006/main" noGrp="1"/>
+          </p:cNvSpPr>
+          <p:nvPr/>
+        </p:nvSpPr>
+        <p:spPr>
+          <a:xfrm xmlns:a="http://schemas.openxmlformats.org/drawingml/2006/main" rot="16200000">
+            <a:off x="10467975" y="3228975"/>
+            <a:ext cx="895350" cy="219075"/>
+          </a:xfrm>
+          <a:prstGeom xmlns:a="http://schemas.openxmlformats.org/drawingml/2006/main" prst="rightArrow">
+            <a:avLst/>
+          </a:prstGeom>
+          <a:solidFill xmlns:a="http://schemas.openxmlformats.org/drawingml/2006/main">
+            <a:srgbClr val="A95D21"/>
+          </a:solidFill>
+          <a:ln xmlns:a="http://schemas.openxmlformats.org/drawingml/2006/main" w="0">
+            <a:noFill/>
+          </a:ln>
+        </p:spPr>
+      </p:sp>
+      <p:sp>
+        <p:nvSpPr>
+          <p:cNvPr id="17" name="gravity-new-label">
+            <a:extLst xmlns:a="http://schemas.openxmlformats.org/drawingml/2006/main">
+              <a:ext uri="{FF2B5EF4-FFF2-40B4-BE49-F238E27FC236}">
+                <a16:creationId xmlns:a16="http://schemas.microsoft.com/office/drawing/2014/main" id="{4A34AD23-18A3-4088-8828-F3FB1F787EFB}"/>
+              </a:ext>
+            </a:extLst>
+          </p:cNvPr>
+          <p:cNvSpPr>
+            <a:spLocks xmlns:a="http://schemas.openxmlformats.org/drawingml/2006/main" noGrp="1"/>
+          </p:cNvSpPr>
+          <p:nvPr/>
+        </p:nvSpPr>
+        <p:spPr>
+          <a:xfrm xmlns:a="http://schemas.openxmlformats.org/drawingml/2006/main">
+            <a:off x="9410700" y="4467225"/>
+            <a:ext cx="1143000" cy="333375"/>
+          </a:xfrm>
+          <a:prstGeom xmlns:a="http://schemas.openxmlformats.org/drawingml/2006/main" prst="rect">
+            <a:avLst/>
+          </a:prstGeom>
+          <a:noFill xmlns:a="http://schemas.openxmlformats.org/drawingml/2006/main"/>
+          <a:ln xmlns:a="http://schemas.openxmlformats.org/drawingml/2006/main" w="0">
+            <a:noFill/>
+          </a:ln>
+        </p:spPr>
+        <p:txBody>
+          <a:bodyPr xmlns:a="http://schemas.openxmlformats.org/drawingml/2006/main" lIns="0" tIns="0" rIns="0" bIns="0" anchor="ctr">
+            <a:noAutofit/>
+          </a:bodyPr>
+          <a:lstStyle xmlns:a="http://schemas.openxmlformats.org/drawingml/2006/main"/>
+          <a:p xmlns:a="http://schemas.openxmlformats.org/drawingml/2006/main">
+            <a:pPr algn="l">
+              <a:defRPr sz="1800" b="1">
+                <a:solidFill>
+                  <a:srgbClr val="28685E"/>
+                </a:solidFill>
+                <a:latin typeface="Calibri"/>
+                <a:ea typeface="Calibri"/>
+                <a:cs typeface="Calibri"/>
+              </a:defRPr>
+            </a:pPr>
+            <a:r>
+              <a:rPr sz="1800" b="1">
+                <a:solidFill>
+                  <a:srgbClr val="28685E"/>
+                </a:solidFill>
+                <a:latin typeface="Calibri"/>
+                <a:ea typeface="Calibri"/>
+                <a:cs typeface="Calibri"/>
+              </a:rPr>
+              <a:t>gravity</a:t>
+            </a:r>
+          </a:p>
+        </p:txBody>
+      </p:sp>
+      <p:sp>
+        <p:nvSpPr>
+          <p:cNvPr id="18" name="motion-new-label">
+            <a:extLst xmlns:a="http://schemas.openxmlformats.org/drawingml/2006/main">
+              <a:ext uri="{FF2B5EF4-FFF2-40B4-BE49-F238E27FC236}">
+                <a16:creationId xmlns:a16="http://schemas.microsoft.com/office/drawing/2014/main" id="{E2C4A9DB-7224-48D2-B917-88D1E64C9921}"/>
+              </a:ext>
+            </a:extLst>
+          </p:cNvPr>
+          <p:cNvSpPr>
+            <a:spLocks xmlns:a="http://schemas.openxmlformats.org/drawingml/2006/main" noGrp="1"/>
+          </p:cNvSpPr>
+          <p:nvPr/>
+        </p:nvSpPr>
+        <p:spPr>
+          <a:xfrm xmlns:a="http://schemas.openxmlformats.org/drawingml/2006/main">
+            <a:off x="9763125" y="2543175"/>
+            <a:ext cx="1238250" cy="333375"/>
+          </a:xfrm>
+          <a:prstGeom xmlns:a="http://schemas.openxmlformats.org/drawingml/2006/main" prst="rect">
+            <a:avLst/>
+          </a:prstGeom>
+          <a:noFill xmlns:a="http://schemas.openxmlformats.org/drawingml/2006/main"/>
+          <a:ln xmlns:a="http://schemas.openxmlformats.org/drawingml/2006/main" w="0">
+            <a:noFill/>
+          </a:ln>
+        </p:spPr>
+        <p:txBody>
+          <a:bodyPr xmlns:a="http://schemas.openxmlformats.org/drawingml/2006/main" lIns="0" tIns="0" rIns="0" bIns="0" anchor="ctr">
+            <a:noAutofit/>
+          </a:bodyPr>
+          <a:lstStyle xmlns:a="http://schemas.openxmlformats.org/drawingml/2006/main"/>
+          <a:p xmlns:a="http://schemas.openxmlformats.org/drawingml/2006/main">
+            <a:pPr algn="l">
+              <a:defRPr sz="1800" b="1">
+                <a:solidFill>
+                  <a:srgbClr val="A95D21"/>
+                </a:solidFill>
+                <a:latin typeface="Calibri"/>
+                <a:ea typeface="Calibri"/>
+                <a:cs typeface="Calibri"/>
+              </a:defRPr>
+            </a:pPr>
+            <a:r>
+              <a:rPr sz="1800" b="1">
+                <a:solidFill>
+                  <a:srgbClr val="A95D21"/>
+                </a:solidFill>
+                <a:latin typeface="Calibri"/>
+                <a:ea typeface="Calibri"/>
+                <a:cs typeface="Calibri"/>
+              </a:rPr>
+              <a:t>motion</a:t>
+            </a:r>
+          </a:p>
+        </p:txBody>
+      </p:sp>
+      <p:sp>
+        <p:nvSpPr>
+          <p:cNvPr id="19" name="orbit-limit">
+            <a:extLst xmlns:a="http://schemas.openxmlformats.org/drawingml/2006/main">
+              <a:ext uri="{FF2B5EF4-FFF2-40B4-BE49-F238E27FC236}">
+                <a16:creationId xmlns:a16="http://schemas.microsoft.com/office/drawing/2014/main" id="{B2577246-B383-49F9-B312-E06476614669}"/>
+              </a:ext>
+            </a:extLst>
+          </p:cNvPr>
+          <p:cNvSpPr>
+            <a:spLocks xmlns:a="http://schemas.openxmlformats.org/drawingml/2006/main" noGrp="1"/>
+          </p:cNvSpPr>
+          <p:nvPr/>
+        </p:nvSpPr>
+        <p:spPr>
+          <a:xfrm xmlns:a="http://schemas.openxmlformats.org/drawingml/2006/main">
+            <a:off x="6762750" y="5829300"/>
+            <a:ext cx="4381500" cy="333375"/>
+          </a:xfrm>
+          <a:prstGeom xmlns:a="http://schemas.openxmlformats.org/drawingml/2006/main" prst="rect">
+            <a:avLst/>
+          </a:prstGeom>
+          <a:noFill xmlns:a="http://schemas.openxmlformats.org/drawingml/2006/main"/>
+          <a:ln xmlns:a="http://schemas.openxmlformats.org/drawingml/2006/main" w="0">
+            <a:noFill/>
+          </a:ln>
+        </p:spPr>
+        <p:txBody>
+          <a:bodyPr xmlns:a="http://schemas.openxmlformats.org/drawingml/2006/main" lIns="0" tIns="0" rIns="0" bIns="0" anchor="ctr">
+            <a:noAutofit/>
+          </a:bodyPr>
+          <a:lstStyle xmlns:a="http://schemas.openxmlformats.org/drawingml/2006/main"/>
+          <a:p xmlns:a="http://schemas.openxmlformats.org/drawingml/2006/main">
+            <a:pPr algn="l">
+              <a:defRPr sz="1500" b="0">
+                <a:solidFill>
+                  <a:srgbClr val="50616B"/>
+                </a:solidFill>
+                <a:latin typeface="Calibri"/>
+                <a:ea typeface="Calibri"/>
+                <a:cs typeface="Calibri"/>
+              </a:defRPr>
+            </a:pPr>
+            <a:r>
+              <a:rPr sz="1500" b="0">
+                <a:solidFill>
+                  <a:srgbClr val="50616B"/>
+                </a:solidFill>
+                <a:latin typeface="Calibri"/>
+                <a:ea typeface="Calibri"/>
+                <a:cs typeface="Calibri"/>
+              </a:rPr>
+              <a:t>Schematic: sizes and distances not to scale</a:t>
             </a:r>
           </a:p>
         </p:txBody>
@@ -5002,7 +6537,7 @@
     <p:bg>
       <p:bgPr>
         <a:solidFill xmlns:a="http://schemas.openxmlformats.org/drawingml/2006/main">
-          <a:srgbClr val="F5F1E8"/>
+          <a:srgbClr val="FAF9F5"/>
         </a:solidFill>
       </p:bgPr>
     </p:bg>
@@ -5031,8 +6566,8 @@
         </p:nvSpPr>
         <p:spPr>
           <a:xfrm xmlns:a="http://schemas.openxmlformats.org/drawingml/2006/main">
-            <a:off x="609600" y="552450"/>
-            <a:ext cx="781050" cy="57150"/>
+            <a:off x="609600" y="733425"/>
+            <a:ext cx="781050" cy="38100"/>
           </a:xfrm>
           <a:prstGeom xmlns:a="http://schemas.openxmlformats.org/drawingml/2006/main" prst="rect">
             <a:avLst/>
@@ -5062,34 +6597,43 @@
         </p:nvSpPr>
         <p:spPr>
           <a:xfrm xmlns:a="http://schemas.openxmlformats.org/drawingml/2006/main">
-            <a:off x="609600" y="762000"/>
-            <a:ext cx="8572500" cy="285750"/>
-          </a:xfrm>
-          <a:prstGeom xmlns:a="http://schemas.openxmlformats.org/drawingml/2006/main" prst="rect">
-            <a:avLst/>
-          </a:prstGeom>
-          <a:noFill xmlns:a="http://schemas.openxmlformats.org/drawingml/2006/main"/>
-          <a:ln xmlns:a="http://schemas.openxmlformats.org/drawingml/2006/main" w="0">
-            <a:noFill/>
-            <a:prstDash val="solid"/>
-          </a:ln>
-        </p:spPr>
-        <p:txBody>
-          <a:bodyPr xmlns:a="http://schemas.openxmlformats.org/drawingml/2006/main" lIns="0" tIns="0" rIns="0" bIns="0" anchor="ctr"/>
-          <a:lstStyle xmlns:a="http://schemas.openxmlformats.org/drawingml/2006/main"/>
-          <a:p xmlns:a="http://schemas.openxmlformats.org/drawingml/2006/main">
-            <a:pPr>
-              <a:defRPr sz="1500" b="1">
+            <a:off x="609600" y="342900"/>
+            <a:ext cx="9334500" cy="304800"/>
+          </a:xfrm>
+          <a:prstGeom xmlns:a="http://schemas.openxmlformats.org/drawingml/2006/main" prst="rect">
+            <a:avLst/>
+          </a:prstGeom>
+          <a:noFill xmlns:a="http://schemas.openxmlformats.org/drawingml/2006/main"/>
+          <a:ln xmlns:a="http://schemas.openxmlformats.org/drawingml/2006/main" w="0">
+            <a:noFill/>
+            <a:prstDash val="solid"/>
+          </a:ln>
+        </p:spPr>
+        <p:txBody>
+          <a:bodyPr xmlns:a="http://schemas.openxmlformats.org/drawingml/2006/main" lIns="0" tIns="0" rIns="0" bIns="0" anchor="ctr">
+            <a:noAutofit/>
+          </a:bodyPr>
+          <a:lstStyle xmlns:a="http://schemas.openxmlformats.org/drawingml/2006/main"/>
+          <a:p xmlns:a="http://schemas.openxmlformats.org/drawingml/2006/main">
+            <a:pPr algn="l">
+              <a:buNone/>
+              <a:defRPr sz="1350" b="1">
                 <a:solidFill>
                   <a:srgbClr val="28685E"/>
                 </a:solidFill>
-              </a:defRPr>
-            </a:pPr>
-            <a:r>
-              <a:rPr sz="1500" b="1">
+                <a:latin typeface="Calibri"/>
+                <a:ea typeface="Calibri"/>
+                <a:cs typeface="Calibri"/>
+              </a:defRPr>
+            </a:pPr>
+            <a:r>
+              <a:rPr sz="1350" b="1">
                 <a:solidFill>
                   <a:srgbClr val="28685E"/>
                 </a:solidFill>
+                <a:latin typeface="Calibri"/>
+                <a:ea typeface="Calibri"/>
+                <a:cs typeface="Calibri"/>
               </a:rPr>
               <a:t>MADE BY MATT  /  GROW SCIENCE</a:t>
             </a:r>
@@ -5112,34 +6656,43 @@
         </p:nvSpPr>
         <p:spPr>
           <a:xfrm xmlns:a="http://schemas.openxmlformats.org/drawingml/2006/main">
-            <a:off x="609600" y="1352550"/>
-            <a:ext cx="10972800" cy="952500"/>
-          </a:xfrm>
-          <a:prstGeom xmlns:a="http://schemas.openxmlformats.org/drawingml/2006/main" prst="rect">
-            <a:avLst/>
-          </a:prstGeom>
-          <a:noFill xmlns:a="http://schemas.openxmlformats.org/drawingml/2006/main"/>
-          <a:ln xmlns:a="http://schemas.openxmlformats.org/drawingml/2006/main" w="0">
-            <a:noFill/>
-            <a:prstDash val="solid"/>
-          </a:ln>
-        </p:spPr>
-        <p:txBody>
-          <a:bodyPr xmlns:a="http://schemas.openxmlformats.org/drawingml/2006/main" lIns="0" tIns="0" rIns="0" bIns="0" anchor="ctr"/>
-          <a:lstStyle xmlns:a="http://schemas.openxmlformats.org/drawingml/2006/main"/>
-          <a:p xmlns:a="http://schemas.openxmlformats.org/drawingml/2006/main">
-            <a:pPr>
-              <a:defRPr sz="3750" b="1">
+            <a:off x="609600" y="990600"/>
+            <a:ext cx="10972800" cy="1000125"/>
+          </a:xfrm>
+          <a:prstGeom xmlns:a="http://schemas.openxmlformats.org/drawingml/2006/main" prst="rect">
+            <a:avLst/>
+          </a:prstGeom>
+          <a:noFill xmlns:a="http://schemas.openxmlformats.org/drawingml/2006/main"/>
+          <a:ln xmlns:a="http://schemas.openxmlformats.org/drawingml/2006/main" w="0">
+            <a:noFill/>
+            <a:prstDash val="solid"/>
+          </a:ln>
+        </p:spPr>
+        <p:txBody>
+          <a:bodyPr xmlns:a="http://schemas.openxmlformats.org/drawingml/2006/main" lIns="0" tIns="0" rIns="0" bIns="0" anchor="ctr">
+            <a:noAutofit/>
+          </a:bodyPr>
+          <a:lstStyle xmlns:a="http://schemas.openxmlformats.org/drawingml/2006/main"/>
+          <a:p xmlns:a="http://schemas.openxmlformats.org/drawingml/2006/main">
+            <a:pPr algn="l">
+              <a:buNone/>
+              <a:defRPr sz="3675" b="1">
                 <a:solidFill>
                   <a:srgbClr val="152B3A"/>
                 </a:solidFill>
-              </a:defRPr>
-            </a:pPr>
-            <a:r>
-              <a:rPr sz="3750" b="1">
+                <a:latin typeface="Calibri"/>
+                <a:ea typeface="Calibri"/>
+                <a:cs typeface="Calibri"/>
+              </a:defRPr>
+            </a:pPr>
+            <a:r>
+              <a:rPr sz="3675" b="1">
                 <a:solidFill>
                   <a:srgbClr val="152B3A"/>
                 </a:solidFill>
+                <a:latin typeface="Calibri"/>
+                <a:ea typeface="Calibri"/>
+                <a:cs typeface="Calibri"/>
               </a:rPr>
               <a:t>Retrieve the order and arrows</a:t>
             </a:r>
@@ -5162,14 +6715,14 @@
         </p:nvSpPr>
         <p:spPr>
           <a:xfrm xmlns:a="http://schemas.openxmlformats.org/drawingml/2006/main">
-            <a:off x="609600" y="6219825"/>
+            <a:off x="609600" y="6191250"/>
             <a:ext cx="10972800" cy="9525"/>
           </a:xfrm>
           <a:prstGeom xmlns:a="http://schemas.openxmlformats.org/drawingml/2006/main" prst="rect">
             <a:avLst/>
           </a:prstGeom>
           <a:solidFill xmlns:a="http://schemas.openxmlformats.org/drawingml/2006/main">
-            <a:srgbClr val="DCE7DD"/>
+            <a:srgbClr val="CEDBD3"/>
           </a:solidFill>
           <a:ln xmlns:a="http://schemas.openxmlformats.org/drawingml/2006/main" w="0">
             <a:noFill/>
@@ -5193,34 +6746,43 @@
         </p:nvSpPr>
         <p:spPr>
           <a:xfrm xmlns:a="http://schemas.openxmlformats.org/drawingml/2006/main">
-            <a:off x="609600" y="6381750"/>
-            <a:ext cx="9906000" cy="228600"/>
-          </a:xfrm>
-          <a:prstGeom xmlns:a="http://schemas.openxmlformats.org/drawingml/2006/main" prst="rect">
-            <a:avLst/>
-          </a:prstGeom>
-          <a:noFill xmlns:a="http://schemas.openxmlformats.org/drawingml/2006/main"/>
-          <a:ln xmlns:a="http://schemas.openxmlformats.org/drawingml/2006/main" w="0">
-            <a:noFill/>
-            <a:prstDash val="solid"/>
-          </a:ln>
-        </p:spPr>
-        <p:txBody>
-          <a:bodyPr xmlns:a="http://schemas.openxmlformats.org/drawingml/2006/main" lIns="0" tIns="0" rIns="0" bIns="0" anchor="ctr"/>
-          <a:lstStyle xmlns:a="http://schemas.openxmlformats.org/drawingml/2006/main"/>
-          <a:p xmlns:a="http://schemas.openxmlformats.org/drawingml/2006/main">
-            <a:pPr>
-              <a:defRPr sz="1275" b="0">
+            <a:off x="609600" y="6419850"/>
+            <a:ext cx="9525000" cy="219075"/>
+          </a:xfrm>
+          <a:prstGeom xmlns:a="http://schemas.openxmlformats.org/drawingml/2006/main" prst="rect">
+            <a:avLst/>
+          </a:prstGeom>
+          <a:noFill xmlns:a="http://schemas.openxmlformats.org/drawingml/2006/main"/>
+          <a:ln xmlns:a="http://schemas.openxmlformats.org/drawingml/2006/main" w="0">
+            <a:noFill/>
+            <a:prstDash val="solid"/>
+          </a:ln>
+        </p:spPr>
+        <p:txBody>
+          <a:bodyPr xmlns:a="http://schemas.openxmlformats.org/drawingml/2006/main" lIns="0" tIns="0" rIns="0" bIns="0" anchor="ctr">
+            <a:noAutofit/>
+          </a:bodyPr>
+          <a:lstStyle xmlns:a="http://schemas.openxmlformats.org/drawingml/2006/main"/>
+          <a:p xmlns:a="http://schemas.openxmlformats.org/drawingml/2006/main">
+            <a:pPr algn="l">
+              <a:buNone/>
+              <a:defRPr sz="1200" b="0">
                 <a:solidFill>
                   <a:srgbClr val="50616B"/>
                 </a:solidFill>
-              </a:defRPr>
-            </a:pPr>
-            <a:r>
-              <a:rPr sz="1275" b="0">
+                <a:latin typeface="Calibri"/>
+                <a:ea typeface="Calibri"/>
+                <a:cs typeface="Calibri"/>
+              </a:defRPr>
+            </a:pPr>
+            <a:r>
+              <a:rPr sz="1200" b="0">
                 <a:solidFill>
                   <a:srgbClr val="50616B"/>
                 </a:solidFill>
+                <a:latin typeface="Calibri"/>
+                <a:ea typeface="Calibri"/>
+                <a:cs typeface="Calibri"/>
               </a:rPr>
               <a:t>AUTUMN 1  ·  WEEK 6  ·  LESSON B</a:t>
             </a:r>
@@ -5243,27 +6805,33 @@
         </p:nvSpPr>
         <p:spPr>
           <a:xfrm xmlns:a="http://schemas.openxmlformats.org/drawingml/2006/main">
-            <a:off x="11106150" y="6362700"/>
-            <a:ext cx="476250" cy="238125"/>
-          </a:xfrm>
-          <a:prstGeom xmlns:a="http://schemas.openxmlformats.org/drawingml/2006/main" prst="rect">
-            <a:avLst/>
-          </a:prstGeom>
-          <a:noFill xmlns:a="http://schemas.openxmlformats.org/drawingml/2006/main"/>
-          <a:ln xmlns:a="http://schemas.openxmlformats.org/drawingml/2006/main" w="0">
-            <a:noFill/>
-            <a:prstDash val="solid"/>
-          </a:ln>
-        </p:spPr>
-        <p:txBody>
-          <a:bodyPr xmlns:a="http://schemas.openxmlformats.org/drawingml/2006/main" lIns="0" tIns="0" rIns="0" bIns="0" anchor="ctr"/>
-          <a:lstStyle xmlns:a="http://schemas.openxmlformats.org/drawingml/2006/main"/>
-          <a:p xmlns:a="http://schemas.openxmlformats.org/drawingml/2006/main">
-            <a:pPr>
+            <a:off x="11106150" y="6400800"/>
+            <a:ext cx="476250" cy="247650"/>
+          </a:xfrm>
+          <a:prstGeom xmlns:a="http://schemas.openxmlformats.org/drawingml/2006/main" prst="rect">
+            <a:avLst/>
+          </a:prstGeom>
+          <a:noFill xmlns:a="http://schemas.openxmlformats.org/drawingml/2006/main"/>
+          <a:ln xmlns:a="http://schemas.openxmlformats.org/drawingml/2006/main" w="0">
+            <a:noFill/>
+            <a:prstDash val="solid"/>
+          </a:ln>
+        </p:spPr>
+        <p:txBody>
+          <a:bodyPr xmlns:a="http://schemas.openxmlformats.org/drawingml/2006/main" lIns="0" tIns="0" rIns="0" bIns="0" anchor="ctr">
+            <a:noAutofit/>
+          </a:bodyPr>
+          <a:lstStyle xmlns:a="http://schemas.openxmlformats.org/drawingml/2006/main"/>
+          <a:p xmlns:a="http://schemas.openxmlformats.org/drawingml/2006/main">
+            <a:pPr algn="l">
+              <a:buNone/>
               <a:defRPr sz="1350" b="1">
                 <a:solidFill>
                   <a:srgbClr val="28685E"/>
                 </a:solidFill>
+                <a:latin typeface="Calibri"/>
+                <a:ea typeface="Calibri"/>
+                <a:cs typeface="Calibri"/>
               </a:defRPr>
             </a:pPr>
             <a:r>
@@ -5271,6 +6839,9 @@
                 <a:solidFill>
                   <a:srgbClr val="28685E"/>
                 </a:solidFill>
+                <a:latin typeface="Calibri"/>
+                <a:ea typeface="Calibri"/>
+                <a:cs typeface="Calibri"/>
               </a:rPr>
               <a:t>02</a:t>
             </a:r>
@@ -5293,34 +6864,43 @@
         </p:nvSpPr>
         <p:spPr>
           <a:xfrm xmlns:a="http://schemas.openxmlformats.org/drawingml/2006/main">
-            <a:off x="609600" y="2619375"/>
-            <a:ext cx="10972800" cy="781050"/>
-          </a:xfrm>
-          <a:prstGeom xmlns:a="http://schemas.openxmlformats.org/drawingml/2006/main" prst="rect">
-            <a:avLst/>
-          </a:prstGeom>
-          <a:noFill xmlns:a="http://schemas.openxmlformats.org/drawingml/2006/main"/>
-          <a:ln xmlns:a="http://schemas.openxmlformats.org/drawingml/2006/main" w="0">
-            <a:noFill/>
-            <a:prstDash val="solid"/>
-          </a:ln>
-        </p:spPr>
-        <p:txBody>
-          <a:bodyPr xmlns:a="http://schemas.openxmlformats.org/drawingml/2006/main" lIns="0" tIns="0" rIns="0" bIns="0" anchor="ctr"/>
-          <a:lstStyle xmlns:a="http://schemas.openxmlformats.org/drawingml/2006/main"/>
-          <a:p xmlns:a="http://schemas.openxmlformats.org/drawingml/2006/main">
-            <a:pPr>
-              <a:defRPr sz="2550" b="0">
+            <a:off x="1000125" y="2333625"/>
+            <a:ext cx="10382250" cy="1076325"/>
+          </a:xfrm>
+          <a:prstGeom xmlns:a="http://schemas.openxmlformats.org/drawingml/2006/main" prst="rect">
+            <a:avLst/>
+          </a:prstGeom>
+          <a:noFill xmlns:a="http://schemas.openxmlformats.org/drawingml/2006/main"/>
+          <a:ln xmlns:a="http://schemas.openxmlformats.org/drawingml/2006/main" w="0">
+            <a:noFill/>
+            <a:prstDash val="solid"/>
+          </a:ln>
+        </p:spPr>
+        <p:txBody>
+          <a:bodyPr xmlns:a="http://schemas.openxmlformats.org/drawingml/2006/main" lIns="0" tIns="0" rIns="0" bIns="0" anchor="ctr">
+            <a:noAutofit/>
+          </a:bodyPr>
+          <a:lstStyle xmlns:a="http://schemas.openxmlformats.org/drawingml/2006/main"/>
+          <a:p xmlns:a="http://schemas.openxmlformats.org/drawingml/2006/main">
+            <a:pPr algn="l">
+              <a:buNone/>
+              <a:defRPr sz="2625" b="0">
                 <a:solidFill>
                   <a:srgbClr val="152B3A"/>
                 </a:solidFill>
-              </a:defRPr>
-            </a:pPr>
-            <a:r>
-              <a:rPr sz="2550" b="0">
+                <a:latin typeface="Calibri"/>
+                <a:ea typeface="Calibri"/>
+                <a:cs typeface="Calibri"/>
+              </a:defRPr>
+            </a:pPr>
+            <a:r>
+              <a:rPr sz="2625" b="0">
                 <a:solidFill>
                   <a:srgbClr val="152B3A"/>
                 </a:solidFill>
+                <a:latin typeface="Calibri"/>
+                <a:ea typeface="Calibri"/>
+                <a:cs typeface="Calibri"/>
               </a:rPr>
               <a:t>Order the eight planet names from the Sun.</a:t>
             </a:r>
@@ -5343,34 +6923,43 @@
         </p:nvSpPr>
         <p:spPr>
           <a:xfrm xmlns:a="http://schemas.openxmlformats.org/drawingml/2006/main">
-            <a:off x="609600" y="3476625"/>
-            <a:ext cx="10972800" cy="781050"/>
-          </a:xfrm>
-          <a:prstGeom xmlns:a="http://schemas.openxmlformats.org/drawingml/2006/main" prst="rect">
-            <a:avLst/>
-          </a:prstGeom>
-          <a:noFill xmlns:a="http://schemas.openxmlformats.org/drawingml/2006/main"/>
-          <a:ln xmlns:a="http://schemas.openxmlformats.org/drawingml/2006/main" w="0">
-            <a:noFill/>
-            <a:prstDash val="solid"/>
-          </a:ln>
-        </p:spPr>
-        <p:txBody>
-          <a:bodyPr xmlns:a="http://schemas.openxmlformats.org/drawingml/2006/main" lIns="0" tIns="0" rIns="0" bIns="0" anchor="ctr"/>
-          <a:lstStyle xmlns:a="http://schemas.openxmlformats.org/drawingml/2006/main"/>
-          <a:p xmlns:a="http://schemas.openxmlformats.org/drawingml/2006/main">
-            <a:pPr>
-              <a:defRPr sz="2550" b="0">
+            <a:off x="1000125" y="3467100"/>
+            <a:ext cx="10382250" cy="1076325"/>
+          </a:xfrm>
+          <a:prstGeom xmlns:a="http://schemas.openxmlformats.org/drawingml/2006/main" prst="rect">
+            <a:avLst/>
+          </a:prstGeom>
+          <a:noFill xmlns:a="http://schemas.openxmlformats.org/drawingml/2006/main"/>
+          <a:ln xmlns:a="http://schemas.openxmlformats.org/drawingml/2006/main" w="0">
+            <a:noFill/>
+            <a:prstDash val="solid"/>
+          </a:ln>
+        </p:spPr>
+        <p:txBody>
+          <a:bodyPr xmlns:a="http://schemas.openxmlformats.org/drawingml/2006/main" lIns="0" tIns="0" rIns="0" bIns="0" anchor="ctr">
+            <a:noAutofit/>
+          </a:bodyPr>
+          <a:lstStyle xmlns:a="http://schemas.openxmlformats.org/drawingml/2006/main"/>
+          <a:p xmlns:a="http://schemas.openxmlformats.org/drawingml/2006/main">
+            <a:pPr algn="l">
+              <a:buNone/>
+              <a:defRPr sz="2625" b="0">
                 <a:solidFill>
                   <a:srgbClr val="152B3A"/>
                 </a:solidFill>
-              </a:defRPr>
-            </a:pPr>
-            <a:r>
-              <a:rPr sz="2550" b="0">
+                <a:latin typeface="Calibri"/>
+                <a:ea typeface="Calibri"/>
+                <a:cs typeface="Calibri"/>
+              </a:defRPr>
+            </a:pPr>
+            <a:r>
+              <a:rPr sz="2625" b="0">
                 <a:solidFill>
                   <a:srgbClr val="152B3A"/>
                 </a:solidFill>
+                <a:latin typeface="Calibri"/>
+                <a:ea typeface="Calibri"/>
+                <a:cs typeface="Calibri"/>
               </a:rPr>
               <a:t>Point towards the Sun for gravity.</a:t>
             </a:r>
@@ -5393,36 +6982,276 @@
         </p:nvSpPr>
         <p:spPr>
           <a:xfrm xmlns:a="http://schemas.openxmlformats.org/drawingml/2006/main">
-            <a:off x="609600" y="4333875"/>
-            <a:ext cx="10972800" cy="781050"/>
-          </a:xfrm>
-          <a:prstGeom xmlns:a="http://schemas.openxmlformats.org/drawingml/2006/main" prst="rect">
-            <a:avLst/>
-          </a:prstGeom>
-          <a:noFill xmlns:a="http://schemas.openxmlformats.org/drawingml/2006/main"/>
-          <a:ln xmlns:a="http://schemas.openxmlformats.org/drawingml/2006/main" w="0">
-            <a:noFill/>
-            <a:prstDash val="solid"/>
-          </a:ln>
-        </p:spPr>
-        <p:txBody>
-          <a:bodyPr xmlns:a="http://schemas.openxmlformats.org/drawingml/2006/main" lIns="0" tIns="0" rIns="0" bIns="0" anchor="ctr"/>
-          <a:lstStyle xmlns:a="http://schemas.openxmlformats.org/drawingml/2006/main"/>
-          <a:p xmlns:a="http://schemas.openxmlformats.org/drawingml/2006/main">
-            <a:pPr>
-              <a:defRPr sz="2550" b="0">
+            <a:off x="1000125" y="4600575"/>
+            <a:ext cx="10382250" cy="1076325"/>
+          </a:xfrm>
+          <a:prstGeom xmlns:a="http://schemas.openxmlformats.org/drawingml/2006/main" prst="rect">
+            <a:avLst/>
+          </a:prstGeom>
+          <a:noFill xmlns:a="http://schemas.openxmlformats.org/drawingml/2006/main"/>
+          <a:ln xmlns:a="http://schemas.openxmlformats.org/drawingml/2006/main" w="0">
+            <a:noFill/>
+            <a:prstDash val="solid"/>
+          </a:ln>
+        </p:spPr>
+        <p:txBody>
+          <a:bodyPr xmlns:a="http://schemas.openxmlformats.org/drawingml/2006/main" lIns="0" tIns="0" rIns="0" bIns="0" anchor="ctr">
+            <a:noAutofit/>
+          </a:bodyPr>
+          <a:lstStyle xmlns:a="http://schemas.openxmlformats.org/drawingml/2006/main"/>
+          <a:p xmlns:a="http://schemas.openxmlformats.org/drawingml/2006/main">
+            <a:pPr algn="l">
+              <a:buNone/>
+              <a:defRPr sz="2625" b="0">
                 <a:solidFill>
                   <a:srgbClr val="152B3A"/>
                 </a:solidFill>
-              </a:defRPr>
-            </a:pPr>
-            <a:r>
-              <a:rPr sz="2550" b="0">
+                <a:latin typeface="Calibri"/>
+                <a:ea typeface="Calibri"/>
+                <a:cs typeface="Calibri"/>
+              </a:defRPr>
+            </a:pPr>
+            <a:r>
+              <a:rPr sz="2625" b="0">
                 <a:solidFill>
                   <a:srgbClr val="152B3A"/>
                 </a:solidFill>
+                <a:latin typeface="Calibri"/>
+                <a:ea typeface="Calibri"/>
+                <a:cs typeface="Calibri"/>
               </a:rPr>
               <a:t>Point along the orbit for motion.</a:t>
+            </a:r>
+          </a:p>
+        </p:txBody>
+      </p:sp>
+      <p:sp>
+        <p:nvSpPr>
+          <p:cNvPr id="11" name="cue-0">
+            <a:extLst xmlns:a="http://schemas.openxmlformats.org/drawingml/2006/main">
+              <a:ext uri="{FF2B5EF4-FFF2-40B4-BE49-F238E27FC236}">
+                <a16:creationId xmlns:a16="http://schemas.microsoft.com/office/drawing/2014/main" id="{36B8A9AC-7B9E-4C87-82D5-647991CC78FF}"/>
+              </a:ext>
+            </a:extLst>
+          </p:cNvPr>
+          <p:cNvSpPr>
+            <a:spLocks xmlns:a="http://schemas.openxmlformats.org/drawingml/2006/main" noGrp="1"/>
+          </p:cNvSpPr>
+          <p:nvPr/>
+        </p:nvSpPr>
+        <p:spPr>
+          <a:xfrm xmlns:a="http://schemas.openxmlformats.org/drawingml/2006/main">
+            <a:off x="609600" y="2362200"/>
+            <a:ext cx="323850" cy="323850"/>
+          </a:xfrm>
+          <a:prstGeom xmlns:a="http://schemas.openxmlformats.org/drawingml/2006/main" prst="rect">
+            <a:avLst/>
+          </a:prstGeom>
+          <a:noFill xmlns:a="http://schemas.openxmlformats.org/drawingml/2006/main"/>
+          <a:ln xmlns:a="http://schemas.openxmlformats.org/drawingml/2006/main" w="0">
+            <a:noFill/>
+          </a:ln>
+        </p:spPr>
+        <p:txBody>
+          <a:bodyPr xmlns:a="http://schemas.openxmlformats.org/drawingml/2006/main" lIns="0" tIns="0" rIns="0" bIns="0" anchor="ctr">
+            <a:noAutofit/>
+          </a:bodyPr>
+          <a:lstStyle xmlns:a="http://schemas.openxmlformats.org/drawingml/2006/main"/>
+          <a:p xmlns:a="http://schemas.openxmlformats.org/drawingml/2006/main">
+            <a:pPr algn="l">
+              <a:defRPr sz="1350" b="1">
+                <a:solidFill>
+                  <a:srgbClr val="28685E"/>
+                </a:solidFill>
+                <a:latin typeface="Calibri"/>
+                <a:ea typeface="Calibri"/>
+                <a:cs typeface="Calibri"/>
+              </a:defRPr>
+            </a:pPr>
+            <a:r>
+              <a:rPr sz="1350" b="1">
+                <a:solidFill>
+                  <a:srgbClr val="28685E"/>
+                </a:solidFill>
+                <a:latin typeface="Calibri"/>
+                <a:ea typeface="Calibri"/>
+                <a:cs typeface="Calibri"/>
+              </a:rPr>
+              <a:t>01</a:t>
+            </a:r>
+          </a:p>
+        </p:txBody>
+      </p:sp>
+      <p:sp>
+        <p:nvSpPr>
+          <p:cNvPr id="12" name="row-rule-0">
+            <a:extLst xmlns:a="http://schemas.openxmlformats.org/drawingml/2006/main">
+              <a:ext uri="{FF2B5EF4-FFF2-40B4-BE49-F238E27FC236}">
+                <a16:creationId xmlns:a16="http://schemas.microsoft.com/office/drawing/2014/main" id="{B761DC3D-C86F-44EF-BCC0-51CB301A5A7B}"/>
+              </a:ext>
+            </a:extLst>
+          </p:cNvPr>
+          <p:cNvSpPr>
+            <a:spLocks xmlns:a="http://schemas.openxmlformats.org/drawingml/2006/main" noGrp="1"/>
+          </p:cNvSpPr>
+          <p:nvPr/>
+        </p:nvSpPr>
+        <p:spPr>
+          <a:xfrm xmlns:a="http://schemas.openxmlformats.org/drawingml/2006/main">
+            <a:off x="1000125" y="3419475"/>
+            <a:ext cx="10334625" cy="0"/>
+          </a:xfrm>
+          <a:prstGeom xmlns:a="http://schemas.openxmlformats.org/drawingml/2006/main" prst="line">
+            <a:avLst/>
+          </a:prstGeom>
+          <a:noFill xmlns:a="http://schemas.openxmlformats.org/drawingml/2006/main"/>
+          <a:ln xmlns:a="http://schemas.openxmlformats.org/drawingml/2006/main" w="9525">
+            <a:solidFill>
+              <a:srgbClr val="CEDBD3"/>
+            </a:solidFill>
+          </a:ln>
+        </p:spPr>
+      </p:sp>
+      <p:sp>
+        <p:nvSpPr>
+          <p:cNvPr id="13" name="cue-1">
+            <a:extLst xmlns:a="http://schemas.openxmlformats.org/drawingml/2006/main">
+              <a:ext uri="{FF2B5EF4-FFF2-40B4-BE49-F238E27FC236}">
+                <a16:creationId xmlns:a16="http://schemas.microsoft.com/office/drawing/2014/main" id="{CEBE0B8F-97F4-42AB-B3E6-0F1669461360}"/>
+              </a:ext>
+            </a:extLst>
+          </p:cNvPr>
+          <p:cNvSpPr>
+            <a:spLocks xmlns:a="http://schemas.openxmlformats.org/drawingml/2006/main" noGrp="1"/>
+          </p:cNvSpPr>
+          <p:nvPr/>
+        </p:nvSpPr>
+        <p:spPr>
+          <a:xfrm xmlns:a="http://schemas.openxmlformats.org/drawingml/2006/main">
+            <a:off x="609600" y="3495675"/>
+            <a:ext cx="323850" cy="323850"/>
+          </a:xfrm>
+          <a:prstGeom xmlns:a="http://schemas.openxmlformats.org/drawingml/2006/main" prst="rect">
+            <a:avLst/>
+          </a:prstGeom>
+          <a:noFill xmlns:a="http://schemas.openxmlformats.org/drawingml/2006/main"/>
+          <a:ln xmlns:a="http://schemas.openxmlformats.org/drawingml/2006/main" w="0">
+            <a:noFill/>
+          </a:ln>
+        </p:spPr>
+        <p:txBody>
+          <a:bodyPr xmlns:a="http://schemas.openxmlformats.org/drawingml/2006/main" lIns="0" tIns="0" rIns="0" bIns="0" anchor="ctr">
+            <a:noAutofit/>
+          </a:bodyPr>
+          <a:lstStyle xmlns:a="http://schemas.openxmlformats.org/drawingml/2006/main"/>
+          <a:p xmlns:a="http://schemas.openxmlformats.org/drawingml/2006/main">
+            <a:pPr algn="l">
+              <a:defRPr sz="1350" b="1">
+                <a:solidFill>
+                  <a:srgbClr val="28685E"/>
+                </a:solidFill>
+                <a:latin typeface="Calibri"/>
+                <a:ea typeface="Calibri"/>
+                <a:cs typeface="Calibri"/>
+              </a:defRPr>
+            </a:pPr>
+            <a:r>
+              <a:rPr sz="1350" b="1">
+                <a:solidFill>
+                  <a:srgbClr val="28685E"/>
+                </a:solidFill>
+                <a:latin typeface="Calibri"/>
+                <a:ea typeface="Calibri"/>
+                <a:cs typeface="Calibri"/>
+              </a:rPr>
+              <a:t>02</a:t>
+            </a:r>
+          </a:p>
+        </p:txBody>
+      </p:sp>
+      <p:sp>
+        <p:nvSpPr>
+          <p:cNvPr id="14" name="row-rule-1">
+            <a:extLst xmlns:a="http://schemas.openxmlformats.org/drawingml/2006/main">
+              <a:ext uri="{FF2B5EF4-FFF2-40B4-BE49-F238E27FC236}">
+                <a16:creationId xmlns:a16="http://schemas.microsoft.com/office/drawing/2014/main" id="{EC6B9C5C-C727-42B3-A167-8B9204CAC8F4}"/>
+              </a:ext>
+            </a:extLst>
+          </p:cNvPr>
+          <p:cNvSpPr>
+            <a:spLocks xmlns:a="http://schemas.openxmlformats.org/drawingml/2006/main" noGrp="1"/>
+          </p:cNvSpPr>
+          <p:nvPr/>
+        </p:nvSpPr>
+        <p:spPr>
+          <a:xfrm xmlns:a="http://schemas.openxmlformats.org/drawingml/2006/main">
+            <a:off x="1000125" y="4552950"/>
+            <a:ext cx="10334625" cy="0"/>
+          </a:xfrm>
+          <a:prstGeom xmlns:a="http://schemas.openxmlformats.org/drawingml/2006/main" prst="line">
+            <a:avLst/>
+          </a:prstGeom>
+          <a:noFill xmlns:a="http://schemas.openxmlformats.org/drawingml/2006/main"/>
+          <a:ln xmlns:a="http://schemas.openxmlformats.org/drawingml/2006/main" w="9525">
+            <a:solidFill>
+              <a:srgbClr val="CEDBD3"/>
+            </a:solidFill>
+          </a:ln>
+        </p:spPr>
+      </p:sp>
+      <p:sp>
+        <p:nvSpPr>
+          <p:cNvPr id="15" name="cue-2">
+            <a:extLst xmlns:a="http://schemas.openxmlformats.org/drawingml/2006/main">
+              <a:ext uri="{FF2B5EF4-FFF2-40B4-BE49-F238E27FC236}">
+                <a16:creationId xmlns:a16="http://schemas.microsoft.com/office/drawing/2014/main" id="{22EA9D6A-D942-4337-8D38-9CFC23D10514}"/>
+              </a:ext>
+            </a:extLst>
+          </p:cNvPr>
+          <p:cNvSpPr>
+            <a:spLocks xmlns:a="http://schemas.openxmlformats.org/drawingml/2006/main" noGrp="1"/>
+          </p:cNvSpPr>
+          <p:nvPr/>
+        </p:nvSpPr>
+        <p:spPr>
+          <a:xfrm xmlns:a="http://schemas.openxmlformats.org/drawingml/2006/main">
+            <a:off x="609600" y="4629150"/>
+            <a:ext cx="323850" cy="323850"/>
+          </a:xfrm>
+          <a:prstGeom xmlns:a="http://schemas.openxmlformats.org/drawingml/2006/main" prst="rect">
+            <a:avLst/>
+          </a:prstGeom>
+          <a:noFill xmlns:a="http://schemas.openxmlformats.org/drawingml/2006/main"/>
+          <a:ln xmlns:a="http://schemas.openxmlformats.org/drawingml/2006/main" w="0">
+            <a:noFill/>
+          </a:ln>
+        </p:spPr>
+        <p:txBody>
+          <a:bodyPr xmlns:a="http://schemas.openxmlformats.org/drawingml/2006/main" lIns="0" tIns="0" rIns="0" bIns="0" anchor="ctr">
+            <a:noAutofit/>
+          </a:bodyPr>
+          <a:lstStyle xmlns:a="http://schemas.openxmlformats.org/drawingml/2006/main"/>
+          <a:p xmlns:a="http://schemas.openxmlformats.org/drawingml/2006/main">
+            <a:pPr algn="l">
+              <a:defRPr sz="1350" b="1">
+                <a:solidFill>
+                  <a:srgbClr val="28685E"/>
+                </a:solidFill>
+                <a:latin typeface="Calibri"/>
+                <a:ea typeface="Calibri"/>
+                <a:cs typeface="Calibri"/>
+              </a:defRPr>
+            </a:pPr>
+            <a:r>
+              <a:rPr sz="1350" b="1">
+                <a:solidFill>
+                  <a:srgbClr val="28685E"/>
+                </a:solidFill>
+                <a:latin typeface="Calibri"/>
+                <a:ea typeface="Calibri"/>
+                <a:cs typeface="Calibri"/>
+              </a:rPr>
+              <a:t>03</a:t>
             </a:r>
           </a:p>
         </p:txBody>
@@ -5443,7 +7272,7 @@
     <p:bg>
       <p:bgPr>
         <a:solidFill xmlns:a="http://schemas.openxmlformats.org/drawingml/2006/main">
-          <a:srgbClr val="F5F1E8"/>
+          <a:srgbClr val="FAF9F5"/>
         </a:solidFill>
       </p:bgPr>
     </p:bg>
@@ -5472,8 +7301,8 @@
         </p:nvSpPr>
         <p:spPr>
           <a:xfrm xmlns:a="http://schemas.openxmlformats.org/drawingml/2006/main">
-            <a:off x="609600" y="552450"/>
-            <a:ext cx="781050" cy="57150"/>
+            <a:off x="609600" y="733425"/>
+            <a:ext cx="781050" cy="38100"/>
           </a:xfrm>
           <a:prstGeom xmlns:a="http://schemas.openxmlformats.org/drawingml/2006/main" prst="rect">
             <a:avLst/>
@@ -5503,34 +7332,43 @@
         </p:nvSpPr>
         <p:spPr>
           <a:xfrm xmlns:a="http://schemas.openxmlformats.org/drawingml/2006/main">
-            <a:off x="609600" y="762000"/>
-            <a:ext cx="8572500" cy="285750"/>
-          </a:xfrm>
-          <a:prstGeom xmlns:a="http://schemas.openxmlformats.org/drawingml/2006/main" prst="rect">
-            <a:avLst/>
-          </a:prstGeom>
-          <a:noFill xmlns:a="http://schemas.openxmlformats.org/drawingml/2006/main"/>
-          <a:ln xmlns:a="http://schemas.openxmlformats.org/drawingml/2006/main" w="0">
-            <a:noFill/>
-            <a:prstDash val="solid"/>
-          </a:ln>
-        </p:spPr>
-        <p:txBody>
-          <a:bodyPr xmlns:a="http://schemas.openxmlformats.org/drawingml/2006/main" lIns="0" tIns="0" rIns="0" bIns="0" anchor="ctr"/>
-          <a:lstStyle xmlns:a="http://schemas.openxmlformats.org/drawingml/2006/main"/>
-          <a:p xmlns:a="http://schemas.openxmlformats.org/drawingml/2006/main">
-            <a:pPr>
-              <a:defRPr sz="1500" b="1">
+            <a:off x="609600" y="342900"/>
+            <a:ext cx="9334500" cy="304800"/>
+          </a:xfrm>
+          <a:prstGeom xmlns:a="http://schemas.openxmlformats.org/drawingml/2006/main" prst="rect">
+            <a:avLst/>
+          </a:prstGeom>
+          <a:noFill xmlns:a="http://schemas.openxmlformats.org/drawingml/2006/main"/>
+          <a:ln xmlns:a="http://schemas.openxmlformats.org/drawingml/2006/main" w="0">
+            <a:noFill/>
+            <a:prstDash val="solid"/>
+          </a:ln>
+        </p:spPr>
+        <p:txBody>
+          <a:bodyPr xmlns:a="http://schemas.openxmlformats.org/drawingml/2006/main" lIns="0" tIns="0" rIns="0" bIns="0" anchor="ctr">
+            <a:noAutofit/>
+          </a:bodyPr>
+          <a:lstStyle xmlns:a="http://schemas.openxmlformats.org/drawingml/2006/main"/>
+          <a:p xmlns:a="http://schemas.openxmlformats.org/drawingml/2006/main">
+            <a:pPr algn="l">
+              <a:buNone/>
+              <a:defRPr sz="1350" b="1">
                 <a:solidFill>
                   <a:srgbClr val="28685E"/>
                 </a:solidFill>
-              </a:defRPr>
-            </a:pPr>
-            <a:r>
-              <a:rPr sz="1500" b="1">
+                <a:latin typeface="Calibri"/>
+                <a:ea typeface="Calibri"/>
+                <a:cs typeface="Calibri"/>
+              </a:defRPr>
+            </a:pPr>
+            <a:r>
+              <a:rPr sz="1350" b="1">
                 <a:solidFill>
                   <a:srgbClr val="28685E"/>
                 </a:solidFill>
+                <a:latin typeface="Calibri"/>
+                <a:ea typeface="Calibri"/>
+                <a:cs typeface="Calibri"/>
               </a:rPr>
               <a:t>MADE BY MATT  /  GROW SCIENCE</a:t>
             </a:r>
@@ -5553,34 +7391,43 @@
         </p:nvSpPr>
         <p:spPr>
           <a:xfrm xmlns:a="http://schemas.openxmlformats.org/drawingml/2006/main">
-            <a:off x="609600" y="1352550"/>
-            <a:ext cx="10972800" cy="952500"/>
-          </a:xfrm>
-          <a:prstGeom xmlns:a="http://schemas.openxmlformats.org/drawingml/2006/main" prst="rect">
-            <a:avLst/>
-          </a:prstGeom>
-          <a:noFill xmlns:a="http://schemas.openxmlformats.org/drawingml/2006/main"/>
-          <a:ln xmlns:a="http://schemas.openxmlformats.org/drawingml/2006/main" w="0">
-            <a:noFill/>
-            <a:prstDash val="solid"/>
-          </a:ln>
-        </p:spPr>
-        <p:txBody>
-          <a:bodyPr xmlns:a="http://schemas.openxmlformats.org/drawingml/2006/main" lIns="0" tIns="0" rIns="0" bIns="0" anchor="ctr"/>
-          <a:lstStyle xmlns:a="http://schemas.openxmlformats.org/drawingml/2006/main"/>
-          <a:p xmlns:a="http://schemas.openxmlformats.org/drawingml/2006/main">
-            <a:pPr>
-              <a:defRPr sz="3750" b="1">
+            <a:off x="609600" y="990600"/>
+            <a:ext cx="10972800" cy="1000125"/>
+          </a:xfrm>
+          <a:prstGeom xmlns:a="http://schemas.openxmlformats.org/drawingml/2006/main" prst="rect">
+            <a:avLst/>
+          </a:prstGeom>
+          <a:noFill xmlns:a="http://schemas.openxmlformats.org/drawingml/2006/main"/>
+          <a:ln xmlns:a="http://schemas.openxmlformats.org/drawingml/2006/main" w="0">
+            <a:noFill/>
+            <a:prstDash val="solid"/>
+          </a:ln>
+        </p:spPr>
+        <p:txBody>
+          <a:bodyPr xmlns:a="http://schemas.openxmlformats.org/drawingml/2006/main" lIns="0" tIns="0" rIns="0" bIns="0" anchor="ctr">
+            <a:noAutofit/>
+          </a:bodyPr>
+          <a:lstStyle xmlns:a="http://schemas.openxmlformats.org/drawingml/2006/main"/>
+          <a:p xmlns:a="http://schemas.openxmlformats.org/drawingml/2006/main">
+            <a:pPr algn="l">
+              <a:buNone/>
+              <a:defRPr sz="3675" b="1">
                 <a:solidFill>
                   <a:srgbClr val="152B3A"/>
                 </a:solidFill>
-              </a:defRPr>
-            </a:pPr>
-            <a:r>
-              <a:rPr sz="3750" b="1">
+                <a:latin typeface="Calibri"/>
+                <a:ea typeface="Calibri"/>
+                <a:cs typeface="Calibri"/>
+              </a:defRPr>
+            </a:pPr>
+            <a:r>
+              <a:rPr sz="3675" b="1">
                 <a:solidFill>
                   <a:srgbClr val="152B3A"/>
                 </a:solidFill>
+                <a:latin typeface="Calibri"/>
+                <a:ea typeface="Calibri"/>
+                <a:cs typeface="Calibri"/>
               </a:rPr>
               <a:t>Choose a route and set up</a:t>
             </a:r>
@@ -5603,14 +7450,14 @@
         </p:nvSpPr>
         <p:spPr>
           <a:xfrm xmlns:a="http://schemas.openxmlformats.org/drawingml/2006/main">
-            <a:off x="609600" y="6219825"/>
+            <a:off x="609600" y="6191250"/>
             <a:ext cx="10972800" cy="9525"/>
           </a:xfrm>
           <a:prstGeom xmlns:a="http://schemas.openxmlformats.org/drawingml/2006/main" prst="rect">
             <a:avLst/>
           </a:prstGeom>
           <a:solidFill xmlns:a="http://schemas.openxmlformats.org/drawingml/2006/main">
-            <a:srgbClr val="DCE7DD"/>
+            <a:srgbClr val="CEDBD3"/>
           </a:solidFill>
           <a:ln xmlns:a="http://schemas.openxmlformats.org/drawingml/2006/main" w="0">
             <a:noFill/>
@@ -5634,34 +7481,43 @@
         </p:nvSpPr>
         <p:spPr>
           <a:xfrm xmlns:a="http://schemas.openxmlformats.org/drawingml/2006/main">
-            <a:off x="609600" y="6381750"/>
-            <a:ext cx="9906000" cy="228600"/>
-          </a:xfrm>
-          <a:prstGeom xmlns:a="http://schemas.openxmlformats.org/drawingml/2006/main" prst="rect">
-            <a:avLst/>
-          </a:prstGeom>
-          <a:noFill xmlns:a="http://schemas.openxmlformats.org/drawingml/2006/main"/>
-          <a:ln xmlns:a="http://schemas.openxmlformats.org/drawingml/2006/main" w="0">
-            <a:noFill/>
-            <a:prstDash val="solid"/>
-          </a:ln>
-        </p:spPr>
-        <p:txBody>
-          <a:bodyPr xmlns:a="http://schemas.openxmlformats.org/drawingml/2006/main" lIns="0" tIns="0" rIns="0" bIns="0" anchor="ctr"/>
-          <a:lstStyle xmlns:a="http://schemas.openxmlformats.org/drawingml/2006/main"/>
-          <a:p xmlns:a="http://schemas.openxmlformats.org/drawingml/2006/main">
-            <a:pPr>
-              <a:defRPr sz="1275" b="0">
+            <a:off x="609600" y="6419850"/>
+            <a:ext cx="9525000" cy="219075"/>
+          </a:xfrm>
+          <a:prstGeom xmlns:a="http://schemas.openxmlformats.org/drawingml/2006/main" prst="rect">
+            <a:avLst/>
+          </a:prstGeom>
+          <a:noFill xmlns:a="http://schemas.openxmlformats.org/drawingml/2006/main"/>
+          <a:ln xmlns:a="http://schemas.openxmlformats.org/drawingml/2006/main" w="0">
+            <a:noFill/>
+            <a:prstDash val="solid"/>
+          </a:ln>
+        </p:spPr>
+        <p:txBody>
+          <a:bodyPr xmlns:a="http://schemas.openxmlformats.org/drawingml/2006/main" lIns="0" tIns="0" rIns="0" bIns="0" anchor="ctr">
+            <a:noAutofit/>
+          </a:bodyPr>
+          <a:lstStyle xmlns:a="http://schemas.openxmlformats.org/drawingml/2006/main"/>
+          <a:p xmlns:a="http://schemas.openxmlformats.org/drawingml/2006/main">
+            <a:pPr algn="l">
+              <a:buNone/>
+              <a:defRPr sz="1200" b="0">
                 <a:solidFill>
                   <a:srgbClr val="50616B"/>
                 </a:solidFill>
-              </a:defRPr>
-            </a:pPr>
-            <a:r>
-              <a:rPr sz="1275" b="0">
+                <a:latin typeface="Calibri"/>
+                <a:ea typeface="Calibri"/>
+                <a:cs typeface="Calibri"/>
+              </a:defRPr>
+            </a:pPr>
+            <a:r>
+              <a:rPr sz="1200" b="0">
                 <a:solidFill>
                   <a:srgbClr val="50616B"/>
                 </a:solidFill>
+                <a:latin typeface="Calibri"/>
+                <a:ea typeface="Calibri"/>
+                <a:cs typeface="Calibri"/>
               </a:rPr>
               <a:t>AUTUMN 1  ·  WEEK 6  ·  LESSON B</a:t>
             </a:r>
@@ -5684,27 +7540,33 @@
         </p:nvSpPr>
         <p:spPr>
           <a:xfrm xmlns:a="http://schemas.openxmlformats.org/drawingml/2006/main">
-            <a:off x="11106150" y="6362700"/>
-            <a:ext cx="476250" cy="238125"/>
-          </a:xfrm>
-          <a:prstGeom xmlns:a="http://schemas.openxmlformats.org/drawingml/2006/main" prst="rect">
-            <a:avLst/>
-          </a:prstGeom>
-          <a:noFill xmlns:a="http://schemas.openxmlformats.org/drawingml/2006/main"/>
-          <a:ln xmlns:a="http://schemas.openxmlformats.org/drawingml/2006/main" w="0">
-            <a:noFill/>
-            <a:prstDash val="solid"/>
-          </a:ln>
-        </p:spPr>
-        <p:txBody>
-          <a:bodyPr xmlns:a="http://schemas.openxmlformats.org/drawingml/2006/main" lIns="0" tIns="0" rIns="0" bIns="0" anchor="ctr"/>
-          <a:lstStyle xmlns:a="http://schemas.openxmlformats.org/drawingml/2006/main"/>
-          <a:p xmlns:a="http://schemas.openxmlformats.org/drawingml/2006/main">
-            <a:pPr>
+            <a:off x="11106150" y="6400800"/>
+            <a:ext cx="476250" cy="247650"/>
+          </a:xfrm>
+          <a:prstGeom xmlns:a="http://schemas.openxmlformats.org/drawingml/2006/main" prst="rect">
+            <a:avLst/>
+          </a:prstGeom>
+          <a:noFill xmlns:a="http://schemas.openxmlformats.org/drawingml/2006/main"/>
+          <a:ln xmlns:a="http://schemas.openxmlformats.org/drawingml/2006/main" w="0">
+            <a:noFill/>
+            <a:prstDash val="solid"/>
+          </a:ln>
+        </p:spPr>
+        <p:txBody>
+          <a:bodyPr xmlns:a="http://schemas.openxmlformats.org/drawingml/2006/main" lIns="0" tIns="0" rIns="0" bIns="0" anchor="ctr">
+            <a:noAutofit/>
+          </a:bodyPr>
+          <a:lstStyle xmlns:a="http://schemas.openxmlformats.org/drawingml/2006/main"/>
+          <a:p xmlns:a="http://schemas.openxmlformats.org/drawingml/2006/main">
+            <a:pPr algn="l">
+              <a:buNone/>
               <a:defRPr sz="1350" b="1">
                 <a:solidFill>
                   <a:srgbClr val="28685E"/>
                 </a:solidFill>
+                <a:latin typeface="Calibri"/>
+                <a:ea typeface="Calibri"/>
+                <a:cs typeface="Calibri"/>
               </a:defRPr>
             </a:pPr>
             <a:r>
@@ -5712,6 +7574,9 @@
                 <a:solidFill>
                   <a:srgbClr val="28685E"/>
                 </a:solidFill>
+                <a:latin typeface="Calibri"/>
+                <a:ea typeface="Calibri"/>
+                <a:cs typeface="Calibri"/>
               </a:rPr>
               <a:t>03</a:t>
             </a:r>
@@ -5734,34 +7599,43 @@
         </p:nvSpPr>
         <p:spPr>
           <a:xfrm xmlns:a="http://schemas.openxmlformats.org/drawingml/2006/main">
-            <a:off x="609600" y="2619375"/>
-            <a:ext cx="10972800" cy="781050"/>
-          </a:xfrm>
-          <a:prstGeom xmlns:a="http://schemas.openxmlformats.org/drawingml/2006/main" prst="rect">
-            <a:avLst/>
-          </a:prstGeom>
-          <a:noFill xmlns:a="http://schemas.openxmlformats.org/drawingml/2006/main"/>
-          <a:ln xmlns:a="http://schemas.openxmlformats.org/drawingml/2006/main" w="0">
-            <a:noFill/>
-            <a:prstDash val="solid"/>
-          </a:ln>
-        </p:spPr>
-        <p:txBody>
-          <a:bodyPr xmlns:a="http://schemas.openxmlformats.org/drawingml/2006/main" lIns="0" tIns="0" rIns="0" bIns="0" anchor="ctr"/>
-          <a:lstStyle xmlns:a="http://schemas.openxmlformats.org/drawingml/2006/main"/>
-          <a:p xmlns:a="http://schemas.openxmlformats.org/drawingml/2006/main">
-            <a:pPr>
-              <a:defRPr sz="2550" b="0">
+            <a:off x="1000125" y="2333625"/>
+            <a:ext cx="10382250" cy="1076325"/>
+          </a:xfrm>
+          <a:prstGeom xmlns:a="http://schemas.openxmlformats.org/drawingml/2006/main" prst="rect">
+            <a:avLst/>
+          </a:prstGeom>
+          <a:noFill xmlns:a="http://schemas.openxmlformats.org/drawingml/2006/main"/>
+          <a:ln xmlns:a="http://schemas.openxmlformats.org/drawingml/2006/main" w="0">
+            <a:noFill/>
+            <a:prstDash val="solid"/>
+          </a:ln>
+        </p:spPr>
+        <p:txBody>
+          <a:bodyPr xmlns:a="http://schemas.openxmlformats.org/drawingml/2006/main" lIns="0" tIns="0" rIns="0" bIns="0" anchor="ctr">
+            <a:noAutofit/>
+          </a:bodyPr>
+          <a:lstStyle xmlns:a="http://schemas.openxmlformats.org/drawingml/2006/main"/>
+          <a:p xmlns:a="http://schemas.openxmlformats.org/drawingml/2006/main">
+            <a:pPr algn="l">
+              <a:buNone/>
+              <a:defRPr sz="2625" b="0">
                 <a:solidFill>
                   <a:srgbClr val="152B3A"/>
                 </a:solidFill>
-              </a:defRPr>
-            </a:pPr>
-            <a:r>
-              <a:rPr sz="2550" b="0">
+                <a:latin typeface="Calibri"/>
+                <a:ea typeface="Calibri"/>
+                <a:cs typeface="Calibri"/>
+              </a:defRPr>
+            </a:pPr>
+            <a:r>
+              <a:rPr sz="2625" b="0">
                 <a:solidFill>
                   <a:srgbClr val="152B3A"/>
                 </a:solidFill>
+                <a:latin typeface="Calibri"/>
+                <a:ea typeface="Calibri"/>
+                <a:cs typeface="Calibri"/>
               </a:rPr>
               <a:t>Use Sun/Earth labels, counters, two paper arrows and the year table.</a:t>
             </a:r>
@@ -5784,34 +7658,43 @@
         </p:nvSpPr>
         <p:spPr>
           <a:xfrm xmlns:a="http://schemas.openxmlformats.org/drawingml/2006/main">
-            <a:off x="609600" y="3476625"/>
-            <a:ext cx="10972800" cy="781050"/>
-          </a:xfrm>
-          <a:prstGeom xmlns:a="http://schemas.openxmlformats.org/drawingml/2006/main" prst="rect">
-            <a:avLst/>
-          </a:prstGeom>
-          <a:noFill xmlns:a="http://schemas.openxmlformats.org/drawingml/2006/main"/>
-          <a:ln xmlns:a="http://schemas.openxmlformats.org/drawingml/2006/main" w="0">
-            <a:noFill/>
-            <a:prstDash val="solid"/>
-          </a:ln>
-        </p:spPr>
-        <p:txBody>
-          <a:bodyPr xmlns:a="http://schemas.openxmlformats.org/drawingml/2006/main" lIns="0" tIns="0" rIns="0" bIns="0" anchor="ctr"/>
-          <a:lstStyle xmlns:a="http://schemas.openxmlformats.org/drawingml/2006/main"/>
-          <a:p xmlns:a="http://schemas.openxmlformats.org/drawingml/2006/main">
-            <a:pPr>
-              <a:defRPr sz="2550" b="0">
+            <a:off x="1000125" y="3467100"/>
+            <a:ext cx="10382250" cy="1076325"/>
+          </a:xfrm>
+          <a:prstGeom xmlns:a="http://schemas.openxmlformats.org/drawingml/2006/main" prst="rect">
+            <a:avLst/>
+          </a:prstGeom>
+          <a:noFill xmlns:a="http://schemas.openxmlformats.org/drawingml/2006/main"/>
+          <a:ln xmlns:a="http://schemas.openxmlformats.org/drawingml/2006/main" w="0">
+            <a:noFill/>
+            <a:prstDash val="solid"/>
+          </a:ln>
+        </p:spPr>
+        <p:txBody>
+          <a:bodyPr xmlns:a="http://schemas.openxmlformats.org/drawingml/2006/main" lIns="0" tIns="0" rIns="0" bIns="0" anchor="ctr">
+            <a:noAutofit/>
+          </a:bodyPr>
+          <a:lstStyle xmlns:a="http://schemas.openxmlformats.org/drawingml/2006/main"/>
+          <a:p xmlns:a="http://schemas.openxmlformats.org/drawingml/2006/main">
+            <a:pPr algn="l">
+              <a:buNone/>
+              <a:defRPr sz="2625" b="0">
                 <a:solidFill>
                   <a:srgbClr val="152B3A"/>
                 </a:solidFill>
-              </a:defRPr>
-            </a:pPr>
-            <a:r>
-              <a:rPr sz="2550" b="0">
+                <a:latin typeface="Calibri"/>
+                <a:ea typeface="Calibri"/>
+                <a:cs typeface="Calibri"/>
+              </a:defRPr>
+            </a:pPr>
+            <a:r>
+              <a:rPr sz="2625" b="0">
                 <a:solidFill>
                   <a:srgbClr val="152B3A"/>
                 </a:solidFill>
+                <a:latin typeface="Calibri"/>
+                <a:ea typeface="Calibri"/>
+                <a:cs typeface="Calibri"/>
               </a:rPr>
               <a:t>Choose desk model, drawing, or directing an adult.</a:t>
             </a:r>
@@ -5834,36 +7717,276 @@
         </p:nvSpPr>
         <p:spPr>
           <a:xfrm xmlns:a="http://schemas.openxmlformats.org/drawingml/2006/main">
-            <a:off x="609600" y="4333875"/>
-            <a:ext cx="10972800" cy="781050"/>
-          </a:xfrm>
-          <a:prstGeom xmlns:a="http://schemas.openxmlformats.org/drawingml/2006/main" prst="rect">
-            <a:avLst/>
-          </a:prstGeom>
-          <a:noFill xmlns:a="http://schemas.openxmlformats.org/drawingml/2006/main"/>
-          <a:ln xmlns:a="http://schemas.openxmlformats.org/drawingml/2006/main" w="0">
-            <a:noFill/>
-            <a:prstDash val="solid"/>
-          </a:ln>
-        </p:spPr>
-        <p:txBody>
-          <a:bodyPr xmlns:a="http://schemas.openxmlformats.org/drawingml/2006/main" lIns="0" tIns="0" rIns="0" bIns="0" anchor="ctr"/>
-          <a:lstStyle xmlns:a="http://schemas.openxmlformats.org/drawingml/2006/main"/>
-          <a:p xmlns:a="http://schemas.openxmlformats.org/drawingml/2006/main">
-            <a:pPr>
-              <a:defRPr sz="2550" b="0">
+            <a:off x="1000125" y="4600575"/>
+            <a:ext cx="10382250" cy="1076325"/>
+          </a:xfrm>
+          <a:prstGeom xmlns:a="http://schemas.openxmlformats.org/drawingml/2006/main" prst="rect">
+            <a:avLst/>
+          </a:prstGeom>
+          <a:noFill xmlns:a="http://schemas.openxmlformats.org/drawingml/2006/main"/>
+          <a:ln xmlns:a="http://schemas.openxmlformats.org/drawingml/2006/main" w="0">
+            <a:noFill/>
+            <a:prstDash val="solid"/>
+          </a:ln>
+        </p:spPr>
+        <p:txBody>
+          <a:bodyPr xmlns:a="http://schemas.openxmlformats.org/drawingml/2006/main" lIns="0" tIns="0" rIns="0" bIns="0" anchor="ctr">
+            <a:noAutofit/>
+          </a:bodyPr>
+          <a:lstStyle xmlns:a="http://schemas.openxmlformats.org/drawingml/2006/main"/>
+          <a:p xmlns:a="http://schemas.openxmlformats.org/drawingml/2006/main">
+            <a:pPr algn="l">
+              <a:buNone/>
+              <a:defRPr sz="2625" b="0">
                 <a:solidFill>
                   <a:srgbClr val="152B3A"/>
                 </a:solidFill>
-              </a:defRPr>
-            </a:pPr>
-            <a:r>
-              <a:rPr sz="2550" b="0">
+                <a:latin typeface="Calibri"/>
+                <a:ea typeface="Calibri"/>
+                <a:cs typeface="Calibri"/>
+              </a:defRPr>
+            </a:pPr>
+            <a:r>
+              <a:rPr sz="2625" b="0">
                 <a:solidFill>
                   <a:srgbClr val="152B3A"/>
                 </a:solidFill>
+                <a:latin typeface="Calibri"/>
+                <a:ea typeface="Calibri"/>
+                <a:cs typeface="Calibri"/>
               </a:rPr>
               <a:t>Keep the kit on the desk. No swinging objects.</a:t>
+            </a:r>
+          </a:p>
+        </p:txBody>
+      </p:sp>
+      <p:sp>
+        <p:nvSpPr>
+          <p:cNvPr id="11" name="cue-0">
+            <a:extLst xmlns:a="http://schemas.openxmlformats.org/drawingml/2006/main">
+              <a:ext uri="{FF2B5EF4-FFF2-40B4-BE49-F238E27FC236}">
+                <a16:creationId xmlns:a16="http://schemas.microsoft.com/office/drawing/2014/main" id="{125B0166-4DC0-407B-81BF-45070AC8E3FD}"/>
+              </a:ext>
+            </a:extLst>
+          </p:cNvPr>
+          <p:cNvSpPr>
+            <a:spLocks xmlns:a="http://schemas.openxmlformats.org/drawingml/2006/main" noGrp="1"/>
+          </p:cNvSpPr>
+          <p:nvPr/>
+        </p:nvSpPr>
+        <p:spPr>
+          <a:xfrm xmlns:a="http://schemas.openxmlformats.org/drawingml/2006/main">
+            <a:off x="609600" y="2362200"/>
+            <a:ext cx="323850" cy="323850"/>
+          </a:xfrm>
+          <a:prstGeom xmlns:a="http://schemas.openxmlformats.org/drawingml/2006/main" prst="rect">
+            <a:avLst/>
+          </a:prstGeom>
+          <a:noFill xmlns:a="http://schemas.openxmlformats.org/drawingml/2006/main"/>
+          <a:ln xmlns:a="http://schemas.openxmlformats.org/drawingml/2006/main" w="0">
+            <a:noFill/>
+          </a:ln>
+        </p:spPr>
+        <p:txBody>
+          <a:bodyPr xmlns:a="http://schemas.openxmlformats.org/drawingml/2006/main" lIns="0" tIns="0" rIns="0" bIns="0" anchor="ctr">
+            <a:noAutofit/>
+          </a:bodyPr>
+          <a:lstStyle xmlns:a="http://schemas.openxmlformats.org/drawingml/2006/main"/>
+          <a:p xmlns:a="http://schemas.openxmlformats.org/drawingml/2006/main">
+            <a:pPr algn="l">
+              <a:defRPr sz="1350" b="1">
+                <a:solidFill>
+                  <a:srgbClr val="28685E"/>
+                </a:solidFill>
+                <a:latin typeface="Calibri"/>
+                <a:ea typeface="Calibri"/>
+                <a:cs typeface="Calibri"/>
+              </a:defRPr>
+            </a:pPr>
+            <a:r>
+              <a:rPr sz="1350" b="1">
+                <a:solidFill>
+                  <a:srgbClr val="28685E"/>
+                </a:solidFill>
+                <a:latin typeface="Calibri"/>
+                <a:ea typeface="Calibri"/>
+                <a:cs typeface="Calibri"/>
+              </a:rPr>
+              <a:t>01</a:t>
+            </a:r>
+          </a:p>
+        </p:txBody>
+      </p:sp>
+      <p:sp>
+        <p:nvSpPr>
+          <p:cNvPr id="12" name="row-rule-0">
+            <a:extLst xmlns:a="http://schemas.openxmlformats.org/drawingml/2006/main">
+              <a:ext uri="{FF2B5EF4-FFF2-40B4-BE49-F238E27FC236}">
+                <a16:creationId xmlns:a16="http://schemas.microsoft.com/office/drawing/2014/main" id="{0E7E96D5-9E8F-4847-B350-539067069FD4}"/>
+              </a:ext>
+            </a:extLst>
+          </p:cNvPr>
+          <p:cNvSpPr>
+            <a:spLocks xmlns:a="http://schemas.openxmlformats.org/drawingml/2006/main" noGrp="1"/>
+          </p:cNvSpPr>
+          <p:nvPr/>
+        </p:nvSpPr>
+        <p:spPr>
+          <a:xfrm xmlns:a="http://schemas.openxmlformats.org/drawingml/2006/main">
+            <a:off x="1000125" y="3419475"/>
+            <a:ext cx="10334625" cy="0"/>
+          </a:xfrm>
+          <a:prstGeom xmlns:a="http://schemas.openxmlformats.org/drawingml/2006/main" prst="line">
+            <a:avLst/>
+          </a:prstGeom>
+          <a:noFill xmlns:a="http://schemas.openxmlformats.org/drawingml/2006/main"/>
+          <a:ln xmlns:a="http://schemas.openxmlformats.org/drawingml/2006/main" w="9525">
+            <a:solidFill>
+              <a:srgbClr val="CEDBD3"/>
+            </a:solidFill>
+          </a:ln>
+        </p:spPr>
+      </p:sp>
+      <p:sp>
+        <p:nvSpPr>
+          <p:cNvPr id="13" name="cue-1">
+            <a:extLst xmlns:a="http://schemas.openxmlformats.org/drawingml/2006/main">
+              <a:ext uri="{FF2B5EF4-FFF2-40B4-BE49-F238E27FC236}">
+                <a16:creationId xmlns:a16="http://schemas.microsoft.com/office/drawing/2014/main" id="{83B9040E-A930-4C61-A892-55CFBC75CDCB}"/>
+              </a:ext>
+            </a:extLst>
+          </p:cNvPr>
+          <p:cNvSpPr>
+            <a:spLocks xmlns:a="http://schemas.openxmlformats.org/drawingml/2006/main" noGrp="1"/>
+          </p:cNvSpPr>
+          <p:nvPr/>
+        </p:nvSpPr>
+        <p:spPr>
+          <a:xfrm xmlns:a="http://schemas.openxmlformats.org/drawingml/2006/main">
+            <a:off x="609600" y="3495675"/>
+            <a:ext cx="323850" cy="323850"/>
+          </a:xfrm>
+          <a:prstGeom xmlns:a="http://schemas.openxmlformats.org/drawingml/2006/main" prst="rect">
+            <a:avLst/>
+          </a:prstGeom>
+          <a:noFill xmlns:a="http://schemas.openxmlformats.org/drawingml/2006/main"/>
+          <a:ln xmlns:a="http://schemas.openxmlformats.org/drawingml/2006/main" w="0">
+            <a:noFill/>
+          </a:ln>
+        </p:spPr>
+        <p:txBody>
+          <a:bodyPr xmlns:a="http://schemas.openxmlformats.org/drawingml/2006/main" lIns="0" tIns="0" rIns="0" bIns="0" anchor="ctr">
+            <a:noAutofit/>
+          </a:bodyPr>
+          <a:lstStyle xmlns:a="http://schemas.openxmlformats.org/drawingml/2006/main"/>
+          <a:p xmlns:a="http://schemas.openxmlformats.org/drawingml/2006/main">
+            <a:pPr algn="l">
+              <a:defRPr sz="1350" b="1">
+                <a:solidFill>
+                  <a:srgbClr val="28685E"/>
+                </a:solidFill>
+                <a:latin typeface="Calibri"/>
+                <a:ea typeface="Calibri"/>
+                <a:cs typeface="Calibri"/>
+              </a:defRPr>
+            </a:pPr>
+            <a:r>
+              <a:rPr sz="1350" b="1">
+                <a:solidFill>
+                  <a:srgbClr val="28685E"/>
+                </a:solidFill>
+                <a:latin typeface="Calibri"/>
+                <a:ea typeface="Calibri"/>
+                <a:cs typeface="Calibri"/>
+              </a:rPr>
+              <a:t>02</a:t>
+            </a:r>
+          </a:p>
+        </p:txBody>
+      </p:sp>
+      <p:sp>
+        <p:nvSpPr>
+          <p:cNvPr id="14" name="row-rule-1">
+            <a:extLst xmlns:a="http://schemas.openxmlformats.org/drawingml/2006/main">
+              <a:ext uri="{FF2B5EF4-FFF2-40B4-BE49-F238E27FC236}">
+                <a16:creationId xmlns:a16="http://schemas.microsoft.com/office/drawing/2014/main" id="{0BEF9F72-0574-4491-A4BA-EB96236CA456}"/>
+              </a:ext>
+            </a:extLst>
+          </p:cNvPr>
+          <p:cNvSpPr>
+            <a:spLocks xmlns:a="http://schemas.openxmlformats.org/drawingml/2006/main" noGrp="1"/>
+          </p:cNvSpPr>
+          <p:nvPr/>
+        </p:nvSpPr>
+        <p:spPr>
+          <a:xfrm xmlns:a="http://schemas.openxmlformats.org/drawingml/2006/main">
+            <a:off x="1000125" y="4552950"/>
+            <a:ext cx="10334625" cy="0"/>
+          </a:xfrm>
+          <a:prstGeom xmlns:a="http://schemas.openxmlformats.org/drawingml/2006/main" prst="line">
+            <a:avLst/>
+          </a:prstGeom>
+          <a:noFill xmlns:a="http://schemas.openxmlformats.org/drawingml/2006/main"/>
+          <a:ln xmlns:a="http://schemas.openxmlformats.org/drawingml/2006/main" w="9525">
+            <a:solidFill>
+              <a:srgbClr val="CEDBD3"/>
+            </a:solidFill>
+          </a:ln>
+        </p:spPr>
+      </p:sp>
+      <p:sp>
+        <p:nvSpPr>
+          <p:cNvPr id="15" name="cue-2">
+            <a:extLst xmlns:a="http://schemas.openxmlformats.org/drawingml/2006/main">
+              <a:ext uri="{FF2B5EF4-FFF2-40B4-BE49-F238E27FC236}">
+                <a16:creationId xmlns:a16="http://schemas.microsoft.com/office/drawing/2014/main" id="{657DB44E-6AD7-4FB0-8665-F6E91EC7EC7D}"/>
+              </a:ext>
+            </a:extLst>
+          </p:cNvPr>
+          <p:cNvSpPr>
+            <a:spLocks xmlns:a="http://schemas.openxmlformats.org/drawingml/2006/main" noGrp="1"/>
+          </p:cNvSpPr>
+          <p:nvPr/>
+        </p:nvSpPr>
+        <p:spPr>
+          <a:xfrm xmlns:a="http://schemas.openxmlformats.org/drawingml/2006/main">
+            <a:off x="609600" y="4629150"/>
+            <a:ext cx="323850" cy="323850"/>
+          </a:xfrm>
+          <a:prstGeom xmlns:a="http://schemas.openxmlformats.org/drawingml/2006/main" prst="rect">
+            <a:avLst/>
+          </a:prstGeom>
+          <a:noFill xmlns:a="http://schemas.openxmlformats.org/drawingml/2006/main"/>
+          <a:ln xmlns:a="http://schemas.openxmlformats.org/drawingml/2006/main" w="0">
+            <a:noFill/>
+          </a:ln>
+        </p:spPr>
+        <p:txBody>
+          <a:bodyPr xmlns:a="http://schemas.openxmlformats.org/drawingml/2006/main" lIns="0" tIns="0" rIns="0" bIns="0" anchor="ctr">
+            <a:noAutofit/>
+          </a:bodyPr>
+          <a:lstStyle xmlns:a="http://schemas.openxmlformats.org/drawingml/2006/main"/>
+          <a:p xmlns:a="http://schemas.openxmlformats.org/drawingml/2006/main">
+            <a:pPr algn="l">
+              <a:defRPr sz="1350" b="1">
+                <a:solidFill>
+                  <a:srgbClr val="28685E"/>
+                </a:solidFill>
+                <a:latin typeface="Calibri"/>
+                <a:ea typeface="Calibri"/>
+                <a:cs typeface="Calibri"/>
+              </a:defRPr>
+            </a:pPr>
+            <a:r>
+              <a:rPr sz="1350" b="1">
+                <a:solidFill>
+                  <a:srgbClr val="28685E"/>
+                </a:solidFill>
+                <a:latin typeface="Calibri"/>
+                <a:ea typeface="Calibri"/>
+                <a:cs typeface="Calibri"/>
+              </a:rPr>
+              <a:t>03</a:t>
             </a:r>
           </a:p>
         </p:txBody>
@@ -5884,7 +8007,7 @@
     <p:bg>
       <p:bgPr>
         <a:solidFill xmlns:a="http://schemas.openxmlformats.org/drawingml/2006/main">
-          <a:srgbClr val="F5F1E8"/>
+          <a:srgbClr val="FAF9F5"/>
         </a:solidFill>
       </p:bgPr>
     </p:bg>
@@ -5913,8 +8036,8 @@
         </p:nvSpPr>
         <p:spPr>
           <a:xfrm xmlns:a="http://schemas.openxmlformats.org/drawingml/2006/main">
-            <a:off x="609600" y="552450"/>
-            <a:ext cx="781050" cy="57150"/>
+            <a:off x="609600" y="733425"/>
+            <a:ext cx="781050" cy="38100"/>
           </a:xfrm>
           <a:prstGeom xmlns:a="http://schemas.openxmlformats.org/drawingml/2006/main" prst="rect">
             <a:avLst/>
@@ -5944,34 +8067,43 @@
         </p:nvSpPr>
         <p:spPr>
           <a:xfrm xmlns:a="http://schemas.openxmlformats.org/drawingml/2006/main">
-            <a:off x="609600" y="762000"/>
-            <a:ext cx="8572500" cy="285750"/>
-          </a:xfrm>
-          <a:prstGeom xmlns:a="http://schemas.openxmlformats.org/drawingml/2006/main" prst="rect">
-            <a:avLst/>
-          </a:prstGeom>
-          <a:noFill xmlns:a="http://schemas.openxmlformats.org/drawingml/2006/main"/>
-          <a:ln xmlns:a="http://schemas.openxmlformats.org/drawingml/2006/main" w="0">
-            <a:noFill/>
-            <a:prstDash val="solid"/>
-          </a:ln>
-        </p:spPr>
-        <p:txBody>
-          <a:bodyPr xmlns:a="http://schemas.openxmlformats.org/drawingml/2006/main" lIns="0" tIns="0" rIns="0" bIns="0" anchor="ctr"/>
-          <a:lstStyle xmlns:a="http://schemas.openxmlformats.org/drawingml/2006/main"/>
-          <a:p xmlns:a="http://schemas.openxmlformats.org/drawingml/2006/main">
-            <a:pPr>
-              <a:defRPr sz="1500" b="1">
+            <a:off x="609600" y="342900"/>
+            <a:ext cx="9334500" cy="304800"/>
+          </a:xfrm>
+          <a:prstGeom xmlns:a="http://schemas.openxmlformats.org/drawingml/2006/main" prst="rect">
+            <a:avLst/>
+          </a:prstGeom>
+          <a:noFill xmlns:a="http://schemas.openxmlformats.org/drawingml/2006/main"/>
+          <a:ln xmlns:a="http://schemas.openxmlformats.org/drawingml/2006/main" w="0">
+            <a:noFill/>
+            <a:prstDash val="solid"/>
+          </a:ln>
+        </p:spPr>
+        <p:txBody>
+          <a:bodyPr xmlns:a="http://schemas.openxmlformats.org/drawingml/2006/main" lIns="0" tIns="0" rIns="0" bIns="0" anchor="ctr">
+            <a:noAutofit/>
+          </a:bodyPr>
+          <a:lstStyle xmlns:a="http://schemas.openxmlformats.org/drawingml/2006/main"/>
+          <a:p xmlns:a="http://schemas.openxmlformats.org/drawingml/2006/main">
+            <a:pPr algn="l">
+              <a:buNone/>
+              <a:defRPr sz="1350" b="1">
                 <a:solidFill>
                   <a:srgbClr val="28685E"/>
                 </a:solidFill>
-              </a:defRPr>
-            </a:pPr>
-            <a:r>
-              <a:rPr sz="1500" b="1">
+                <a:latin typeface="Calibri"/>
+                <a:ea typeface="Calibri"/>
+                <a:cs typeface="Calibri"/>
+              </a:defRPr>
+            </a:pPr>
+            <a:r>
+              <a:rPr sz="1350" b="1">
                 <a:solidFill>
                   <a:srgbClr val="28685E"/>
                 </a:solidFill>
+                <a:latin typeface="Calibri"/>
+                <a:ea typeface="Calibri"/>
+                <a:cs typeface="Calibri"/>
               </a:rPr>
               <a:t>MADE BY MATT  /  GROW SCIENCE</a:t>
             </a:r>
@@ -5994,34 +8126,43 @@
         </p:nvSpPr>
         <p:spPr>
           <a:xfrm xmlns:a="http://schemas.openxmlformats.org/drawingml/2006/main">
-            <a:off x="609600" y="1352550"/>
-            <a:ext cx="10972800" cy="952500"/>
-          </a:xfrm>
-          <a:prstGeom xmlns:a="http://schemas.openxmlformats.org/drawingml/2006/main" prst="rect">
-            <a:avLst/>
-          </a:prstGeom>
-          <a:noFill xmlns:a="http://schemas.openxmlformats.org/drawingml/2006/main"/>
-          <a:ln xmlns:a="http://schemas.openxmlformats.org/drawingml/2006/main" w="0">
-            <a:noFill/>
-            <a:prstDash val="solid"/>
-          </a:ln>
-        </p:spPr>
-        <p:txBody>
-          <a:bodyPr xmlns:a="http://schemas.openxmlformats.org/drawingml/2006/main" lIns="0" tIns="0" rIns="0" bIns="0" anchor="ctr"/>
-          <a:lstStyle xmlns:a="http://schemas.openxmlformats.org/drawingml/2006/main"/>
-          <a:p xmlns:a="http://schemas.openxmlformats.org/drawingml/2006/main">
-            <a:pPr>
-              <a:defRPr sz="3750" b="1">
+            <a:off x="609600" y="990600"/>
+            <a:ext cx="10972800" cy="1000125"/>
+          </a:xfrm>
+          <a:prstGeom xmlns:a="http://schemas.openxmlformats.org/drawingml/2006/main" prst="rect">
+            <a:avLst/>
+          </a:prstGeom>
+          <a:noFill xmlns:a="http://schemas.openxmlformats.org/drawingml/2006/main"/>
+          <a:ln xmlns:a="http://schemas.openxmlformats.org/drawingml/2006/main" w="0">
+            <a:noFill/>
+            <a:prstDash val="solid"/>
+          </a:ln>
+        </p:spPr>
+        <p:txBody>
+          <a:bodyPr xmlns:a="http://schemas.openxmlformats.org/drawingml/2006/main" lIns="0" tIns="0" rIns="0" bIns="0" anchor="ctr">
+            <a:noAutofit/>
+          </a:bodyPr>
+          <a:lstStyle xmlns:a="http://schemas.openxmlformats.org/drawingml/2006/main"/>
+          <a:p xmlns:a="http://schemas.openxmlformats.org/drawingml/2006/main">
+            <a:pPr algn="l">
+              <a:buNone/>
+              <a:defRPr sz="3675" b="1">
                 <a:solidFill>
                   <a:srgbClr val="152B3A"/>
                 </a:solidFill>
-              </a:defRPr>
-            </a:pPr>
-            <a:r>
-              <a:rPr sz="3750" b="1">
+                <a:latin typeface="Calibri"/>
+                <a:ea typeface="Calibri"/>
+                <a:cs typeface="Calibri"/>
+              </a:defRPr>
+            </a:pPr>
+            <a:r>
+              <a:rPr sz="3675" b="1">
                 <a:solidFill>
                   <a:srgbClr val="152B3A"/>
                 </a:solidFill>
+                <a:latin typeface="Calibri"/>
+                <a:ea typeface="Calibri"/>
+                <a:cs typeface="Calibri"/>
               </a:rPr>
               <a:t>Two arrows, two meanings</a:t>
             </a:r>
@@ -6044,14 +8185,14 @@
         </p:nvSpPr>
         <p:spPr>
           <a:xfrm xmlns:a="http://schemas.openxmlformats.org/drawingml/2006/main">
-            <a:off x="609600" y="6219825"/>
+            <a:off x="609600" y="6191250"/>
             <a:ext cx="10972800" cy="9525"/>
           </a:xfrm>
           <a:prstGeom xmlns:a="http://schemas.openxmlformats.org/drawingml/2006/main" prst="rect">
             <a:avLst/>
           </a:prstGeom>
           <a:solidFill xmlns:a="http://schemas.openxmlformats.org/drawingml/2006/main">
-            <a:srgbClr val="DCE7DD"/>
+            <a:srgbClr val="CEDBD3"/>
           </a:solidFill>
           <a:ln xmlns:a="http://schemas.openxmlformats.org/drawingml/2006/main" w="0">
             <a:noFill/>
@@ -6075,34 +8216,43 @@
         </p:nvSpPr>
         <p:spPr>
           <a:xfrm xmlns:a="http://schemas.openxmlformats.org/drawingml/2006/main">
-            <a:off x="609600" y="6381750"/>
-            <a:ext cx="9906000" cy="228600"/>
-          </a:xfrm>
-          <a:prstGeom xmlns:a="http://schemas.openxmlformats.org/drawingml/2006/main" prst="rect">
-            <a:avLst/>
-          </a:prstGeom>
-          <a:noFill xmlns:a="http://schemas.openxmlformats.org/drawingml/2006/main"/>
-          <a:ln xmlns:a="http://schemas.openxmlformats.org/drawingml/2006/main" w="0">
-            <a:noFill/>
-            <a:prstDash val="solid"/>
-          </a:ln>
-        </p:spPr>
-        <p:txBody>
-          <a:bodyPr xmlns:a="http://schemas.openxmlformats.org/drawingml/2006/main" lIns="0" tIns="0" rIns="0" bIns="0" anchor="ctr"/>
-          <a:lstStyle xmlns:a="http://schemas.openxmlformats.org/drawingml/2006/main"/>
-          <a:p xmlns:a="http://schemas.openxmlformats.org/drawingml/2006/main">
-            <a:pPr>
-              <a:defRPr sz="1275" b="0">
+            <a:off x="609600" y="6419850"/>
+            <a:ext cx="9525000" cy="219075"/>
+          </a:xfrm>
+          <a:prstGeom xmlns:a="http://schemas.openxmlformats.org/drawingml/2006/main" prst="rect">
+            <a:avLst/>
+          </a:prstGeom>
+          <a:noFill xmlns:a="http://schemas.openxmlformats.org/drawingml/2006/main"/>
+          <a:ln xmlns:a="http://schemas.openxmlformats.org/drawingml/2006/main" w="0">
+            <a:noFill/>
+            <a:prstDash val="solid"/>
+          </a:ln>
+        </p:spPr>
+        <p:txBody>
+          <a:bodyPr xmlns:a="http://schemas.openxmlformats.org/drawingml/2006/main" lIns="0" tIns="0" rIns="0" bIns="0" anchor="ctr">
+            <a:noAutofit/>
+          </a:bodyPr>
+          <a:lstStyle xmlns:a="http://schemas.openxmlformats.org/drawingml/2006/main"/>
+          <a:p xmlns:a="http://schemas.openxmlformats.org/drawingml/2006/main">
+            <a:pPr algn="l">
+              <a:buNone/>
+              <a:defRPr sz="1200" b="0">
                 <a:solidFill>
                   <a:srgbClr val="50616B"/>
                 </a:solidFill>
-              </a:defRPr>
-            </a:pPr>
-            <a:r>
-              <a:rPr sz="1275" b="0">
+                <a:latin typeface="Calibri"/>
+                <a:ea typeface="Calibri"/>
+                <a:cs typeface="Calibri"/>
+              </a:defRPr>
+            </a:pPr>
+            <a:r>
+              <a:rPr sz="1200" b="0">
                 <a:solidFill>
                   <a:srgbClr val="50616B"/>
                 </a:solidFill>
+                <a:latin typeface="Calibri"/>
+                <a:ea typeface="Calibri"/>
+                <a:cs typeface="Calibri"/>
               </a:rPr>
               <a:t>AUTUMN 1  ·  WEEK 6  ·  LESSON B</a:t>
             </a:r>
@@ -6125,27 +8275,33 @@
         </p:nvSpPr>
         <p:spPr>
           <a:xfrm xmlns:a="http://schemas.openxmlformats.org/drawingml/2006/main">
-            <a:off x="11106150" y="6362700"/>
-            <a:ext cx="476250" cy="238125"/>
-          </a:xfrm>
-          <a:prstGeom xmlns:a="http://schemas.openxmlformats.org/drawingml/2006/main" prst="rect">
-            <a:avLst/>
-          </a:prstGeom>
-          <a:noFill xmlns:a="http://schemas.openxmlformats.org/drawingml/2006/main"/>
-          <a:ln xmlns:a="http://schemas.openxmlformats.org/drawingml/2006/main" w="0">
-            <a:noFill/>
-            <a:prstDash val="solid"/>
-          </a:ln>
-        </p:spPr>
-        <p:txBody>
-          <a:bodyPr xmlns:a="http://schemas.openxmlformats.org/drawingml/2006/main" lIns="0" tIns="0" rIns="0" bIns="0" anchor="ctr"/>
-          <a:lstStyle xmlns:a="http://schemas.openxmlformats.org/drawingml/2006/main"/>
-          <a:p xmlns:a="http://schemas.openxmlformats.org/drawingml/2006/main">
-            <a:pPr>
+            <a:off x="11106150" y="6400800"/>
+            <a:ext cx="476250" cy="247650"/>
+          </a:xfrm>
+          <a:prstGeom xmlns:a="http://schemas.openxmlformats.org/drawingml/2006/main" prst="rect">
+            <a:avLst/>
+          </a:prstGeom>
+          <a:noFill xmlns:a="http://schemas.openxmlformats.org/drawingml/2006/main"/>
+          <a:ln xmlns:a="http://schemas.openxmlformats.org/drawingml/2006/main" w="0">
+            <a:noFill/>
+            <a:prstDash val="solid"/>
+          </a:ln>
+        </p:spPr>
+        <p:txBody>
+          <a:bodyPr xmlns:a="http://schemas.openxmlformats.org/drawingml/2006/main" lIns="0" tIns="0" rIns="0" bIns="0" anchor="ctr">
+            <a:noAutofit/>
+          </a:bodyPr>
+          <a:lstStyle xmlns:a="http://schemas.openxmlformats.org/drawingml/2006/main"/>
+          <a:p xmlns:a="http://schemas.openxmlformats.org/drawingml/2006/main">
+            <a:pPr algn="l">
+              <a:buNone/>
               <a:defRPr sz="1350" b="1">
                 <a:solidFill>
                   <a:srgbClr val="28685E"/>
                 </a:solidFill>
+                <a:latin typeface="Calibri"/>
+                <a:ea typeface="Calibri"/>
+                <a:cs typeface="Calibri"/>
               </a:defRPr>
             </a:pPr>
             <a:r>
@@ -6153,6 +8309,9 @@
                 <a:solidFill>
                   <a:srgbClr val="28685E"/>
                 </a:solidFill>
+                <a:latin typeface="Calibri"/>
+                <a:ea typeface="Calibri"/>
+                <a:cs typeface="Calibri"/>
               </a:rPr>
               <a:t>04</a:t>
             </a:r>
@@ -6351,6 +8510,7 @@
           <a:lstStyle xmlns:a="http://schemas.openxmlformats.org/drawingml/2006/main"/>
           <a:p xmlns:a="http://schemas.openxmlformats.org/drawingml/2006/main">
             <a:pPr>
+              <a:buNone/>
               <a:defRPr sz="1950" b="1">
                 <a:solidFill>
                   <a:srgbClr val="152B3A"/>
@@ -6401,6 +8561,7 @@
           <a:lstStyle xmlns:a="http://schemas.openxmlformats.org/drawingml/2006/main"/>
           <a:p xmlns:a="http://schemas.openxmlformats.org/drawingml/2006/main">
             <a:pPr>
+              <a:buNone/>
               <a:defRPr sz="1950" b="1">
                 <a:solidFill>
                   <a:srgbClr val="152B3A"/>
@@ -6451,6 +8612,7 @@
           <a:lstStyle xmlns:a="http://schemas.openxmlformats.org/drawingml/2006/main"/>
           <a:p xmlns:a="http://schemas.openxmlformats.org/drawingml/2006/main">
             <a:pPr>
+              <a:buNone/>
               <a:defRPr sz="1800" b="1">
                 <a:solidFill>
                   <a:srgbClr val="A65D25"/>
@@ -6501,6 +8663,7 @@
           <a:lstStyle xmlns:a="http://schemas.openxmlformats.org/drawingml/2006/main"/>
           <a:p xmlns:a="http://schemas.openxmlformats.org/drawingml/2006/main">
             <a:pPr>
+              <a:buNone/>
               <a:defRPr sz="1800" b="1">
                 <a:solidFill>
                   <a:srgbClr val="28685E"/>
@@ -6534,34 +8697,43 @@
         </p:nvSpPr>
         <p:spPr>
           <a:xfrm xmlns:a="http://schemas.openxmlformats.org/drawingml/2006/main">
-            <a:off x="6667500" y="2714625"/>
-            <a:ext cx="4857750" cy="1762125"/>
-          </a:xfrm>
-          <a:prstGeom xmlns:a="http://schemas.openxmlformats.org/drawingml/2006/main" prst="rect">
-            <a:avLst/>
-          </a:prstGeom>
-          <a:noFill xmlns:a="http://schemas.openxmlformats.org/drawingml/2006/main"/>
-          <a:ln xmlns:a="http://schemas.openxmlformats.org/drawingml/2006/main" w="0">
-            <a:noFill/>
-            <a:prstDash val="solid"/>
-          </a:ln>
-        </p:spPr>
-        <p:txBody>
-          <a:bodyPr xmlns:a="http://schemas.openxmlformats.org/drawingml/2006/main" lIns="0" tIns="0" rIns="0" bIns="0" anchor="ctr"/>
-          <a:lstStyle xmlns:a="http://schemas.openxmlformats.org/drawingml/2006/main"/>
-          <a:p xmlns:a="http://schemas.openxmlformats.org/drawingml/2006/main">
-            <a:pPr>
-              <a:defRPr sz="2550" b="1">
+            <a:off x="6667500" y="2476500"/>
+            <a:ext cx="4914900" cy="2095500"/>
+          </a:xfrm>
+          <a:prstGeom xmlns:a="http://schemas.openxmlformats.org/drawingml/2006/main" prst="rect">
+            <a:avLst/>
+          </a:prstGeom>
+          <a:noFill xmlns:a="http://schemas.openxmlformats.org/drawingml/2006/main"/>
+          <a:ln xmlns:a="http://schemas.openxmlformats.org/drawingml/2006/main" w="0">
+            <a:noFill/>
+            <a:prstDash val="solid"/>
+          </a:ln>
+        </p:spPr>
+        <p:txBody>
+          <a:bodyPr xmlns:a="http://schemas.openxmlformats.org/drawingml/2006/main" lIns="0" tIns="0" rIns="0" bIns="0" anchor="ctr">
+            <a:noAutofit/>
+          </a:bodyPr>
+          <a:lstStyle xmlns:a="http://schemas.openxmlformats.org/drawingml/2006/main"/>
+          <a:p xmlns:a="http://schemas.openxmlformats.org/drawingml/2006/main">
+            <a:pPr algn="l">
+              <a:buNone/>
+              <a:defRPr sz="2475" b="1">
                 <a:solidFill>
                   <a:srgbClr val="152B3A"/>
                 </a:solidFill>
-              </a:defRPr>
-            </a:pPr>
-            <a:r>
-              <a:rPr sz="2550" b="1">
+                <a:latin typeface="Calibri"/>
+                <a:ea typeface="Calibri"/>
+                <a:cs typeface="Calibri"/>
+              </a:defRPr>
+            </a:pPr>
+            <a:r>
+              <a:rPr sz="2475" b="1">
                 <a:solidFill>
                   <a:srgbClr val="152B3A"/>
                 </a:solidFill>
+                <a:latin typeface="Calibri"/>
+                <a:ea typeface="Calibri"/>
+                <a:cs typeface="Calibri"/>
               </a:rPr>
               <a:t>Place Earth in two positions. Change both arrows each time.</a:t>
             </a:r>
@@ -6584,27 +8756,33 @@
         </p:nvSpPr>
         <p:spPr>
           <a:xfrm xmlns:a="http://schemas.openxmlformats.org/drawingml/2006/main">
-            <a:off x="6667500" y="4714875"/>
-            <a:ext cx="4857750" cy="1000125"/>
-          </a:xfrm>
-          <a:prstGeom xmlns:a="http://schemas.openxmlformats.org/drawingml/2006/main" prst="rect">
-            <a:avLst/>
-          </a:prstGeom>
-          <a:noFill xmlns:a="http://schemas.openxmlformats.org/drawingml/2006/main"/>
-          <a:ln xmlns:a="http://schemas.openxmlformats.org/drawingml/2006/main" w="0">
-            <a:noFill/>
-            <a:prstDash val="solid"/>
-          </a:ln>
-        </p:spPr>
-        <p:txBody>
-          <a:bodyPr xmlns:a="http://schemas.openxmlformats.org/drawingml/2006/main" lIns="0" tIns="0" rIns="0" bIns="0" anchor="ctr"/>
-          <a:lstStyle xmlns:a="http://schemas.openxmlformats.org/drawingml/2006/main"/>
-          <a:p xmlns:a="http://schemas.openxmlformats.org/drawingml/2006/main">
-            <a:pPr>
+            <a:off x="6667500" y="4781550"/>
+            <a:ext cx="4914900" cy="1057275"/>
+          </a:xfrm>
+          <a:prstGeom xmlns:a="http://schemas.openxmlformats.org/drawingml/2006/main" prst="rect">
+            <a:avLst/>
+          </a:prstGeom>
+          <a:noFill xmlns:a="http://schemas.openxmlformats.org/drawingml/2006/main"/>
+          <a:ln xmlns:a="http://schemas.openxmlformats.org/drawingml/2006/main" w="0">
+            <a:noFill/>
+            <a:prstDash val="solid"/>
+          </a:ln>
+        </p:spPr>
+        <p:txBody>
+          <a:bodyPr xmlns:a="http://schemas.openxmlformats.org/drawingml/2006/main" lIns="0" tIns="0" rIns="0" bIns="0" anchor="ctr">
+            <a:noAutofit/>
+          </a:bodyPr>
+          <a:lstStyle xmlns:a="http://schemas.openxmlformats.org/drawingml/2006/main"/>
+          <a:p xmlns:a="http://schemas.openxmlformats.org/drawingml/2006/main">
+            <a:pPr algn="l">
+              <a:buNone/>
               <a:defRPr sz="2175" b="0">
                 <a:solidFill>
                   <a:srgbClr val="28685E"/>
                 </a:solidFill>
+                <a:latin typeface="Calibri"/>
+                <a:ea typeface="Calibri"/>
+                <a:cs typeface="Calibri"/>
               </a:defRPr>
             </a:pPr>
             <a:r>
@@ -6612,6 +8790,9 @@
                 <a:solidFill>
                   <a:srgbClr val="28685E"/>
                 </a:solidFill>
+                <a:latin typeface="Calibri"/>
+                <a:ea typeface="Calibri"/>
+                <a:cs typeface="Calibri"/>
               </a:rPr>
               <a:t>Motion direction is not another force.</a:t>
             </a:r>
@@ -6634,7 +8815,7 @@
     <p:bg>
       <p:bgPr>
         <a:solidFill xmlns:a="http://schemas.openxmlformats.org/drawingml/2006/main">
-          <a:srgbClr val="F5F1E8"/>
+          <a:srgbClr val="FAF9F5"/>
         </a:solidFill>
       </p:bgPr>
     </p:bg>
@@ -6663,8 +8844,8 @@
         </p:nvSpPr>
         <p:spPr>
           <a:xfrm xmlns:a="http://schemas.openxmlformats.org/drawingml/2006/main">
-            <a:off x="609600" y="552450"/>
-            <a:ext cx="781050" cy="57150"/>
+            <a:off x="609600" y="733425"/>
+            <a:ext cx="781050" cy="38100"/>
           </a:xfrm>
           <a:prstGeom xmlns:a="http://schemas.openxmlformats.org/drawingml/2006/main" prst="rect">
             <a:avLst/>
@@ -6694,34 +8875,43 @@
         </p:nvSpPr>
         <p:spPr>
           <a:xfrm xmlns:a="http://schemas.openxmlformats.org/drawingml/2006/main">
-            <a:off x="609600" y="762000"/>
-            <a:ext cx="8572500" cy="285750"/>
-          </a:xfrm>
-          <a:prstGeom xmlns:a="http://schemas.openxmlformats.org/drawingml/2006/main" prst="rect">
-            <a:avLst/>
-          </a:prstGeom>
-          <a:noFill xmlns:a="http://schemas.openxmlformats.org/drawingml/2006/main"/>
-          <a:ln xmlns:a="http://schemas.openxmlformats.org/drawingml/2006/main" w="0">
-            <a:noFill/>
-            <a:prstDash val="solid"/>
-          </a:ln>
-        </p:spPr>
-        <p:txBody>
-          <a:bodyPr xmlns:a="http://schemas.openxmlformats.org/drawingml/2006/main" lIns="0" tIns="0" rIns="0" bIns="0" anchor="ctr"/>
-          <a:lstStyle xmlns:a="http://schemas.openxmlformats.org/drawingml/2006/main"/>
-          <a:p xmlns:a="http://schemas.openxmlformats.org/drawingml/2006/main">
-            <a:pPr>
-              <a:defRPr sz="1500" b="1">
+            <a:off x="609600" y="342900"/>
+            <a:ext cx="9334500" cy="304800"/>
+          </a:xfrm>
+          <a:prstGeom xmlns:a="http://schemas.openxmlformats.org/drawingml/2006/main" prst="rect">
+            <a:avLst/>
+          </a:prstGeom>
+          <a:noFill xmlns:a="http://schemas.openxmlformats.org/drawingml/2006/main"/>
+          <a:ln xmlns:a="http://schemas.openxmlformats.org/drawingml/2006/main" w="0">
+            <a:noFill/>
+            <a:prstDash val="solid"/>
+          </a:ln>
+        </p:spPr>
+        <p:txBody>
+          <a:bodyPr xmlns:a="http://schemas.openxmlformats.org/drawingml/2006/main" lIns="0" tIns="0" rIns="0" bIns="0" anchor="ctr">
+            <a:noAutofit/>
+          </a:bodyPr>
+          <a:lstStyle xmlns:a="http://schemas.openxmlformats.org/drawingml/2006/main"/>
+          <a:p xmlns:a="http://schemas.openxmlformats.org/drawingml/2006/main">
+            <a:pPr algn="l">
+              <a:buNone/>
+              <a:defRPr sz="1350" b="1">
                 <a:solidFill>
                   <a:srgbClr val="28685E"/>
                 </a:solidFill>
-              </a:defRPr>
-            </a:pPr>
-            <a:r>
-              <a:rPr sz="1500" b="1">
+                <a:latin typeface="Calibri"/>
+                <a:ea typeface="Calibri"/>
+                <a:cs typeface="Calibri"/>
+              </a:defRPr>
+            </a:pPr>
+            <a:r>
+              <a:rPr sz="1350" b="1">
                 <a:solidFill>
                   <a:srgbClr val="28685E"/>
                 </a:solidFill>
+                <a:latin typeface="Calibri"/>
+                <a:ea typeface="Calibri"/>
+                <a:cs typeface="Calibri"/>
               </a:rPr>
               <a:t>MADE BY MATT  /  GROW SCIENCE</a:t>
             </a:r>
@@ -6744,34 +8934,43 @@
         </p:nvSpPr>
         <p:spPr>
           <a:xfrm xmlns:a="http://schemas.openxmlformats.org/drawingml/2006/main">
-            <a:off x="609600" y="1352550"/>
-            <a:ext cx="10972800" cy="952500"/>
-          </a:xfrm>
-          <a:prstGeom xmlns:a="http://schemas.openxmlformats.org/drawingml/2006/main" prst="rect">
-            <a:avLst/>
-          </a:prstGeom>
-          <a:noFill xmlns:a="http://schemas.openxmlformats.org/drawingml/2006/main"/>
-          <a:ln xmlns:a="http://schemas.openxmlformats.org/drawingml/2006/main" w="0">
-            <a:noFill/>
-            <a:prstDash val="solid"/>
-          </a:ln>
-        </p:spPr>
-        <p:txBody>
-          <a:bodyPr xmlns:a="http://schemas.openxmlformats.org/drawingml/2006/main" lIns="0" tIns="0" rIns="0" bIns="0" anchor="ctr"/>
-          <a:lstStyle xmlns:a="http://schemas.openxmlformats.org/drawingml/2006/main"/>
-          <a:p xmlns:a="http://schemas.openxmlformats.org/drawingml/2006/main">
-            <a:pPr>
-              <a:defRPr sz="3750" b="1">
+            <a:off x="609600" y="990600"/>
+            <a:ext cx="10972800" cy="1000125"/>
+          </a:xfrm>
+          <a:prstGeom xmlns:a="http://schemas.openxmlformats.org/drawingml/2006/main" prst="rect">
+            <a:avLst/>
+          </a:prstGeom>
+          <a:noFill xmlns:a="http://schemas.openxmlformats.org/drawingml/2006/main"/>
+          <a:ln xmlns:a="http://schemas.openxmlformats.org/drawingml/2006/main" w="0">
+            <a:noFill/>
+            <a:prstDash val="solid"/>
+          </a:ln>
+        </p:spPr>
+        <p:txBody>
+          <a:bodyPr xmlns:a="http://schemas.openxmlformats.org/drawingml/2006/main" lIns="0" tIns="0" rIns="0" bIns="0" anchor="ctr">
+            <a:noAutofit/>
+          </a:bodyPr>
+          <a:lstStyle xmlns:a="http://schemas.openxmlformats.org/drawingml/2006/main"/>
+          <a:p xmlns:a="http://schemas.openxmlformats.org/drawingml/2006/main">
+            <a:pPr algn="l">
+              <a:buNone/>
+              <a:defRPr sz="3675" b="1">
                 <a:solidFill>
                   <a:srgbClr val="152B3A"/>
                 </a:solidFill>
-              </a:defRPr>
-            </a:pPr>
-            <a:r>
-              <a:rPr sz="3750" b="1">
+                <a:latin typeface="Calibri"/>
+                <a:ea typeface="Calibri"/>
+                <a:cs typeface="Calibri"/>
+              </a:defRPr>
+            </a:pPr>
+            <a:r>
+              <a:rPr sz="3675" b="1">
                 <a:solidFill>
                   <a:srgbClr val="152B3A"/>
                 </a:solidFill>
+                <a:latin typeface="Calibri"/>
+                <a:ea typeface="Calibri"/>
+                <a:cs typeface="Calibri"/>
               </a:rPr>
               <a:t>Use the supplied year data</a:t>
             </a:r>
@@ -6794,14 +8993,14 @@
         </p:nvSpPr>
         <p:spPr>
           <a:xfrm xmlns:a="http://schemas.openxmlformats.org/drawingml/2006/main">
-            <a:off x="609600" y="6219825"/>
+            <a:off x="609600" y="6191250"/>
             <a:ext cx="10972800" cy="9525"/>
           </a:xfrm>
           <a:prstGeom xmlns:a="http://schemas.openxmlformats.org/drawingml/2006/main" prst="rect">
             <a:avLst/>
           </a:prstGeom>
           <a:solidFill xmlns:a="http://schemas.openxmlformats.org/drawingml/2006/main">
-            <a:srgbClr val="DCE7DD"/>
+            <a:srgbClr val="CEDBD3"/>
           </a:solidFill>
           <a:ln xmlns:a="http://schemas.openxmlformats.org/drawingml/2006/main" w="0">
             <a:noFill/>
@@ -6825,34 +9024,43 @@
         </p:nvSpPr>
         <p:spPr>
           <a:xfrm xmlns:a="http://schemas.openxmlformats.org/drawingml/2006/main">
-            <a:off x="609600" y="6381750"/>
-            <a:ext cx="9906000" cy="228600"/>
-          </a:xfrm>
-          <a:prstGeom xmlns:a="http://schemas.openxmlformats.org/drawingml/2006/main" prst="rect">
-            <a:avLst/>
-          </a:prstGeom>
-          <a:noFill xmlns:a="http://schemas.openxmlformats.org/drawingml/2006/main"/>
-          <a:ln xmlns:a="http://schemas.openxmlformats.org/drawingml/2006/main" w="0">
-            <a:noFill/>
-            <a:prstDash val="solid"/>
-          </a:ln>
-        </p:spPr>
-        <p:txBody>
-          <a:bodyPr xmlns:a="http://schemas.openxmlformats.org/drawingml/2006/main" lIns="0" tIns="0" rIns="0" bIns="0" anchor="ctr"/>
-          <a:lstStyle xmlns:a="http://schemas.openxmlformats.org/drawingml/2006/main"/>
-          <a:p xmlns:a="http://schemas.openxmlformats.org/drawingml/2006/main">
-            <a:pPr>
-              <a:defRPr sz="1275" b="0">
+            <a:off x="609600" y="6419850"/>
+            <a:ext cx="9525000" cy="219075"/>
+          </a:xfrm>
+          <a:prstGeom xmlns:a="http://schemas.openxmlformats.org/drawingml/2006/main" prst="rect">
+            <a:avLst/>
+          </a:prstGeom>
+          <a:noFill xmlns:a="http://schemas.openxmlformats.org/drawingml/2006/main"/>
+          <a:ln xmlns:a="http://schemas.openxmlformats.org/drawingml/2006/main" w="0">
+            <a:noFill/>
+            <a:prstDash val="solid"/>
+          </a:ln>
+        </p:spPr>
+        <p:txBody>
+          <a:bodyPr xmlns:a="http://schemas.openxmlformats.org/drawingml/2006/main" lIns="0" tIns="0" rIns="0" bIns="0" anchor="ctr">
+            <a:noAutofit/>
+          </a:bodyPr>
+          <a:lstStyle xmlns:a="http://schemas.openxmlformats.org/drawingml/2006/main"/>
+          <a:p xmlns:a="http://schemas.openxmlformats.org/drawingml/2006/main">
+            <a:pPr algn="l">
+              <a:buNone/>
+              <a:defRPr sz="1200" b="0">
                 <a:solidFill>
                   <a:srgbClr val="50616B"/>
                 </a:solidFill>
-              </a:defRPr>
-            </a:pPr>
-            <a:r>
-              <a:rPr sz="1275" b="0">
+                <a:latin typeface="Calibri"/>
+                <a:ea typeface="Calibri"/>
+                <a:cs typeface="Calibri"/>
+              </a:defRPr>
+            </a:pPr>
+            <a:r>
+              <a:rPr sz="1200" b="0">
                 <a:solidFill>
                   <a:srgbClr val="50616B"/>
                 </a:solidFill>
+                <a:latin typeface="Calibri"/>
+                <a:ea typeface="Calibri"/>
+                <a:cs typeface="Calibri"/>
               </a:rPr>
               <a:t>AUTUMN 1  ·  WEEK 6  ·  LESSON B</a:t>
             </a:r>
@@ -6875,27 +9083,33 @@
         </p:nvSpPr>
         <p:spPr>
           <a:xfrm xmlns:a="http://schemas.openxmlformats.org/drawingml/2006/main">
-            <a:off x="11106150" y="6362700"/>
-            <a:ext cx="476250" cy="238125"/>
-          </a:xfrm>
-          <a:prstGeom xmlns:a="http://schemas.openxmlformats.org/drawingml/2006/main" prst="rect">
-            <a:avLst/>
-          </a:prstGeom>
-          <a:noFill xmlns:a="http://schemas.openxmlformats.org/drawingml/2006/main"/>
-          <a:ln xmlns:a="http://schemas.openxmlformats.org/drawingml/2006/main" w="0">
-            <a:noFill/>
-            <a:prstDash val="solid"/>
-          </a:ln>
-        </p:spPr>
-        <p:txBody>
-          <a:bodyPr xmlns:a="http://schemas.openxmlformats.org/drawingml/2006/main" lIns="0" tIns="0" rIns="0" bIns="0" anchor="ctr"/>
-          <a:lstStyle xmlns:a="http://schemas.openxmlformats.org/drawingml/2006/main"/>
-          <a:p xmlns:a="http://schemas.openxmlformats.org/drawingml/2006/main">
-            <a:pPr>
+            <a:off x="11106150" y="6400800"/>
+            <a:ext cx="476250" cy="247650"/>
+          </a:xfrm>
+          <a:prstGeom xmlns:a="http://schemas.openxmlformats.org/drawingml/2006/main" prst="rect">
+            <a:avLst/>
+          </a:prstGeom>
+          <a:noFill xmlns:a="http://schemas.openxmlformats.org/drawingml/2006/main"/>
+          <a:ln xmlns:a="http://schemas.openxmlformats.org/drawingml/2006/main" w="0">
+            <a:noFill/>
+            <a:prstDash val="solid"/>
+          </a:ln>
+        </p:spPr>
+        <p:txBody>
+          <a:bodyPr xmlns:a="http://schemas.openxmlformats.org/drawingml/2006/main" lIns="0" tIns="0" rIns="0" bIns="0" anchor="ctr">
+            <a:noAutofit/>
+          </a:bodyPr>
+          <a:lstStyle xmlns:a="http://schemas.openxmlformats.org/drawingml/2006/main"/>
+          <a:p xmlns:a="http://schemas.openxmlformats.org/drawingml/2006/main">
+            <a:pPr algn="l">
+              <a:buNone/>
               <a:defRPr sz="1350" b="1">
                 <a:solidFill>
                   <a:srgbClr val="28685E"/>
                 </a:solidFill>
+                <a:latin typeface="Calibri"/>
+                <a:ea typeface="Calibri"/>
+                <a:cs typeface="Calibri"/>
               </a:defRPr>
             </a:pPr>
             <a:r>
@@ -6903,6 +9117,9 @@
                 <a:solidFill>
                   <a:srgbClr val="28685E"/>
                 </a:solidFill>
+                <a:latin typeface="Calibri"/>
+                <a:ea typeface="Calibri"/>
+                <a:cs typeface="Calibri"/>
               </a:rPr>
               <a:t>05</a:t>
             </a:r>
@@ -6925,34 +9142,43 @@
         </p:nvSpPr>
         <p:spPr>
           <a:xfrm xmlns:a="http://schemas.openxmlformats.org/drawingml/2006/main">
-            <a:off x="609600" y="2619375"/>
-            <a:ext cx="10972800" cy="533400"/>
-          </a:xfrm>
-          <a:prstGeom xmlns:a="http://schemas.openxmlformats.org/drawingml/2006/main" prst="rect">
-            <a:avLst/>
-          </a:prstGeom>
-          <a:noFill xmlns:a="http://schemas.openxmlformats.org/drawingml/2006/main"/>
-          <a:ln xmlns:a="http://schemas.openxmlformats.org/drawingml/2006/main" w="0">
-            <a:noFill/>
-            <a:prstDash val="solid"/>
-          </a:ln>
-        </p:spPr>
-        <p:txBody>
-          <a:bodyPr xmlns:a="http://schemas.openxmlformats.org/drawingml/2006/main" lIns="0" tIns="0" rIns="0" bIns="0" anchor="ctr"/>
-          <a:lstStyle xmlns:a="http://schemas.openxmlformats.org/drawingml/2006/main"/>
-          <a:p xmlns:a="http://schemas.openxmlformats.org/drawingml/2006/main">
-            <a:pPr>
-              <a:defRPr sz="2175" b="0">
+            <a:off x="1000125" y="2333625"/>
+            <a:ext cx="10382250" cy="622935"/>
+          </a:xfrm>
+          <a:prstGeom xmlns:a="http://schemas.openxmlformats.org/drawingml/2006/main" prst="rect">
+            <a:avLst/>
+          </a:prstGeom>
+          <a:noFill xmlns:a="http://schemas.openxmlformats.org/drawingml/2006/main"/>
+          <a:ln xmlns:a="http://schemas.openxmlformats.org/drawingml/2006/main" w="0">
+            <a:noFill/>
+            <a:prstDash val="solid"/>
+          </a:ln>
+        </p:spPr>
+        <p:txBody>
+          <a:bodyPr xmlns:a="http://schemas.openxmlformats.org/drawingml/2006/main" lIns="0" tIns="0" rIns="0" bIns="0" anchor="ctr">
+            <a:noAutofit/>
+          </a:bodyPr>
+          <a:lstStyle xmlns:a="http://schemas.openxmlformats.org/drawingml/2006/main"/>
+          <a:p xmlns:a="http://schemas.openxmlformats.org/drawingml/2006/main">
+            <a:pPr algn="l">
+              <a:buNone/>
+              <a:defRPr sz="2400" b="0">
                 <a:solidFill>
                   <a:srgbClr val="152B3A"/>
                 </a:solidFill>
-              </a:defRPr>
-            </a:pPr>
-            <a:r>
-              <a:rPr sz="2175" b="0">
+                <a:latin typeface="Calibri"/>
+                <a:ea typeface="Calibri"/>
+                <a:cs typeface="Calibri"/>
+              </a:defRPr>
+            </a:pPr>
+            <a:r>
+              <a:rPr sz="2400" b="0">
                 <a:solidFill>
                   <a:srgbClr val="152B3A"/>
                 </a:solidFill>
+                <a:latin typeface="Calibri"/>
+                <a:ea typeface="Calibri"/>
+                <a:cs typeface="Calibri"/>
               </a:rPr>
               <a:t>Mercury   88 Earth days</a:t>
             </a:r>
@@ -6975,34 +9201,43 @@
         </p:nvSpPr>
         <p:spPr>
           <a:xfrm xmlns:a="http://schemas.openxmlformats.org/drawingml/2006/main">
-            <a:off x="609600" y="3228975"/>
-            <a:ext cx="10972800" cy="533400"/>
-          </a:xfrm>
-          <a:prstGeom xmlns:a="http://schemas.openxmlformats.org/drawingml/2006/main" prst="rect">
-            <a:avLst/>
-          </a:prstGeom>
-          <a:noFill xmlns:a="http://schemas.openxmlformats.org/drawingml/2006/main"/>
-          <a:ln xmlns:a="http://schemas.openxmlformats.org/drawingml/2006/main" w="0">
-            <a:noFill/>
-            <a:prstDash val="solid"/>
-          </a:ln>
-        </p:spPr>
-        <p:txBody>
-          <a:bodyPr xmlns:a="http://schemas.openxmlformats.org/drawingml/2006/main" lIns="0" tIns="0" rIns="0" bIns="0" anchor="ctr"/>
-          <a:lstStyle xmlns:a="http://schemas.openxmlformats.org/drawingml/2006/main"/>
-          <a:p xmlns:a="http://schemas.openxmlformats.org/drawingml/2006/main">
-            <a:pPr>
-              <a:defRPr sz="2175" b="0">
+            <a:off x="1000125" y="3013710"/>
+            <a:ext cx="10382250" cy="622935"/>
+          </a:xfrm>
+          <a:prstGeom xmlns:a="http://schemas.openxmlformats.org/drawingml/2006/main" prst="rect">
+            <a:avLst/>
+          </a:prstGeom>
+          <a:noFill xmlns:a="http://schemas.openxmlformats.org/drawingml/2006/main"/>
+          <a:ln xmlns:a="http://schemas.openxmlformats.org/drawingml/2006/main" w="0">
+            <a:noFill/>
+            <a:prstDash val="solid"/>
+          </a:ln>
+        </p:spPr>
+        <p:txBody>
+          <a:bodyPr xmlns:a="http://schemas.openxmlformats.org/drawingml/2006/main" lIns="0" tIns="0" rIns="0" bIns="0" anchor="ctr">
+            <a:noAutofit/>
+          </a:bodyPr>
+          <a:lstStyle xmlns:a="http://schemas.openxmlformats.org/drawingml/2006/main"/>
+          <a:p xmlns:a="http://schemas.openxmlformats.org/drawingml/2006/main">
+            <a:pPr algn="l">
+              <a:buNone/>
+              <a:defRPr sz="2400" b="0">
                 <a:solidFill>
                   <a:srgbClr val="152B3A"/>
                 </a:solidFill>
-              </a:defRPr>
-            </a:pPr>
-            <a:r>
-              <a:rPr sz="2175" b="0">
+                <a:latin typeface="Calibri"/>
+                <a:ea typeface="Calibri"/>
+                <a:cs typeface="Calibri"/>
+              </a:defRPr>
+            </a:pPr>
+            <a:r>
+              <a:rPr sz="2400" b="0">
                 <a:solidFill>
                   <a:srgbClr val="152B3A"/>
                 </a:solidFill>
+                <a:latin typeface="Calibri"/>
+                <a:ea typeface="Calibri"/>
+                <a:cs typeface="Calibri"/>
               </a:rPr>
               <a:t>Earth   365 Earth days</a:t>
             </a:r>
@@ -7025,34 +9260,43 @@
         </p:nvSpPr>
         <p:spPr>
           <a:xfrm xmlns:a="http://schemas.openxmlformats.org/drawingml/2006/main">
-            <a:off x="609600" y="3838575"/>
-            <a:ext cx="10972800" cy="533400"/>
-          </a:xfrm>
-          <a:prstGeom xmlns:a="http://schemas.openxmlformats.org/drawingml/2006/main" prst="rect">
-            <a:avLst/>
-          </a:prstGeom>
-          <a:noFill xmlns:a="http://schemas.openxmlformats.org/drawingml/2006/main"/>
-          <a:ln xmlns:a="http://schemas.openxmlformats.org/drawingml/2006/main" w="0">
-            <a:noFill/>
-            <a:prstDash val="solid"/>
-          </a:ln>
-        </p:spPr>
-        <p:txBody>
-          <a:bodyPr xmlns:a="http://schemas.openxmlformats.org/drawingml/2006/main" lIns="0" tIns="0" rIns="0" bIns="0" anchor="ctr"/>
-          <a:lstStyle xmlns:a="http://schemas.openxmlformats.org/drawingml/2006/main"/>
-          <a:p xmlns:a="http://schemas.openxmlformats.org/drawingml/2006/main">
-            <a:pPr>
-              <a:defRPr sz="2175" b="0">
+            <a:off x="1000125" y="3693795"/>
+            <a:ext cx="10382250" cy="622935"/>
+          </a:xfrm>
+          <a:prstGeom xmlns:a="http://schemas.openxmlformats.org/drawingml/2006/main" prst="rect">
+            <a:avLst/>
+          </a:prstGeom>
+          <a:noFill xmlns:a="http://schemas.openxmlformats.org/drawingml/2006/main"/>
+          <a:ln xmlns:a="http://schemas.openxmlformats.org/drawingml/2006/main" w="0">
+            <a:noFill/>
+            <a:prstDash val="solid"/>
+          </a:ln>
+        </p:spPr>
+        <p:txBody>
+          <a:bodyPr xmlns:a="http://schemas.openxmlformats.org/drawingml/2006/main" lIns="0" tIns="0" rIns="0" bIns="0" anchor="ctr">
+            <a:noAutofit/>
+          </a:bodyPr>
+          <a:lstStyle xmlns:a="http://schemas.openxmlformats.org/drawingml/2006/main"/>
+          <a:p xmlns:a="http://schemas.openxmlformats.org/drawingml/2006/main">
+            <a:pPr algn="l">
+              <a:buNone/>
+              <a:defRPr sz="2400" b="0">
                 <a:solidFill>
                   <a:srgbClr val="152B3A"/>
                 </a:solidFill>
-              </a:defRPr>
-            </a:pPr>
-            <a:r>
-              <a:rPr sz="2175" b="0">
+                <a:latin typeface="Calibri"/>
+                <a:ea typeface="Calibri"/>
+                <a:cs typeface="Calibri"/>
+              </a:defRPr>
+            </a:pPr>
+            <a:r>
+              <a:rPr sz="2400" b="0">
                 <a:solidFill>
                   <a:srgbClr val="152B3A"/>
                 </a:solidFill>
+                <a:latin typeface="Calibri"/>
+                <a:ea typeface="Calibri"/>
+                <a:cs typeface="Calibri"/>
               </a:rPr>
               <a:t>Mars   687 Earth days</a:t>
             </a:r>
@@ -7075,34 +9319,43 @@
         </p:nvSpPr>
         <p:spPr>
           <a:xfrm xmlns:a="http://schemas.openxmlformats.org/drawingml/2006/main">
-            <a:off x="609600" y="4448175"/>
-            <a:ext cx="10972800" cy="533400"/>
-          </a:xfrm>
-          <a:prstGeom xmlns:a="http://schemas.openxmlformats.org/drawingml/2006/main" prst="rect">
-            <a:avLst/>
-          </a:prstGeom>
-          <a:noFill xmlns:a="http://schemas.openxmlformats.org/drawingml/2006/main"/>
-          <a:ln xmlns:a="http://schemas.openxmlformats.org/drawingml/2006/main" w="0">
-            <a:noFill/>
-            <a:prstDash val="solid"/>
-          </a:ln>
-        </p:spPr>
-        <p:txBody>
-          <a:bodyPr xmlns:a="http://schemas.openxmlformats.org/drawingml/2006/main" lIns="0" tIns="0" rIns="0" bIns="0" anchor="ctr"/>
-          <a:lstStyle xmlns:a="http://schemas.openxmlformats.org/drawingml/2006/main"/>
-          <a:p xmlns:a="http://schemas.openxmlformats.org/drawingml/2006/main">
-            <a:pPr>
-              <a:defRPr sz="2175" b="0">
+            <a:off x="1000125" y="4373880"/>
+            <a:ext cx="10382250" cy="622935"/>
+          </a:xfrm>
+          <a:prstGeom xmlns:a="http://schemas.openxmlformats.org/drawingml/2006/main" prst="rect">
+            <a:avLst/>
+          </a:prstGeom>
+          <a:noFill xmlns:a="http://schemas.openxmlformats.org/drawingml/2006/main"/>
+          <a:ln xmlns:a="http://schemas.openxmlformats.org/drawingml/2006/main" w="0">
+            <a:noFill/>
+            <a:prstDash val="solid"/>
+          </a:ln>
+        </p:spPr>
+        <p:txBody>
+          <a:bodyPr xmlns:a="http://schemas.openxmlformats.org/drawingml/2006/main" lIns="0" tIns="0" rIns="0" bIns="0" anchor="ctr">
+            <a:noAutofit/>
+          </a:bodyPr>
+          <a:lstStyle xmlns:a="http://schemas.openxmlformats.org/drawingml/2006/main"/>
+          <a:p xmlns:a="http://schemas.openxmlformats.org/drawingml/2006/main">
+            <a:pPr algn="l">
+              <a:buNone/>
+              <a:defRPr sz="2400" b="0">
                 <a:solidFill>
                   <a:srgbClr val="152B3A"/>
                 </a:solidFill>
-              </a:defRPr>
-            </a:pPr>
-            <a:r>
-              <a:rPr sz="2175" b="0">
+                <a:latin typeface="Calibri"/>
+                <a:ea typeface="Calibri"/>
+                <a:cs typeface="Calibri"/>
+              </a:defRPr>
+            </a:pPr>
+            <a:r>
+              <a:rPr sz="2400" b="0">
                 <a:solidFill>
                   <a:srgbClr val="152B3A"/>
                 </a:solidFill>
+                <a:latin typeface="Calibri"/>
+                <a:ea typeface="Calibri"/>
+                <a:cs typeface="Calibri"/>
               </a:rPr>
               <a:t>Jupiter   4,333 Earth days</a:t>
             </a:r>
@@ -7125,39 +9378,168 @@
         </p:nvSpPr>
         <p:spPr>
           <a:xfrm xmlns:a="http://schemas.openxmlformats.org/drawingml/2006/main">
-            <a:off x="609600" y="5057775"/>
-            <a:ext cx="10972800" cy="533400"/>
-          </a:xfrm>
-          <a:prstGeom xmlns:a="http://schemas.openxmlformats.org/drawingml/2006/main" prst="rect">
-            <a:avLst/>
-          </a:prstGeom>
-          <a:noFill xmlns:a="http://schemas.openxmlformats.org/drawingml/2006/main"/>
-          <a:ln xmlns:a="http://schemas.openxmlformats.org/drawingml/2006/main" w="0">
-            <a:noFill/>
-            <a:prstDash val="solid"/>
-          </a:ln>
-        </p:spPr>
-        <p:txBody>
-          <a:bodyPr xmlns:a="http://schemas.openxmlformats.org/drawingml/2006/main" lIns="0" tIns="0" rIns="0" bIns="0" anchor="ctr"/>
-          <a:lstStyle xmlns:a="http://schemas.openxmlformats.org/drawingml/2006/main"/>
-          <a:p xmlns:a="http://schemas.openxmlformats.org/drawingml/2006/main">
-            <a:pPr>
-              <a:defRPr sz="2175" b="0">
+            <a:off x="1000125" y="5053965"/>
+            <a:ext cx="10382250" cy="622935"/>
+          </a:xfrm>
+          <a:prstGeom xmlns:a="http://schemas.openxmlformats.org/drawingml/2006/main" prst="rect">
+            <a:avLst/>
+          </a:prstGeom>
+          <a:noFill xmlns:a="http://schemas.openxmlformats.org/drawingml/2006/main"/>
+          <a:ln xmlns:a="http://schemas.openxmlformats.org/drawingml/2006/main" w="0">
+            <a:noFill/>
+            <a:prstDash val="solid"/>
+          </a:ln>
+        </p:spPr>
+        <p:txBody>
+          <a:bodyPr xmlns:a="http://schemas.openxmlformats.org/drawingml/2006/main" lIns="0" tIns="0" rIns="0" bIns="0" anchor="ctr">
+            <a:noAutofit/>
+          </a:bodyPr>
+          <a:lstStyle xmlns:a="http://schemas.openxmlformats.org/drawingml/2006/main"/>
+          <a:p xmlns:a="http://schemas.openxmlformats.org/drawingml/2006/main">
+            <a:pPr algn="l">
+              <a:buNone/>
+              <a:defRPr sz="2400" b="0">
                 <a:solidFill>
                   <a:srgbClr val="152B3A"/>
                 </a:solidFill>
-              </a:defRPr>
-            </a:pPr>
-            <a:r>
-              <a:rPr sz="2175" b="0">
+                <a:latin typeface="Calibri"/>
+                <a:ea typeface="Calibri"/>
+                <a:cs typeface="Calibri"/>
+              </a:defRPr>
+            </a:pPr>
+            <a:r>
+              <a:rPr sz="2400" b="0">
                 <a:solidFill>
                   <a:srgbClr val="152B3A"/>
                 </a:solidFill>
+                <a:latin typeface="Calibri"/>
+                <a:ea typeface="Calibri"/>
+                <a:cs typeface="Calibri"/>
               </a:rPr>
               <a:t>Neptune   60,190 Earth days</a:t>
             </a:r>
           </a:p>
         </p:txBody>
+      </p:sp>
+      <p:sp>
+        <p:nvSpPr>
+          <p:cNvPr id="14" name="row-rule-0">
+            <a:extLst xmlns:a="http://schemas.openxmlformats.org/drawingml/2006/main">
+              <a:ext uri="{FF2B5EF4-FFF2-40B4-BE49-F238E27FC236}">
+                <a16:creationId xmlns:a16="http://schemas.microsoft.com/office/drawing/2014/main" id="{385A4903-C118-4A0E-BC02-61217B03300C}"/>
+              </a:ext>
+            </a:extLst>
+          </p:cNvPr>
+          <p:cNvSpPr>
+            <a:spLocks xmlns:a="http://schemas.openxmlformats.org/drawingml/2006/main" noGrp="1"/>
+          </p:cNvSpPr>
+          <p:nvPr/>
+        </p:nvSpPr>
+        <p:spPr>
+          <a:xfrm xmlns:a="http://schemas.openxmlformats.org/drawingml/2006/main">
+            <a:off x="1000125" y="2966085"/>
+            <a:ext cx="10334625" cy="0"/>
+          </a:xfrm>
+          <a:prstGeom xmlns:a="http://schemas.openxmlformats.org/drawingml/2006/main" prst="line">
+            <a:avLst/>
+          </a:prstGeom>
+          <a:noFill xmlns:a="http://schemas.openxmlformats.org/drawingml/2006/main"/>
+          <a:ln xmlns:a="http://schemas.openxmlformats.org/drawingml/2006/main" w="9525">
+            <a:solidFill>
+              <a:srgbClr val="CEDBD3"/>
+            </a:solidFill>
+          </a:ln>
+        </p:spPr>
+      </p:sp>
+      <p:sp>
+        <p:nvSpPr>
+          <p:cNvPr id="16" name="row-rule-1">
+            <a:extLst xmlns:a="http://schemas.openxmlformats.org/drawingml/2006/main">
+              <a:ext uri="{FF2B5EF4-FFF2-40B4-BE49-F238E27FC236}">
+                <a16:creationId xmlns:a16="http://schemas.microsoft.com/office/drawing/2014/main" id="{2CB4086F-5ED2-4EA4-9241-4CDB7C2337C9}"/>
+              </a:ext>
+            </a:extLst>
+          </p:cNvPr>
+          <p:cNvSpPr>
+            <a:spLocks xmlns:a="http://schemas.openxmlformats.org/drawingml/2006/main" noGrp="1"/>
+          </p:cNvSpPr>
+          <p:nvPr/>
+        </p:nvSpPr>
+        <p:spPr>
+          <a:xfrm xmlns:a="http://schemas.openxmlformats.org/drawingml/2006/main">
+            <a:off x="1000125" y="3646170"/>
+            <a:ext cx="10334625" cy="0"/>
+          </a:xfrm>
+          <a:prstGeom xmlns:a="http://schemas.openxmlformats.org/drawingml/2006/main" prst="line">
+            <a:avLst/>
+          </a:prstGeom>
+          <a:noFill xmlns:a="http://schemas.openxmlformats.org/drawingml/2006/main"/>
+          <a:ln xmlns:a="http://schemas.openxmlformats.org/drawingml/2006/main" w="9525">
+            <a:solidFill>
+              <a:srgbClr val="CEDBD3"/>
+            </a:solidFill>
+          </a:ln>
+        </p:spPr>
+      </p:sp>
+      <p:sp>
+        <p:nvSpPr>
+          <p:cNvPr id="18" name="row-rule-2">
+            <a:extLst xmlns:a="http://schemas.openxmlformats.org/drawingml/2006/main">
+              <a:ext uri="{FF2B5EF4-FFF2-40B4-BE49-F238E27FC236}">
+                <a16:creationId xmlns:a16="http://schemas.microsoft.com/office/drawing/2014/main" id="{475F9425-9094-417E-9D21-3E10779A744C}"/>
+              </a:ext>
+            </a:extLst>
+          </p:cNvPr>
+          <p:cNvSpPr>
+            <a:spLocks xmlns:a="http://schemas.openxmlformats.org/drawingml/2006/main" noGrp="1"/>
+          </p:cNvSpPr>
+          <p:nvPr/>
+        </p:nvSpPr>
+        <p:spPr>
+          <a:xfrm xmlns:a="http://schemas.openxmlformats.org/drawingml/2006/main">
+            <a:off x="1000125" y="4326255"/>
+            <a:ext cx="10334625" cy="0"/>
+          </a:xfrm>
+          <a:prstGeom xmlns:a="http://schemas.openxmlformats.org/drawingml/2006/main" prst="line">
+            <a:avLst/>
+          </a:prstGeom>
+          <a:noFill xmlns:a="http://schemas.openxmlformats.org/drawingml/2006/main"/>
+          <a:ln xmlns:a="http://schemas.openxmlformats.org/drawingml/2006/main" w="9525">
+            <a:solidFill>
+              <a:srgbClr val="CEDBD3"/>
+            </a:solidFill>
+          </a:ln>
+        </p:spPr>
+      </p:sp>
+      <p:sp>
+        <p:nvSpPr>
+          <p:cNvPr id="20" name="row-rule-3">
+            <a:extLst xmlns:a="http://schemas.openxmlformats.org/drawingml/2006/main">
+              <a:ext uri="{FF2B5EF4-FFF2-40B4-BE49-F238E27FC236}">
+                <a16:creationId xmlns:a16="http://schemas.microsoft.com/office/drawing/2014/main" id="{AE675A6E-E633-4A62-A1F2-D9E8EB516172}"/>
+              </a:ext>
+            </a:extLst>
+          </p:cNvPr>
+          <p:cNvSpPr>
+            <a:spLocks xmlns:a="http://schemas.openxmlformats.org/drawingml/2006/main" noGrp="1"/>
+          </p:cNvSpPr>
+          <p:nvPr/>
+        </p:nvSpPr>
+        <p:spPr>
+          <a:xfrm xmlns:a="http://schemas.openxmlformats.org/drawingml/2006/main">
+            <a:off x="1000125" y="5006340"/>
+            <a:ext cx="10334625" cy="0"/>
+          </a:xfrm>
+          <a:prstGeom xmlns:a="http://schemas.openxmlformats.org/drawingml/2006/main" prst="line">
+            <a:avLst/>
+          </a:prstGeom>
+          <a:noFill xmlns:a="http://schemas.openxmlformats.org/drawingml/2006/main"/>
+          <a:ln xmlns:a="http://schemas.openxmlformats.org/drawingml/2006/main" w="9525">
+            <a:solidFill>
+              <a:srgbClr val="CEDBD3"/>
+            </a:solidFill>
+          </a:ln>
+        </p:spPr>
       </p:sp>
     </p:spTree>
     <p:extLst>
@@ -7175,7 +9557,7 @@
     <p:bg>
       <p:bgPr>
         <a:solidFill xmlns:a="http://schemas.openxmlformats.org/drawingml/2006/main">
-          <a:srgbClr val="F5F1E8"/>
+          <a:srgbClr val="FAF9F5"/>
         </a:solidFill>
       </p:bgPr>
     </p:bg>
@@ -7204,8 +9586,8 @@
         </p:nvSpPr>
         <p:spPr>
           <a:xfrm xmlns:a="http://schemas.openxmlformats.org/drawingml/2006/main">
-            <a:off x="609600" y="552450"/>
-            <a:ext cx="781050" cy="57150"/>
+            <a:off x="609600" y="733425"/>
+            <a:ext cx="781050" cy="38100"/>
           </a:xfrm>
           <a:prstGeom xmlns:a="http://schemas.openxmlformats.org/drawingml/2006/main" prst="rect">
             <a:avLst/>
@@ -7235,34 +9617,43 @@
         </p:nvSpPr>
         <p:spPr>
           <a:xfrm xmlns:a="http://schemas.openxmlformats.org/drawingml/2006/main">
-            <a:off x="609600" y="762000"/>
-            <a:ext cx="8572500" cy="285750"/>
-          </a:xfrm>
-          <a:prstGeom xmlns:a="http://schemas.openxmlformats.org/drawingml/2006/main" prst="rect">
-            <a:avLst/>
-          </a:prstGeom>
-          <a:noFill xmlns:a="http://schemas.openxmlformats.org/drawingml/2006/main"/>
-          <a:ln xmlns:a="http://schemas.openxmlformats.org/drawingml/2006/main" w="0">
-            <a:noFill/>
-            <a:prstDash val="solid"/>
-          </a:ln>
-        </p:spPr>
-        <p:txBody>
-          <a:bodyPr xmlns:a="http://schemas.openxmlformats.org/drawingml/2006/main" lIns="0" tIns="0" rIns="0" bIns="0" anchor="ctr"/>
-          <a:lstStyle xmlns:a="http://schemas.openxmlformats.org/drawingml/2006/main"/>
-          <a:p xmlns:a="http://schemas.openxmlformats.org/drawingml/2006/main">
-            <a:pPr>
-              <a:defRPr sz="1500" b="1">
+            <a:off x="609600" y="342900"/>
+            <a:ext cx="9334500" cy="304800"/>
+          </a:xfrm>
+          <a:prstGeom xmlns:a="http://schemas.openxmlformats.org/drawingml/2006/main" prst="rect">
+            <a:avLst/>
+          </a:prstGeom>
+          <a:noFill xmlns:a="http://schemas.openxmlformats.org/drawingml/2006/main"/>
+          <a:ln xmlns:a="http://schemas.openxmlformats.org/drawingml/2006/main" w="0">
+            <a:noFill/>
+            <a:prstDash val="solid"/>
+          </a:ln>
+        </p:spPr>
+        <p:txBody>
+          <a:bodyPr xmlns:a="http://schemas.openxmlformats.org/drawingml/2006/main" lIns="0" tIns="0" rIns="0" bIns="0" anchor="ctr">
+            <a:noAutofit/>
+          </a:bodyPr>
+          <a:lstStyle xmlns:a="http://schemas.openxmlformats.org/drawingml/2006/main"/>
+          <a:p xmlns:a="http://schemas.openxmlformats.org/drawingml/2006/main">
+            <a:pPr algn="l">
+              <a:buNone/>
+              <a:defRPr sz="1350" b="1">
                 <a:solidFill>
                   <a:srgbClr val="28685E"/>
                 </a:solidFill>
-              </a:defRPr>
-            </a:pPr>
-            <a:r>
-              <a:rPr sz="1500" b="1">
+                <a:latin typeface="Calibri"/>
+                <a:ea typeface="Calibri"/>
+                <a:cs typeface="Calibri"/>
+              </a:defRPr>
+            </a:pPr>
+            <a:r>
+              <a:rPr sz="1350" b="1">
                 <a:solidFill>
                   <a:srgbClr val="28685E"/>
                 </a:solidFill>
+                <a:latin typeface="Calibri"/>
+                <a:ea typeface="Calibri"/>
+                <a:cs typeface="Calibri"/>
               </a:rPr>
               <a:t>MADE BY MATT  /  GROW SCIENCE</a:t>
             </a:r>
@@ -7285,34 +9676,43 @@
         </p:nvSpPr>
         <p:spPr>
           <a:xfrm xmlns:a="http://schemas.openxmlformats.org/drawingml/2006/main">
-            <a:off x="609600" y="1352550"/>
-            <a:ext cx="10972800" cy="952500"/>
-          </a:xfrm>
-          <a:prstGeom xmlns:a="http://schemas.openxmlformats.org/drawingml/2006/main" prst="rect">
-            <a:avLst/>
-          </a:prstGeom>
-          <a:noFill xmlns:a="http://schemas.openxmlformats.org/drawingml/2006/main"/>
-          <a:ln xmlns:a="http://schemas.openxmlformats.org/drawingml/2006/main" w="0">
-            <a:noFill/>
-            <a:prstDash val="solid"/>
-          </a:ln>
-        </p:spPr>
-        <p:txBody>
-          <a:bodyPr xmlns:a="http://schemas.openxmlformats.org/drawingml/2006/main" lIns="0" tIns="0" rIns="0" bIns="0" anchor="ctr"/>
-          <a:lstStyle xmlns:a="http://schemas.openxmlformats.org/drawingml/2006/main"/>
-          <a:p xmlns:a="http://schemas.openxmlformats.org/drawingml/2006/main">
-            <a:pPr>
-              <a:defRPr sz="3750" b="1">
+            <a:off x="609600" y="990600"/>
+            <a:ext cx="10972800" cy="1000125"/>
+          </a:xfrm>
+          <a:prstGeom xmlns:a="http://schemas.openxmlformats.org/drawingml/2006/main" prst="rect">
+            <a:avLst/>
+          </a:prstGeom>
+          <a:noFill xmlns:a="http://schemas.openxmlformats.org/drawingml/2006/main"/>
+          <a:ln xmlns:a="http://schemas.openxmlformats.org/drawingml/2006/main" w="0">
+            <a:noFill/>
+            <a:prstDash val="solid"/>
+          </a:ln>
+        </p:spPr>
+        <p:txBody>
+          <a:bodyPr xmlns:a="http://schemas.openxmlformats.org/drawingml/2006/main" lIns="0" tIns="0" rIns="0" bIns="0" anchor="ctr">
+            <a:noAutofit/>
+          </a:bodyPr>
+          <a:lstStyle xmlns:a="http://schemas.openxmlformats.org/drawingml/2006/main"/>
+          <a:p xmlns:a="http://schemas.openxmlformats.org/drawingml/2006/main">
+            <a:pPr algn="l">
+              <a:buNone/>
+              <a:defRPr sz="3675" b="1">
                 <a:solidFill>
                   <a:srgbClr val="152B3A"/>
                 </a:solidFill>
-              </a:defRPr>
-            </a:pPr>
-            <a:r>
-              <a:rPr sz="3750" b="1">
+                <a:latin typeface="Calibri"/>
+                <a:ea typeface="Calibri"/>
+                <a:cs typeface="Calibri"/>
+              </a:defRPr>
+            </a:pPr>
+            <a:r>
+              <a:rPr sz="3675" b="1">
                 <a:solidFill>
                   <a:srgbClr val="152B3A"/>
                 </a:solidFill>
+                <a:latin typeface="Calibri"/>
+                <a:ea typeface="Calibri"/>
+                <a:cs typeface="Calibri"/>
               </a:rPr>
               <a:t>Make a claim, then check it</a:t>
             </a:r>
@@ -7335,14 +9735,14 @@
         </p:nvSpPr>
         <p:spPr>
           <a:xfrm xmlns:a="http://schemas.openxmlformats.org/drawingml/2006/main">
-            <a:off x="609600" y="6219825"/>
+            <a:off x="609600" y="6191250"/>
             <a:ext cx="10972800" cy="9525"/>
           </a:xfrm>
           <a:prstGeom xmlns:a="http://schemas.openxmlformats.org/drawingml/2006/main" prst="rect">
             <a:avLst/>
           </a:prstGeom>
           <a:solidFill xmlns:a="http://schemas.openxmlformats.org/drawingml/2006/main">
-            <a:srgbClr val="DCE7DD"/>
+            <a:srgbClr val="CEDBD3"/>
           </a:solidFill>
           <a:ln xmlns:a="http://schemas.openxmlformats.org/drawingml/2006/main" w="0">
             <a:noFill/>
@@ -7366,34 +9766,43 @@
         </p:nvSpPr>
         <p:spPr>
           <a:xfrm xmlns:a="http://schemas.openxmlformats.org/drawingml/2006/main">
-            <a:off x="609600" y="6381750"/>
-            <a:ext cx="9906000" cy="228600"/>
-          </a:xfrm>
-          <a:prstGeom xmlns:a="http://schemas.openxmlformats.org/drawingml/2006/main" prst="rect">
-            <a:avLst/>
-          </a:prstGeom>
-          <a:noFill xmlns:a="http://schemas.openxmlformats.org/drawingml/2006/main"/>
-          <a:ln xmlns:a="http://schemas.openxmlformats.org/drawingml/2006/main" w="0">
-            <a:noFill/>
-            <a:prstDash val="solid"/>
-          </a:ln>
-        </p:spPr>
-        <p:txBody>
-          <a:bodyPr xmlns:a="http://schemas.openxmlformats.org/drawingml/2006/main" lIns="0" tIns="0" rIns="0" bIns="0" anchor="ctr"/>
-          <a:lstStyle xmlns:a="http://schemas.openxmlformats.org/drawingml/2006/main"/>
-          <a:p xmlns:a="http://schemas.openxmlformats.org/drawingml/2006/main">
-            <a:pPr>
-              <a:defRPr sz="1275" b="0">
+            <a:off x="609600" y="6419850"/>
+            <a:ext cx="9525000" cy="219075"/>
+          </a:xfrm>
+          <a:prstGeom xmlns:a="http://schemas.openxmlformats.org/drawingml/2006/main" prst="rect">
+            <a:avLst/>
+          </a:prstGeom>
+          <a:noFill xmlns:a="http://schemas.openxmlformats.org/drawingml/2006/main"/>
+          <a:ln xmlns:a="http://schemas.openxmlformats.org/drawingml/2006/main" w="0">
+            <a:noFill/>
+            <a:prstDash val="solid"/>
+          </a:ln>
+        </p:spPr>
+        <p:txBody>
+          <a:bodyPr xmlns:a="http://schemas.openxmlformats.org/drawingml/2006/main" lIns="0" tIns="0" rIns="0" bIns="0" anchor="ctr">
+            <a:noAutofit/>
+          </a:bodyPr>
+          <a:lstStyle xmlns:a="http://schemas.openxmlformats.org/drawingml/2006/main"/>
+          <a:p xmlns:a="http://schemas.openxmlformats.org/drawingml/2006/main">
+            <a:pPr algn="l">
+              <a:buNone/>
+              <a:defRPr sz="1200" b="0">
                 <a:solidFill>
                   <a:srgbClr val="50616B"/>
                 </a:solidFill>
-              </a:defRPr>
-            </a:pPr>
-            <a:r>
-              <a:rPr sz="1275" b="0">
+                <a:latin typeface="Calibri"/>
+                <a:ea typeface="Calibri"/>
+                <a:cs typeface="Calibri"/>
+              </a:defRPr>
+            </a:pPr>
+            <a:r>
+              <a:rPr sz="1200" b="0">
                 <a:solidFill>
                   <a:srgbClr val="50616B"/>
                 </a:solidFill>
+                <a:latin typeface="Calibri"/>
+                <a:ea typeface="Calibri"/>
+                <a:cs typeface="Calibri"/>
               </a:rPr>
               <a:t>AUTUMN 1  ·  WEEK 6  ·  LESSON B</a:t>
             </a:r>
@@ -7416,27 +9825,33 @@
         </p:nvSpPr>
         <p:spPr>
           <a:xfrm xmlns:a="http://schemas.openxmlformats.org/drawingml/2006/main">
-            <a:off x="11106150" y="6362700"/>
-            <a:ext cx="476250" cy="238125"/>
-          </a:xfrm>
-          <a:prstGeom xmlns:a="http://schemas.openxmlformats.org/drawingml/2006/main" prst="rect">
-            <a:avLst/>
-          </a:prstGeom>
-          <a:noFill xmlns:a="http://schemas.openxmlformats.org/drawingml/2006/main"/>
-          <a:ln xmlns:a="http://schemas.openxmlformats.org/drawingml/2006/main" w="0">
-            <a:noFill/>
-            <a:prstDash val="solid"/>
-          </a:ln>
-        </p:spPr>
-        <p:txBody>
-          <a:bodyPr xmlns:a="http://schemas.openxmlformats.org/drawingml/2006/main" lIns="0" tIns="0" rIns="0" bIns="0" anchor="ctr"/>
-          <a:lstStyle xmlns:a="http://schemas.openxmlformats.org/drawingml/2006/main"/>
-          <a:p xmlns:a="http://schemas.openxmlformats.org/drawingml/2006/main">
-            <a:pPr>
+            <a:off x="11106150" y="6400800"/>
+            <a:ext cx="476250" cy="247650"/>
+          </a:xfrm>
+          <a:prstGeom xmlns:a="http://schemas.openxmlformats.org/drawingml/2006/main" prst="rect">
+            <a:avLst/>
+          </a:prstGeom>
+          <a:noFill xmlns:a="http://schemas.openxmlformats.org/drawingml/2006/main"/>
+          <a:ln xmlns:a="http://schemas.openxmlformats.org/drawingml/2006/main" w="0">
+            <a:noFill/>
+            <a:prstDash val="solid"/>
+          </a:ln>
+        </p:spPr>
+        <p:txBody>
+          <a:bodyPr xmlns:a="http://schemas.openxmlformats.org/drawingml/2006/main" lIns="0" tIns="0" rIns="0" bIns="0" anchor="ctr">
+            <a:noAutofit/>
+          </a:bodyPr>
+          <a:lstStyle xmlns:a="http://schemas.openxmlformats.org/drawingml/2006/main"/>
+          <a:p xmlns:a="http://schemas.openxmlformats.org/drawingml/2006/main">
+            <a:pPr algn="l">
+              <a:buNone/>
               <a:defRPr sz="1350" b="1">
                 <a:solidFill>
                   <a:srgbClr val="28685E"/>
                 </a:solidFill>
+                <a:latin typeface="Calibri"/>
+                <a:ea typeface="Calibri"/>
+                <a:cs typeface="Calibri"/>
               </a:defRPr>
             </a:pPr>
             <a:r>
@@ -7444,6 +9859,9 @@
                 <a:solidFill>
                   <a:srgbClr val="28685E"/>
                 </a:solidFill>
+                <a:latin typeface="Calibri"/>
+                <a:ea typeface="Calibri"/>
+                <a:cs typeface="Calibri"/>
               </a:rPr>
               <a:t>06</a:t>
             </a:r>
@@ -7466,34 +9884,43 @@
         </p:nvSpPr>
         <p:spPr>
           <a:xfrm xmlns:a="http://schemas.openxmlformats.org/drawingml/2006/main">
-            <a:off x="609600" y="2619375"/>
-            <a:ext cx="10972800" cy="781050"/>
-          </a:xfrm>
-          <a:prstGeom xmlns:a="http://schemas.openxmlformats.org/drawingml/2006/main" prst="rect">
-            <a:avLst/>
-          </a:prstGeom>
-          <a:noFill xmlns:a="http://schemas.openxmlformats.org/drawingml/2006/main"/>
-          <a:ln xmlns:a="http://schemas.openxmlformats.org/drawingml/2006/main" w="0">
-            <a:noFill/>
-            <a:prstDash val="solid"/>
-          </a:ln>
-        </p:spPr>
-        <p:txBody>
-          <a:bodyPr xmlns:a="http://schemas.openxmlformats.org/drawingml/2006/main" lIns="0" tIns="0" rIns="0" bIns="0" anchor="ctr"/>
-          <a:lstStyle xmlns:a="http://schemas.openxmlformats.org/drawingml/2006/main"/>
-          <a:p xmlns:a="http://schemas.openxmlformats.org/drawingml/2006/main">
-            <a:pPr>
-              <a:defRPr sz="2550" b="0">
+            <a:off x="1000125" y="2333625"/>
+            <a:ext cx="10382250" cy="1076325"/>
+          </a:xfrm>
+          <a:prstGeom xmlns:a="http://schemas.openxmlformats.org/drawingml/2006/main" prst="rect">
+            <a:avLst/>
+          </a:prstGeom>
+          <a:noFill xmlns:a="http://schemas.openxmlformats.org/drawingml/2006/main"/>
+          <a:ln xmlns:a="http://schemas.openxmlformats.org/drawingml/2006/main" w="0">
+            <a:noFill/>
+            <a:prstDash val="solid"/>
+          </a:ln>
+        </p:spPr>
+        <p:txBody>
+          <a:bodyPr xmlns:a="http://schemas.openxmlformats.org/drawingml/2006/main" lIns="0" tIns="0" rIns="0" bIns="0" anchor="ctr">
+            <a:noAutofit/>
+          </a:bodyPr>
+          <a:lstStyle xmlns:a="http://schemas.openxmlformats.org/drawingml/2006/main"/>
+          <a:p xmlns:a="http://schemas.openxmlformats.org/drawingml/2006/main">
+            <a:pPr algn="l">
+              <a:buNone/>
+              <a:defRPr sz="2625" b="0">
                 <a:solidFill>
                   <a:srgbClr val="152B3A"/>
                 </a:solidFill>
-              </a:defRPr>
-            </a:pPr>
-            <a:r>
-              <a:rPr sz="2550" b="0">
+                <a:latin typeface="Calibri"/>
+                <a:ea typeface="Calibri"/>
+                <a:cs typeface="Calibri"/>
+              </a:defRPr>
+            </a:pPr>
+            <a:r>
+              <a:rPr sz="2625" b="0">
                 <a:solidFill>
                   <a:srgbClr val="152B3A"/>
                 </a:solidFill>
+                <a:latin typeface="Calibri"/>
+                <a:ea typeface="Calibri"/>
+                <a:cs typeface="Calibri"/>
               </a:rPr>
               <a:t>Choose a pair. Predict which has the longer year.</a:t>
             </a:r>
@@ -7516,34 +9943,43 @@
         </p:nvSpPr>
         <p:spPr>
           <a:xfrm xmlns:a="http://schemas.openxmlformats.org/drawingml/2006/main">
-            <a:off x="609600" y="3476625"/>
-            <a:ext cx="10972800" cy="781050"/>
-          </a:xfrm>
-          <a:prstGeom xmlns:a="http://schemas.openxmlformats.org/drawingml/2006/main" prst="rect">
-            <a:avLst/>
-          </a:prstGeom>
-          <a:noFill xmlns:a="http://schemas.openxmlformats.org/drawingml/2006/main"/>
-          <a:ln xmlns:a="http://schemas.openxmlformats.org/drawingml/2006/main" w="0">
-            <a:noFill/>
-            <a:prstDash val="solid"/>
-          </a:ln>
-        </p:spPr>
-        <p:txBody>
-          <a:bodyPr xmlns:a="http://schemas.openxmlformats.org/drawingml/2006/main" lIns="0" tIns="0" rIns="0" bIns="0" anchor="ctr"/>
-          <a:lstStyle xmlns:a="http://schemas.openxmlformats.org/drawingml/2006/main"/>
-          <a:p xmlns:a="http://schemas.openxmlformats.org/drawingml/2006/main">
-            <a:pPr>
-              <a:defRPr sz="2550" b="0">
+            <a:off x="1000125" y="3467100"/>
+            <a:ext cx="10382250" cy="1076325"/>
+          </a:xfrm>
+          <a:prstGeom xmlns:a="http://schemas.openxmlformats.org/drawingml/2006/main" prst="rect">
+            <a:avLst/>
+          </a:prstGeom>
+          <a:noFill xmlns:a="http://schemas.openxmlformats.org/drawingml/2006/main"/>
+          <a:ln xmlns:a="http://schemas.openxmlformats.org/drawingml/2006/main" w="0">
+            <a:noFill/>
+            <a:prstDash val="solid"/>
+          </a:ln>
+        </p:spPr>
+        <p:txBody>
+          <a:bodyPr xmlns:a="http://schemas.openxmlformats.org/drawingml/2006/main" lIns="0" tIns="0" rIns="0" bIns="0" anchor="ctr">
+            <a:noAutofit/>
+          </a:bodyPr>
+          <a:lstStyle xmlns:a="http://schemas.openxmlformats.org/drawingml/2006/main"/>
+          <a:p xmlns:a="http://schemas.openxmlformats.org/drawingml/2006/main">
+            <a:pPr algn="l">
+              <a:buNone/>
+              <a:defRPr sz="2625" b="0">
                 <a:solidFill>
                   <a:srgbClr val="152B3A"/>
                 </a:solidFill>
-              </a:defRPr>
-            </a:pPr>
-            <a:r>
-              <a:rPr sz="2550" b="0">
+                <a:latin typeface="Calibri"/>
+                <a:ea typeface="Calibri"/>
+                <a:cs typeface="Calibri"/>
+              </a:defRPr>
+            </a:pPr>
+            <a:r>
+              <a:rPr sz="2625" b="0">
                 <a:solidFill>
                   <a:srgbClr val="152B3A"/>
                 </a:solidFill>
+                <a:latin typeface="Calibri"/>
+                <a:ea typeface="Calibri"/>
+                <a:cs typeface="Calibri"/>
               </a:rPr>
               <a:t>Check the numbers and name the evidence.</a:t>
             </a:r>
@@ -7566,36 +10002,276 @@
         </p:nvSpPr>
         <p:spPr>
           <a:xfrm xmlns:a="http://schemas.openxmlformats.org/drawingml/2006/main">
-            <a:off x="609600" y="4333875"/>
-            <a:ext cx="10972800" cy="781050"/>
-          </a:xfrm>
-          <a:prstGeom xmlns:a="http://schemas.openxmlformats.org/drawingml/2006/main" prst="rect">
-            <a:avLst/>
-          </a:prstGeom>
-          <a:noFill xmlns:a="http://schemas.openxmlformats.org/drawingml/2006/main"/>
-          <a:ln xmlns:a="http://schemas.openxmlformats.org/drawingml/2006/main" w="0">
-            <a:noFill/>
-            <a:prstDash val="solid"/>
-          </a:ln>
-        </p:spPr>
-        <p:txBody>
-          <a:bodyPr xmlns:a="http://schemas.openxmlformats.org/drawingml/2006/main" lIns="0" tIns="0" rIns="0" bIns="0" anchor="ctr"/>
-          <a:lstStyle xmlns:a="http://schemas.openxmlformats.org/drawingml/2006/main"/>
-          <a:p xmlns:a="http://schemas.openxmlformats.org/drawingml/2006/main">
-            <a:pPr>
-              <a:defRPr sz="2550" b="0">
+            <a:off x="1000125" y="4600575"/>
+            <a:ext cx="10382250" cy="1076325"/>
+          </a:xfrm>
+          <a:prstGeom xmlns:a="http://schemas.openxmlformats.org/drawingml/2006/main" prst="rect">
+            <a:avLst/>
+          </a:prstGeom>
+          <a:noFill xmlns:a="http://schemas.openxmlformats.org/drawingml/2006/main"/>
+          <a:ln xmlns:a="http://schemas.openxmlformats.org/drawingml/2006/main" w="0">
+            <a:noFill/>
+            <a:prstDash val="solid"/>
+          </a:ln>
+        </p:spPr>
+        <p:txBody>
+          <a:bodyPr xmlns:a="http://schemas.openxmlformats.org/drawingml/2006/main" lIns="0" tIns="0" rIns="0" bIns="0" anchor="ctr">
+            <a:noAutofit/>
+          </a:bodyPr>
+          <a:lstStyle xmlns:a="http://schemas.openxmlformats.org/drawingml/2006/main"/>
+          <a:p xmlns:a="http://schemas.openxmlformats.org/drawingml/2006/main">
+            <a:pPr algn="l">
+              <a:buNone/>
+              <a:defRPr sz="2625" b="0">
                 <a:solidFill>
                   <a:srgbClr val="152B3A"/>
                 </a:solidFill>
-              </a:defRPr>
-            </a:pPr>
-            <a:r>
-              <a:rPr sz="2550" b="0">
+                <a:latin typeface="Calibri"/>
+                <a:ea typeface="Calibri"/>
+                <a:cs typeface="Calibri"/>
+              </a:defRPr>
+            </a:pPr>
+            <a:r>
+              <a:rPr sz="2625" b="0">
                 <a:solidFill>
                   <a:srgbClr val="152B3A"/>
                 </a:solidFill>
+                <a:latin typeface="Calibri"/>
+                <a:ea typeface="Calibri"/>
+                <a:cs typeface="Calibri"/>
               </a:rPr>
               <a:t>Try a second pair or explain one model limit.</a:t>
+            </a:r>
+          </a:p>
+        </p:txBody>
+      </p:sp>
+      <p:sp>
+        <p:nvSpPr>
+          <p:cNvPr id="11" name="cue-0">
+            <a:extLst xmlns:a="http://schemas.openxmlformats.org/drawingml/2006/main">
+              <a:ext uri="{FF2B5EF4-FFF2-40B4-BE49-F238E27FC236}">
+                <a16:creationId xmlns:a16="http://schemas.microsoft.com/office/drawing/2014/main" id="{33F31ECB-1EF5-49C9-8B0E-9991F77CAAD3}"/>
+              </a:ext>
+            </a:extLst>
+          </p:cNvPr>
+          <p:cNvSpPr>
+            <a:spLocks xmlns:a="http://schemas.openxmlformats.org/drawingml/2006/main" noGrp="1"/>
+          </p:cNvSpPr>
+          <p:nvPr/>
+        </p:nvSpPr>
+        <p:spPr>
+          <a:xfrm xmlns:a="http://schemas.openxmlformats.org/drawingml/2006/main">
+            <a:off x="609600" y="2362200"/>
+            <a:ext cx="323850" cy="323850"/>
+          </a:xfrm>
+          <a:prstGeom xmlns:a="http://schemas.openxmlformats.org/drawingml/2006/main" prst="rect">
+            <a:avLst/>
+          </a:prstGeom>
+          <a:noFill xmlns:a="http://schemas.openxmlformats.org/drawingml/2006/main"/>
+          <a:ln xmlns:a="http://schemas.openxmlformats.org/drawingml/2006/main" w="0">
+            <a:noFill/>
+          </a:ln>
+        </p:spPr>
+        <p:txBody>
+          <a:bodyPr xmlns:a="http://schemas.openxmlformats.org/drawingml/2006/main" lIns="0" tIns="0" rIns="0" bIns="0" anchor="ctr">
+            <a:noAutofit/>
+          </a:bodyPr>
+          <a:lstStyle xmlns:a="http://schemas.openxmlformats.org/drawingml/2006/main"/>
+          <a:p xmlns:a="http://schemas.openxmlformats.org/drawingml/2006/main">
+            <a:pPr algn="l">
+              <a:defRPr sz="1350" b="1">
+                <a:solidFill>
+                  <a:srgbClr val="28685E"/>
+                </a:solidFill>
+                <a:latin typeface="Calibri"/>
+                <a:ea typeface="Calibri"/>
+                <a:cs typeface="Calibri"/>
+              </a:defRPr>
+            </a:pPr>
+            <a:r>
+              <a:rPr sz="1350" b="1">
+                <a:solidFill>
+                  <a:srgbClr val="28685E"/>
+                </a:solidFill>
+                <a:latin typeface="Calibri"/>
+                <a:ea typeface="Calibri"/>
+                <a:cs typeface="Calibri"/>
+              </a:rPr>
+              <a:t>01</a:t>
+            </a:r>
+          </a:p>
+        </p:txBody>
+      </p:sp>
+      <p:sp>
+        <p:nvSpPr>
+          <p:cNvPr id="12" name="row-rule-0">
+            <a:extLst xmlns:a="http://schemas.openxmlformats.org/drawingml/2006/main">
+              <a:ext uri="{FF2B5EF4-FFF2-40B4-BE49-F238E27FC236}">
+                <a16:creationId xmlns:a16="http://schemas.microsoft.com/office/drawing/2014/main" id="{71E7C3AF-3FB8-4930-BD9C-B98F0B77D5B2}"/>
+              </a:ext>
+            </a:extLst>
+          </p:cNvPr>
+          <p:cNvSpPr>
+            <a:spLocks xmlns:a="http://schemas.openxmlformats.org/drawingml/2006/main" noGrp="1"/>
+          </p:cNvSpPr>
+          <p:nvPr/>
+        </p:nvSpPr>
+        <p:spPr>
+          <a:xfrm xmlns:a="http://schemas.openxmlformats.org/drawingml/2006/main">
+            <a:off x="1000125" y="3419475"/>
+            <a:ext cx="10334625" cy="0"/>
+          </a:xfrm>
+          <a:prstGeom xmlns:a="http://schemas.openxmlformats.org/drawingml/2006/main" prst="line">
+            <a:avLst/>
+          </a:prstGeom>
+          <a:noFill xmlns:a="http://schemas.openxmlformats.org/drawingml/2006/main"/>
+          <a:ln xmlns:a="http://schemas.openxmlformats.org/drawingml/2006/main" w="9525">
+            <a:solidFill>
+              <a:srgbClr val="CEDBD3"/>
+            </a:solidFill>
+          </a:ln>
+        </p:spPr>
+      </p:sp>
+      <p:sp>
+        <p:nvSpPr>
+          <p:cNvPr id="13" name="cue-1">
+            <a:extLst xmlns:a="http://schemas.openxmlformats.org/drawingml/2006/main">
+              <a:ext uri="{FF2B5EF4-FFF2-40B4-BE49-F238E27FC236}">
+                <a16:creationId xmlns:a16="http://schemas.microsoft.com/office/drawing/2014/main" id="{984AF86A-71D9-4DCD-9992-98CA4ADD0B53}"/>
+              </a:ext>
+            </a:extLst>
+          </p:cNvPr>
+          <p:cNvSpPr>
+            <a:spLocks xmlns:a="http://schemas.openxmlformats.org/drawingml/2006/main" noGrp="1"/>
+          </p:cNvSpPr>
+          <p:nvPr/>
+        </p:nvSpPr>
+        <p:spPr>
+          <a:xfrm xmlns:a="http://schemas.openxmlformats.org/drawingml/2006/main">
+            <a:off x="609600" y="3495675"/>
+            <a:ext cx="323850" cy="323850"/>
+          </a:xfrm>
+          <a:prstGeom xmlns:a="http://schemas.openxmlformats.org/drawingml/2006/main" prst="rect">
+            <a:avLst/>
+          </a:prstGeom>
+          <a:noFill xmlns:a="http://schemas.openxmlformats.org/drawingml/2006/main"/>
+          <a:ln xmlns:a="http://schemas.openxmlformats.org/drawingml/2006/main" w="0">
+            <a:noFill/>
+          </a:ln>
+        </p:spPr>
+        <p:txBody>
+          <a:bodyPr xmlns:a="http://schemas.openxmlformats.org/drawingml/2006/main" lIns="0" tIns="0" rIns="0" bIns="0" anchor="ctr">
+            <a:noAutofit/>
+          </a:bodyPr>
+          <a:lstStyle xmlns:a="http://schemas.openxmlformats.org/drawingml/2006/main"/>
+          <a:p xmlns:a="http://schemas.openxmlformats.org/drawingml/2006/main">
+            <a:pPr algn="l">
+              <a:defRPr sz="1350" b="1">
+                <a:solidFill>
+                  <a:srgbClr val="28685E"/>
+                </a:solidFill>
+                <a:latin typeface="Calibri"/>
+                <a:ea typeface="Calibri"/>
+                <a:cs typeface="Calibri"/>
+              </a:defRPr>
+            </a:pPr>
+            <a:r>
+              <a:rPr sz="1350" b="1">
+                <a:solidFill>
+                  <a:srgbClr val="28685E"/>
+                </a:solidFill>
+                <a:latin typeface="Calibri"/>
+                <a:ea typeface="Calibri"/>
+                <a:cs typeface="Calibri"/>
+              </a:rPr>
+              <a:t>02</a:t>
+            </a:r>
+          </a:p>
+        </p:txBody>
+      </p:sp>
+      <p:sp>
+        <p:nvSpPr>
+          <p:cNvPr id="14" name="row-rule-1">
+            <a:extLst xmlns:a="http://schemas.openxmlformats.org/drawingml/2006/main">
+              <a:ext uri="{FF2B5EF4-FFF2-40B4-BE49-F238E27FC236}">
+                <a16:creationId xmlns:a16="http://schemas.microsoft.com/office/drawing/2014/main" id="{99F83F70-883B-4CB6-BC93-8F25617190DE}"/>
+              </a:ext>
+            </a:extLst>
+          </p:cNvPr>
+          <p:cNvSpPr>
+            <a:spLocks xmlns:a="http://schemas.openxmlformats.org/drawingml/2006/main" noGrp="1"/>
+          </p:cNvSpPr>
+          <p:nvPr/>
+        </p:nvSpPr>
+        <p:spPr>
+          <a:xfrm xmlns:a="http://schemas.openxmlformats.org/drawingml/2006/main">
+            <a:off x="1000125" y="4552950"/>
+            <a:ext cx="10334625" cy="0"/>
+          </a:xfrm>
+          <a:prstGeom xmlns:a="http://schemas.openxmlformats.org/drawingml/2006/main" prst="line">
+            <a:avLst/>
+          </a:prstGeom>
+          <a:noFill xmlns:a="http://schemas.openxmlformats.org/drawingml/2006/main"/>
+          <a:ln xmlns:a="http://schemas.openxmlformats.org/drawingml/2006/main" w="9525">
+            <a:solidFill>
+              <a:srgbClr val="CEDBD3"/>
+            </a:solidFill>
+          </a:ln>
+        </p:spPr>
+      </p:sp>
+      <p:sp>
+        <p:nvSpPr>
+          <p:cNvPr id="15" name="cue-2">
+            <a:extLst xmlns:a="http://schemas.openxmlformats.org/drawingml/2006/main">
+              <a:ext uri="{FF2B5EF4-FFF2-40B4-BE49-F238E27FC236}">
+                <a16:creationId xmlns:a16="http://schemas.microsoft.com/office/drawing/2014/main" id="{EF5CC98D-A7CD-44C7-B451-608A818B4A00}"/>
+              </a:ext>
+            </a:extLst>
+          </p:cNvPr>
+          <p:cNvSpPr>
+            <a:spLocks xmlns:a="http://schemas.openxmlformats.org/drawingml/2006/main" noGrp="1"/>
+          </p:cNvSpPr>
+          <p:nvPr/>
+        </p:nvSpPr>
+        <p:spPr>
+          <a:xfrm xmlns:a="http://schemas.openxmlformats.org/drawingml/2006/main">
+            <a:off x="609600" y="4629150"/>
+            <a:ext cx="323850" cy="323850"/>
+          </a:xfrm>
+          <a:prstGeom xmlns:a="http://schemas.openxmlformats.org/drawingml/2006/main" prst="rect">
+            <a:avLst/>
+          </a:prstGeom>
+          <a:noFill xmlns:a="http://schemas.openxmlformats.org/drawingml/2006/main"/>
+          <a:ln xmlns:a="http://schemas.openxmlformats.org/drawingml/2006/main" w="0">
+            <a:noFill/>
+          </a:ln>
+        </p:spPr>
+        <p:txBody>
+          <a:bodyPr xmlns:a="http://schemas.openxmlformats.org/drawingml/2006/main" lIns="0" tIns="0" rIns="0" bIns="0" anchor="ctr">
+            <a:noAutofit/>
+          </a:bodyPr>
+          <a:lstStyle xmlns:a="http://schemas.openxmlformats.org/drawingml/2006/main"/>
+          <a:p xmlns:a="http://schemas.openxmlformats.org/drawingml/2006/main">
+            <a:pPr algn="l">
+              <a:defRPr sz="1350" b="1">
+                <a:solidFill>
+                  <a:srgbClr val="28685E"/>
+                </a:solidFill>
+                <a:latin typeface="Calibri"/>
+                <a:ea typeface="Calibri"/>
+                <a:cs typeface="Calibri"/>
+              </a:defRPr>
+            </a:pPr>
+            <a:r>
+              <a:rPr sz="1350" b="1">
+                <a:solidFill>
+                  <a:srgbClr val="28685E"/>
+                </a:solidFill>
+                <a:latin typeface="Calibri"/>
+                <a:ea typeface="Calibri"/>
+                <a:cs typeface="Calibri"/>
+              </a:rPr>
+              <a:t>03</a:t>
             </a:r>
           </a:p>
         </p:txBody>
@@ -7616,7 +10292,7 @@
     <p:bg>
       <p:bgPr>
         <a:solidFill xmlns:a="http://schemas.openxmlformats.org/drawingml/2006/main">
-          <a:srgbClr val="F5F1E8"/>
+          <a:srgbClr val="FAF9F5"/>
         </a:solidFill>
       </p:bgPr>
     </p:bg>
@@ -7645,8 +10321,8 @@
         </p:nvSpPr>
         <p:spPr>
           <a:xfrm xmlns:a="http://schemas.openxmlformats.org/drawingml/2006/main">
-            <a:off x="609600" y="552450"/>
-            <a:ext cx="781050" cy="57150"/>
+            <a:off x="609600" y="733425"/>
+            <a:ext cx="781050" cy="38100"/>
           </a:xfrm>
           <a:prstGeom xmlns:a="http://schemas.openxmlformats.org/drawingml/2006/main" prst="rect">
             <a:avLst/>
@@ -7676,34 +10352,43 @@
         </p:nvSpPr>
         <p:spPr>
           <a:xfrm xmlns:a="http://schemas.openxmlformats.org/drawingml/2006/main">
-            <a:off x="609600" y="762000"/>
-            <a:ext cx="8572500" cy="285750"/>
-          </a:xfrm>
-          <a:prstGeom xmlns:a="http://schemas.openxmlformats.org/drawingml/2006/main" prst="rect">
-            <a:avLst/>
-          </a:prstGeom>
-          <a:noFill xmlns:a="http://schemas.openxmlformats.org/drawingml/2006/main"/>
-          <a:ln xmlns:a="http://schemas.openxmlformats.org/drawingml/2006/main" w="0">
-            <a:noFill/>
-            <a:prstDash val="solid"/>
-          </a:ln>
-        </p:spPr>
-        <p:txBody>
-          <a:bodyPr xmlns:a="http://schemas.openxmlformats.org/drawingml/2006/main" lIns="0" tIns="0" rIns="0" bIns="0" anchor="ctr"/>
-          <a:lstStyle xmlns:a="http://schemas.openxmlformats.org/drawingml/2006/main"/>
-          <a:p xmlns:a="http://schemas.openxmlformats.org/drawingml/2006/main">
-            <a:pPr>
-              <a:defRPr sz="1500" b="1">
+            <a:off x="609600" y="342900"/>
+            <a:ext cx="9334500" cy="304800"/>
+          </a:xfrm>
+          <a:prstGeom xmlns:a="http://schemas.openxmlformats.org/drawingml/2006/main" prst="rect">
+            <a:avLst/>
+          </a:prstGeom>
+          <a:noFill xmlns:a="http://schemas.openxmlformats.org/drawingml/2006/main"/>
+          <a:ln xmlns:a="http://schemas.openxmlformats.org/drawingml/2006/main" w="0">
+            <a:noFill/>
+            <a:prstDash val="solid"/>
+          </a:ln>
+        </p:spPr>
+        <p:txBody>
+          <a:bodyPr xmlns:a="http://schemas.openxmlformats.org/drawingml/2006/main" lIns="0" tIns="0" rIns="0" bIns="0" anchor="ctr">
+            <a:noAutofit/>
+          </a:bodyPr>
+          <a:lstStyle xmlns:a="http://schemas.openxmlformats.org/drawingml/2006/main"/>
+          <a:p xmlns:a="http://schemas.openxmlformats.org/drawingml/2006/main">
+            <a:pPr algn="l">
+              <a:buNone/>
+              <a:defRPr sz="1350" b="1">
                 <a:solidFill>
                   <a:srgbClr val="28685E"/>
                 </a:solidFill>
-              </a:defRPr>
-            </a:pPr>
-            <a:r>
-              <a:rPr sz="1500" b="1">
+                <a:latin typeface="Calibri"/>
+                <a:ea typeface="Calibri"/>
+                <a:cs typeface="Calibri"/>
+              </a:defRPr>
+            </a:pPr>
+            <a:r>
+              <a:rPr sz="1350" b="1">
                 <a:solidFill>
                   <a:srgbClr val="28685E"/>
                 </a:solidFill>
+                <a:latin typeface="Calibri"/>
+                <a:ea typeface="Calibri"/>
+                <a:cs typeface="Calibri"/>
               </a:rPr>
               <a:t>MADE BY MATT  /  GROW SCIENCE</a:t>
             </a:r>
@@ -7726,34 +10411,43 @@
         </p:nvSpPr>
         <p:spPr>
           <a:xfrm xmlns:a="http://schemas.openxmlformats.org/drawingml/2006/main">
-            <a:off x="609600" y="1352550"/>
-            <a:ext cx="10972800" cy="952500"/>
-          </a:xfrm>
-          <a:prstGeom xmlns:a="http://schemas.openxmlformats.org/drawingml/2006/main" prst="rect">
-            <a:avLst/>
-          </a:prstGeom>
-          <a:noFill xmlns:a="http://schemas.openxmlformats.org/drawingml/2006/main"/>
-          <a:ln xmlns:a="http://schemas.openxmlformats.org/drawingml/2006/main" w="0">
-            <a:noFill/>
-            <a:prstDash val="solid"/>
-          </a:ln>
-        </p:spPr>
-        <p:txBody>
-          <a:bodyPr xmlns:a="http://schemas.openxmlformats.org/drawingml/2006/main" lIns="0" tIns="0" rIns="0" bIns="0" anchor="ctr"/>
-          <a:lstStyle xmlns:a="http://schemas.openxmlformats.org/drawingml/2006/main"/>
-          <a:p xmlns:a="http://schemas.openxmlformats.org/drawingml/2006/main">
-            <a:pPr>
-              <a:defRPr sz="3750" b="1">
+            <a:off x="609600" y="990600"/>
+            <a:ext cx="10972800" cy="1000125"/>
+          </a:xfrm>
+          <a:prstGeom xmlns:a="http://schemas.openxmlformats.org/drawingml/2006/main" prst="rect">
+            <a:avLst/>
+          </a:prstGeom>
+          <a:noFill xmlns:a="http://schemas.openxmlformats.org/drawingml/2006/main"/>
+          <a:ln xmlns:a="http://schemas.openxmlformats.org/drawingml/2006/main" w="0">
+            <a:noFill/>
+            <a:prstDash val="solid"/>
+          </a:ln>
+        </p:spPr>
+        <p:txBody>
+          <a:bodyPr xmlns:a="http://schemas.openxmlformats.org/drawingml/2006/main" lIns="0" tIns="0" rIns="0" bIns="0" anchor="ctr">
+            <a:noAutofit/>
+          </a:bodyPr>
+          <a:lstStyle xmlns:a="http://schemas.openxmlformats.org/drawingml/2006/main"/>
+          <a:p xmlns:a="http://schemas.openxmlformats.org/drawingml/2006/main">
+            <a:pPr algn="l">
+              <a:buNone/>
+              <a:defRPr sz="3675" b="1">
                 <a:solidFill>
                   <a:srgbClr val="152B3A"/>
                 </a:solidFill>
-              </a:defRPr>
-            </a:pPr>
-            <a:r>
-              <a:rPr sz="3750" b="1">
+                <a:latin typeface="Calibri"/>
+                <a:ea typeface="Calibri"/>
+                <a:cs typeface="Calibri"/>
+              </a:defRPr>
+            </a:pPr>
+            <a:r>
+              <a:rPr sz="3675" b="1">
                 <a:solidFill>
                   <a:srgbClr val="152B3A"/>
                 </a:solidFill>
+                <a:latin typeface="Calibri"/>
+                <a:ea typeface="Calibri"/>
+                <a:cs typeface="Calibri"/>
               </a:rPr>
               <a:t>Record your evidence</a:t>
             </a:r>
@@ -7776,14 +10470,14 @@
         </p:nvSpPr>
         <p:spPr>
           <a:xfrm xmlns:a="http://schemas.openxmlformats.org/drawingml/2006/main">
-            <a:off x="609600" y="6219825"/>
+            <a:off x="609600" y="6191250"/>
             <a:ext cx="10972800" cy="9525"/>
           </a:xfrm>
           <a:prstGeom xmlns:a="http://schemas.openxmlformats.org/drawingml/2006/main" prst="rect">
             <a:avLst/>
           </a:prstGeom>
           <a:solidFill xmlns:a="http://schemas.openxmlformats.org/drawingml/2006/main">
-            <a:srgbClr val="DCE7DD"/>
+            <a:srgbClr val="CEDBD3"/>
           </a:solidFill>
           <a:ln xmlns:a="http://schemas.openxmlformats.org/drawingml/2006/main" w="0">
             <a:noFill/>
@@ -7807,34 +10501,43 @@
         </p:nvSpPr>
         <p:spPr>
           <a:xfrm xmlns:a="http://schemas.openxmlformats.org/drawingml/2006/main">
-            <a:off x="609600" y="6381750"/>
-            <a:ext cx="9906000" cy="228600"/>
-          </a:xfrm>
-          <a:prstGeom xmlns:a="http://schemas.openxmlformats.org/drawingml/2006/main" prst="rect">
-            <a:avLst/>
-          </a:prstGeom>
-          <a:noFill xmlns:a="http://schemas.openxmlformats.org/drawingml/2006/main"/>
-          <a:ln xmlns:a="http://schemas.openxmlformats.org/drawingml/2006/main" w="0">
-            <a:noFill/>
-            <a:prstDash val="solid"/>
-          </a:ln>
-        </p:spPr>
-        <p:txBody>
-          <a:bodyPr xmlns:a="http://schemas.openxmlformats.org/drawingml/2006/main" lIns="0" tIns="0" rIns="0" bIns="0" anchor="ctr"/>
-          <a:lstStyle xmlns:a="http://schemas.openxmlformats.org/drawingml/2006/main"/>
-          <a:p xmlns:a="http://schemas.openxmlformats.org/drawingml/2006/main">
-            <a:pPr>
-              <a:defRPr sz="1275" b="0">
+            <a:off x="609600" y="6419850"/>
+            <a:ext cx="9525000" cy="219075"/>
+          </a:xfrm>
+          <a:prstGeom xmlns:a="http://schemas.openxmlformats.org/drawingml/2006/main" prst="rect">
+            <a:avLst/>
+          </a:prstGeom>
+          <a:noFill xmlns:a="http://schemas.openxmlformats.org/drawingml/2006/main"/>
+          <a:ln xmlns:a="http://schemas.openxmlformats.org/drawingml/2006/main" w="0">
+            <a:noFill/>
+            <a:prstDash val="solid"/>
+          </a:ln>
+        </p:spPr>
+        <p:txBody>
+          <a:bodyPr xmlns:a="http://schemas.openxmlformats.org/drawingml/2006/main" lIns="0" tIns="0" rIns="0" bIns="0" anchor="ctr">
+            <a:noAutofit/>
+          </a:bodyPr>
+          <a:lstStyle xmlns:a="http://schemas.openxmlformats.org/drawingml/2006/main"/>
+          <a:p xmlns:a="http://schemas.openxmlformats.org/drawingml/2006/main">
+            <a:pPr algn="l">
+              <a:buNone/>
+              <a:defRPr sz="1200" b="0">
                 <a:solidFill>
                   <a:srgbClr val="50616B"/>
                 </a:solidFill>
-              </a:defRPr>
-            </a:pPr>
-            <a:r>
-              <a:rPr sz="1275" b="0">
+                <a:latin typeface="Calibri"/>
+                <a:ea typeface="Calibri"/>
+                <a:cs typeface="Calibri"/>
+              </a:defRPr>
+            </a:pPr>
+            <a:r>
+              <a:rPr sz="1200" b="0">
                 <a:solidFill>
                   <a:srgbClr val="50616B"/>
                 </a:solidFill>
+                <a:latin typeface="Calibri"/>
+                <a:ea typeface="Calibri"/>
+                <a:cs typeface="Calibri"/>
               </a:rPr>
               <a:t>AUTUMN 1  ·  WEEK 6  ·  LESSON B</a:t>
             </a:r>
@@ -7857,27 +10560,33 @@
         </p:nvSpPr>
         <p:spPr>
           <a:xfrm xmlns:a="http://schemas.openxmlformats.org/drawingml/2006/main">
-            <a:off x="11106150" y="6362700"/>
-            <a:ext cx="476250" cy="238125"/>
-          </a:xfrm>
-          <a:prstGeom xmlns:a="http://schemas.openxmlformats.org/drawingml/2006/main" prst="rect">
-            <a:avLst/>
-          </a:prstGeom>
-          <a:noFill xmlns:a="http://schemas.openxmlformats.org/drawingml/2006/main"/>
-          <a:ln xmlns:a="http://schemas.openxmlformats.org/drawingml/2006/main" w="0">
-            <a:noFill/>
-            <a:prstDash val="solid"/>
-          </a:ln>
-        </p:spPr>
-        <p:txBody>
-          <a:bodyPr xmlns:a="http://schemas.openxmlformats.org/drawingml/2006/main" lIns="0" tIns="0" rIns="0" bIns="0" anchor="ctr"/>
-          <a:lstStyle xmlns:a="http://schemas.openxmlformats.org/drawingml/2006/main"/>
-          <a:p xmlns:a="http://schemas.openxmlformats.org/drawingml/2006/main">
-            <a:pPr>
+            <a:off x="11106150" y="6400800"/>
+            <a:ext cx="476250" cy="247650"/>
+          </a:xfrm>
+          <a:prstGeom xmlns:a="http://schemas.openxmlformats.org/drawingml/2006/main" prst="rect">
+            <a:avLst/>
+          </a:prstGeom>
+          <a:noFill xmlns:a="http://schemas.openxmlformats.org/drawingml/2006/main"/>
+          <a:ln xmlns:a="http://schemas.openxmlformats.org/drawingml/2006/main" w="0">
+            <a:noFill/>
+            <a:prstDash val="solid"/>
+          </a:ln>
+        </p:spPr>
+        <p:txBody>
+          <a:bodyPr xmlns:a="http://schemas.openxmlformats.org/drawingml/2006/main" lIns="0" tIns="0" rIns="0" bIns="0" anchor="ctr">
+            <a:noAutofit/>
+          </a:bodyPr>
+          <a:lstStyle xmlns:a="http://schemas.openxmlformats.org/drawingml/2006/main"/>
+          <a:p xmlns:a="http://schemas.openxmlformats.org/drawingml/2006/main">
+            <a:pPr algn="l">
+              <a:buNone/>
               <a:defRPr sz="1350" b="1">
                 <a:solidFill>
                   <a:srgbClr val="28685E"/>
                 </a:solidFill>
+                <a:latin typeface="Calibri"/>
+                <a:ea typeface="Calibri"/>
+                <a:cs typeface="Calibri"/>
               </a:defRPr>
             </a:pPr>
             <a:r>
@@ -7885,6 +10594,9 @@
                 <a:solidFill>
                   <a:srgbClr val="28685E"/>
                 </a:solidFill>
+                <a:latin typeface="Calibri"/>
+                <a:ea typeface="Calibri"/>
+                <a:cs typeface="Calibri"/>
               </a:rPr>
               <a:t>07</a:t>
             </a:r>
@@ -7907,36 +10619,71 @@
         </p:nvSpPr>
         <p:spPr>
           <a:xfrm xmlns:a="http://schemas.openxmlformats.org/drawingml/2006/main">
-            <a:off x="609600" y="2686050"/>
-            <a:ext cx="10858500" cy="1524000"/>
-          </a:xfrm>
-          <a:prstGeom xmlns:a="http://schemas.openxmlformats.org/drawingml/2006/main" prst="rect">
-            <a:avLst/>
-          </a:prstGeom>
-          <a:noFill xmlns:a="http://schemas.openxmlformats.org/drawingml/2006/main"/>
-          <a:ln xmlns:a="http://schemas.openxmlformats.org/drawingml/2006/main" w="0">
-            <a:noFill/>
-            <a:prstDash val="solid"/>
-          </a:ln>
-        </p:spPr>
-        <p:txBody>
-          <a:bodyPr xmlns:a="http://schemas.openxmlformats.org/drawingml/2006/main" lIns="0" tIns="0" rIns="0" bIns="0" anchor="ctr"/>
-          <a:lstStyle xmlns:a="http://schemas.openxmlformats.org/drawingml/2006/main"/>
-          <a:p xmlns:a="http://schemas.openxmlformats.org/drawingml/2006/main">
-            <a:pPr>
-              <a:defRPr sz="2925" b="1">
+            <a:off x="457200" y="2190750"/>
+            <a:ext cx="11277600" cy="2143125"/>
+          </a:xfrm>
+          <a:prstGeom xmlns:a="http://schemas.openxmlformats.org/drawingml/2006/main" prst="rect">
+            <a:avLst/>
+          </a:prstGeom>
+          <a:solidFill xmlns:a="http://schemas.openxmlformats.org/drawingml/2006/main">
+            <a:srgbClr val="E7EFE9"/>
+          </a:solidFill>
+          <a:ln xmlns:a="http://schemas.openxmlformats.org/drawingml/2006/main" w="0">
+            <a:noFill/>
+            <a:prstDash val="solid"/>
+          </a:ln>
+        </p:spPr>
+        <p:txBody>
+          <a:bodyPr xmlns:a="http://schemas.openxmlformats.org/drawingml/2006/main" lIns="152400" tIns="114300" rIns="152400" bIns="114300" anchor="ctr">
+            <a:noAutofit/>
+          </a:bodyPr>
+          <a:lstStyle xmlns:a="http://schemas.openxmlformats.org/drawingml/2006/main"/>
+          <a:p xmlns:a="http://schemas.openxmlformats.org/drawingml/2006/main">
+            <a:pPr algn="l">
+              <a:buNone/>
+              <a:defRPr sz="3075" b="1">
                 <a:solidFill>
                   <a:srgbClr val="28685E"/>
                 </a:solidFill>
-              </a:defRPr>
-            </a:pPr>
-            <a:r>
-              <a:rPr sz="2925" b="1">
+                <a:latin typeface="Calibri"/>
+                <a:ea typeface="Calibri"/>
+                <a:cs typeface="Calibri"/>
+              </a:defRPr>
+            </a:pPr>
+            <a:r>
+              <a:rPr sz="3075" b="1">
                 <a:solidFill>
                   <a:srgbClr val="28685E"/>
                 </a:solidFill>
-              </a:rPr>
-              <a:t>_____ has the longer year because_____ days is more than_____ days.</a:t>
+                <a:latin typeface="Calibri"/>
+                <a:ea typeface="Calibri"/>
+                <a:cs typeface="Calibri"/>
+              </a:rPr>
+              <a:t>_____ has the longer year because_____ days</a:t>
+            </a:r>
+          </a:p>
+          <a:p xmlns:a="http://schemas.openxmlformats.org/drawingml/2006/main">
+            <a:pPr algn="l">
+              <a:buNone/>
+              <a:defRPr sz="3075" b="1">
+                <a:solidFill>
+                  <a:srgbClr val="28685E"/>
+                </a:solidFill>
+                <a:latin typeface="Calibri"/>
+                <a:ea typeface="Calibri"/>
+                <a:cs typeface="Calibri"/>
+              </a:defRPr>
+            </a:pPr>
+            <a:r>
+              <a:rPr sz="3075" b="1">
+                <a:solidFill>
+                  <a:srgbClr val="28685E"/>
+                </a:solidFill>
+                <a:latin typeface="Calibri"/>
+                <a:ea typeface="Calibri"/>
+                <a:cs typeface="Calibri"/>
+              </a:rPr>
+              <a:t>is more than_____ days.</a:t>
             </a:r>
           </a:p>
         </p:txBody>
@@ -7957,34 +10704,43 @@
         </p:nvSpPr>
         <p:spPr>
           <a:xfrm xmlns:a="http://schemas.openxmlformats.org/drawingml/2006/main">
-            <a:off x="609600" y="4552950"/>
-            <a:ext cx="10858500" cy="1285875"/>
-          </a:xfrm>
-          <a:prstGeom xmlns:a="http://schemas.openxmlformats.org/drawingml/2006/main" prst="rect">
-            <a:avLst/>
-          </a:prstGeom>
-          <a:noFill xmlns:a="http://schemas.openxmlformats.org/drawingml/2006/main"/>
-          <a:ln xmlns:a="http://schemas.openxmlformats.org/drawingml/2006/main" w="0">
-            <a:noFill/>
-            <a:prstDash val="solid"/>
-          </a:ln>
-        </p:spPr>
-        <p:txBody>
-          <a:bodyPr xmlns:a="http://schemas.openxmlformats.org/drawingml/2006/main" lIns="0" tIns="0" rIns="0" bIns="0" anchor="ctr"/>
-          <a:lstStyle xmlns:a="http://schemas.openxmlformats.org/drawingml/2006/main"/>
-          <a:p xmlns:a="http://schemas.openxmlformats.org/drawingml/2006/main">
-            <a:pPr>
-              <a:defRPr sz="2700" b="0">
+            <a:off x="609600" y="4438650"/>
+            <a:ext cx="10972800" cy="1257300"/>
+          </a:xfrm>
+          <a:prstGeom xmlns:a="http://schemas.openxmlformats.org/drawingml/2006/main" prst="rect">
+            <a:avLst/>
+          </a:prstGeom>
+          <a:noFill xmlns:a="http://schemas.openxmlformats.org/drawingml/2006/main"/>
+          <a:ln xmlns:a="http://schemas.openxmlformats.org/drawingml/2006/main" w="0">
+            <a:noFill/>
+            <a:prstDash val="solid"/>
+          </a:ln>
+        </p:spPr>
+        <p:txBody>
+          <a:bodyPr xmlns:a="http://schemas.openxmlformats.org/drawingml/2006/main" lIns="0" tIns="0" rIns="0" bIns="0" anchor="ctr">
+            <a:noAutofit/>
+          </a:bodyPr>
+          <a:lstStyle xmlns:a="http://schemas.openxmlformats.org/drawingml/2006/main"/>
+          <a:p xmlns:a="http://schemas.openxmlformats.org/drawingml/2006/main">
+            <a:pPr algn="l">
+              <a:buNone/>
+              <a:defRPr sz="2550" b="0">
                 <a:solidFill>
                   <a:srgbClr val="152B3A"/>
                 </a:solidFill>
-              </a:defRPr>
-            </a:pPr>
-            <a:r>
-              <a:rPr sz="2700" b="0">
+                <a:latin typeface="Calibri"/>
+                <a:ea typeface="Calibri"/>
+                <a:cs typeface="Calibri"/>
+              </a:defRPr>
+            </a:pPr>
+            <a:r>
+              <a:rPr sz="2550" b="0">
                 <a:solidFill>
                   <a:srgbClr val="152B3A"/>
                 </a:solidFill>
+                <a:latin typeface="Calibri"/>
+                <a:ea typeface="Calibri"/>
+                <a:cs typeface="Calibri"/>
               </a:rPr>
               <a:t>Our model shows_____, but it does not show_____.</a:t>
             </a:r>
@@ -8007,7 +10763,7 @@
     <p:bg>
       <p:bgPr>
         <a:solidFill xmlns:a="http://schemas.openxmlformats.org/drawingml/2006/main">
-          <a:srgbClr val="F5F1E8"/>
+          <a:srgbClr val="FAF9F5"/>
         </a:solidFill>
       </p:bgPr>
     </p:bg>
@@ -8036,8 +10792,8 @@
         </p:nvSpPr>
         <p:spPr>
           <a:xfrm xmlns:a="http://schemas.openxmlformats.org/drawingml/2006/main">
-            <a:off x="609600" y="552450"/>
-            <a:ext cx="781050" cy="57150"/>
+            <a:off x="609600" y="733425"/>
+            <a:ext cx="781050" cy="38100"/>
           </a:xfrm>
           <a:prstGeom xmlns:a="http://schemas.openxmlformats.org/drawingml/2006/main" prst="rect">
             <a:avLst/>
@@ -8067,34 +10823,43 @@
         </p:nvSpPr>
         <p:spPr>
           <a:xfrm xmlns:a="http://schemas.openxmlformats.org/drawingml/2006/main">
-            <a:off x="609600" y="762000"/>
-            <a:ext cx="8572500" cy="285750"/>
-          </a:xfrm>
-          <a:prstGeom xmlns:a="http://schemas.openxmlformats.org/drawingml/2006/main" prst="rect">
-            <a:avLst/>
-          </a:prstGeom>
-          <a:noFill xmlns:a="http://schemas.openxmlformats.org/drawingml/2006/main"/>
-          <a:ln xmlns:a="http://schemas.openxmlformats.org/drawingml/2006/main" w="0">
-            <a:noFill/>
-            <a:prstDash val="solid"/>
-          </a:ln>
-        </p:spPr>
-        <p:txBody>
-          <a:bodyPr xmlns:a="http://schemas.openxmlformats.org/drawingml/2006/main" lIns="0" tIns="0" rIns="0" bIns="0" anchor="ctr"/>
-          <a:lstStyle xmlns:a="http://schemas.openxmlformats.org/drawingml/2006/main"/>
-          <a:p xmlns:a="http://schemas.openxmlformats.org/drawingml/2006/main">
-            <a:pPr>
-              <a:defRPr sz="1500" b="1">
+            <a:off x="609600" y="342900"/>
+            <a:ext cx="9334500" cy="304800"/>
+          </a:xfrm>
+          <a:prstGeom xmlns:a="http://schemas.openxmlformats.org/drawingml/2006/main" prst="rect">
+            <a:avLst/>
+          </a:prstGeom>
+          <a:noFill xmlns:a="http://schemas.openxmlformats.org/drawingml/2006/main"/>
+          <a:ln xmlns:a="http://schemas.openxmlformats.org/drawingml/2006/main" w="0">
+            <a:noFill/>
+            <a:prstDash val="solid"/>
+          </a:ln>
+        </p:spPr>
+        <p:txBody>
+          <a:bodyPr xmlns:a="http://schemas.openxmlformats.org/drawingml/2006/main" lIns="0" tIns="0" rIns="0" bIns="0" anchor="ctr">
+            <a:noAutofit/>
+          </a:bodyPr>
+          <a:lstStyle xmlns:a="http://schemas.openxmlformats.org/drawingml/2006/main"/>
+          <a:p xmlns:a="http://schemas.openxmlformats.org/drawingml/2006/main">
+            <a:pPr algn="l">
+              <a:buNone/>
+              <a:defRPr sz="1350" b="1">
                 <a:solidFill>
                   <a:srgbClr val="28685E"/>
                 </a:solidFill>
-              </a:defRPr>
-            </a:pPr>
-            <a:r>
-              <a:rPr sz="1500" b="1">
+                <a:latin typeface="Calibri"/>
+                <a:ea typeface="Calibri"/>
+                <a:cs typeface="Calibri"/>
+              </a:defRPr>
+            </a:pPr>
+            <a:r>
+              <a:rPr sz="1350" b="1">
                 <a:solidFill>
                   <a:srgbClr val="28685E"/>
                 </a:solidFill>
+                <a:latin typeface="Calibri"/>
+                <a:ea typeface="Calibri"/>
+                <a:cs typeface="Calibri"/>
               </a:rPr>
               <a:t>MADE BY MATT  /  GROW SCIENCE</a:t>
             </a:r>
@@ -8117,34 +10882,43 @@
         </p:nvSpPr>
         <p:spPr>
           <a:xfrm xmlns:a="http://schemas.openxmlformats.org/drawingml/2006/main">
-            <a:off x="609600" y="1352550"/>
-            <a:ext cx="10972800" cy="952500"/>
-          </a:xfrm>
-          <a:prstGeom xmlns:a="http://schemas.openxmlformats.org/drawingml/2006/main" prst="rect">
-            <a:avLst/>
-          </a:prstGeom>
-          <a:noFill xmlns:a="http://schemas.openxmlformats.org/drawingml/2006/main"/>
-          <a:ln xmlns:a="http://schemas.openxmlformats.org/drawingml/2006/main" w="0">
-            <a:noFill/>
-            <a:prstDash val="solid"/>
-          </a:ln>
-        </p:spPr>
-        <p:txBody>
-          <a:bodyPr xmlns:a="http://schemas.openxmlformats.org/drawingml/2006/main" lIns="0" tIns="0" rIns="0" bIns="0" anchor="ctr"/>
-          <a:lstStyle xmlns:a="http://schemas.openxmlformats.org/drawingml/2006/main"/>
-          <a:p xmlns:a="http://schemas.openxmlformats.org/drawingml/2006/main">
-            <a:pPr>
-              <a:defRPr sz="3750" b="1">
+            <a:off x="609600" y="990600"/>
+            <a:ext cx="10972800" cy="1000125"/>
+          </a:xfrm>
+          <a:prstGeom xmlns:a="http://schemas.openxmlformats.org/drawingml/2006/main" prst="rect">
+            <a:avLst/>
+          </a:prstGeom>
+          <a:noFill xmlns:a="http://schemas.openxmlformats.org/drawingml/2006/main"/>
+          <a:ln xmlns:a="http://schemas.openxmlformats.org/drawingml/2006/main" w="0">
+            <a:noFill/>
+            <a:prstDash val="solid"/>
+          </a:ln>
+        </p:spPr>
+        <p:txBody>
+          <a:bodyPr xmlns:a="http://schemas.openxmlformats.org/drawingml/2006/main" lIns="0" tIns="0" rIns="0" bIns="0" anchor="ctr">
+            <a:noAutofit/>
+          </a:bodyPr>
+          <a:lstStyle xmlns:a="http://schemas.openxmlformats.org/drawingml/2006/main"/>
+          <a:p xmlns:a="http://schemas.openxmlformats.org/drawingml/2006/main">
+            <a:pPr algn="l">
+              <a:buNone/>
+              <a:defRPr sz="3675" b="1">
                 <a:solidFill>
                   <a:srgbClr val="152B3A"/>
                 </a:solidFill>
-              </a:defRPr>
-            </a:pPr>
-            <a:r>
-              <a:rPr sz="3750" b="1">
+                <a:latin typeface="Calibri"/>
+                <a:ea typeface="Calibri"/>
+                <a:cs typeface="Calibri"/>
+              </a:defRPr>
+            </a:pPr>
+            <a:r>
+              <a:rPr sz="3675" b="1">
                 <a:solidFill>
                   <a:srgbClr val="152B3A"/>
                 </a:solidFill>
+                <a:latin typeface="Calibri"/>
+                <a:ea typeface="Calibri"/>
+                <a:cs typeface="Calibri"/>
               </a:rPr>
               <a:t>Pause for a two-minute check</a:t>
             </a:r>
@@ -8167,14 +10941,14 @@
         </p:nvSpPr>
         <p:spPr>
           <a:xfrm xmlns:a="http://schemas.openxmlformats.org/drawingml/2006/main">
-            <a:off x="609600" y="6219825"/>
+            <a:off x="609600" y="6191250"/>
             <a:ext cx="10972800" cy="9525"/>
           </a:xfrm>
           <a:prstGeom xmlns:a="http://schemas.openxmlformats.org/drawingml/2006/main" prst="rect">
             <a:avLst/>
           </a:prstGeom>
           <a:solidFill xmlns:a="http://schemas.openxmlformats.org/drawingml/2006/main">
-            <a:srgbClr val="DCE7DD"/>
+            <a:srgbClr val="CEDBD3"/>
           </a:solidFill>
           <a:ln xmlns:a="http://schemas.openxmlformats.org/drawingml/2006/main" w="0">
             <a:noFill/>
@@ -8198,34 +10972,43 @@
         </p:nvSpPr>
         <p:spPr>
           <a:xfrm xmlns:a="http://schemas.openxmlformats.org/drawingml/2006/main">
-            <a:off x="609600" y="6381750"/>
-            <a:ext cx="9906000" cy="228600"/>
-          </a:xfrm>
-          <a:prstGeom xmlns:a="http://schemas.openxmlformats.org/drawingml/2006/main" prst="rect">
-            <a:avLst/>
-          </a:prstGeom>
-          <a:noFill xmlns:a="http://schemas.openxmlformats.org/drawingml/2006/main"/>
-          <a:ln xmlns:a="http://schemas.openxmlformats.org/drawingml/2006/main" w="0">
-            <a:noFill/>
-            <a:prstDash val="solid"/>
-          </a:ln>
-        </p:spPr>
-        <p:txBody>
-          <a:bodyPr xmlns:a="http://schemas.openxmlformats.org/drawingml/2006/main" lIns="0" tIns="0" rIns="0" bIns="0" anchor="ctr"/>
-          <a:lstStyle xmlns:a="http://schemas.openxmlformats.org/drawingml/2006/main"/>
-          <a:p xmlns:a="http://schemas.openxmlformats.org/drawingml/2006/main">
-            <a:pPr>
-              <a:defRPr sz="1275" b="0">
+            <a:off x="609600" y="6419850"/>
+            <a:ext cx="9525000" cy="219075"/>
+          </a:xfrm>
+          <a:prstGeom xmlns:a="http://schemas.openxmlformats.org/drawingml/2006/main" prst="rect">
+            <a:avLst/>
+          </a:prstGeom>
+          <a:noFill xmlns:a="http://schemas.openxmlformats.org/drawingml/2006/main"/>
+          <a:ln xmlns:a="http://schemas.openxmlformats.org/drawingml/2006/main" w="0">
+            <a:noFill/>
+            <a:prstDash val="solid"/>
+          </a:ln>
+        </p:spPr>
+        <p:txBody>
+          <a:bodyPr xmlns:a="http://schemas.openxmlformats.org/drawingml/2006/main" lIns="0" tIns="0" rIns="0" bIns="0" anchor="ctr">
+            <a:noAutofit/>
+          </a:bodyPr>
+          <a:lstStyle xmlns:a="http://schemas.openxmlformats.org/drawingml/2006/main"/>
+          <a:p xmlns:a="http://schemas.openxmlformats.org/drawingml/2006/main">
+            <a:pPr algn="l">
+              <a:buNone/>
+              <a:defRPr sz="1200" b="0">
                 <a:solidFill>
                   <a:srgbClr val="50616B"/>
                 </a:solidFill>
-              </a:defRPr>
-            </a:pPr>
-            <a:r>
-              <a:rPr sz="1275" b="0">
+                <a:latin typeface="Calibri"/>
+                <a:ea typeface="Calibri"/>
+                <a:cs typeface="Calibri"/>
+              </a:defRPr>
+            </a:pPr>
+            <a:r>
+              <a:rPr sz="1200" b="0">
                 <a:solidFill>
                   <a:srgbClr val="50616B"/>
                 </a:solidFill>
+                <a:latin typeface="Calibri"/>
+                <a:ea typeface="Calibri"/>
+                <a:cs typeface="Calibri"/>
               </a:rPr>
               <a:t>AUTUMN 1  ·  WEEK 6  ·  LESSON B</a:t>
             </a:r>
@@ -8248,27 +11031,33 @@
         </p:nvSpPr>
         <p:spPr>
           <a:xfrm xmlns:a="http://schemas.openxmlformats.org/drawingml/2006/main">
-            <a:off x="11106150" y="6362700"/>
-            <a:ext cx="476250" cy="238125"/>
-          </a:xfrm>
-          <a:prstGeom xmlns:a="http://schemas.openxmlformats.org/drawingml/2006/main" prst="rect">
-            <a:avLst/>
-          </a:prstGeom>
-          <a:noFill xmlns:a="http://schemas.openxmlformats.org/drawingml/2006/main"/>
-          <a:ln xmlns:a="http://schemas.openxmlformats.org/drawingml/2006/main" w="0">
-            <a:noFill/>
-            <a:prstDash val="solid"/>
-          </a:ln>
-        </p:spPr>
-        <p:txBody>
-          <a:bodyPr xmlns:a="http://schemas.openxmlformats.org/drawingml/2006/main" lIns="0" tIns="0" rIns="0" bIns="0" anchor="ctr"/>
-          <a:lstStyle xmlns:a="http://schemas.openxmlformats.org/drawingml/2006/main"/>
-          <a:p xmlns:a="http://schemas.openxmlformats.org/drawingml/2006/main">
-            <a:pPr>
+            <a:off x="11106150" y="6400800"/>
+            <a:ext cx="476250" cy="247650"/>
+          </a:xfrm>
+          <a:prstGeom xmlns:a="http://schemas.openxmlformats.org/drawingml/2006/main" prst="rect">
+            <a:avLst/>
+          </a:prstGeom>
+          <a:noFill xmlns:a="http://schemas.openxmlformats.org/drawingml/2006/main"/>
+          <a:ln xmlns:a="http://schemas.openxmlformats.org/drawingml/2006/main" w="0">
+            <a:noFill/>
+            <a:prstDash val="solid"/>
+          </a:ln>
+        </p:spPr>
+        <p:txBody>
+          <a:bodyPr xmlns:a="http://schemas.openxmlformats.org/drawingml/2006/main" lIns="0" tIns="0" rIns="0" bIns="0" anchor="ctr">
+            <a:noAutofit/>
+          </a:bodyPr>
+          <a:lstStyle xmlns:a="http://schemas.openxmlformats.org/drawingml/2006/main"/>
+          <a:p xmlns:a="http://schemas.openxmlformats.org/drawingml/2006/main">
+            <a:pPr algn="l">
+              <a:buNone/>
               <a:defRPr sz="1350" b="1">
                 <a:solidFill>
                   <a:srgbClr val="28685E"/>
                 </a:solidFill>
+                <a:latin typeface="Calibri"/>
+                <a:ea typeface="Calibri"/>
+                <a:cs typeface="Calibri"/>
               </a:defRPr>
             </a:pPr>
             <a:r>
@@ -8276,6 +11065,9 @@
                 <a:solidFill>
                   <a:srgbClr val="28685E"/>
                 </a:solidFill>
+                <a:latin typeface="Calibri"/>
+                <a:ea typeface="Calibri"/>
+                <a:cs typeface="Calibri"/>
               </a:rPr>
               <a:t>08</a:t>
             </a:r>
@@ -8298,34 +11090,43 @@
         </p:nvSpPr>
         <p:spPr>
           <a:xfrm xmlns:a="http://schemas.openxmlformats.org/drawingml/2006/main">
-            <a:off x="609600" y="2619375"/>
-            <a:ext cx="10972800" cy="781050"/>
-          </a:xfrm>
-          <a:prstGeom xmlns:a="http://schemas.openxmlformats.org/drawingml/2006/main" prst="rect">
-            <a:avLst/>
-          </a:prstGeom>
-          <a:noFill xmlns:a="http://schemas.openxmlformats.org/drawingml/2006/main"/>
-          <a:ln xmlns:a="http://schemas.openxmlformats.org/drawingml/2006/main" w="0">
-            <a:noFill/>
-            <a:prstDash val="solid"/>
-          </a:ln>
-        </p:spPr>
-        <p:txBody>
-          <a:bodyPr xmlns:a="http://schemas.openxmlformats.org/drawingml/2006/main" lIns="0" tIns="0" rIns="0" bIns="0" anchor="ctr"/>
-          <a:lstStyle xmlns:a="http://schemas.openxmlformats.org/drawingml/2006/main"/>
-          <a:p xmlns:a="http://schemas.openxmlformats.org/drawingml/2006/main">
-            <a:pPr>
-              <a:defRPr sz="2550" b="0">
+            <a:off x="1000125" y="2333625"/>
+            <a:ext cx="10382250" cy="1076325"/>
+          </a:xfrm>
+          <a:prstGeom xmlns:a="http://schemas.openxmlformats.org/drawingml/2006/main" prst="rect">
+            <a:avLst/>
+          </a:prstGeom>
+          <a:noFill xmlns:a="http://schemas.openxmlformats.org/drawingml/2006/main"/>
+          <a:ln xmlns:a="http://schemas.openxmlformats.org/drawingml/2006/main" w="0">
+            <a:noFill/>
+            <a:prstDash val="solid"/>
+          </a:ln>
+        </p:spPr>
+        <p:txBody>
+          <a:bodyPr xmlns:a="http://schemas.openxmlformats.org/drawingml/2006/main" lIns="0" tIns="0" rIns="0" bIns="0" anchor="ctr">
+            <a:noAutofit/>
+          </a:bodyPr>
+          <a:lstStyle xmlns:a="http://schemas.openxmlformats.org/drawingml/2006/main"/>
+          <a:p xmlns:a="http://schemas.openxmlformats.org/drawingml/2006/main">
+            <a:pPr algn="l">
+              <a:buNone/>
+              <a:defRPr sz="2625" b="0">
                 <a:solidFill>
                   <a:srgbClr val="152B3A"/>
                 </a:solidFill>
-              </a:defRPr>
-            </a:pPr>
-            <a:r>
-              <a:rPr sz="2550" b="0">
+                <a:latin typeface="Calibri"/>
+                <a:ea typeface="Calibri"/>
+                <a:cs typeface="Calibri"/>
+              </a:defRPr>
+            </a:pPr>
+            <a:r>
+              <a:rPr sz="2625" b="0">
                 <a:solidFill>
                   <a:srgbClr val="152B3A"/>
                 </a:solidFill>
+                <a:latin typeface="Calibri"/>
+                <a:ea typeface="Calibri"/>
+                <a:cs typeface="Calibri"/>
               </a:rPr>
               <a:t>Ask an adult or chosen partner to check one arrow.</a:t>
             </a:r>
@@ -8348,34 +11149,43 @@
         </p:nvSpPr>
         <p:spPr>
           <a:xfrm xmlns:a="http://schemas.openxmlformats.org/drawingml/2006/main">
-            <a:off x="609600" y="3476625"/>
-            <a:ext cx="10972800" cy="781050"/>
-          </a:xfrm>
-          <a:prstGeom xmlns:a="http://schemas.openxmlformats.org/drawingml/2006/main" prst="rect">
-            <a:avLst/>
-          </a:prstGeom>
-          <a:noFill xmlns:a="http://schemas.openxmlformats.org/drawingml/2006/main"/>
-          <a:ln xmlns:a="http://schemas.openxmlformats.org/drawingml/2006/main" w="0">
-            <a:noFill/>
-            <a:prstDash val="solid"/>
-          </a:ln>
-        </p:spPr>
-        <p:txBody>
-          <a:bodyPr xmlns:a="http://schemas.openxmlformats.org/drawingml/2006/main" lIns="0" tIns="0" rIns="0" bIns="0" anchor="ctr"/>
-          <a:lstStyle xmlns:a="http://schemas.openxmlformats.org/drawingml/2006/main"/>
-          <a:p xmlns:a="http://schemas.openxmlformats.org/drawingml/2006/main">
-            <a:pPr>
-              <a:defRPr sz="2550" b="0">
+            <a:off x="1000125" y="3467100"/>
+            <a:ext cx="10382250" cy="1076325"/>
+          </a:xfrm>
+          <a:prstGeom xmlns:a="http://schemas.openxmlformats.org/drawingml/2006/main" prst="rect">
+            <a:avLst/>
+          </a:prstGeom>
+          <a:noFill xmlns:a="http://schemas.openxmlformats.org/drawingml/2006/main"/>
+          <a:ln xmlns:a="http://schemas.openxmlformats.org/drawingml/2006/main" w="0">
+            <a:noFill/>
+            <a:prstDash val="solid"/>
+          </a:ln>
+        </p:spPr>
+        <p:txBody>
+          <a:bodyPr xmlns:a="http://schemas.openxmlformats.org/drawingml/2006/main" lIns="0" tIns="0" rIns="0" bIns="0" anchor="ctr">
+            <a:noAutofit/>
+          </a:bodyPr>
+          <a:lstStyle xmlns:a="http://schemas.openxmlformats.org/drawingml/2006/main"/>
+          <a:p xmlns:a="http://schemas.openxmlformats.org/drawingml/2006/main">
+            <a:pPr algn="l">
+              <a:buNone/>
+              <a:defRPr sz="2625" b="0">
                 <a:solidFill>
                   <a:srgbClr val="152B3A"/>
                 </a:solidFill>
-              </a:defRPr>
-            </a:pPr>
-            <a:r>
-              <a:rPr sz="2550" b="0">
+                <a:latin typeface="Calibri"/>
+                <a:ea typeface="Calibri"/>
+                <a:cs typeface="Calibri"/>
+              </a:defRPr>
+            </a:pPr>
+            <a:r>
+              <a:rPr sz="2625" b="0">
                 <a:solidFill>
                   <a:srgbClr val="152B3A"/>
                 </a:solidFill>
+                <a:latin typeface="Calibri"/>
+                <a:ea typeface="Calibri"/>
+                <a:cs typeface="Calibri"/>
               </a:rPr>
               <a:t>Explain one year comparison.</a:t>
             </a:r>
@@ -8398,36 +11208,276 @@
         </p:nvSpPr>
         <p:spPr>
           <a:xfrm xmlns:a="http://schemas.openxmlformats.org/drawingml/2006/main">
-            <a:off x="609600" y="4333875"/>
-            <a:ext cx="10972800" cy="781050"/>
-          </a:xfrm>
-          <a:prstGeom xmlns:a="http://schemas.openxmlformats.org/drawingml/2006/main" prst="rect">
-            <a:avLst/>
-          </a:prstGeom>
-          <a:noFill xmlns:a="http://schemas.openxmlformats.org/drawingml/2006/main"/>
-          <a:ln xmlns:a="http://schemas.openxmlformats.org/drawingml/2006/main" w="0">
-            <a:noFill/>
-            <a:prstDash val="solid"/>
-          </a:ln>
-        </p:spPr>
-        <p:txBody>
-          <a:bodyPr xmlns:a="http://schemas.openxmlformats.org/drawingml/2006/main" lIns="0" tIns="0" rIns="0" bIns="0" anchor="ctr"/>
-          <a:lstStyle xmlns:a="http://schemas.openxmlformats.org/drawingml/2006/main"/>
-          <a:p xmlns:a="http://schemas.openxmlformats.org/drawingml/2006/main">
-            <a:pPr>
-              <a:defRPr sz="2550" b="0">
+            <a:off x="1000125" y="4600575"/>
+            <a:ext cx="10382250" cy="1076325"/>
+          </a:xfrm>
+          <a:prstGeom xmlns:a="http://schemas.openxmlformats.org/drawingml/2006/main" prst="rect">
+            <a:avLst/>
+          </a:prstGeom>
+          <a:noFill xmlns:a="http://schemas.openxmlformats.org/drawingml/2006/main"/>
+          <a:ln xmlns:a="http://schemas.openxmlformats.org/drawingml/2006/main" w="0">
+            <a:noFill/>
+            <a:prstDash val="solid"/>
+          </a:ln>
+        </p:spPr>
+        <p:txBody>
+          <a:bodyPr xmlns:a="http://schemas.openxmlformats.org/drawingml/2006/main" lIns="0" tIns="0" rIns="0" bIns="0" anchor="ctr">
+            <a:noAutofit/>
+          </a:bodyPr>
+          <a:lstStyle xmlns:a="http://schemas.openxmlformats.org/drawingml/2006/main"/>
+          <a:p xmlns:a="http://schemas.openxmlformats.org/drawingml/2006/main">
+            <a:pPr algn="l">
+              <a:buNone/>
+              <a:defRPr sz="2625" b="0">
                 <a:solidFill>
                   <a:srgbClr val="152B3A"/>
                 </a:solidFill>
-              </a:defRPr>
-            </a:pPr>
-            <a:r>
-              <a:rPr sz="2550" b="0">
+                <a:latin typeface="Calibri"/>
+                <a:ea typeface="Calibri"/>
+                <a:cs typeface="Calibri"/>
+              </a:defRPr>
+            </a:pPr>
+            <a:r>
+              <a:rPr sz="2625" b="0">
                 <a:solidFill>
                   <a:srgbClr val="152B3A"/>
                 </a:solidFill>
+                <a:latin typeface="Calibri"/>
+                <a:ea typeface="Calibri"/>
+                <a:cs typeface="Calibri"/>
               </a:rPr>
               <a:t>Does ‘longer year’ mean more time for one orbit?</a:t>
+            </a:r>
+          </a:p>
+        </p:txBody>
+      </p:sp>
+      <p:sp>
+        <p:nvSpPr>
+          <p:cNvPr id="11" name="cue-0">
+            <a:extLst xmlns:a="http://schemas.openxmlformats.org/drawingml/2006/main">
+              <a:ext uri="{FF2B5EF4-FFF2-40B4-BE49-F238E27FC236}">
+                <a16:creationId xmlns:a16="http://schemas.microsoft.com/office/drawing/2014/main" id="{02D173C7-F62B-4393-AEFC-0227B1384977}"/>
+              </a:ext>
+            </a:extLst>
+          </p:cNvPr>
+          <p:cNvSpPr>
+            <a:spLocks xmlns:a="http://schemas.openxmlformats.org/drawingml/2006/main" noGrp="1"/>
+          </p:cNvSpPr>
+          <p:nvPr/>
+        </p:nvSpPr>
+        <p:spPr>
+          <a:xfrm xmlns:a="http://schemas.openxmlformats.org/drawingml/2006/main">
+            <a:off x="609600" y="2362200"/>
+            <a:ext cx="323850" cy="323850"/>
+          </a:xfrm>
+          <a:prstGeom xmlns:a="http://schemas.openxmlformats.org/drawingml/2006/main" prst="rect">
+            <a:avLst/>
+          </a:prstGeom>
+          <a:noFill xmlns:a="http://schemas.openxmlformats.org/drawingml/2006/main"/>
+          <a:ln xmlns:a="http://schemas.openxmlformats.org/drawingml/2006/main" w="0">
+            <a:noFill/>
+          </a:ln>
+        </p:spPr>
+        <p:txBody>
+          <a:bodyPr xmlns:a="http://schemas.openxmlformats.org/drawingml/2006/main" lIns="0" tIns="0" rIns="0" bIns="0" anchor="ctr">
+            <a:noAutofit/>
+          </a:bodyPr>
+          <a:lstStyle xmlns:a="http://schemas.openxmlformats.org/drawingml/2006/main"/>
+          <a:p xmlns:a="http://schemas.openxmlformats.org/drawingml/2006/main">
+            <a:pPr algn="l">
+              <a:defRPr sz="1350" b="1">
+                <a:solidFill>
+                  <a:srgbClr val="28685E"/>
+                </a:solidFill>
+                <a:latin typeface="Calibri"/>
+                <a:ea typeface="Calibri"/>
+                <a:cs typeface="Calibri"/>
+              </a:defRPr>
+            </a:pPr>
+            <a:r>
+              <a:rPr sz="1350" b="1">
+                <a:solidFill>
+                  <a:srgbClr val="28685E"/>
+                </a:solidFill>
+                <a:latin typeface="Calibri"/>
+                <a:ea typeface="Calibri"/>
+                <a:cs typeface="Calibri"/>
+              </a:rPr>
+              <a:t>01</a:t>
+            </a:r>
+          </a:p>
+        </p:txBody>
+      </p:sp>
+      <p:sp>
+        <p:nvSpPr>
+          <p:cNvPr id="12" name="row-rule-0">
+            <a:extLst xmlns:a="http://schemas.openxmlformats.org/drawingml/2006/main">
+              <a:ext uri="{FF2B5EF4-FFF2-40B4-BE49-F238E27FC236}">
+                <a16:creationId xmlns:a16="http://schemas.microsoft.com/office/drawing/2014/main" id="{D9FC75A2-C7CA-4B17-9B00-E0617FE40BD6}"/>
+              </a:ext>
+            </a:extLst>
+          </p:cNvPr>
+          <p:cNvSpPr>
+            <a:spLocks xmlns:a="http://schemas.openxmlformats.org/drawingml/2006/main" noGrp="1"/>
+          </p:cNvSpPr>
+          <p:nvPr/>
+        </p:nvSpPr>
+        <p:spPr>
+          <a:xfrm xmlns:a="http://schemas.openxmlformats.org/drawingml/2006/main">
+            <a:off x="1000125" y="3419475"/>
+            <a:ext cx="10334625" cy="0"/>
+          </a:xfrm>
+          <a:prstGeom xmlns:a="http://schemas.openxmlformats.org/drawingml/2006/main" prst="line">
+            <a:avLst/>
+          </a:prstGeom>
+          <a:noFill xmlns:a="http://schemas.openxmlformats.org/drawingml/2006/main"/>
+          <a:ln xmlns:a="http://schemas.openxmlformats.org/drawingml/2006/main" w="9525">
+            <a:solidFill>
+              <a:srgbClr val="CEDBD3"/>
+            </a:solidFill>
+          </a:ln>
+        </p:spPr>
+      </p:sp>
+      <p:sp>
+        <p:nvSpPr>
+          <p:cNvPr id="13" name="cue-1">
+            <a:extLst xmlns:a="http://schemas.openxmlformats.org/drawingml/2006/main">
+              <a:ext uri="{FF2B5EF4-FFF2-40B4-BE49-F238E27FC236}">
+                <a16:creationId xmlns:a16="http://schemas.microsoft.com/office/drawing/2014/main" id="{5A787DB1-599C-464E-AF6A-5FC9B5D34A0C}"/>
+              </a:ext>
+            </a:extLst>
+          </p:cNvPr>
+          <p:cNvSpPr>
+            <a:spLocks xmlns:a="http://schemas.openxmlformats.org/drawingml/2006/main" noGrp="1"/>
+          </p:cNvSpPr>
+          <p:nvPr/>
+        </p:nvSpPr>
+        <p:spPr>
+          <a:xfrm xmlns:a="http://schemas.openxmlformats.org/drawingml/2006/main">
+            <a:off x="609600" y="3495675"/>
+            <a:ext cx="323850" cy="323850"/>
+          </a:xfrm>
+          <a:prstGeom xmlns:a="http://schemas.openxmlformats.org/drawingml/2006/main" prst="rect">
+            <a:avLst/>
+          </a:prstGeom>
+          <a:noFill xmlns:a="http://schemas.openxmlformats.org/drawingml/2006/main"/>
+          <a:ln xmlns:a="http://schemas.openxmlformats.org/drawingml/2006/main" w="0">
+            <a:noFill/>
+          </a:ln>
+        </p:spPr>
+        <p:txBody>
+          <a:bodyPr xmlns:a="http://schemas.openxmlformats.org/drawingml/2006/main" lIns="0" tIns="0" rIns="0" bIns="0" anchor="ctr">
+            <a:noAutofit/>
+          </a:bodyPr>
+          <a:lstStyle xmlns:a="http://schemas.openxmlformats.org/drawingml/2006/main"/>
+          <a:p xmlns:a="http://schemas.openxmlformats.org/drawingml/2006/main">
+            <a:pPr algn="l">
+              <a:defRPr sz="1350" b="1">
+                <a:solidFill>
+                  <a:srgbClr val="28685E"/>
+                </a:solidFill>
+                <a:latin typeface="Calibri"/>
+                <a:ea typeface="Calibri"/>
+                <a:cs typeface="Calibri"/>
+              </a:defRPr>
+            </a:pPr>
+            <a:r>
+              <a:rPr sz="1350" b="1">
+                <a:solidFill>
+                  <a:srgbClr val="28685E"/>
+                </a:solidFill>
+                <a:latin typeface="Calibri"/>
+                <a:ea typeface="Calibri"/>
+                <a:cs typeface="Calibri"/>
+              </a:rPr>
+              <a:t>02</a:t>
+            </a:r>
+          </a:p>
+        </p:txBody>
+      </p:sp>
+      <p:sp>
+        <p:nvSpPr>
+          <p:cNvPr id="14" name="row-rule-1">
+            <a:extLst xmlns:a="http://schemas.openxmlformats.org/drawingml/2006/main">
+              <a:ext uri="{FF2B5EF4-FFF2-40B4-BE49-F238E27FC236}">
+                <a16:creationId xmlns:a16="http://schemas.microsoft.com/office/drawing/2014/main" id="{4BD7939A-A7C4-407C-9E11-CDB2405A1CCC}"/>
+              </a:ext>
+            </a:extLst>
+          </p:cNvPr>
+          <p:cNvSpPr>
+            <a:spLocks xmlns:a="http://schemas.openxmlformats.org/drawingml/2006/main" noGrp="1"/>
+          </p:cNvSpPr>
+          <p:nvPr/>
+        </p:nvSpPr>
+        <p:spPr>
+          <a:xfrm xmlns:a="http://schemas.openxmlformats.org/drawingml/2006/main">
+            <a:off x="1000125" y="4552950"/>
+            <a:ext cx="10334625" cy="0"/>
+          </a:xfrm>
+          <a:prstGeom xmlns:a="http://schemas.openxmlformats.org/drawingml/2006/main" prst="line">
+            <a:avLst/>
+          </a:prstGeom>
+          <a:noFill xmlns:a="http://schemas.openxmlformats.org/drawingml/2006/main"/>
+          <a:ln xmlns:a="http://schemas.openxmlformats.org/drawingml/2006/main" w="9525">
+            <a:solidFill>
+              <a:srgbClr val="CEDBD3"/>
+            </a:solidFill>
+          </a:ln>
+        </p:spPr>
+      </p:sp>
+      <p:sp>
+        <p:nvSpPr>
+          <p:cNvPr id="15" name="cue-2">
+            <a:extLst xmlns:a="http://schemas.openxmlformats.org/drawingml/2006/main">
+              <a:ext uri="{FF2B5EF4-FFF2-40B4-BE49-F238E27FC236}">
+                <a16:creationId xmlns:a16="http://schemas.microsoft.com/office/drawing/2014/main" id="{E93D23D4-72F8-4212-9F7E-0EDC90B5C19F}"/>
+              </a:ext>
+            </a:extLst>
+          </p:cNvPr>
+          <p:cNvSpPr>
+            <a:spLocks xmlns:a="http://schemas.openxmlformats.org/drawingml/2006/main" noGrp="1"/>
+          </p:cNvSpPr>
+          <p:nvPr/>
+        </p:nvSpPr>
+        <p:spPr>
+          <a:xfrm xmlns:a="http://schemas.openxmlformats.org/drawingml/2006/main">
+            <a:off x="609600" y="4629150"/>
+            <a:ext cx="323850" cy="323850"/>
+          </a:xfrm>
+          <a:prstGeom xmlns:a="http://schemas.openxmlformats.org/drawingml/2006/main" prst="rect">
+            <a:avLst/>
+          </a:prstGeom>
+          <a:noFill xmlns:a="http://schemas.openxmlformats.org/drawingml/2006/main"/>
+          <a:ln xmlns:a="http://schemas.openxmlformats.org/drawingml/2006/main" w="0">
+            <a:noFill/>
+          </a:ln>
+        </p:spPr>
+        <p:txBody>
+          <a:bodyPr xmlns:a="http://schemas.openxmlformats.org/drawingml/2006/main" lIns="0" tIns="0" rIns="0" bIns="0" anchor="ctr">
+            <a:noAutofit/>
+          </a:bodyPr>
+          <a:lstStyle xmlns:a="http://schemas.openxmlformats.org/drawingml/2006/main"/>
+          <a:p xmlns:a="http://schemas.openxmlformats.org/drawingml/2006/main">
+            <a:pPr algn="l">
+              <a:defRPr sz="1350" b="1">
+                <a:solidFill>
+                  <a:srgbClr val="28685E"/>
+                </a:solidFill>
+                <a:latin typeface="Calibri"/>
+                <a:ea typeface="Calibri"/>
+                <a:cs typeface="Calibri"/>
+              </a:defRPr>
+            </a:pPr>
+            <a:r>
+              <a:rPr sz="1350" b="1">
+                <a:solidFill>
+                  <a:srgbClr val="28685E"/>
+                </a:solidFill>
+                <a:latin typeface="Calibri"/>
+                <a:ea typeface="Calibri"/>
+                <a:cs typeface="Calibri"/>
+              </a:rPr>
+              <a:t>03</a:t>
             </a:r>
           </a:p>
         </p:txBody>
@@ -8448,7 +11498,7 @@
     <p:bg>
       <p:bgPr>
         <a:solidFill xmlns:a="http://schemas.openxmlformats.org/drawingml/2006/main">
-          <a:srgbClr val="F5F1E8"/>
+          <a:srgbClr val="FAF9F5"/>
         </a:solidFill>
       </p:bgPr>
     </p:bg>
@@ -8477,8 +11527,8 @@
         </p:nvSpPr>
         <p:spPr>
           <a:xfrm xmlns:a="http://schemas.openxmlformats.org/drawingml/2006/main">
-            <a:off x="609600" y="552450"/>
-            <a:ext cx="781050" cy="57150"/>
+            <a:off x="609600" y="733425"/>
+            <a:ext cx="781050" cy="38100"/>
           </a:xfrm>
           <a:prstGeom xmlns:a="http://schemas.openxmlformats.org/drawingml/2006/main" prst="rect">
             <a:avLst/>
@@ -8508,34 +11558,43 @@
         </p:nvSpPr>
         <p:spPr>
           <a:xfrm xmlns:a="http://schemas.openxmlformats.org/drawingml/2006/main">
-            <a:off x="609600" y="762000"/>
-            <a:ext cx="8572500" cy="285750"/>
-          </a:xfrm>
-          <a:prstGeom xmlns:a="http://schemas.openxmlformats.org/drawingml/2006/main" prst="rect">
-            <a:avLst/>
-          </a:prstGeom>
-          <a:noFill xmlns:a="http://schemas.openxmlformats.org/drawingml/2006/main"/>
-          <a:ln xmlns:a="http://schemas.openxmlformats.org/drawingml/2006/main" w="0">
-            <a:noFill/>
-            <a:prstDash val="solid"/>
-          </a:ln>
-        </p:spPr>
-        <p:txBody>
-          <a:bodyPr xmlns:a="http://schemas.openxmlformats.org/drawingml/2006/main" lIns="0" tIns="0" rIns="0" bIns="0" anchor="ctr"/>
-          <a:lstStyle xmlns:a="http://schemas.openxmlformats.org/drawingml/2006/main"/>
-          <a:p xmlns:a="http://schemas.openxmlformats.org/drawingml/2006/main">
-            <a:pPr>
-              <a:defRPr sz="1500" b="1">
+            <a:off x="609600" y="342900"/>
+            <a:ext cx="9334500" cy="304800"/>
+          </a:xfrm>
+          <a:prstGeom xmlns:a="http://schemas.openxmlformats.org/drawingml/2006/main" prst="rect">
+            <a:avLst/>
+          </a:prstGeom>
+          <a:noFill xmlns:a="http://schemas.openxmlformats.org/drawingml/2006/main"/>
+          <a:ln xmlns:a="http://schemas.openxmlformats.org/drawingml/2006/main" w="0">
+            <a:noFill/>
+            <a:prstDash val="solid"/>
+          </a:ln>
+        </p:spPr>
+        <p:txBody>
+          <a:bodyPr xmlns:a="http://schemas.openxmlformats.org/drawingml/2006/main" lIns="0" tIns="0" rIns="0" bIns="0" anchor="ctr">
+            <a:noAutofit/>
+          </a:bodyPr>
+          <a:lstStyle xmlns:a="http://schemas.openxmlformats.org/drawingml/2006/main"/>
+          <a:p xmlns:a="http://schemas.openxmlformats.org/drawingml/2006/main">
+            <a:pPr algn="l">
+              <a:buNone/>
+              <a:defRPr sz="1350" b="1">
                 <a:solidFill>
                   <a:srgbClr val="28685E"/>
                 </a:solidFill>
-              </a:defRPr>
-            </a:pPr>
-            <a:r>
-              <a:rPr sz="1500" b="1">
+                <a:latin typeface="Calibri"/>
+                <a:ea typeface="Calibri"/>
+                <a:cs typeface="Calibri"/>
+              </a:defRPr>
+            </a:pPr>
+            <a:r>
+              <a:rPr sz="1350" b="1">
                 <a:solidFill>
                   <a:srgbClr val="28685E"/>
                 </a:solidFill>
+                <a:latin typeface="Calibri"/>
+                <a:ea typeface="Calibri"/>
+                <a:cs typeface="Calibri"/>
               </a:rPr>
               <a:t>MADE BY MATT  /  GROW SCIENCE</a:t>
             </a:r>
@@ -8558,34 +11617,43 @@
         </p:nvSpPr>
         <p:spPr>
           <a:xfrm xmlns:a="http://schemas.openxmlformats.org/drawingml/2006/main">
-            <a:off x="609600" y="1352550"/>
-            <a:ext cx="10972800" cy="952500"/>
-          </a:xfrm>
-          <a:prstGeom xmlns:a="http://schemas.openxmlformats.org/drawingml/2006/main" prst="rect">
-            <a:avLst/>
-          </a:prstGeom>
-          <a:noFill xmlns:a="http://schemas.openxmlformats.org/drawingml/2006/main"/>
-          <a:ln xmlns:a="http://schemas.openxmlformats.org/drawingml/2006/main" w="0">
-            <a:noFill/>
-            <a:prstDash val="solid"/>
-          </a:ln>
-        </p:spPr>
-        <p:txBody>
-          <a:bodyPr xmlns:a="http://schemas.openxmlformats.org/drawingml/2006/main" lIns="0" tIns="0" rIns="0" bIns="0" anchor="ctr"/>
-          <a:lstStyle xmlns:a="http://schemas.openxmlformats.org/drawingml/2006/main"/>
-          <a:p xmlns:a="http://schemas.openxmlformats.org/drawingml/2006/main">
-            <a:pPr>
-              <a:defRPr sz="3750" b="1">
+            <a:off x="609600" y="990600"/>
+            <a:ext cx="10972800" cy="1000125"/>
+          </a:xfrm>
+          <a:prstGeom xmlns:a="http://schemas.openxmlformats.org/drawingml/2006/main" prst="rect">
+            <a:avLst/>
+          </a:prstGeom>
+          <a:noFill xmlns:a="http://schemas.openxmlformats.org/drawingml/2006/main"/>
+          <a:ln xmlns:a="http://schemas.openxmlformats.org/drawingml/2006/main" w="0">
+            <a:noFill/>
+            <a:prstDash val="solid"/>
+          </a:ln>
+        </p:spPr>
+        <p:txBody>
+          <a:bodyPr xmlns:a="http://schemas.openxmlformats.org/drawingml/2006/main" lIns="0" tIns="0" rIns="0" bIns="0" anchor="ctr">
+            <a:noAutofit/>
+          </a:bodyPr>
+          <a:lstStyle xmlns:a="http://schemas.openxmlformats.org/drawingml/2006/main"/>
+          <a:p xmlns:a="http://schemas.openxmlformats.org/drawingml/2006/main">
+            <a:pPr algn="l">
+              <a:buNone/>
+              <a:defRPr sz="3675" b="1">
                 <a:solidFill>
                   <a:srgbClr val="152B3A"/>
                 </a:solidFill>
-              </a:defRPr>
-            </a:pPr>
-            <a:r>
-              <a:rPr sz="3750" b="1">
+                <a:latin typeface="Calibri"/>
+                <a:ea typeface="Calibri"/>
+                <a:cs typeface="Calibri"/>
+              </a:defRPr>
+            </a:pPr>
+            <a:r>
+              <a:rPr sz="3675" b="1">
                 <a:solidFill>
                   <a:srgbClr val="152B3A"/>
                 </a:solidFill>
+                <a:latin typeface="Calibri"/>
+                <a:ea typeface="Calibri"/>
+                <a:cs typeface="Calibri"/>
               </a:rPr>
               <a:t>Improve one thing</a:t>
             </a:r>
@@ -8608,14 +11676,14 @@
         </p:nvSpPr>
         <p:spPr>
           <a:xfrm xmlns:a="http://schemas.openxmlformats.org/drawingml/2006/main">
-            <a:off x="609600" y="6219825"/>
+            <a:off x="609600" y="6191250"/>
             <a:ext cx="10972800" cy="9525"/>
           </a:xfrm>
           <a:prstGeom xmlns:a="http://schemas.openxmlformats.org/drawingml/2006/main" prst="rect">
             <a:avLst/>
           </a:prstGeom>
           <a:solidFill xmlns:a="http://schemas.openxmlformats.org/drawingml/2006/main">
-            <a:srgbClr val="DCE7DD"/>
+            <a:srgbClr val="CEDBD3"/>
           </a:solidFill>
           <a:ln xmlns:a="http://schemas.openxmlformats.org/drawingml/2006/main" w="0">
             <a:noFill/>
@@ -8639,34 +11707,43 @@
         </p:nvSpPr>
         <p:spPr>
           <a:xfrm xmlns:a="http://schemas.openxmlformats.org/drawingml/2006/main">
-            <a:off x="609600" y="6381750"/>
-            <a:ext cx="9906000" cy="228600"/>
-          </a:xfrm>
-          <a:prstGeom xmlns:a="http://schemas.openxmlformats.org/drawingml/2006/main" prst="rect">
-            <a:avLst/>
-          </a:prstGeom>
-          <a:noFill xmlns:a="http://schemas.openxmlformats.org/drawingml/2006/main"/>
-          <a:ln xmlns:a="http://schemas.openxmlformats.org/drawingml/2006/main" w="0">
-            <a:noFill/>
-            <a:prstDash val="solid"/>
-          </a:ln>
-        </p:spPr>
-        <p:txBody>
-          <a:bodyPr xmlns:a="http://schemas.openxmlformats.org/drawingml/2006/main" lIns="0" tIns="0" rIns="0" bIns="0" anchor="ctr"/>
-          <a:lstStyle xmlns:a="http://schemas.openxmlformats.org/drawingml/2006/main"/>
-          <a:p xmlns:a="http://schemas.openxmlformats.org/drawingml/2006/main">
-            <a:pPr>
-              <a:defRPr sz="1275" b="0">
+            <a:off x="609600" y="6419850"/>
+            <a:ext cx="9525000" cy="219075"/>
+          </a:xfrm>
+          <a:prstGeom xmlns:a="http://schemas.openxmlformats.org/drawingml/2006/main" prst="rect">
+            <a:avLst/>
+          </a:prstGeom>
+          <a:noFill xmlns:a="http://schemas.openxmlformats.org/drawingml/2006/main"/>
+          <a:ln xmlns:a="http://schemas.openxmlformats.org/drawingml/2006/main" w="0">
+            <a:noFill/>
+            <a:prstDash val="solid"/>
+          </a:ln>
+        </p:spPr>
+        <p:txBody>
+          <a:bodyPr xmlns:a="http://schemas.openxmlformats.org/drawingml/2006/main" lIns="0" tIns="0" rIns="0" bIns="0" anchor="ctr">
+            <a:noAutofit/>
+          </a:bodyPr>
+          <a:lstStyle xmlns:a="http://schemas.openxmlformats.org/drawingml/2006/main"/>
+          <a:p xmlns:a="http://schemas.openxmlformats.org/drawingml/2006/main">
+            <a:pPr algn="l">
+              <a:buNone/>
+              <a:defRPr sz="1200" b="0">
                 <a:solidFill>
                   <a:srgbClr val="50616B"/>
                 </a:solidFill>
-              </a:defRPr>
-            </a:pPr>
-            <a:r>
-              <a:rPr sz="1275" b="0">
+                <a:latin typeface="Calibri"/>
+                <a:ea typeface="Calibri"/>
+                <a:cs typeface="Calibri"/>
+              </a:defRPr>
+            </a:pPr>
+            <a:r>
+              <a:rPr sz="1200" b="0">
                 <a:solidFill>
                   <a:srgbClr val="50616B"/>
                 </a:solidFill>
+                <a:latin typeface="Calibri"/>
+                <a:ea typeface="Calibri"/>
+                <a:cs typeface="Calibri"/>
               </a:rPr>
               <a:t>AUTUMN 1  ·  WEEK 6  ·  LESSON B</a:t>
             </a:r>
@@ -8689,27 +11766,33 @@
         </p:nvSpPr>
         <p:spPr>
           <a:xfrm xmlns:a="http://schemas.openxmlformats.org/drawingml/2006/main">
-            <a:off x="11106150" y="6362700"/>
-            <a:ext cx="476250" cy="238125"/>
-          </a:xfrm>
-          <a:prstGeom xmlns:a="http://schemas.openxmlformats.org/drawingml/2006/main" prst="rect">
-            <a:avLst/>
-          </a:prstGeom>
-          <a:noFill xmlns:a="http://schemas.openxmlformats.org/drawingml/2006/main"/>
-          <a:ln xmlns:a="http://schemas.openxmlformats.org/drawingml/2006/main" w="0">
-            <a:noFill/>
-            <a:prstDash val="solid"/>
-          </a:ln>
-        </p:spPr>
-        <p:txBody>
-          <a:bodyPr xmlns:a="http://schemas.openxmlformats.org/drawingml/2006/main" lIns="0" tIns="0" rIns="0" bIns="0" anchor="ctr"/>
-          <a:lstStyle xmlns:a="http://schemas.openxmlformats.org/drawingml/2006/main"/>
-          <a:p xmlns:a="http://schemas.openxmlformats.org/drawingml/2006/main">
-            <a:pPr>
+            <a:off x="11106150" y="6400800"/>
+            <a:ext cx="476250" cy="247650"/>
+          </a:xfrm>
+          <a:prstGeom xmlns:a="http://schemas.openxmlformats.org/drawingml/2006/main" prst="rect">
+            <a:avLst/>
+          </a:prstGeom>
+          <a:noFill xmlns:a="http://schemas.openxmlformats.org/drawingml/2006/main"/>
+          <a:ln xmlns:a="http://schemas.openxmlformats.org/drawingml/2006/main" w="0">
+            <a:noFill/>
+            <a:prstDash val="solid"/>
+          </a:ln>
+        </p:spPr>
+        <p:txBody>
+          <a:bodyPr xmlns:a="http://schemas.openxmlformats.org/drawingml/2006/main" lIns="0" tIns="0" rIns="0" bIns="0" anchor="ctr">
+            <a:noAutofit/>
+          </a:bodyPr>
+          <a:lstStyle xmlns:a="http://schemas.openxmlformats.org/drawingml/2006/main"/>
+          <a:p xmlns:a="http://schemas.openxmlformats.org/drawingml/2006/main">
+            <a:pPr algn="l">
+              <a:buNone/>
               <a:defRPr sz="1350" b="1">
                 <a:solidFill>
                   <a:srgbClr val="28685E"/>
                 </a:solidFill>
+                <a:latin typeface="Calibri"/>
+                <a:ea typeface="Calibri"/>
+                <a:cs typeface="Calibri"/>
               </a:defRPr>
             </a:pPr>
             <a:r>
@@ -8717,6 +11800,9 @@
                 <a:solidFill>
                   <a:srgbClr val="28685E"/>
                 </a:solidFill>
+                <a:latin typeface="Calibri"/>
+                <a:ea typeface="Calibri"/>
+                <a:cs typeface="Calibri"/>
               </a:rPr>
               <a:t>09</a:t>
             </a:r>
@@ -8739,34 +11825,43 @@
         </p:nvSpPr>
         <p:spPr>
           <a:xfrm xmlns:a="http://schemas.openxmlformats.org/drawingml/2006/main">
-            <a:off x="609600" y="2619375"/>
-            <a:ext cx="10972800" cy="781050"/>
-          </a:xfrm>
-          <a:prstGeom xmlns:a="http://schemas.openxmlformats.org/drawingml/2006/main" prst="rect">
-            <a:avLst/>
-          </a:prstGeom>
-          <a:noFill xmlns:a="http://schemas.openxmlformats.org/drawingml/2006/main"/>
-          <a:ln xmlns:a="http://schemas.openxmlformats.org/drawingml/2006/main" w="0">
-            <a:noFill/>
-            <a:prstDash val="solid"/>
-          </a:ln>
-        </p:spPr>
-        <p:txBody>
-          <a:bodyPr xmlns:a="http://schemas.openxmlformats.org/drawingml/2006/main" lIns="0" tIns="0" rIns="0" bIns="0" anchor="ctr"/>
-          <a:lstStyle xmlns:a="http://schemas.openxmlformats.org/drawingml/2006/main"/>
-          <a:p xmlns:a="http://schemas.openxmlformats.org/drawingml/2006/main">
-            <a:pPr>
-              <a:defRPr sz="2550" b="0">
+            <a:off x="1000125" y="2333625"/>
+            <a:ext cx="10382250" cy="1076325"/>
+          </a:xfrm>
+          <a:prstGeom xmlns:a="http://schemas.openxmlformats.org/drawingml/2006/main" prst="rect">
+            <a:avLst/>
+          </a:prstGeom>
+          <a:noFill xmlns:a="http://schemas.openxmlformats.org/drawingml/2006/main"/>
+          <a:ln xmlns:a="http://schemas.openxmlformats.org/drawingml/2006/main" w="0">
+            <a:noFill/>
+            <a:prstDash val="solid"/>
+          </a:ln>
+        </p:spPr>
+        <p:txBody>
+          <a:bodyPr xmlns:a="http://schemas.openxmlformats.org/drawingml/2006/main" lIns="0" tIns="0" rIns="0" bIns="0" anchor="ctr">
+            <a:noAutofit/>
+          </a:bodyPr>
+          <a:lstStyle xmlns:a="http://schemas.openxmlformats.org/drawingml/2006/main"/>
+          <a:p xmlns:a="http://schemas.openxmlformats.org/drawingml/2006/main">
+            <a:pPr algn="l">
+              <a:buNone/>
+              <a:defRPr sz="2625" b="0">
                 <a:solidFill>
                   <a:srgbClr val="152B3A"/>
                 </a:solidFill>
-              </a:defRPr>
-            </a:pPr>
-            <a:r>
-              <a:rPr sz="2550" b="0">
+                <a:latin typeface="Calibri"/>
+                <a:ea typeface="Calibri"/>
+                <a:cs typeface="Calibri"/>
+              </a:defRPr>
+            </a:pPr>
+            <a:r>
+              <a:rPr sz="2625" b="0">
                 <a:solidFill>
                   <a:srgbClr val="152B3A"/>
                 </a:solidFill>
+                <a:latin typeface="Calibri"/>
+                <a:ea typeface="Calibri"/>
+                <a:cs typeface="Calibri"/>
               </a:rPr>
               <a:t>Correct one arrow or number comparison.</a:t>
             </a:r>
@@ -8789,34 +11884,43 @@
         </p:nvSpPr>
         <p:spPr>
           <a:xfrm xmlns:a="http://schemas.openxmlformats.org/drawingml/2006/main">
-            <a:off x="609600" y="3476625"/>
-            <a:ext cx="10972800" cy="781050"/>
-          </a:xfrm>
-          <a:prstGeom xmlns:a="http://schemas.openxmlformats.org/drawingml/2006/main" prst="rect">
-            <a:avLst/>
-          </a:prstGeom>
-          <a:noFill xmlns:a="http://schemas.openxmlformats.org/drawingml/2006/main"/>
-          <a:ln xmlns:a="http://schemas.openxmlformats.org/drawingml/2006/main" w="0">
-            <a:noFill/>
-            <a:prstDash val="solid"/>
-          </a:ln>
-        </p:spPr>
-        <p:txBody>
-          <a:bodyPr xmlns:a="http://schemas.openxmlformats.org/drawingml/2006/main" lIns="0" tIns="0" rIns="0" bIns="0" anchor="ctr"/>
-          <a:lstStyle xmlns:a="http://schemas.openxmlformats.org/drawingml/2006/main"/>
-          <a:p xmlns:a="http://schemas.openxmlformats.org/drawingml/2006/main">
-            <a:pPr>
-              <a:defRPr sz="2550" b="0">
+            <a:off x="1000125" y="3467100"/>
+            <a:ext cx="10382250" cy="1076325"/>
+          </a:xfrm>
+          <a:prstGeom xmlns:a="http://schemas.openxmlformats.org/drawingml/2006/main" prst="rect">
+            <a:avLst/>
+          </a:prstGeom>
+          <a:noFill xmlns:a="http://schemas.openxmlformats.org/drawingml/2006/main"/>
+          <a:ln xmlns:a="http://schemas.openxmlformats.org/drawingml/2006/main" w="0">
+            <a:noFill/>
+            <a:prstDash val="solid"/>
+          </a:ln>
+        </p:spPr>
+        <p:txBody>
+          <a:bodyPr xmlns:a="http://schemas.openxmlformats.org/drawingml/2006/main" lIns="0" tIns="0" rIns="0" bIns="0" anchor="ctr">
+            <a:noAutofit/>
+          </a:bodyPr>
+          <a:lstStyle xmlns:a="http://schemas.openxmlformats.org/drawingml/2006/main"/>
+          <a:p xmlns:a="http://schemas.openxmlformats.org/drawingml/2006/main">
+            <a:pPr algn="l">
+              <a:buNone/>
+              <a:defRPr sz="2625" b="0">
                 <a:solidFill>
                   <a:srgbClr val="152B3A"/>
                 </a:solidFill>
-              </a:defRPr>
-            </a:pPr>
-            <a:r>
-              <a:rPr sz="2550" b="0">
+                <a:latin typeface="Calibri"/>
+                <a:ea typeface="Calibri"/>
+                <a:cs typeface="Calibri"/>
+              </a:defRPr>
+            </a:pPr>
+            <a:r>
+              <a:rPr sz="2625" b="0">
                 <a:solidFill>
                   <a:srgbClr val="152B3A"/>
                 </a:solidFill>
+                <a:latin typeface="Calibri"/>
+                <a:ea typeface="Calibri"/>
+                <a:cs typeface="Calibri"/>
               </a:rPr>
               <a:t>Record two things the model shows.</a:t>
             </a:r>
@@ -8839,36 +11943,276 @@
         </p:nvSpPr>
         <p:spPr>
           <a:xfrm xmlns:a="http://schemas.openxmlformats.org/drawingml/2006/main">
-            <a:off x="609600" y="4333875"/>
-            <a:ext cx="10972800" cy="781050"/>
-          </a:xfrm>
-          <a:prstGeom xmlns:a="http://schemas.openxmlformats.org/drawingml/2006/main" prst="rect">
-            <a:avLst/>
-          </a:prstGeom>
-          <a:noFill xmlns:a="http://schemas.openxmlformats.org/drawingml/2006/main"/>
-          <a:ln xmlns:a="http://schemas.openxmlformats.org/drawingml/2006/main" w="0">
-            <a:noFill/>
-            <a:prstDash val="solid"/>
-          </a:ln>
-        </p:spPr>
-        <p:txBody>
-          <a:bodyPr xmlns:a="http://schemas.openxmlformats.org/drawingml/2006/main" lIns="0" tIns="0" rIns="0" bIns="0" anchor="ctr"/>
-          <a:lstStyle xmlns:a="http://schemas.openxmlformats.org/drawingml/2006/main"/>
-          <a:p xmlns:a="http://schemas.openxmlformats.org/drawingml/2006/main">
-            <a:pPr>
-              <a:defRPr sz="2550" b="0">
+            <a:off x="1000125" y="4600575"/>
+            <a:ext cx="10382250" cy="1076325"/>
+          </a:xfrm>
+          <a:prstGeom xmlns:a="http://schemas.openxmlformats.org/drawingml/2006/main" prst="rect">
+            <a:avLst/>
+          </a:prstGeom>
+          <a:noFill xmlns:a="http://schemas.openxmlformats.org/drawingml/2006/main"/>
+          <a:ln xmlns:a="http://schemas.openxmlformats.org/drawingml/2006/main" w="0">
+            <a:noFill/>
+            <a:prstDash val="solid"/>
+          </a:ln>
+        </p:spPr>
+        <p:txBody>
+          <a:bodyPr xmlns:a="http://schemas.openxmlformats.org/drawingml/2006/main" lIns="0" tIns="0" rIns="0" bIns="0" anchor="ctr">
+            <a:noAutofit/>
+          </a:bodyPr>
+          <a:lstStyle xmlns:a="http://schemas.openxmlformats.org/drawingml/2006/main"/>
+          <a:p xmlns:a="http://schemas.openxmlformats.org/drawingml/2006/main">
+            <a:pPr algn="l">
+              <a:buNone/>
+              <a:defRPr sz="2625" b="0">
                 <a:solidFill>
                   <a:srgbClr val="152B3A"/>
                 </a:solidFill>
-              </a:defRPr>
-            </a:pPr>
-            <a:r>
-              <a:rPr sz="2550" b="0">
+                <a:latin typeface="Calibri"/>
+                <a:ea typeface="Calibri"/>
+                <a:cs typeface="Calibri"/>
+              </a:defRPr>
+            </a:pPr>
+            <a:r>
+              <a:rPr sz="2625" b="0">
                 <a:solidFill>
                   <a:srgbClr val="152B3A"/>
                 </a:solidFill>
+                <a:latin typeface="Calibri"/>
+                <a:ea typeface="Calibri"/>
+                <a:cs typeface="Calibri"/>
               </a:rPr>
               <a:t>Name one thing it does not show accurately.</a:t>
+            </a:r>
+          </a:p>
+        </p:txBody>
+      </p:sp>
+      <p:sp>
+        <p:nvSpPr>
+          <p:cNvPr id="11" name="cue-0">
+            <a:extLst xmlns:a="http://schemas.openxmlformats.org/drawingml/2006/main">
+              <a:ext uri="{FF2B5EF4-FFF2-40B4-BE49-F238E27FC236}">
+                <a16:creationId xmlns:a16="http://schemas.microsoft.com/office/drawing/2014/main" id="{12931DE8-5BF7-4974-94CB-377649886A52}"/>
+              </a:ext>
+            </a:extLst>
+          </p:cNvPr>
+          <p:cNvSpPr>
+            <a:spLocks xmlns:a="http://schemas.openxmlformats.org/drawingml/2006/main" noGrp="1"/>
+          </p:cNvSpPr>
+          <p:nvPr/>
+        </p:nvSpPr>
+        <p:spPr>
+          <a:xfrm xmlns:a="http://schemas.openxmlformats.org/drawingml/2006/main">
+            <a:off x="609600" y="2362200"/>
+            <a:ext cx="323850" cy="323850"/>
+          </a:xfrm>
+          <a:prstGeom xmlns:a="http://schemas.openxmlformats.org/drawingml/2006/main" prst="rect">
+            <a:avLst/>
+          </a:prstGeom>
+          <a:noFill xmlns:a="http://schemas.openxmlformats.org/drawingml/2006/main"/>
+          <a:ln xmlns:a="http://schemas.openxmlformats.org/drawingml/2006/main" w="0">
+            <a:noFill/>
+          </a:ln>
+        </p:spPr>
+        <p:txBody>
+          <a:bodyPr xmlns:a="http://schemas.openxmlformats.org/drawingml/2006/main" lIns="0" tIns="0" rIns="0" bIns="0" anchor="ctr">
+            <a:noAutofit/>
+          </a:bodyPr>
+          <a:lstStyle xmlns:a="http://schemas.openxmlformats.org/drawingml/2006/main"/>
+          <a:p xmlns:a="http://schemas.openxmlformats.org/drawingml/2006/main">
+            <a:pPr algn="l">
+              <a:defRPr sz="1350" b="1">
+                <a:solidFill>
+                  <a:srgbClr val="28685E"/>
+                </a:solidFill>
+                <a:latin typeface="Calibri"/>
+                <a:ea typeface="Calibri"/>
+                <a:cs typeface="Calibri"/>
+              </a:defRPr>
+            </a:pPr>
+            <a:r>
+              <a:rPr sz="1350" b="1">
+                <a:solidFill>
+                  <a:srgbClr val="28685E"/>
+                </a:solidFill>
+                <a:latin typeface="Calibri"/>
+                <a:ea typeface="Calibri"/>
+                <a:cs typeface="Calibri"/>
+              </a:rPr>
+              <a:t>01</a:t>
+            </a:r>
+          </a:p>
+        </p:txBody>
+      </p:sp>
+      <p:sp>
+        <p:nvSpPr>
+          <p:cNvPr id="12" name="row-rule-0">
+            <a:extLst xmlns:a="http://schemas.openxmlformats.org/drawingml/2006/main">
+              <a:ext uri="{FF2B5EF4-FFF2-40B4-BE49-F238E27FC236}">
+                <a16:creationId xmlns:a16="http://schemas.microsoft.com/office/drawing/2014/main" id="{3A96A078-3731-4ADA-9663-469538F2AC55}"/>
+              </a:ext>
+            </a:extLst>
+          </p:cNvPr>
+          <p:cNvSpPr>
+            <a:spLocks xmlns:a="http://schemas.openxmlformats.org/drawingml/2006/main" noGrp="1"/>
+          </p:cNvSpPr>
+          <p:nvPr/>
+        </p:nvSpPr>
+        <p:spPr>
+          <a:xfrm xmlns:a="http://schemas.openxmlformats.org/drawingml/2006/main">
+            <a:off x="1000125" y="3419475"/>
+            <a:ext cx="10334625" cy="0"/>
+          </a:xfrm>
+          <a:prstGeom xmlns:a="http://schemas.openxmlformats.org/drawingml/2006/main" prst="line">
+            <a:avLst/>
+          </a:prstGeom>
+          <a:noFill xmlns:a="http://schemas.openxmlformats.org/drawingml/2006/main"/>
+          <a:ln xmlns:a="http://schemas.openxmlformats.org/drawingml/2006/main" w="9525">
+            <a:solidFill>
+              <a:srgbClr val="CEDBD3"/>
+            </a:solidFill>
+          </a:ln>
+        </p:spPr>
+      </p:sp>
+      <p:sp>
+        <p:nvSpPr>
+          <p:cNvPr id="13" name="cue-1">
+            <a:extLst xmlns:a="http://schemas.openxmlformats.org/drawingml/2006/main">
+              <a:ext uri="{FF2B5EF4-FFF2-40B4-BE49-F238E27FC236}">
+                <a16:creationId xmlns:a16="http://schemas.microsoft.com/office/drawing/2014/main" id="{42E37F10-1E61-469E-8FC1-64F90CCA6242}"/>
+              </a:ext>
+            </a:extLst>
+          </p:cNvPr>
+          <p:cNvSpPr>
+            <a:spLocks xmlns:a="http://schemas.openxmlformats.org/drawingml/2006/main" noGrp="1"/>
+          </p:cNvSpPr>
+          <p:nvPr/>
+        </p:nvSpPr>
+        <p:spPr>
+          <a:xfrm xmlns:a="http://schemas.openxmlformats.org/drawingml/2006/main">
+            <a:off x="609600" y="3495675"/>
+            <a:ext cx="323850" cy="323850"/>
+          </a:xfrm>
+          <a:prstGeom xmlns:a="http://schemas.openxmlformats.org/drawingml/2006/main" prst="rect">
+            <a:avLst/>
+          </a:prstGeom>
+          <a:noFill xmlns:a="http://schemas.openxmlformats.org/drawingml/2006/main"/>
+          <a:ln xmlns:a="http://schemas.openxmlformats.org/drawingml/2006/main" w="0">
+            <a:noFill/>
+          </a:ln>
+        </p:spPr>
+        <p:txBody>
+          <a:bodyPr xmlns:a="http://schemas.openxmlformats.org/drawingml/2006/main" lIns="0" tIns="0" rIns="0" bIns="0" anchor="ctr">
+            <a:noAutofit/>
+          </a:bodyPr>
+          <a:lstStyle xmlns:a="http://schemas.openxmlformats.org/drawingml/2006/main"/>
+          <a:p xmlns:a="http://schemas.openxmlformats.org/drawingml/2006/main">
+            <a:pPr algn="l">
+              <a:defRPr sz="1350" b="1">
+                <a:solidFill>
+                  <a:srgbClr val="28685E"/>
+                </a:solidFill>
+                <a:latin typeface="Calibri"/>
+                <a:ea typeface="Calibri"/>
+                <a:cs typeface="Calibri"/>
+              </a:defRPr>
+            </a:pPr>
+            <a:r>
+              <a:rPr sz="1350" b="1">
+                <a:solidFill>
+                  <a:srgbClr val="28685E"/>
+                </a:solidFill>
+                <a:latin typeface="Calibri"/>
+                <a:ea typeface="Calibri"/>
+                <a:cs typeface="Calibri"/>
+              </a:rPr>
+              <a:t>02</a:t>
+            </a:r>
+          </a:p>
+        </p:txBody>
+      </p:sp>
+      <p:sp>
+        <p:nvSpPr>
+          <p:cNvPr id="14" name="row-rule-1">
+            <a:extLst xmlns:a="http://schemas.openxmlformats.org/drawingml/2006/main">
+              <a:ext uri="{FF2B5EF4-FFF2-40B4-BE49-F238E27FC236}">
+                <a16:creationId xmlns:a16="http://schemas.microsoft.com/office/drawing/2014/main" id="{8C650A1B-E0D2-4E52-A023-70DC485B0505}"/>
+              </a:ext>
+            </a:extLst>
+          </p:cNvPr>
+          <p:cNvSpPr>
+            <a:spLocks xmlns:a="http://schemas.openxmlformats.org/drawingml/2006/main" noGrp="1"/>
+          </p:cNvSpPr>
+          <p:nvPr/>
+        </p:nvSpPr>
+        <p:spPr>
+          <a:xfrm xmlns:a="http://schemas.openxmlformats.org/drawingml/2006/main">
+            <a:off x="1000125" y="4552950"/>
+            <a:ext cx="10334625" cy="0"/>
+          </a:xfrm>
+          <a:prstGeom xmlns:a="http://schemas.openxmlformats.org/drawingml/2006/main" prst="line">
+            <a:avLst/>
+          </a:prstGeom>
+          <a:noFill xmlns:a="http://schemas.openxmlformats.org/drawingml/2006/main"/>
+          <a:ln xmlns:a="http://schemas.openxmlformats.org/drawingml/2006/main" w="9525">
+            <a:solidFill>
+              <a:srgbClr val="CEDBD3"/>
+            </a:solidFill>
+          </a:ln>
+        </p:spPr>
+      </p:sp>
+      <p:sp>
+        <p:nvSpPr>
+          <p:cNvPr id="15" name="cue-2">
+            <a:extLst xmlns:a="http://schemas.openxmlformats.org/drawingml/2006/main">
+              <a:ext uri="{FF2B5EF4-FFF2-40B4-BE49-F238E27FC236}">
+                <a16:creationId xmlns:a16="http://schemas.microsoft.com/office/drawing/2014/main" id="{F98701B2-3FC4-43BB-A726-B04CCE48CC11}"/>
+              </a:ext>
+            </a:extLst>
+          </p:cNvPr>
+          <p:cNvSpPr>
+            <a:spLocks xmlns:a="http://schemas.openxmlformats.org/drawingml/2006/main" noGrp="1"/>
+          </p:cNvSpPr>
+          <p:nvPr/>
+        </p:nvSpPr>
+        <p:spPr>
+          <a:xfrm xmlns:a="http://schemas.openxmlformats.org/drawingml/2006/main">
+            <a:off x="609600" y="4629150"/>
+            <a:ext cx="323850" cy="323850"/>
+          </a:xfrm>
+          <a:prstGeom xmlns:a="http://schemas.openxmlformats.org/drawingml/2006/main" prst="rect">
+            <a:avLst/>
+          </a:prstGeom>
+          <a:noFill xmlns:a="http://schemas.openxmlformats.org/drawingml/2006/main"/>
+          <a:ln xmlns:a="http://schemas.openxmlformats.org/drawingml/2006/main" w="0">
+            <a:noFill/>
+          </a:ln>
+        </p:spPr>
+        <p:txBody>
+          <a:bodyPr xmlns:a="http://schemas.openxmlformats.org/drawingml/2006/main" lIns="0" tIns="0" rIns="0" bIns="0" anchor="ctr">
+            <a:noAutofit/>
+          </a:bodyPr>
+          <a:lstStyle xmlns:a="http://schemas.openxmlformats.org/drawingml/2006/main"/>
+          <a:p xmlns:a="http://schemas.openxmlformats.org/drawingml/2006/main">
+            <a:pPr algn="l">
+              <a:defRPr sz="1350" b="1">
+                <a:solidFill>
+                  <a:srgbClr val="28685E"/>
+                </a:solidFill>
+                <a:latin typeface="Calibri"/>
+                <a:ea typeface="Calibri"/>
+                <a:cs typeface="Calibri"/>
+              </a:defRPr>
+            </a:pPr>
+            <a:r>
+              <a:rPr sz="1350" b="1">
+                <a:solidFill>
+                  <a:srgbClr val="28685E"/>
+                </a:solidFill>
+                <a:latin typeface="Calibri"/>
+                <a:ea typeface="Calibri"/>
+                <a:cs typeface="Calibri"/>
+              </a:rPr>
+              <a:t>03</a:t>
             </a:r>
           </a:p>
         </p:txBody>
